--- a/business/pitch_deck/ATOMiK_Investor_Deck.pptx
+++ b/business/pitch_deck/ATOMiK_Investor_Deck.pptx
@@ -23,7 +23,6 @@
     <p:sldId id="269" r:id="rId14"/>
     <p:sldId id="265" r:id="rId15"/>
     <p:sldId id="270" r:id="rId16"/>
-    <p:sldId id="271" r:id="rId17"/>
   </p:sldIdLst>
   <p:sldSz cx="12192000" cy="6858000"/>
   <p:notesSz cx="6858000" cy="9144000"/>
@@ -3345,93 +3344,6 @@
 </p:notes>
 </file>
 
-<file path=ppt/notesSlides/notesSlide16.xml><?xml version="1.0" encoding="utf-8"?>
-<p:notes xmlns:a="http://schemas.openxmlformats.org/drawingml/2006/main" xmlns:r="http://schemas.openxmlformats.org/officeDocument/2006/relationships" xmlns:p="http://schemas.openxmlformats.org/presentationml/2006/main">
-  <p:cSld>
-    <p:spTree>
-      <p:nvGrpSpPr>
-        <p:cNvPr id="1" name=""/>
-        <p:cNvGrpSpPr/>
-        <p:nvPr/>
-      </p:nvGrpSpPr>
-      <p:grpSpPr>
-        <a:xfrm>
-          <a:off x="0" y="0"/>
-          <a:ext cx="0" cy="0"/>
-          <a:chOff x="0" y="0"/>
-          <a:chExt cx="0" cy="0"/>
-        </a:xfrm>
-      </p:grpSpPr>
-      <p:sp>
-        <p:nvSpPr>
-          <p:cNvPr id="2" name="Slide Image Placeholder 1"/>
-          <p:cNvSpPr>
-            <a:spLocks noGrp="1" noRot="1" noChangeAspect="1"/>
-          </p:cNvSpPr>
-          <p:nvPr>
-            <p:ph type="sldImg"/>
-          </p:nvPr>
-        </p:nvSpPr>
-        <p:spPr/>
-      </p:sp>
-      <p:sp>
-        <p:nvSpPr>
-          <p:cNvPr id="3" name="Notes Placeholder 2"/>
-          <p:cNvSpPr>
-            <a:spLocks noGrp="1"/>
-          </p:cNvSpPr>
-          <p:nvPr>
-            <p:ph type="body" idx="1"/>
-          </p:nvPr>
-        </p:nvSpPr>
-        <p:spPr/>
-        <p:txBody>
-          <a:bodyPr/>
-          <a:lstStyle/>
-          <a:p>
-            <a:r>
-              <a:rPr lang="en-US" dirty="0"/>
-              <a:t>Notes – Delete Later</a:t>
-            </a:r>
-          </a:p>
-        </p:txBody>
-      </p:sp>
-      <p:sp>
-        <p:nvSpPr>
-          <p:cNvPr id="4" name="Slide Number Placeholder 3"/>
-          <p:cNvSpPr>
-            <a:spLocks noGrp="1"/>
-          </p:cNvSpPr>
-          <p:nvPr>
-            <p:ph type="sldNum" sz="quarter" idx="5"/>
-          </p:nvPr>
-        </p:nvSpPr>
-        <p:spPr/>
-        <p:txBody>
-          <a:bodyPr/>
-          <a:lstStyle/>
-          <a:p>
-            <a:fld id="{161671F2-E488-4C08-84D7-2A0DC4C16FCC}" type="slidenum">
-              <a:rPr lang="en-US" smtClean="0"/>
-              <a:t>16</a:t>
-            </a:fld>
-            <a:endParaRPr lang="en-US"/>
-          </a:p>
-        </p:txBody>
-      </p:sp>
-    </p:spTree>
-    <p:extLst>
-      <p:ext uri="{BB962C8B-B14F-4D97-AF65-F5344CB8AC3E}">
-        <p14:creationId xmlns:p14="http://schemas.microsoft.com/office/powerpoint/2010/main" val="666403467"/>
-      </p:ext>
-    </p:extLst>
-  </p:cSld>
-  <p:clrMapOvr>
-    <a:masterClrMapping/>
-  </p:clrMapOvr>
-</p:notes>
-</file>
-
 <file path=ppt/notesSlides/notesSlide2.xml><?xml version="1.0" encoding="utf-8"?>
 <p:notes xmlns:a="http://schemas.openxmlformats.org/drawingml/2006/main" xmlns:r="http://schemas.openxmlformats.org/officeDocument/2006/relationships" xmlns:p="http://schemas.openxmlformats.org/presentationml/2006/main">
   <p:cSld>
@@ -7340,7 +7252,7 @@
                 </a:solidFill>
                 <a:latin typeface="Segoe UI"/>
               </a:rPr>
-              <a:t> Operations/Second on a $10 Chip</a:t>
+              <a:t> Operations/Second on a $13.50 Chip</a:t>
             </a:r>
           </a:p>
         </p:txBody>
@@ -7978,7 +7890,7 @@
                 </a:solidFill>
                 <a:latin typeface="Segoe UI"/>
               </a:rPr>
-              <a:t>$10 Device</a:t>
+              <a:t>$13.50 Device</a:t>
             </a:r>
           </a:p>
         </p:txBody>
@@ -8131,7 +8043,7 @@
                 </a:solidFill>
                 <a:latin typeface="Segoe UI"/>
               </a:rPr>
-              <a:t>1/10</a:t>
+              <a:t>1/15</a:t>
             </a:r>
           </a:p>
         </p:txBody>
@@ -10719,7 +10631,7 @@
                 </a:solidFill>
                 <a:latin typeface="Segoe UI"/>
               </a:rPr>
-              <a:t>8/10</a:t>
+              <a:t>10/15</a:t>
             </a:r>
           </a:p>
         </p:txBody>
@@ -11798,7 +11710,7 @@
                 <a:latin typeface="Segoe UI"/>
               </a:rPr>
               <a:t>5 languages
-314 tests</a:t>
+353 tests</a:t>
             </a:r>
           </a:p>
         </p:txBody>
@@ -13636,7 +13548,7 @@
                 </a:solidFill>
                 <a:latin typeface="Segoe UI"/>
               </a:rPr>
-              <a:t>9/10</a:t>
+              <a:t>11/15</a:t>
             </a:r>
           </a:p>
         </p:txBody>
@@ -13846,6 +13758,14 @@
 <file path=ppt/slides/slide12.xml><?xml version="1.0" encoding="utf-8"?>
 <p:sld xmlns:a="http://schemas.openxmlformats.org/drawingml/2006/main" xmlns:r="http://schemas.openxmlformats.org/officeDocument/2006/relationships" xmlns:p="http://schemas.openxmlformats.org/presentationml/2006/main">
   <p:cSld>
+    <p:bg>
+      <p:bgPr>
+        <a:solidFill>
+          <a:srgbClr val="13131A"/>
+        </a:solidFill>
+        <a:effectLst/>
+      </p:bgPr>
+    </p:bg>
     <p:spTree>
       <p:nvGrpSpPr>
         <p:cNvPr id="1" name=""/>
@@ -13860,6 +13780,1543 @@
           <a:chExt cx="0" cy="0"/>
         </a:xfrm>
       </p:grpSpPr>
+      <p:sp>
+        <p:nvSpPr>
+          <p:cNvPr id="2" name="TextBox 1"/>
+          <p:cNvSpPr txBox="1"/>
+          <p:nvPr/>
+        </p:nvSpPr>
+        <p:spPr>
+          <a:xfrm>
+            <a:off x="731520" y="365760"/>
+            <a:ext cx="10500000" cy="600000"/>
+          </a:xfrm>
+          <a:prstGeom prst="rect">
+            <a:avLst/>
+          </a:prstGeom>
+          <a:noFill/>
+        </p:spPr>
+        <p:txBody>
+          <a:bodyPr wrap="square">
+            <a:spAutoFit/>
+          </a:bodyPr>
+          <a:lstStyle/>
+          <a:p>
+            <a:pPr algn="l"/>
+            <a:r>
+              <a:rPr sz="3600" b="1">
+                <a:solidFill>
+                  <a:srgbClr val="89B4FA"/>
+                </a:solidFill>
+                <a:latin typeface="Segoe UI"/>
+              </a:rPr>
+              <a:t>Team</a:t>
+            </a:r>
+          </a:p>
+        </p:txBody>
+      </p:sp>
+      <p:sp>
+        <p:nvSpPr>
+          <p:cNvPr id="3" name="TextBox 2"/>
+          <p:cNvSpPr txBox="1"/>
+          <p:nvPr/>
+        </p:nvSpPr>
+        <p:spPr>
+          <a:xfrm>
+            <a:off x="731520" y="885475"/>
+            <a:ext cx="10500000" cy="400000"/>
+          </a:xfrm>
+          <a:prstGeom prst="rect">
+            <a:avLst/>
+          </a:prstGeom>
+          <a:noFill/>
+        </p:spPr>
+        <p:txBody>
+          <a:bodyPr wrap="square">
+            <a:spAutoFit/>
+          </a:bodyPr>
+          <a:lstStyle/>
+          <a:p>
+            <a:pPr algn="l"/>
+            <a:r>
+              <a:rPr sz="1600" b="0">
+                <a:solidFill>
+                  <a:srgbClr val="CDD6F4"/>
+                </a:solidFill>
+                <a:latin typeface="Segoe UI"/>
+              </a:rPr>
+              <a:t>Solo founder + AI-augmented development model.</a:t>
+            </a:r>
+          </a:p>
+        </p:txBody>
+      </p:sp>
+      <p:sp>
+        <p:nvSpPr>
+          <p:cNvPr id="4" name="Rectangle 3"/>
+          <p:cNvSpPr/>
+          <p:nvPr/>
+        </p:nvSpPr>
+        <p:spPr>
+          <a:xfrm>
+            <a:off x="609904" y="1280160"/>
+            <a:ext cx="10972800" cy="25400"/>
+          </a:xfrm>
+          <a:prstGeom prst="rect">
+            <a:avLst/>
+          </a:prstGeom>
+          <a:solidFill>
+            <a:srgbClr val="89B4FA"/>
+          </a:solidFill>
+          <a:ln>
+            <a:noFill/>
+          </a:ln>
+        </p:spPr>
+        <p:style>
+          <a:lnRef idx="1">
+            <a:schemeClr val="accent1"/>
+          </a:lnRef>
+          <a:fillRef idx="3">
+            <a:schemeClr val="accent1"/>
+          </a:fillRef>
+          <a:effectRef idx="2">
+            <a:schemeClr val="accent1"/>
+          </a:effectRef>
+          <a:fontRef idx="minor">
+            <a:schemeClr val="lt1"/>
+          </a:fontRef>
+        </p:style>
+        <p:txBody>
+          <a:bodyPr rtlCol="0" anchor="ctr"/>
+          <a:lstStyle/>
+          <a:p>
+            <a:pPr algn="ctr"/>
+          </a:p>
+        </p:txBody>
+      </p:sp>
+      <p:sp>
+        <p:nvSpPr>
+          <p:cNvPr id="5" name="Rounded Rectangle 4"/>
+          <p:cNvSpPr/>
+          <p:nvPr/>
+        </p:nvSpPr>
+        <p:spPr>
+          <a:xfrm>
+            <a:off x="731520" y="1500000"/>
+            <a:ext cx="5000000" cy="2800000"/>
+          </a:xfrm>
+          <a:prstGeom prst="roundRect">
+            <a:avLst/>
+          </a:prstGeom>
+          <a:solidFill>
+            <a:srgbClr val="1E1E2E"/>
+          </a:solidFill>
+          <a:ln>
+            <a:noFill/>
+          </a:ln>
+        </p:spPr>
+        <p:style>
+          <a:lnRef idx="1">
+            <a:schemeClr val="accent1"/>
+          </a:lnRef>
+          <a:fillRef idx="3">
+            <a:schemeClr val="accent1"/>
+          </a:fillRef>
+          <a:effectRef idx="2">
+            <a:schemeClr val="accent1"/>
+          </a:effectRef>
+          <a:fontRef idx="minor">
+            <a:schemeClr val="lt1"/>
+          </a:fontRef>
+        </p:style>
+        <p:txBody>
+          <a:bodyPr rtlCol="0" anchor="ctr"/>
+          <a:lstStyle/>
+          <a:p>
+            <a:pPr algn="ctr"/>
+          </a:p>
+        </p:txBody>
+      </p:sp>
+      <p:sp>
+        <p:nvSpPr>
+          <p:cNvPr id="6" name="TextBox 5"/>
+          <p:cNvSpPr txBox="1"/>
+          <p:nvPr/>
+        </p:nvSpPr>
+        <p:spPr>
+          <a:xfrm>
+            <a:off x="900000" y="1600000"/>
+            <a:ext cx="4600000" cy="350000"/>
+          </a:xfrm>
+          <a:prstGeom prst="rect">
+            <a:avLst/>
+          </a:prstGeom>
+          <a:noFill/>
+        </p:spPr>
+        <p:txBody>
+          <a:bodyPr wrap="square">
+            <a:spAutoFit/>
+          </a:bodyPr>
+          <a:lstStyle/>
+          <a:p>
+            <a:pPr algn="l"/>
+            <a:r>
+              <a:rPr sz="2400" b="1">
+                <a:solidFill>
+                  <a:srgbClr val="89B4FA"/>
+                </a:solidFill>
+                <a:latin typeface="Segoe UI"/>
+              </a:rPr>
+              <a:t>Matthew H. Rockwell</a:t>
+            </a:r>
+          </a:p>
+        </p:txBody>
+      </p:sp>
+      <p:sp>
+        <p:nvSpPr>
+          <p:cNvPr id="7" name="TextBox 6"/>
+          <p:cNvSpPr txBox="1"/>
+          <p:nvPr/>
+        </p:nvSpPr>
+        <p:spPr>
+          <a:xfrm>
+            <a:off x="900000" y="1900000"/>
+            <a:ext cx="4600000" cy="300000"/>
+          </a:xfrm>
+          <a:prstGeom prst="rect">
+            <a:avLst/>
+          </a:prstGeom>
+          <a:noFill/>
+        </p:spPr>
+        <p:txBody>
+          <a:bodyPr wrap="square">
+            <a:spAutoFit/>
+          </a:bodyPr>
+          <a:lstStyle/>
+          <a:p>
+            <a:pPr algn="l"/>
+            <a:r>
+              <a:rPr sz="1600" b="1">
+                <a:solidFill>
+                  <a:srgbClr val="CBA6F7"/>
+                </a:solidFill>
+                <a:latin typeface="Segoe UI"/>
+              </a:rPr>
+              <a:t>Founder &amp; CEO</a:t>
+            </a:r>
+          </a:p>
+        </p:txBody>
+      </p:sp>
+      <p:sp>
+        <p:nvSpPr>
+          <p:cNvPr id="8" name="TextBox 7"/>
+          <p:cNvSpPr txBox="1"/>
+          <p:nvPr/>
+        </p:nvSpPr>
+        <p:spPr>
+          <a:xfrm>
+            <a:off x="900000" y="2250000"/>
+            <a:ext cx="4600000" cy="260000"/>
+          </a:xfrm>
+          <a:prstGeom prst="rect">
+            <a:avLst/>
+          </a:prstGeom>
+          <a:noFill/>
+        </p:spPr>
+        <p:txBody>
+          <a:bodyPr wrap="square">
+            <a:spAutoFit/>
+          </a:bodyPr>
+          <a:lstStyle/>
+          <a:p>
+            <a:pPr algn="l"/>
+            <a:r>
+              <a:rPr sz="1200" b="0">
+                <a:solidFill>
+                  <a:srgbClr val="CDD6F4"/>
+                </a:solidFill>
+                <a:latin typeface="Segoe UI"/>
+              </a:rPr>
+              <a:t>•  Formal mathematics (Lean4 proof engineering)</a:t>
+            </a:r>
+          </a:p>
+        </p:txBody>
+      </p:sp>
+      <p:sp>
+        <p:nvSpPr>
+          <p:cNvPr id="9" name="TextBox 8"/>
+          <p:cNvSpPr txBox="1"/>
+          <p:nvPr/>
+        </p:nvSpPr>
+        <p:spPr>
+          <a:xfrm>
+            <a:off x="900000" y="2530000"/>
+            <a:ext cx="4600000" cy="260000"/>
+          </a:xfrm>
+          <a:prstGeom prst="rect">
+            <a:avLst/>
+          </a:prstGeom>
+          <a:noFill/>
+        </p:spPr>
+        <p:txBody>
+          <a:bodyPr wrap="square">
+            <a:spAutoFit/>
+          </a:bodyPr>
+          <a:lstStyle/>
+          <a:p>
+            <a:pPr algn="l"/>
+            <a:r>
+              <a:rPr sz="1200" b="0">
+                <a:solidFill>
+                  <a:srgbClr val="CDD6F4"/>
+                </a:solidFill>
+                <a:latin typeface="Segoe UI"/>
+              </a:rPr>
+              <a:t>•  Digital design (Verilog RTL, FPGA synthesis, timing closure)</a:t>
+            </a:r>
+          </a:p>
+        </p:txBody>
+      </p:sp>
+      <p:sp>
+        <p:nvSpPr>
+          <p:cNvPr id="10" name="TextBox 9"/>
+          <p:cNvSpPr txBox="1"/>
+          <p:nvPr/>
+        </p:nvSpPr>
+        <p:spPr>
+          <a:xfrm>
+            <a:off x="900000" y="2810000"/>
+            <a:ext cx="4600000" cy="260000"/>
+          </a:xfrm>
+          <a:prstGeom prst="rect">
+            <a:avLst/>
+          </a:prstGeom>
+          <a:noFill/>
+        </p:spPr>
+        <p:txBody>
+          <a:bodyPr wrap="square">
+            <a:spAutoFit/>
+          </a:bodyPr>
+          <a:lstStyle/>
+          <a:p>
+            <a:pPr algn="l"/>
+            <a:r>
+              <a:rPr sz="1200" b="0">
+                <a:solidFill>
+                  <a:srgbClr val="CDD6F4"/>
+                </a:solidFill>
+                <a:latin typeface="Segoe UI"/>
+              </a:rPr>
+              <a:t>•  Software engineering (Python SDK, multi-language codegen)</a:t>
+            </a:r>
+          </a:p>
+        </p:txBody>
+      </p:sp>
+      <p:sp>
+        <p:nvSpPr>
+          <p:cNvPr id="11" name="TextBox 10"/>
+          <p:cNvSpPr txBox="1"/>
+          <p:nvPr/>
+        </p:nvSpPr>
+        <p:spPr>
+          <a:xfrm>
+            <a:off x="900000" y="3090000"/>
+            <a:ext cx="4600000" cy="260000"/>
+          </a:xfrm>
+          <a:prstGeom prst="rect">
+            <a:avLst/>
+          </a:prstGeom>
+          <a:noFill/>
+        </p:spPr>
+        <p:txBody>
+          <a:bodyPr wrap="square">
+            <a:spAutoFit/>
+          </a:bodyPr>
+          <a:lstStyle/>
+          <a:p>
+            <a:pPr algn="l"/>
+            <a:r>
+              <a:rPr sz="1200" b="0">
+                <a:solidFill>
+                  <a:srgbClr val="CDD6F4"/>
+                </a:solidFill>
+                <a:latin typeface="Segoe UI"/>
+              </a:rPr>
+              <a:t>•  Hardware validation (UART protocol, physical FPGA testing)</a:t>
+            </a:r>
+          </a:p>
+        </p:txBody>
+      </p:sp>
+      <p:sp>
+        <p:nvSpPr>
+          <p:cNvPr id="12" name="TextBox 11"/>
+          <p:cNvSpPr txBox="1"/>
+          <p:nvPr/>
+        </p:nvSpPr>
+        <p:spPr>
+          <a:xfrm>
+            <a:off x="900000" y="3370000"/>
+            <a:ext cx="4600000" cy="260000"/>
+          </a:xfrm>
+          <a:prstGeom prst="rect">
+            <a:avLst/>
+          </a:prstGeom>
+          <a:noFill/>
+        </p:spPr>
+        <p:txBody>
+          <a:bodyPr wrap="square">
+            <a:spAutoFit/>
+          </a:bodyPr>
+          <a:lstStyle/>
+          <a:p>
+            <a:pPr algn="l"/>
+            <a:r>
+              <a:rPr sz="1200" b="0">
+                <a:solidFill>
+                  <a:srgbClr val="CDD6F4"/>
+                </a:solidFill>
+                <a:latin typeface="Segoe UI"/>
+              </a:rPr>
+              <a:t>•  Business development (patent filing, investor materials)</a:t>
+            </a:r>
+          </a:p>
+        </p:txBody>
+      </p:sp>
+      <p:sp>
+        <p:nvSpPr>
+          <p:cNvPr id="13" name="Rounded Rectangle 12"/>
+          <p:cNvSpPr/>
+          <p:nvPr/>
+        </p:nvSpPr>
+        <p:spPr>
+          <a:xfrm>
+            <a:off x="6100000" y="1500000"/>
+            <a:ext cx="5400000" cy="2800000"/>
+          </a:xfrm>
+          <a:prstGeom prst="roundRect">
+            <a:avLst/>
+          </a:prstGeom>
+          <a:solidFill>
+            <a:srgbClr val="1E1E2E"/>
+          </a:solidFill>
+          <a:ln>
+            <a:noFill/>
+          </a:ln>
+        </p:spPr>
+        <p:style>
+          <a:lnRef idx="1">
+            <a:schemeClr val="accent1"/>
+          </a:lnRef>
+          <a:fillRef idx="3">
+            <a:schemeClr val="accent1"/>
+          </a:fillRef>
+          <a:effectRef idx="2">
+            <a:schemeClr val="accent1"/>
+          </a:effectRef>
+          <a:fontRef idx="minor">
+            <a:schemeClr val="lt1"/>
+          </a:fontRef>
+        </p:style>
+        <p:txBody>
+          <a:bodyPr rtlCol="0" anchor="ctr"/>
+          <a:lstStyle/>
+          <a:p>
+            <a:pPr algn="ctr"/>
+          </a:p>
+        </p:txBody>
+      </p:sp>
+      <p:sp>
+        <p:nvSpPr>
+          <p:cNvPr id="14" name="TextBox 13"/>
+          <p:cNvSpPr txBox="1"/>
+          <p:nvPr/>
+        </p:nvSpPr>
+        <p:spPr>
+          <a:xfrm>
+            <a:off x="6300000" y="1600000"/>
+            <a:ext cx="5000000" cy="350000"/>
+          </a:xfrm>
+          <a:prstGeom prst="rect">
+            <a:avLst/>
+          </a:prstGeom>
+          <a:noFill/>
+        </p:spPr>
+        <p:txBody>
+          <a:bodyPr wrap="square">
+            <a:spAutoFit/>
+          </a:bodyPr>
+          <a:lstStyle/>
+          <a:p>
+            <a:pPr algn="l"/>
+            <a:r>
+              <a:rPr sz="2000" b="1">
+                <a:solidFill>
+                  <a:srgbClr val="A6E3A1"/>
+                </a:solidFill>
+                <a:latin typeface="Segoe UI"/>
+              </a:rPr>
+              <a:t>AI-Augmented Development</a:t>
+            </a:r>
+          </a:p>
+        </p:txBody>
+      </p:sp>
+      <p:sp>
+        <p:nvSpPr>
+          <p:cNvPr id="15" name="TextBox 14"/>
+          <p:cNvSpPr txBox="1"/>
+          <p:nvPr/>
+        </p:nvSpPr>
+        <p:spPr>
+          <a:xfrm>
+            <a:off x="6300000" y="2050000"/>
+            <a:ext cx="1800000" cy="200000"/>
+          </a:xfrm>
+          <a:prstGeom prst="rect">
+            <a:avLst/>
+          </a:prstGeom>
+          <a:noFill/>
+        </p:spPr>
+        <p:txBody>
+          <a:bodyPr wrap="square">
+            <a:spAutoFit/>
+          </a:bodyPr>
+          <a:lstStyle/>
+          <a:p>
+            <a:pPr algn="l"/>
+            <a:r>
+              <a:rPr sz="1200" b="0">
+                <a:solidFill>
+                  <a:srgbClr val="7F849C"/>
+                </a:solidFill>
+                <a:latin typeface="Segoe UI"/>
+              </a:rPr>
+              <a:t>Development cost</a:t>
+            </a:r>
+          </a:p>
+        </p:txBody>
+      </p:sp>
+      <p:sp>
+        <p:nvSpPr>
+          <p:cNvPr id="16" name="TextBox 15"/>
+          <p:cNvSpPr txBox="1"/>
+          <p:nvPr/>
+        </p:nvSpPr>
+        <p:spPr>
+          <a:xfrm>
+            <a:off x="8100000" y="2050000"/>
+            <a:ext cx="1500000" cy="200000"/>
+          </a:xfrm>
+          <a:prstGeom prst="rect">
+            <a:avLst/>
+          </a:prstGeom>
+          <a:noFill/>
+        </p:spPr>
+        <p:txBody>
+          <a:bodyPr wrap="square">
+            <a:spAutoFit/>
+          </a:bodyPr>
+          <a:lstStyle/>
+          <a:p>
+            <a:pPr algn="l"/>
+            <a:r>
+              <a:rPr sz="1200" b="0">
+                <a:solidFill>
+                  <a:srgbClr val="F38BA8"/>
+                </a:solidFill>
+                <a:latin typeface="Segoe UI"/>
+              </a:rPr>
+              <a:t>$2–5M typical</a:t>
+            </a:r>
+          </a:p>
+        </p:txBody>
+      </p:sp>
+      <p:sp>
+        <p:nvSpPr>
+          <p:cNvPr id="17" name="TextBox 16"/>
+          <p:cNvSpPr txBox="1"/>
+          <p:nvPr/>
+        </p:nvSpPr>
+        <p:spPr>
+          <a:xfrm>
+            <a:off x="9700000" y="2050000"/>
+            <a:ext cx="1500000" cy="200000"/>
+          </a:xfrm>
+          <a:prstGeom prst="rect">
+            <a:avLst/>
+          </a:prstGeom>
+          <a:noFill/>
+        </p:spPr>
+        <p:txBody>
+          <a:bodyPr wrap="square">
+            <a:spAutoFit/>
+          </a:bodyPr>
+          <a:lstStyle/>
+          <a:p>
+            <a:pPr algn="l"/>
+            <a:r>
+              <a:rPr sz="1200" b="1">
+                <a:solidFill>
+                  <a:srgbClr val="A6E3A1"/>
+                </a:solidFill>
+                <a:latin typeface="Segoe UI"/>
+              </a:rPr>
+              <a:t>~$225 total</a:t>
+            </a:r>
+          </a:p>
+        </p:txBody>
+      </p:sp>
+      <p:sp>
+        <p:nvSpPr>
+          <p:cNvPr id="18" name="TextBox 17"/>
+          <p:cNvSpPr txBox="1"/>
+          <p:nvPr/>
+        </p:nvSpPr>
+        <p:spPr>
+          <a:xfrm>
+            <a:off x="6300000" y="2550000"/>
+            <a:ext cx="1800000" cy="200000"/>
+          </a:xfrm>
+          <a:prstGeom prst="rect">
+            <a:avLst/>
+          </a:prstGeom>
+          <a:noFill/>
+        </p:spPr>
+        <p:txBody>
+          <a:bodyPr wrap="square">
+            <a:spAutoFit/>
+          </a:bodyPr>
+          <a:lstStyle/>
+          <a:p>
+            <a:pPr algn="l"/>
+            <a:r>
+              <a:rPr sz="1200" b="0">
+                <a:solidFill>
+                  <a:srgbClr val="7F849C"/>
+                </a:solidFill>
+                <a:latin typeface="Segoe UI"/>
+              </a:rPr>
+              <a:t>Team size</a:t>
+            </a:r>
+          </a:p>
+        </p:txBody>
+      </p:sp>
+      <p:sp>
+        <p:nvSpPr>
+          <p:cNvPr id="19" name="TextBox 18"/>
+          <p:cNvSpPr txBox="1"/>
+          <p:nvPr/>
+        </p:nvSpPr>
+        <p:spPr>
+          <a:xfrm>
+            <a:off x="8100000" y="2550000"/>
+            <a:ext cx="1500000" cy="200000"/>
+          </a:xfrm>
+          <a:prstGeom prst="rect">
+            <a:avLst/>
+          </a:prstGeom>
+          <a:noFill/>
+        </p:spPr>
+        <p:txBody>
+          <a:bodyPr wrap="square">
+            <a:spAutoFit/>
+          </a:bodyPr>
+          <a:lstStyle/>
+          <a:p>
+            <a:pPr algn="l"/>
+            <a:r>
+              <a:rPr sz="1200" b="0">
+                <a:solidFill>
+                  <a:srgbClr val="F38BA8"/>
+                </a:solidFill>
+                <a:latin typeface="Segoe UI"/>
+              </a:rPr>
+              <a:t>5–10 engineers</a:t>
+            </a:r>
+          </a:p>
+        </p:txBody>
+      </p:sp>
+      <p:sp>
+        <p:nvSpPr>
+          <p:cNvPr id="20" name="TextBox 19"/>
+          <p:cNvSpPr txBox="1"/>
+          <p:nvPr/>
+        </p:nvSpPr>
+        <p:spPr>
+          <a:xfrm>
+            <a:off x="9700000" y="2550000"/>
+            <a:ext cx="1500000" cy="200000"/>
+          </a:xfrm>
+          <a:prstGeom prst="rect">
+            <a:avLst/>
+          </a:prstGeom>
+          <a:noFill/>
+        </p:spPr>
+        <p:txBody>
+          <a:bodyPr wrap="square">
+            <a:spAutoFit/>
+          </a:bodyPr>
+          <a:lstStyle/>
+          <a:p>
+            <a:pPr algn="l"/>
+            <a:r>
+              <a:rPr sz="1200" b="1">
+                <a:solidFill>
+                  <a:srgbClr val="A6E3A1"/>
+                </a:solidFill>
+                <a:latin typeface="Segoe UI"/>
+              </a:rPr>
+              <a:t>1 founder + AI</a:t>
+            </a:r>
+          </a:p>
+        </p:txBody>
+      </p:sp>
+      <p:sp>
+        <p:nvSpPr>
+          <p:cNvPr id="21" name="TextBox 20"/>
+          <p:cNvSpPr txBox="1"/>
+          <p:nvPr/>
+        </p:nvSpPr>
+        <p:spPr>
+          <a:xfrm>
+            <a:off x="6300000" y="3050000"/>
+            <a:ext cx="1800000" cy="200000"/>
+          </a:xfrm>
+          <a:prstGeom prst="rect">
+            <a:avLst/>
+          </a:prstGeom>
+          <a:noFill/>
+        </p:spPr>
+        <p:txBody>
+          <a:bodyPr wrap="square">
+            <a:spAutoFit/>
+          </a:bodyPr>
+          <a:lstStyle/>
+          <a:p>
+            <a:pPr algn="l"/>
+            <a:r>
+              <a:rPr sz="1200" b="0">
+                <a:solidFill>
+                  <a:srgbClr val="7F849C"/>
+                </a:solidFill>
+                <a:latin typeface="Segoe UI"/>
+              </a:rPr>
+              <a:t>Time to PoC</a:t>
+            </a:r>
+          </a:p>
+        </p:txBody>
+      </p:sp>
+      <p:sp>
+        <p:nvSpPr>
+          <p:cNvPr id="22" name="TextBox 21"/>
+          <p:cNvSpPr txBox="1"/>
+          <p:nvPr/>
+        </p:nvSpPr>
+        <p:spPr>
+          <a:xfrm>
+            <a:off x="8100000" y="3050000"/>
+            <a:ext cx="1500000" cy="200000"/>
+          </a:xfrm>
+          <a:prstGeom prst="rect">
+            <a:avLst/>
+          </a:prstGeom>
+          <a:noFill/>
+        </p:spPr>
+        <p:txBody>
+          <a:bodyPr wrap="square">
+            <a:spAutoFit/>
+          </a:bodyPr>
+          <a:lstStyle/>
+          <a:p>
+            <a:pPr algn="l"/>
+            <a:r>
+              <a:rPr sz="1200" b="0">
+                <a:solidFill>
+                  <a:srgbClr val="F38BA8"/>
+                </a:solidFill>
+                <a:latin typeface="Segoe UI"/>
+              </a:rPr>
+              <a:t>12–18 months</a:t>
+            </a:r>
+          </a:p>
+        </p:txBody>
+      </p:sp>
+      <p:sp>
+        <p:nvSpPr>
+          <p:cNvPr id="23" name="TextBox 22"/>
+          <p:cNvSpPr txBox="1"/>
+          <p:nvPr/>
+        </p:nvSpPr>
+        <p:spPr>
+          <a:xfrm>
+            <a:off x="9700000" y="3050000"/>
+            <a:ext cx="1500000" cy="200000"/>
+          </a:xfrm>
+          <a:prstGeom prst="rect">
+            <a:avLst/>
+          </a:prstGeom>
+          <a:noFill/>
+        </p:spPr>
+        <p:txBody>
+          <a:bodyPr wrap="square">
+            <a:spAutoFit/>
+          </a:bodyPr>
+          <a:lstStyle/>
+          <a:p>
+            <a:pPr algn="l"/>
+            <a:r>
+              <a:rPr sz="1200" b="1">
+                <a:solidFill>
+                  <a:srgbClr val="A6E3A1"/>
+                </a:solidFill>
+                <a:latin typeface="Segoe UI"/>
+              </a:rPr>
+              <a:t>~7 days</a:t>
+            </a:r>
+          </a:p>
+        </p:txBody>
+      </p:sp>
+      <p:sp>
+        <p:nvSpPr>
+          <p:cNvPr id="24" name="TextBox 23"/>
+          <p:cNvSpPr txBox="1"/>
+          <p:nvPr/>
+        </p:nvSpPr>
+        <p:spPr>
+          <a:xfrm>
+            <a:off x="6300000" y="3550000"/>
+            <a:ext cx="1800000" cy="200000"/>
+          </a:xfrm>
+          <a:prstGeom prst="rect">
+            <a:avLst/>
+          </a:prstGeom>
+          <a:noFill/>
+        </p:spPr>
+        <p:txBody>
+          <a:bodyPr wrap="square">
+            <a:spAutoFit/>
+          </a:bodyPr>
+          <a:lstStyle/>
+          <a:p>
+            <a:pPr algn="l"/>
+            <a:r>
+              <a:rPr sz="1200" b="0">
+                <a:solidFill>
+                  <a:srgbClr val="7F849C"/>
+                </a:solidFill>
+                <a:latin typeface="Segoe UI"/>
+              </a:rPr>
+              <a:t>Proof engineering</a:t>
+            </a:r>
+          </a:p>
+        </p:txBody>
+      </p:sp>
+      <p:sp>
+        <p:nvSpPr>
+          <p:cNvPr id="25" name="TextBox 24"/>
+          <p:cNvSpPr txBox="1"/>
+          <p:nvPr/>
+        </p:nvSpPr>
+        <p:spPr>
+          <a:xfrm>
+            <a:off x="8100000" y="3550000"/>
+            <a:ext cx="1500000" cy="200000"/>
+          </a:xfrm>
+          <a:prstGeom prst="rect">
+            <a:avLst/>
+          </a:prstGeom>
+          <a:noFill/>
+        </p:spPr>
+        <p:txBody>
+          <a:bodyPr wrap="square">
+            <a:spAutoFit/>
+          </a:bodyPr>
+          <a:lstStyle/>
+          <a:p>
+            <a:pPr algn="l"/>
+            <a:r>
+              <a:rPr sz="1200" b="0">
+                <a:solidFill>
+                  <a:srgbClr val="F38BA8"/>
+                </a:solidFill>
+                <a:latin typeface="Segoe UI"/>
+              </a:rPr>
+              <a:t>Months per proof</a:t>
+            </a:r>
+          </a:p>
+        </p:txBody>
+      </p:sp>
+      <p:sp>
+        <p:nvSpPr>
+          <p:cNvPr id="26" name="TextBox 25"/>
+          <p:cNvSpPr txBox="1"/>
+          <p:nvPr/>
+        </p:nvSpPr>
+        <p:spPr>
+          <a:xfrm>
+            <a:off x="9700000" y="3550000"/>
+            <a:ext cx="1500000" cy="200000"/>
+          </a:xfrm>
+          <a:prstGeom prst="rect">
+            <a:avLst/>
+          </a:prstGeom>
+          <a:noFill/>
+        </p:spPr>
+        <p:txBody>
+          <a:bodyPr wrap="square">
+            <a:spAutoFit/>
+          </a:bodyPr>
+          <a:lstStyle/>
+          <a:p>
+            <a:pPr algn="l"/>
+            <a:r>
+              <a:rPr sz="1200" b="1">
+                <a:solidFill>
+                  <a:srgbClr val="A6E3A1"/>
+                </a:solidFill>
+                <a:latin typeface="Segoe UI"/>
+              </a:rPr>
+              <a:t>92 in single sprint</a:t>
+            </a:r>
+          </a:p>
+        </p:txBody>
+      </p:sp>
+      <p:sp>
+        <p:nvSpPr>
+          <p:cNvPr id="27" name="TextBox 26"/>
+          <p:cNvSpPr txBox="1"/>
+          <p:nvPr/>
+        </p:nvSpPr>
+        <p:spPr>
+          <a:xfrm>
+            <a:off x="8100000" y="1900000"/>
+            <a:ext cx="1500000" cy="200000"/>
+          </a:xfrm>
+          <a:prstGeom prst="rect">
+            <a:avLst/>
+          </a:prstGeom>
+          <a:noFill/>
+        </p:spPr>
+        <p:txBody>
+          <a:bodyPr wrap="square">
+            <a:spAutoFit/>
+          </a:bodyPr>
+          <a:lstStyle/>
+          <a:p>
+            <a:pPr algn="l"/>
+            <a:r>
+              <a:rPr sz="1100" b="1">
+                <a:solidFill>
+                  <a:srgbClr val="7F849C"/>
+                </a:solidFill>
+                <a:latin typeface="Segoe UI"/>
+              </a:rPr>
+              <a:t>Traditional</a:t>
+            </a:r>
+          </a:p>
+        </p:txBody>
+      </p:sp>
+      <p:sp>
+        <p:nvSpPr>
+          <p:cNvPr id="28" name="TextBox 27"/>
+          <p:cNvSpPr txBox="1"/>
+          <p:nvPr/>
+        </p:nvSpPr>
+        <p:spPr>
+          <a:xfrm>
+            <a:off x="9700000" y="1900000"/>
+            <a:ext cx="1500000" cy="200000"/>
+          </a:xfrm>
+          <a:prstGeom prst="rect">
+            <a:avLst/>
+          </a:prstGeom>
+          <a:noFill/>
+        </p:spPr>
+        <p:txBody>
+          <a:bodyPr wrap="square">
+            <a:spAutoFit/>
+          </a:bodyPr>
+          <a:lstStyle/>
+          <a:p>
+            <a:pPr algn="l"/>
+            <a:r>
+              <a:rPr sz="1100" b="1">
+                <a:solidFill>
+                  <a:srgbClr val="A6E3A1"/>
+                </a:solidFill>
+                <a:latin typeface="Segoe UI"/>
+              </a:rPr>
+              <a:t>ATOMiK</a:t>
+            </a:r>
+          </a:p>
+        </p:txBody>
+      </p:sp>
+      <p:sp>
+        <p:nvSpPr>
+          <p:cNvPr id="29" name="TextBox 28"/>
+          <p:cNvSpPr txBox="1"/>
+          <p:nvPr/>
+        </p:nvSpPr>
+        <p:spPr>
+          <a:xfrm>
+            <a:off x="731520" y="4600000"/>
+            <a:ext cx="5000000" cy="300000"/>
+          </a:xfrm>
+          <a:prstGeom prst="rect">
+            <a:avLst/>
+          </a:prstGeom>
+          <a:noFill/>
+        </p:spPr>
+        <p:txBody>
+          <a:bodyPr wrap="square">
+            <a:spAutoFit/>
+          </a:bodyPr>
+          <a:lstStyle/>
+          <a:p>
+            <a:pPr algn="l"/>
+            <a:r>
+              <a:rPr sz="1800" b="1">
+                <a:solidFill>
+                  <a:srgbClr val="89B4FA"/>
+                </a:solidFill>
+                <a:latin typeface="Segoe UI"/>
+              </a:rPr>
+              <a:t>Post-Funding Team Expansion</a:t>
+            </a:r>
+          </a:p>
+        </p:txBody>
+      </p:sp>
+      <p:sp>
+        <p:nvSpPr>
+          <p:cNvPr id="30" name="Rectangle 29"/>
+          <p:cNvSpPr/>
+          <p:nvPr/>
+        </p:nvSpPr>
+        <p:spPr>
+          <a:xfrm>
+            <a:off x="731520" y="4950000"/>
+            <a:ext cx="10500000" cy="20000"/>
+          </a:xfrm>
+          <a:prstGeom prst="rect">
+            <a:avLst/>
+          </a:prstGeom>
+          <a:solidFill>
+            <a:srgbClr val="89B4FA"/>
+          </a:solidFill>
+          <a:ln>
+            <a:noFill/>
+          </a:ln>
+        </p:spPr>
+        <p:style>
+          <a:lnRef idx="1">
+            <a:schemeClr val="accent1"/>
+          </a:lnRef>
+          <a:fillRef idx="3">
+            <a:schemeClr val="accent1"/>
+          </a:fillRef>
+          <a:effectRef idx="2">
+            <a:schemeClr val="accent1"/>
+          </a:effectRef>
+          <a:fontRef idx="minor">
+            <a:schemeClr val="lt1"/>
+          </a:fontRef>
+        </p:style>
+        <p:txBody>
+          <a:bodyPr rtlCol="0" anchor="ctr"/>
+          <a:lstStyle/>
+          <a:p>
+            <a:pPr algn="ctr"/>
+          </a:p>
+        </p:txBody>
+      </p:sp>
+      <p:sp>
+        <p:nvSpPr>
+          <p:cNvPr id="31" name="TextBox 30"/>
+          <p:cNvSpPr txBox="1"/>
+          <p:nvPr/>
+        </p:nvSpPr>
+        <p:spPr>
+          <a:xfrm>
+            <a:off x="731520" y="5100000"/>
+            <a:ext cx="2000000" cy="250000"/>
+          </a:xfrm>
+          <a:prstGeom prst="rect">
+            <a:avLst/>
+          </a:prstGeom>
+          <a:noFill/>
+        </p:spPr>
+        <p:txBody>
+          <a:bodyPr wrap="square">
+            <a:spAutoFit/>
+          </a:bodyPr>
+          <a:lstStyle/>
+          <a:p>
+            <a:pPr algn="l"/>
+            <a:r>
+              <a:rPr sz="1300" b="1">
+                <a:solidFill>
+                  <a:srgbClr val="CDD6F4"/>
+                </a:solidFill>
+                <a:latin typeface="Segoe UI"/>
+              </a:rPr>
+              <a:t>FPGA/ASIC Engineer</a:t>
+            </a:r>
+          </a:p>
+        </p:txBody>
+      </p:sp>
+      <p:sp>
+        <p:nvSpPr>
+          <p:cNvPr id="32" name="TextBox 31"/>
+          <p:cNvSpPr txBox="1"/>
+          <p:nvPr/>
+        </p:nvSpPr>
+        <p:spPr>
+          <a:xfrm>
+            <a:off x="2831520" y="5100000"/>
+            <a:ext cx="600000" cy="250000"/>
+          </a:xfrm>
+          <a:prstGeom prst="rect">
+            <a:avLst/>
+          </a:prstGeom>
+          <a:noFill/>
+        </p:spPr>
+        <p:txBody>
+          <a:bodyPr wrap="square">
+            <a:spAutoFit/>
+          </a:bodyPr>
+          <a:lstStyle/>
+          <a:p>
+            <a:pPr algn="l"/>
+            <a:r>
+              <a:rPr sz="1200" b="1">
+                <a:solidFill>
+                  <a:srgbClr val="A6E3A1"/>
+                </a:solidFill>
+                <a:latin typeface="Segoe UI"/>
+              </a:rPr>
+              <a:t>High</a:t>
+            </a:r>
+          </a:p>
+        </p:txBody>
+      </p:sp>
+      <p:sp>
+        <p:nvSpPr>
+          <p:cNvPr id="33" name="TextBox 32"/>
+          <p:cNvSpPr txBox="1"/>
+          <p:nvPr/>
+        </p:nvSpPr>
+        <p:spPr>
+          <a:xfrm>
+            <a:off x="3531520" y="5100000"/>
+            <a:ext cx="2500000" cy="250000"/>
+          </a:xfrm>
+          <a:prstGeom prst="rect">
+            <a:avLst/>
+          </a:prstGeom>
+          <a:noFill/>
+        </p:spPr>
+        <p:txBody>
+          <a:bodyPr wrap="square">
+            <a:spAutoFit/>
+          </a:bodyPr>
+          <a:lstStyle/>
+          <a:p>
+            <a:pPr algn="l"/>
+            <a:r>
+              <a:rPr sz="1100" b="0">
+                <a:solidFill>
+                  <a:srgbClr val="7F849C"/>
+                </a:solidFill>
+                <a:latin typeface="Segoe UI"/>
+              </a:rPr>
+              <a:t>Larger device ports, synthesis optimization</a:t>
+            </a:r>
+          </a:p>
+        </p:txBody>
+      </p:sp>
+      <p:sp>
+        <p:nvSpPr>
+          <p:cNvPr id="34" name="TextBox 33"/>
+          <p:cNvSpPr txBox="1"/>
+          <p:nvPr/>
+        </p:nvSpPr>
+        <p:spPr>
+          <a:xfrm>
+            <a:off x="6131520" y="5100000"/>
+            <a:ext cx="2000000" cy="250000"/>
+          </a:xfrm>
+          <a:prstGeom prst="rect">
+            <a:avLst/>
+          </a:prstGeom>
+          <a:noFill/>
+        </p:spPr>
+        <p:txBody>
+          <a:bodyPr wrap="square">
+            <a:spAutoFit/>
+          </a:bodyPr>
+          <a:lstStyle/>
+          <a:p>
+            <a:pPr algn="l"/>
+            <a:r>
+              <a:rPr sz="1300" b="1">
+                <a:solidFill>
+                  <a:srgbClr val="CDD6F4"/>
+                </a:solidFill>
+                <a:latin typeface="Segoe UI"/>
+              </a:rPr>
+              <a:t>Application Engineer</a:t>
+            </a:r>
+          </a:p>
+        </p:txBody>
+      </p:sp>
+      <p:sp>
+        <p:nvSpPr>
+          <p:cNvPr id="35" name="TextBox 34"/>
+          <p:cNvSpPr txBox="1"/>
+          <p:nvPr/>
+        </p:nvSpPr>
+        <p:spPr>
+          <a:xfrm>
+            <a:off x="8231520" y="5100000"/>
+            <a:ext cx="600000" cy="250000"/>
+          </a:xfrm>
+          <a:prstGeom prst="rect">
+            <a:avLst/>
+          </a:prstGeom>
+          <a:noFill/>
+        </p:spPr>
+        <p:txBody>
+          <a:bodyPr wrap="square">
+            <a:spAutoFit/>
+          </a:bodyPr>
+          <a:lstStyle/>
+          <a:p>
+            <a:pPr algn="l"/>
+            <a:r>
+              <a:rPr sz="1200" b="1">
+                <a:solidFill>
+                  <a:srgbClr val="A6E3A1"/>
+                </a:solidFill>
+                <a:latin typeface="Segoe UI"/>
+              </a:rPr>
+              <a:t>High</a:t>
+            </a:r>
+          </a:p>
+        </p:txBody>
+      </p:sp>
+      <p:sp>
+        <p:nvSpPr>
+          <p:cNvPr id="36" name="TextBox 35"/>
+          <p:cNvSpPr txBox="1"/>
+          <p:nvPr/>
+        </p:nvSpPr>
+        <p:spPr>
+          <a:xfrm>
+            <a:off x="8931520" y="5100000"/>
+            <a:ext cx="2500000" cy="250000"/>
+          </a:xfrm>
+          <a:prstGeom prst="rect">
+            <a:avLst/>
+          </a:prstGeom>
+          <a:noFill/>
+        </p:spPr>
+        <p:txBody>
+          <a:bodyPr wrap="square">
+            <a:spAutoFit/>
+          </a:bodyPr>
+          <a:lstStyle/>
+          <a:p>
+            <a:pPr algn="l"/>
+            <a:r>
+              <a:rPr sz="1100" b="0">
+                <a:solidFill>
+                  <a:srgbClr val="7F849C"/>
+                </a:solidFill>
+                <a:latin typeface="Segoe UI"/>
+              </a:rPr>
+              <a:t>Vertical modules, customer integration</a:t>
+            </a:r>
+          </a:p>
+        </p:txBody>
+      </p:sp>
+      <p:sp>
+        <p:nvSpPr>
+          <p:cNvPr id="37" name="TextBox 36"/>
+          <p:cNvSpPr txBox="1"/>
+          <p:nvPr/>
+        </p:nvSpPr>
+        <p:spPr>
+          <a:xfrm>
+            <a:off x="731520" y="5650000"/>
+            <a:ext cx="2000000" cy="250000"/>
+          </a:xfrm>
+          <a:prstGeom prst="rect">
+            <a:avLst/>
+          </a:prstGeom>
+          <a:noFill/>
+        </p:spPr>
+        <p:txBody>
+          <a:bodyPr wrap="square">
+            <a:spAutoFit/>
+          </a:bodyPr>
+          <a:lstStyle/>
+          <a:p>
+            <a:pPr algn="l"/>
+            <a:r>
+              <a:rPr sz="1300" b="1">
+                <a:solidFill>
+                  <a:srgbClr val="CDD6F4"/>
+                </a:solidFill>
+                <a:latin typeface="Segoe UI"/>
+              </a:rPr>
+              <a:t>DevRel / Community</a:t>
+            </a:r>
+          </a:p>
+        </p:txBody>
+      </p:sp>
+      <p:sp>
+        <p:nvSpPr>
+          <p:cNvPr id="38" name="TextBox 37"/>
+          <p:cNvSpPr txBox="1"/>
+          <p:nvPr/>
+        </p:nvSpPr>
+        <p:spPr>
+          <a:xfrm>
+            <a:off x="2831520" y="5650000"/>
+            <a:ext cx="600000" cy="250000"/>
+          </a:xfrm>
+          <a:prstGeom prst="rect">
+            <a:avLst/>
+          </a:prstGeom>
+          <a:noFill/>
+        </p:spPr>
+        <p:txBody>
+          <a:bodyPr wrap="square">
+            <a:spAutoFit/>
+          </a:bodyPr>
+          <a:lstStyle/>
+          <a:p>
+            <a:pPr algn="l"/>
+            <a:r>
+              <a:rPr sz="1200" b="1">
+                <a:solidFill>
+                  <a:srgbClr val="F9E2AF"/>
+                </a:solidFill>
+                <a:latin typeface="Segoe UI"/>
+              </a:rPr>
+              <a:t>Medium</a:t>
+            </a:r>
+          </a:p>
+        </p:txBody>
+      </p:sp>
+      <p:sp>
+        <p:nvSpPr>
+          <p:cNvPr id="39" name="TextBox 38"/>
+          <p:cNvSpPr txBox="1"/>
+          <p:nvPr/>
+        </p:nvSpPr>
+        <p:spPr>
+          <a:xfrm>
+            <a:off x="3531520" y="5650000"/>
+            <a:ext cx="2500000" cy="250000"/>
+          </a:xfrm>
+          <a:prstGeom prst="rect">
+            <a:avLst/>
+          </a:prstGeom>
+          <a:noFill/>
+        </p:spPr>
+        <p:txBody>
+          <a:bodyPr wrap="square">
+            <a:spAutoFit/>
+          </a:bodyPr>
+          <a:lstStyle/>
+          <a:p>
+            <a:pPr algn="l"/>
+            <a:r>
+              <a:rPr sz="1100" b="0">
+                <a:solidFill>
+                  <a:srgbClr val="7F849C"/>
+                </a:solidFill>
+                <a:latin typeface="Segoe UI"/>
+              </a:rPr>
+              <a:t>SDK ecosystem growth</a:t>
+            </a:r>
+          </a:p>
+        </p:txBody>
+      </p:sp>
+      <p:sp>
+        <p:nvSpPr>
+          <p:cNvPr id="40" name="TextBox 39"/>
+          <p:cNvSpPr txBox="1"/>
+          <p:nvPr/>
+        </p:nvSpPr>
+        <p:spPr>
+          <a:xfrm>
+            <a:off x="6131520" y="5650000"/>
+            <a:ext cx="2000000" cy="250000"/>
+          </a:xfrm>
+          <a:prstGeom prst="rect">
+            <a:avLst/>
+          </a:prstGeom>
+          <a:noFill/>
+        </p:spPr>
+        <p:txBody>
+          <a:bodyPr wrap="square">
+            <a:spAutoFit/>
+          </a:bodyPr>
+          <a:lstStyle/>
+          <a:p>
+            <a:pPr algn="l"/>
+            <a:r>
+              <a:rPr sz="1300" b="1">
+                <a:solidFill>
+                  <a:srgbClr val="CDD6F4"/>
+                </a:solidFill>
+                <a:latin typeface="Segoe UI"/>
+              </a:rPr>
+              <a:t>Business Development</a:t>
+            </a:r>
+          </a:p>
+        </p:txBody>
+      </p:sp>
+      <p:sp>
+        <p:nvSpPr>
+          <p:cNvPr id="41" name="TextBox 40"/>
+          <p:cNvSpPr txBox="1"/>
+          <p:nvPr/>
+        </p:nvSpPr>
+        <p:spPr>
+          <a:xfrm>
+            <a:off x="8231520" y="5650000"/>
+            <a:ext cx="600000" cy="250000"/>
+          </a:xfrm>
+          <a:prstGeom prst="rect">
+            <a:avLst/>
+          </a:prstGeom>
+          <a:noFill/>
+        </p:spPr>
+        <p:txBody>
+          <a:bodyPr wrap="square">
+            <a:spAutoFit/>
+          </a:bodyPr>
+          <a:lstStyle/>
+          <a:p>
+            <a:pPr algn="l"/>
+            <a:r>
+              <a:rPr sz="1200" b="1">
+                <a:solidFill>
+                  <a:srgbClr val="F9E2AF"/>
+                </a:solidFill>
+                <a:latin typeface="Segoe UI"/>
+              </a:rPr>
+              <a:t>Medium</a:t>
+            </a:r>
+          </a:p>
+        </p:txBody>
+      </p:sp>
+      <p:sp>
+        <p:nvSpPr>
+          <p:cNvPr id="42" name="TextBox 41"/>
+          <p:cNvSpPr txBox="1"/>
+          <p:nvPr/>
+        </p:nvSpPr>
+        <p:spPr>
+          <a:xfrm>
+            <a:off x="8931520" y="5650000"/>
+            <a:ext cx="2500000" cy="250000"/>
+          </a:xfrm>
+          <a:prstGeom prst="rect">
+            <a:avLst/>
+          </a:prstGeom>
+          <a:noFill/>
+        </p:spPr>
+        <p:txBody>
+          <a:bodyPr wrap="square">
+            <a:spAutoFit/>
+          </a:bodyPr>
+          <a:lstStyle/>
+          <a:p>
+            <a:pPr algn="l"/>
+            <a:r>
+              <a:rPr sz="1100" b="0">
+                <a:solidFill>
+                  <a:srgbClr val="7F849C"/>
+                </a:solidFill>
+                <a:latin typeface="Segoe UI"/>
+              </a:rPr>
+              <a:t>Partnership and licensing deals</a:t>
+            </a:r>
+          </a:p>
+        </p:txBody>
+      </p:sp>
+      <p:sp>
+        <p:nvSpPr>
+          <p:cNvPr id="43" name="TextBox 42"/>
+          <p:cNvSpPr txBox="1"/>
+          <p:nvPr/>
+        </p:nvSpPr>
+        <p:spPr>
+          <a:xfrm>
+            <a:off x="731520" y="6100000"/>
+            <a:ext cx="10500000" cy="300000"/>
+          </a:xfrm>
+          <a:prstGeom prst="rect">
+            <a:avLst/>
+          </a:prstGeom>
+          <a:noFill/>
+        </p:spPr>
+        <p:txBody>
+          <a:bodyPr wrap="square">
+            <a:spAutoFit/>
+          </a:bodyPr>
+          <a:lstStyle/>
+          <a:p>
+            <a:pPr algn="ctr"/>
+            <a:r>
+              <a:rPr sz="1300" b="0">
+                <a:solidFill>
+                  <a:srgbClr val="CBA6F7"/>
+                </a:solidFill>
+                <a:latin typeface="Segoe UI"/>
+              </a:rPr>
+              <a:t>If one person with AI tools can produce 92 proofs, working hardware, and a 5-language SDK, a funded team can move exponentially faster.</a:t>
+            </a:r>
+          </a:p>
+        </p:txBody>
+      </p:sp>
+      <p:sp>
+        <p:nvSpPr>
+          <p:cNvPr id="44" name="TextBox 43"/>
+          <p:cNvSpPr txBox="1"/>
+          <p:nvPr/>
+        </p:nvSpPr>
+        <p:spPr>
+          <a:xfrm>
+            <a:off x="11277295" y="6492240"/>
+            <a:ext cx="700000" cy="300000"/>
+          </a:xfrm>
+          <a:prstGeom prst="rect">
+            <a:avLst/>
+          </a:prstGeom>
+          <a:noFill/>
+        </p:spPr>
+        <p:txBody>
+          <a:bodyPr wrap="square">
+            <a:spAutoFit/>
+          </a:bodyPr>
+          <a:lstStyle/>
+          <a:p>
+            <a:pPr algn="r"/>
+            <a:r>
+              <a:rPr sz="1000" b="0">
+                <a:solidFill>
+                  <a:srgbClr val="7F849C"/>
+                </a:solidFill>
+                <a:latin typeface="Segoe UI"/>
+              </a:rPr>
+              <a:t>12/15</a:t>
+            </a:r>
+          </a:p>
+        </p:txBody>
+      </p:sp>
     </p:spTree>
     <p:extLst>
       <p:ext uri="{BB962C8B-B14F-4D97-AF65-F5344CB8AC3E}">
@@ -13876,6 +15333,14 @@
 <file path=ppt/slides/slide13.xml><?xml version="1.0" encoding="utf-8"?>
 <p:sld xmlns:a="http://schemas.openxmlformats.org/drawingml/2006/main" xmlns:r="http://schemas.openxmlformats.org/officeDocument/2006/relationships" xmlns:p="http://schemas.openxmlformats.org/presentationml/2006/main">
   <p:cSld>
+    <p:bg>
+      <p:bgPr>
+        <a:solidFill>
+          <a:srgbClr val="13131A"/>
+        </a:solidFill>
+        <a:effectLst/>
+      </p:bgPr>
+    </p:bg>
     <p:spTree>
       <p:nvGrpSpPr>
         <p:cNvPr id="1" name=""/>
@@ -13890,6 +15355,1233 @@
           <a:chExt cx="0" cy="0"/>
         </a:xfrm>
       </p:grpSpPr>
+      <p:sp>
+        <p:nvSpPr>
+          <p:cNvPr id="2" name="TextBox 1"/>
+          <p:cNvSpPr txBox="1"/>
+          <p:nvPr/>
+        </p:nvSpPr>
+        <p:spPr>
+          <a:xfrm>
+            <a:off x="731520" y="365760"/>
+            <a:ext cx="10500000" cy="600000"/>
+          </a:xfrm>
+          <a:prstGeom prst="rect">
+            <a:avLst/>
+          </a:prstGeom>
+          <a:noFill/>
+        </p:spPr>
+        <p:txBody>
+          <a:bodyPr wrap="square">
+            <a:spAutoFit/>
+          </a:bodyPr>
+          <a:lstStyle/>
+          <a:p>
+            <a:pPr algn="l"/>
+            <a:r>
+              <a:rPr sz="3600" b="1">
+                <a:solidFill>
+                  <a:srgbClr val="89B4FA"/>
+                </a:solidFill>
+                <a:latin typeface="Segoe UI"/>
+              </a:rPr>
+              <a:t>Moat &amp; Defensibility</a:t>
+            </a:r>
+          </a:p>
+        </p:txBody>
+      </p:sp>
+      <p:sp>
+        <p:nvSpPr>
+          <p:cNvPr id="3" name="TextBox 2"/>
+          <p:cNvSpPr txBox="1"/>
+          <p:nvPr/>
+        </p:nvSpPr>
+        <p:spPr>
+          <a:xfrm>
+            <a:off x="731520" y="885475"/>
+            <a:ext cx="10500000" cy="400000"/>
+          </a:xfrm>
+          <a:prstGeom prst="rect">
+            <a:avLst/>
+          </a:prstGeom>
+          <a:noFill/>
+        </p:spPr>
+        <p:txBody>
+          <a:bodyPr wrap="square">
+            <a:spAutoFit/>
+          </a:bodyPr>
+          <a:lstStyle/>
+          <a:p>
+            <a:pPr algn="l"/>
+            <a:r>
+              <a:rPr sz="1600" b="0">
+                <a:solidFill>
+                  <a:srgbClr val="CDD6F4"/>
+                </a:solidFill>
+                <a:latin typeface="Segoe UI"/>
+              </a:rPr>
+              <a:t>Four layers of compounding defense.</a:t>
+            </a:r>
+          </a:p>
+        </p:txBody>
+      </p:sp>
+      <p:sp>
+        <p:nvSpPr>
+          <p:cNvPr id="4" name="Rectangle 3"/>
+          <p:cNvSpPr/>
+          <p:nvPr/>
+        </p:nvSpPr>
+        <p:spPr>
+          <a:xfrm>
+            <a:off x="609904" y="1280160"/>
+            <a:ext cx="10972800" cy="25400"/>
+          </a:xfrm>
+          <a:prstGeom prst="rect">
+            <a:avLst/>
+          </a:prstGeom>
+          <a:solidFill>
+            <a:srgbClr val="89B4FA"/>
+          </a:solidFill>
+          <a:ln>
+            <a:noFill/>
+          </a:ln>
+        </p:spPr>
+        <p:style>
+          <a:lnRef idx="1">
+            <a:schemeClr val="accent1"/>
+          </a:lnRef>
+          <a:fillRef idx="3">
+            <a:schemeClr val="accent1"/>
+          </a:fillRef>
+          <a:effectRef idx="2">
+            <a:schemeClr val="accent1"/>
+          </a:effectRef>
+          <a:fontRef idx="minor">
+            <a:schemeClr val="lt1"/>
+          </a:fontRef>
+        </p:style>
+        <p:txBody>
+          <a:bodyPr rtlCol="0" anchor="ctr"/>
+          <a:lstStyle/>
+          <a:p>
+            <a:pPr algn="ctr"/>
+          </a:p>
+        </p:txBody>
+      </p:sp>
+      <p:sp>
+        <p:nvSpPr>
+          <p:cNvPr id="5" name="Rounded Rectangle 4"/>
+          <p:cNvSpPr/>
+          <p:nvPr/>
+        </p:nvSpPr>
+        <p:spPr>
+          <a:xfrm>
+            <a:off x="731520" y="1500000"/>
+            <a:ext cx="5200000" cy="1700000"/>
+          </a:xfrm>
+          <a:prstGeom prst="roundRect">
+            <a:avLst/>
+          </a:prstGeom>
+          <a:solidFill>
+            <a:srgbClr val="1E1E2E"/>
+          </a:solidFill>
+          <a:ln>
+            <a:noFill/>
+          </a:ln>
+        </p:spPr>
+        <p:style>
+          <a:lnRef idx="1">
+            <a:schemeClr val="accent1"/>
+          </a:lnRef>
+          <a:fillRef idx="3">
+            <a:schemeClr val="accent1"/>
+          </a:fillRef>
+          <a:effectRef idx="2">
+            <a:schemeClr val="accent1"/>
+          </a:effectRef>
+          <a:fontRef idx="minor">
+            <a:schemeClr val="lt1"/>
+          </a:fontRef>
+        </p:style>
+        <p:txBody>
+          <a:bodyPr rtlCol="0" anchor="ctr"/>
+          <a:lstStyle/>
+          <a:p>
+            <a:pPr algn="ctr"/>
+          </a:p>
+        </p:txBody>
+      </p:sp>
+      <p:sp>
+        <p:nvSpPr>
+          <p:cNvPr id="6" name="Oval 5"/>
+          <p:cNvSpPr/>
+          <p:nvPr/>
+        </p:nvSpPr>
+        <p:spPr>
+          <a:xfrm>
+            <a:off x="881520" y="1650000"/>
+            <a:ext cx="350000" cy="350000"/>
+          </a:xfrm>
+          <a:prstGeom prst="ellipse">
+            <a:avLst/>
+          </a:prstGeom>
+          <a:solidFill>
+            <a:srgbClr val="89B4FA"/>
+          </a:solidFill>
+          <a:ln>
+            <a:noFill/>
+          </a:ln>
+        </p:spPr>
+        <p:style>
+          <a:lnRef idx="1">
+            <a:schemeClr val="accent1"/>
+          </a:lnRef>
+          <a:fillRef idx="3">
+            <a:schemeClr val="accent1"/>
+          </a:fillRef>
+          <a:effectRef idx="2">
+            <a:schemeClr val="accent1"/>
+          </a:effectRef>
+          <a:fontRef idx="minor">
+            <a:schemeClr val="lt1"/>
+          </a:fontRef>
+        </p:style>
+        <p:txBody>
+          <a:bodyPr rtlCol="0" anchor="ctr"/>
+          <a:lstStyle/>
+          <a:p>
+            <a:pPr algn="ctr"/>
+          </a:p>
+        </p:txBody>
+      </p:sp>
+      <p:sp>
+        <p:nvSpPr>
+          <p:cNvPr id="7" name="TextBox 6"/>
+          <p:cNvSpPr txBox="1"/>
+          <p:nvPr/>
+        </p:nvSpPr>
+        <p:spPr>
+          <a:xfrm>
+            <a:off x="881520" y="1690000"/>
+            <a:ext cx="350000" cy="300000"/>
+          </a:xfrm>
+          <a:prstGeom prst="rect">
+            <a:avLst/>
+          </a:prstGeom>
+          <a:noFill/>
+        </p:spPr>
+        <p:txBody>
+          <a:bodyPr wrap="square">
+            <a:spAutoFit/>
+          </a:bodyPr>
+          <a:lstStyle/>
+          <a:p>
+            <a:pPr algn="ctr"/>
+            <a:r>
+              <a:rPr sz="1800" b="1">
+                <a:solidFill>
+                  <a:srgbClr val="13131A"/>
+                </a:solidFill>
+                <a:latin typeface="Segoe UI"/>
+              </a:rPr>
+              <a:t>1</a:t>
+            </a:r>
+          </a:p>
+        </p:txBody>
+      </p:sp>
+      <p:sp>
+        <p:nvSpPr>
+          <p:cNvPr id="8" name="TextBox 7"/>
+          <p:cNvSpPr txBox="1"/>
+          <p:nvPr/>
+        </p:nvSpPr>
+        <p:spPr>
+          <a:xfrm>
+            <a:off x="1331520" y="1680000"/>
+            <a:ext cx="4400000" cy="300000"/>
+          </a:xfrm>
+          <a:prstGeom prst="rect">
+            <a:avLst/>
+          </a:prstGeom>
+          <a:noFill/>
+        </p:spPr>
+        <p:txBody>
+          <a:bodyPr wrap="square">
+            <a:spAutoFit/>
+          </a:bodyPr>
+          <a:lstStyle/>
+          <a:p>
+            <a:pPr algn="l"/>
+            <a:r>
+              <a:rPr sz="1800" b="1">
+                <a:solidFill>
+                  <a:srgbClr val="89B4FA"/>
+                </a:solidFill>
+                <a:latin typeface="Segoe UI"/>
+              </a:rPr>
+              <a:t>Patent Protection</a:t>
+            </a:r>
+          </a:p>
+        </p:txBody>
+      </p:sp>
+      <p:sp>
+        <p:nvSpPr>
+          <p:cNvPr id="9" name="TextBox 8"/>
+          <p:cNvSpPr txBox="1"/>
+          <p:nvPr/>
+        </p:nvSpPr>
+        <p:spPr>
+          <a:xfrm>
+            <a:off x="1331520" y="2030000"/>
+            <a:ext cx="4400000" cy="300000"/>
+          </a:xfrm>
+          <a:prstGeom prst="rect">
+            <a:avLst/>
+          </a:prstGeom>
+          <a:noFill/>
+        </p:spPr>
+        <p:txBody>
+          <a:bodyPr wrap="square">
+            <a:spAutoFit/>
+          </a:bodyPr>
+          <a:lstStyle/>
+          <a:p>
+            <a:pPr algn="l"/>
+            <a:r>
+              <a:rPr sz="1100" b="0">
+                <a:solidFill>
+                  <a:srgbClr val="CDD6F4"/>
+                </a:solidFill>
+                <a:latin typeface="Segoe UI"/>
+              </a:rPr>
+              <a:t>•  Architecture and execution model under IP protection</a:t>
+            </a:r>
+          </a:p>
+        </p:txBody>
+      </p:sp>
+      <p:sp>
+        <p:nvSpPr>
+          <p:cNvPr id="10" name="TextBox 9"/>
+          <p:cNvSpPr txBox="1"/>
+          <p:nvPr/>
+        </p:nvSpPr>
+        <p:spPr>
+          <a:xfrm>
+            <a:off x="1331520" y="2380000"/>
+            <a:ext cx="4400000" cy="300000"/>
+          </a:xfrm>
+          <a:prstGeom prst="rect">
+            <a:avLst/>
+          </a:prstGeom>
+          <a:noFill/>
+        </p:spPr>
+        <p:txBody>
+          <a:bodyPr wrap="square">
+            <a:spAutoFit/>
+          </a:bodyPr>
+          <a:lstStyle/>
+          <a:p>
+            <a:pPr algn="l"/>
+            <a:r>
+              <a:rPr sz="1100" b="0">
+                <a:solidFill>
+                  <a:srgbClr val="CDD6F4"/>
+                </a:solidFill>
+                <a:latin typeface="Segoe UI"/>
+              </a:rPr>
+              <a:t>•  Covers: XOR accumulation, parallel banks, merge tree, RTL generation</a:t>
+            </a:r>
+          </a:p>
+        </p:txBody>
+      </p:sp>
+      <p:sp>
+        <p:nvSpPr>
+          <p:cNvPr id="11" name="TextBox 10"/>
+          <p:cNvSpPr txBox="1"/>
+          <p:nvPr/>
+        </p:nvSpPr>
+        <p:spPr>
+          <a:xfrm>
+            <a:off x="1331520" y="2730000"/>
+            <a:ext cx="4400000" cy="300000"/>
+          </a:xfrm>
+          <a:prstGeom prst="rect">
+            <a:avLst/>
+          </a:prstGeom>
+          <a:noFill/>
+        </p:spPr>
+        <p:txBody>
+          <a:bodyPr wrap="square">
+            <a:spAutoFit/>
+          </a:bodyPr>
+          <a:lstStyle/>
+          <a:p>
+            <a:pPr algn="l"/>
+            <a:r>
+              <a:rPr sz="1100" b="0">
+                <a:solidFill>
+                  <a:srgbClr val="CDD6F4"/>
+                </a:solidFill>
+                <a:latin typeface="Segoe UI"/>
+              </a:rPr>
+              <a:t>•  Continuation patents planned for parallel scaling innovations</a:t>
+            </a:r>
+          </a:p>
+        </p:txBody>
+      </p:sp>
+      <p:sp>
+        <p:nvSpPr>
+          <p:cNvPr id="12" name="Rounded Rectangle 11"/>
+          <p:cNvSpPr/>
+          <p:nvPr/>
+        </p:nvSpPr>
+        <p:spPr>
+          <a:xfrm>
+            <a:off x="6231520" y="1500000"/>
+            <a:ext cx="5200000" cy="1700000"/>
+          </a:xfrm>
+          <a:prstGeom prst="roundRect">
+            <a:avLst/>
+          </a:prstGeom>
+          <a:solidFill>
+            <a:srgbClr val="1E1E2E"/>
+          </a:solidFill>
+          <a:ln>
+            <a:noFill/>
+          </a:ln>
+        </p:spPr>
+        <p:style>
+          <a:lnRef idx="1">
+            <a:schemeClr val="accent1"/>
+          </a:lnRef>
+          <a:fillRef idx="3">
+            <a:schemeClr val="accent1"/>
+          </a:fillRef>
+          <a:effectRef idx="2">
+            <a:schemeClr val="accent1"/>
+          </a:effectRef>
+          <a:fontRef idx="minor">
+            <a:schemeClr val="lt1"/>
+          </a:fontRef>
+        </p:style>
+        <p:txBody>
+          <a:bodyPr rtlCol="0" anchor="ctr"/>
+          <a:lstStyle/>
+          <a:p>
+            <a:pPr algn="ctr"/>
+          </a:p>
+        </p:txBody>
+      </p:sp>
+      <p:sp>
+        <p:nvSpPr>
+          <p:cNvPr id="13" name="Oval 12"/>
+          <p:cNvSpPr/>
+          <p:nvPr/>
+        </p:nvSpPr>
+        <p:spPr>
+          <a:xfrm>
+            <a:off x="6381520" y="1650000"/>
+            <a:ext cx="350000" cy="350000"/>
+          </a:xfrm>
+          <a:prstGeom prst="ellipse">
+            <a:avLst/>
+          </a:prstGeom>
+          <a:solidFill>
+            <a:srgbClr val="A6E3A1"/>
+          </a:solidFill>
+          <a:ln>
+            <a:noFill/>
+          </a:ln>
+        </p:spPr>
+        <p:style>
+          <a:lnRef idx="1">
+            <a:schemeClr val="accent1"/>
+          </a:lnRef>
+          <a:fillRef idx="3">
+            <a:schemeClr val="accent1"/>
+          </a:fillRef>
+          <a:effectRef idx="2">
+            <a:schemeClr val="accent1"/>
+          </a:effectRef>
+          <a:fontRef idx="minor">
+            <a:schemeClr val="lt1"/>
+          </a:fontRef>
+        </p:style>
+        <p:txBody>
+          <a:bodyPr rtlCol="0" anchor="ctr"/>
+          <a:lstStyle/>
+          <a:p>
+            <a:pPr algn="ctr"/>
+          </a:p>
+        </p:txBody>
+      </p:sp>
+      <p:sp>
+        <p:nvSpPr>
+          <p:cNvPr id="14" name="TextBox 13"/>
+          <p:cNvSpPr txBox="1"/>
+          <p:nvPr/>
+        </p:nvSpPr>
+        <p:spPr>
+          <a:xfrm>
+            <a:off x="6381520" y="1690000"/>
+            <a:ext cx="350000" cy="300000"/>
+          </a:xfrm>
+          <a:prstGeom prst="rect">
+            <a:avLst/>
+          </a:prstGeom>
+          <a:noFill/>
+        </p:spPr>
+        <p:txBody>
+          <a:bodyPr wrap="square">
+            <a:spAutoFit/>
+          </a:bodyPr>
+          <a:lstStyle/>
+          <a:p>
+            <a:pPr algn="ctr"/>
+            <a:r>
+              <a:rPr sz="1800" b="1">
+                <a:solidFill>
+                  <a:srgbClr val="13131A"/>
+                </a:solidFill>
+                <a:latin typeface="Segoe UI"/>
+              </a:rPr>
+              <a:t>2</a:t>
+            </a:r>
+          </a:p>
+        </p:txBody>
+      </p:sp>
+      <p:sp>
+        <p:nvSpPr>
+          <p:cNvPr id="15" name="TextBox 14"/>
+          <p:cNvSpPr txBox="1"/>
+          <p:nvPr/>
+        </p:nvSpPr>
+        <p:spPr>
+          <a:xfrm>
+            <a:off x="6831520" y="1680000"/>
+            <a:ext cx="4400000" cy="300000"/>
+          </a:xfrm>
+          <a:prstGeom prst="rect">
+            <a:avLst/>
+          </a:prstGeom>
+          <a:noFill/>
+        </p:spPr>
+        <p:txBody>
+          <a:bodyPr wrap="square">
+            <a:spAutoFit/>
+          </a:bodyPr>
+          <a:lstStyle/>
+          <a:p>
+            <a:pPr algn="l"/>
+            <a:r>
+              <a:rPr sz="1800" b="1">
+                <a:solidFill>
+                  <a:srgbClr val="A6E3A1"/>
+                </a:solidFill>
+                <a:latin typeface="Segoe UI"/>
+              </a:rPr>
+              <a:t>Formal Verification Barrier</a:t>
+            </a:r>
+          </a:p>
+        </p:txBody>
+      </p:sp>
+      <p:sp>
+        <p:nvSpPr>
+          <p:cNvPr id="16" name="TextBox 15"/>
+          <p:cNvSpPr txBox="1"/>
+          <p:nvPr/>
+        </p:nvSpPr>
+        <p:spPr>
+          <a:xfrm>
+            <a:off x="6831520" y="2030000"/>
+            <a:ext cx="4400000" cy="300000"/>
+          </a:xfrm>
+          <a:prstGeom prst="rect">
+            <a:avLst/>
+          </a:prstGeom>
+          <a:noFill/>
+        </p:spPr>
+        <p:txBody>
+          <a:bodyPr wrap="square">
+            <a:spAutoFit/>
+          </a:bodyPr>
+          <a:lstStyle/>
+          <a:p>
+            <a:pPr algn="l"/>
+            <a:r>
+              <a:rPr sz="1100" b="0">
+                <a:solidFill>
+                  <a:srgbClr val="CDD6F4"/>
+                </a:solidFill>
+                <a:latin typeface="Segoe UI"/>
+              </a:rPr>
+              <a:t>•  92 Lean4 proofs = multi-month engineering effort to replicate</a:t>
+            </a:r>
+          </a:p>
+        </p:txBody>
+      </p:sp>
+      <p:sp>
+        <p:nvSpPr>
+          <p:cNvPr id="17" name="TextBox 16"/>
+          <p:cNvSpPr txBox="1"/>
+          <p:nvPr/>
+        </p:nvSpPr>
+        <p:spPr>
+          <a:xfrm>
+            <a:off x="6831520" y="2380000"/>
+            <a:ext cx="4400000" cy="300000"/>
+          </a:xfrm>
+          <a:prstGeom prst="rect">
+            <a:avLst/>
+          </a:prstGeom>
+          <a:noFill/>
+        </p:spPr>
+        <p:txBody>
+          <a:bodyPr wrap="square">
+            <a:spAutoFit/>
+          </a:bodyPr>
+          <a:lstStyle/>
+          <a:p>
+            <a:pPr algn="l"/>
+            <a:r>
+              <a:rPr sz="1100" b="0">
+                <a:solidFill>
+                  <a:srgbClr val="CDD6F4"/>
+                </a:solidFill>
+                <a:latin typeface="Segoe UI"/>
+              </a:rPr>
+              <a:t>•  Competitors must match proof standard or accept unverified claims</a:t>
+            </a:r>
+          </a:p>
+        </p:txBody>
+      </p:sp>
+      <p:sp>
+        <p:nvSpPr>
+          <p:cNvPr id="18" name="TextBox 17"/>
+          <p:cNvSpPr txBox="1"/>
+          <p:nvPr/>
+        </p:nvSpPr>
+        <p:spPr>
+          <a:xfrm>
+            <a:off x="6831520" y="2730000"/>
+            <a:ext cx="4400000" cy="300000"/>
+          </a:xfrm>
+          <a:prstGeom prst="rect">
+            <a:avLst/>
+          </a:prstGeom>
+          <a:noFill/>
+        </p:spPr>
+        <p:txBody>
+          <a:bodyPr wrap="square">
+            <a:spAutoFit/>
+          </a:bodyPr>
+          <a:lstStyle/>
+          <a:p>
+            <a:pPr algn="l"/>
+            <a:r>
+              <a:rPr sz="1100" b="0">
+                <a:solidFill>
+                  <a:srgbClr val="CDD6F4"/>
+                </a:solidFill>
+                <a:latin typeface="Segoe UI"/>
+              </a:rPr>
+              <a:t>•  Proof base grows with each theorem, increasing barrier over time</a:t>
+            </a:r>
+          </a:p>
+        </p:txBody>
+      </p:sp>
+      <p:sp>
+        <p:nvSpPr>
+          <p:cNvPr id="19" name="Rounded Rectangle 18"/>
+          <p:cNvSpPr/>
+          <p:nvPr/>
+        </p:nvSpPr>
+        <p:spPr>
+          <a:xfrm>
+            <a:off x="731520" y="3400000"/>
+            <a:ext cx="5200000" cy="1700000"/>
+          </a:xfrm>
+          <a:prstGeom prst="roundRect">
+            <a:avLst/>
+          </a:prstGeom>
+          <a:solidFill>
+            <a:srgbClr val="1E1E2E"/>
+          </a:solidFill>
+          <a:ln>
+            <a:noFill/>
+          </a:ln>
+        </p:spPr>
+        <p:style>
+          <a:lnRef idx="1">
+            <a:schemeClr val="accent1"/>
+          </a:lnRef>
+          <a:fillRef idx="3">
+            <a:schemeClr val="accent1"/>
+          </a:fillRef>
+          <a:effectRef idx="2">
+            <a:schemeClr val="accent1"/>
+          </a:effectRef>
+          <a:fontRef idx="minor">
+            <a:schemeClr val="lt1"/>
+          </a:fontRef>
+        </p:style>
+        <p:txBody>
+          <a:bodyPr rtlCol="0" anchor="ctr"/>
+          <a:lstStyle/>
+          <a:p>
+            <a:pPr algn="ctr"/>
+          </a:p>
+        </p:txBody>
+      </p:sp>
+      <p:sp>
+        <p:nvSpPr>
+          <p:cNvPr id="20" name="Oval 19"/>
+          <p:cNvSpPr/>
+          <p:nvPr/>
+        </p:nvSpPr>
+        <p:spPr>
+          <a:xfrm>
+            <a:off x="881520" y="3550000"/>
+            <a:ext cx="350000" cy="350000"/>
+          </a:xfrm>
+          <a:prstGeom prst="ellipse">
+            <a:avLst/>
+          </a:prstGeom>
+          <a:solidFill>
+            <a:srgbClr val="CBA6F7"/>
+          </a:solidFill>
+          <a:ln>
+            <a:noFill/>
+          </a:ln>
+        </p:spPr>
+        <p:style>
+          <a:lnRef idx="1">
+            <a:schemeClr val="accent1"/>
+          </a:lnRef>
+          <a:fillRef idx="3">
+            <a:schemeClr val="accent1"/>
+          </a:fillRef>
+          <a:effectRef idx="2">
+            <a:schemeClr val="accent1"/>
+          </a:effectRef>
+          <a:fontRef idx="minor">
+            <a:schemeClr val="lt1"/>
+          </a:fontRef>
+        </p:style>
+        <p:txBody>
+          <a:bodyPr rtlCol="0" anchor="ctr"/>
+          <a:lstStyle/>
+          <a:p>
+            <a:pPr algn="ctr"/>
+          </a:p>
+        </p:txBody>
+      </p:sp>
+      <p:sp>
+        <p:nvSpPr>
+          <p:cNvPr id="21" name="TextBox 20"/>
+          <p:cNvSpPr txBox="1"/>
+          <p:nvPr/>
+        </p:nvSpPr>
+        <p:spPr>
+          <a:xfrm>
+            <a:off x="881520" y="3590000"/>
+            <a:ext cx="350000" cy="300000"/>
+          </a:xfrm>
+          <a:prstGeom prst="rect">
+            <a:avLst/>
+          </a:prstGeom>
+          <a:noFill/>
+        </p:spPr>
+        <p:txBody>
+          <a:bodyPr wrap="square">
+            <a:spAutoFit/>
+          </a:bodyPr>
+          <a:lstStyle/>
+          <a:p>
+            <a:pPr algn="ctr"/>
+            <a:r>
+              <a:rPr sz="1800" b="1">
+                <a:solidFill>
+                  <a:srgbClr val="13131A"/>
+                </a:solidFill>
+                <a:latin typeface="Segoe UI"/>
+              </a:rPr>
+              <a:t>3</a:t>
+            </a:r>
+          </a:p>
+        </p:txBody>
+      </p:sp>
+      <p:sp>
+        <p:nvSpPr>
+          <p:cNvPr id="22" name="TextBox 21"/>
+          <p:cNvSpPr txBox="1"/>
+          <p:nvPr/>
+        </p:nvSpPr>
+        <p:spPr>
+          <a:xfrm>
+            <a:off x="1331520" y="3580000"/>
+            <a:ext cx="4400000" cy="300000"/>
+          </a:xfrm>
+          <a:prstGeom prst="rect">
+            <a:avLst/>
+          </a:prstGeom>
+          <a:noFill/>
+        </p:spPr>
+        <p:txBody>
+          <a:bodyPr wrap="square">
+            <a:spAutoFit/>
+          </a:bodyPr>
+          <a:lstStyle/>
+          <a:p>
+            <a:pPr algn="l"/>
+            <a:r>
+              <a:rPr sz="1800" b="1">
+                <a:solidFill>
+                  <a:srgbClr val="CBA6F7"/>
+                </a:solidFill>
+                <a:latin typeface="Segoe UI"/>
+              </a:rPr>
+              <a:t>SDK Ecosystem Lock-In</a:t>
+            </a:r>
+          </a:p>
+        </p:txBody>
+      </p:sp>
+      <p:sp>
+        <p:nvSpPr>
+          <p:cNvPr id="23" name="TextBox 22"/>
+          <p:cNvSpPr txBox="1"/>
+          <p:nvPr/>
+        </p:nvSpPr>
+        <p:spPr>
+          <a:xfrm>
+            <a:off x="1331520" y="3930000"/>
+            <a:ext cx="4400000" cy="300000"/>
+          </a:xfrm>
+          <a:prstGeom prst="rect">
+            <a:avLst/>
+          </a:prstGeom>
+          <a:noFill/>
+        </p:spPr>
+        <p:txBody>
+          <a:bodyPr wrap="square">
+            <a:spAutoFit/>
+          </a:bodyPr>
+          <a:lstStyle/>
+          <a:p>
+            <a:pPr algn="l"/>
+            <a:r>
+              <a:rPr sz="1100" b="0">
+                <a:solidFill>
+                  <a:srgbClr val="CDD6F4"/>
+                </a:solidFill>
+                <a:latin typeface="Segoe UI"/>
+              </a:rPr>
+              <a:t>•  Schema-driven codegen across 5 languages creates switching costs</a:t>
+            </a:r>
+          </a:p>
+        </p:txBody>
+      </p:sp>
+      <p:sp>
+        <p:nvSpPr>
+          <p:cNvPr id="24" name="TextBox 23"/>
+          <p:cNvSpPr txBox="1"/>
+          <p:nvPr/>
+        </p:nvSpPr>
+        <p:spPr>
+          <a:xfrm>
+            <a:off x="1331520" y="4280000"/>
+            <a:ext cx="4400000" cy="300000"/>
+          </a:xfrm>
+          <a:prstGeom prst="rect">
+            <a:avLst/>
+          </a:prstGeom>
+          <a:noFill/>
+        </p:spPr>
+        <p:txBody>
+          <a:bodyPr wrap="square">
+            <a:spAutoFit/>
+          </a:bodyPr>
+          <a:lstStyle/>
+          <a:p>
+            <a:pPr algn="l"/>
+            <a:r>
+              <a:rPr sz="1100" b="0">
+                <a:solidFill>
+                  <a:srgbClr val="CDD6F4"/>
+                </a:solidFill>
+                <a:latin typeface="Segoe UI"/>
+              </a:rPr>
+              <a:t>•  Hardware RTL + software coupled through same schema</a:t>
+            </a:r>
+          </a:p>
+        </p:txBody>
+      </p:sp>
+      <p:sp>
+        <p:nvSpPr>
+          <p:cNvPr id="25" name="TextBox 24"/>
+          <p:cNvSpPr txBox="1"/>
+          <p:nvPr/>
+        </p:nvSpPr>
+        <p:spPr>
+          <a:xfrm>
+            <a:off x="1331520" y="4630000"/>
+            <a:ext cx="4400000" cy="300000"/>
+          </a:xfrm>
+          <a:prstGeom prst="rect">
+            <a:avLst/>
+          </a:prstGeom>
+          <a:noFill/>
+        </p:spPr>
+        <p:txBody>
+          <a:bodyPr wrap="square">
+            <a:spAutoFit/>
+          </a:bodyPr>
+          <a:lstStyle/>
+          <a:p>
+            <a:pPr algn="l"/>
+            <a:r>
+              <a:rPr sz="1100" b="0">
+                <a:solidFill>
+                  <a:srgbClr val="CDD6F4"/>
+                </a:solidFill>
+                <a:latin typeface="Segoe UI"/>
+              </a:rPr>
+              <a:t>•  353 tests verify algebraic correctness across all targets</a:t>
+            </a:r>
+          </a:p>
+        </p:txBody>
+      </p:sp>
+      <p:sp>
+        <p:nvSpPr>
+          <p:cNvPr id="26" name="Rounded Rectangle 25"/>
+          <p:cNvSpPr/>
+          <p:nvPr/>
+        </p:nvSpPr>
+        <p:spPr>
+          <a:xfrm>
+            <a:off x="6231520" y="3400000"/>
+            <a:ext cx="5200000" cy="1700000"/>
+          </a:xfrm>
+          <a:prstGeom prst="roundRect">
+            <a:avLst/>
+          </a:prstGeom>
+          <a:solidFill>
+            <a:srgbClr val="1E1E2E"/>
+          </a:solidFill>
+          <a:ln>
+            <a:noFill/>
+          </a:ln>
+        </p:spPr>
+        <p:style>
+          <a:lnRef idx="1">
+            <a:schemeClr val="accent1"/>
+          </a:lnRef>
+          <a:fillRef idx="3">
+            <a:schemeClr val="accent1"/>
+          </a:fillRef>
+          <a:effectRef idx="2">
+            <a:schemeClr val="accent1"/>
+          </a:effectRef>
+          <a:fontRef idx="minor">
+            <a:schemeClr val="lt1"/>
+          </a:fontRef>
+        </p:style>
+        <p:txBody>
+          <a:bodyPr rtlCol="0" anchor="ctr"/>
+          <a:lstStyle/>
+          <a:p>
+            <a:pPr algn="ctr"/>
+          </a:p>
+        </p:txBody>
+      </p:sp>
+      <p:sp>
+        <p:nvSpPr>
+          <p:cNvPr id="27" name="Oval 26"/>
+          <p:cNvSpPr/>
+          <p:nvPr/>
+        </p:nvSpPr>
+        <p:spPr>
+          <a:xfrm>
+            <a:off x="6381520" y="3550000"/>
+            <a:ext cx="350000" cy="350000"/>
+          </a:xfrm>
+          <a:prstGeom prst="ellipse">
+            <a:avLst/>
+          </a:prstGeom>
+          <a:solidFill>
+            <a:srgbClr val="FAB387"/>
+          </a:solidFill>
+          <a:ln>
+            <a:noFill/>
+          </a:ln>
+        </p:spPr>
+        <p:style>
+          <a:lnRef idx="1">
+            <a:schemeClr val="accent1"/>
+          </a:lnRef>
+          <a:fillRef idx="3">
+            <a:schemeClr val="accent1"/>
+          </a:fillRef>
+          <a:effectRef idx="2">
+            <a:schemeClr val="accent1"/>
+          </a:effectRef>
+          <a:fontRef idx="minor">
+            <a:schemeClr val="lt1"/>
+          </a:fontRef>
+        </p:style>
+        <p:txBody>
+          <a:bodyPr rtlCol="0" anchor="ctr"/>
+          <a:lstStyle/>
+          <a:p>
+            <a:pPr algn="ctr"/>
+          </a:p>
+        </p:txBody>
+      </p:sp>
+      <p:sp>
+        <p:nvSpPr>
+          <p:cNvPr id="28" name="TextBox 27"/>
+          <p:cNvSpPr txBox="1"/>
+          <p:nvPr/>
+        </p:nvSpPr>
+        <p:spPr>
+          <a:xfrm>
+            <a:off x="6381520" y="3590000"/>
+            <a:ext cx="350000" cy="300000"/>
+          </a:xfrm>
+          <a:prstGeom prst="rect">
+            <a:avLst/>
+          </a:prstGeom>
+          <a:noFill/>
+        </p:spPr>
+        <p:txBody>
+          <a:bodyPr wrap="square">
+            <a:spAutoFit/>
+          </a:bodyPr>
+          <a:lstStyle/>
+          <a:p>
+            <a:pPr algn="ctr"/>
+            <a:r>
+              <a:rPr sz="1800" b="1">
+                <a:solidFill>
+                  <a:srgbClr val="13131A"/>
+                </a:solidFill>
+                <a:latin typeface="Segoe UI"/>
+              </a:rPr>
+              <a:t>4</a:t>
+            </a:r>
+          </a:p>
+        </p:txBody>
+      </p:sp>
+      <p:sp>
+        <p:nvSpPr>
+          <p:cNvPr id="29" name="TextBox 28"/>
+          <p:cNvSpPr txBox="1"/>
+          <p:nvPr/>
+        </p:nvSpPr>
+        <p:spPr>
+          <a:xfrm>
+            <a:off x="6831520" y="3580000"/>
+            <a:ext cx="4400000" cy="300000"/>
+          </a:xfrm>
+          <a:prstGeom prst="rect">
+            <a:avLst/>
+          </a:prstGeom>
+          <a:noFill/>
+        </p:spPr>
+        <p:txBody>
+          <a:bodyPr wrap="square">
+            <a:spAutoFit/>
+          </a:bodyPr>
+          <a:lstStyle/>
+          <a:p>
+            <a:pPr algn="l"/>
+            <a:r>
+              <a:rPr sz="1800" b="1">
+                <a:solidFill>
+                  <a:srgbClr val="FAB387"/>
+                </a:solidFill>
+                <a:latin typeface="Segoe UI"/>
+              </a:rPr>
+              <a:t>Architectural Lock-In</a:t>
+            </a:r>
+          </a:p>
+        </p:txBody>
+      </p:sp>
+      <p:sp>
+        <p:nvSpPr>
+          <p:cNvPr id="30" name="TextBox 29"/>
+          <p:cNvSpPr txBox="1"/>
+          <p:nvPr/>
+        </p:nvSpPr>
+        <p:spPr>
+          <a:xfrm>
+            <a:off x="6831520" y="3930000"/>
+            <a:ext cx="4400000" cy="300000"/>
+          </a:xfrm>
+          <a:prstGeom prst="rect">
+            <a:avLst/>
+          </a:prstGeom>
+          <a:noFill/>
+        </p:spPr>
+        <p:txBody>
+          <a:bodyPr wrap="square">
+            <a:spAutoFit/>
+          </a:bodyPr>
+          <a:lstStyle/>
+          <a:p>
+            <a:pPr algn="l"/>
+            <a:r>
+              <a:rPr sz="1100" b="0">
+                <a:solidFill>
+                  <a:srgbClr val="CDD6F4"/>
+                </a:solidFill>
+                <a:latin typeface="Segoe UI"/>
+              </a:rPr>
+              <a:t>•  RTL IP wired into chip data path = 12-24 month re-design to switch</a:t>
+            </a:r>
+          </a:p>
+        </p:txBody>
+      </p:sp>
+      <p:sp>
+        <p:nvSpPr>
+          <p:cNvPr id="31" name="TextBox 30"/>
+          <p:cNvSpPr txBox="1"/>
+          <p:nvPr/>
+        </p:nvSpPr>
+        <p:spPr>
+          <a:xfrm>
+            <a:off x="6831520" y="4280000"/>
+            <a:ext cx="4400000" cy="300000"/>
+          </a:xfrm>
+          <a:prstGeom prst="rect">
+            <a:avLst/>
+          </a:prstGeom>
+          <a:noFill/>
+        </p:spPr>
+        <p:txBody>
+          <a:bodyPr wrap="square">
+            <a:spAutoFit/>
+          </a:bodyPr>
+          <a:lstStyle/>
+          <a:p>
+            <a:pPr algn="l"/>
+            <a:r>
+              <a:rPr sz="1100" b="0">
+                <a:solidFill>
+                  <a:srgbClr val="CDD6F4"/>
+                </a:solidFill>
+                <a:latin typeface="Segoe UI"/>
+              </a:rPr>
+              <a:t>•  Performance advantage compounds: optimizing for delta-state = increasing returns</a:t>
+            </a:r>
+          </a:p>
+        </p:txBody>
+      </p:sp>
+      <p:sp>
+        <p:nvSpPr>
+          <p:cNvPr id="32" name="TextBox 31"/>
+          <p:cNvSpPr txBox="1"/>
+          <p:nvPr/>
+        </p:nvSpPr>
+        <p:spPr>
+          <a:xfrm>
+            <a:off x="6831520" y="4630000"/>
+            <a:ext cx="4400000" cy="300000"/>
+          </a:xfrm>
+          <a:prstGeom prst="rect">
+            <a:avLst/>
+          </a:prstGeom>
+          <a:noFill/>
+        </p:spPr>
+        <p:txBody>
+          <a:bodyPr wrap="square">
+            <a:spAutoFit/>
+          </a:bodyPr>
+          <a:lstStyle/>
+          <a:p>
+            <a:pPr algn="l"/>
+            <a:r>
+              <a:rPr sz="1100" b="0">
+                <a:solidFill>
+                  <a:srgbClr val="CDD6F4"/>
+                </a:solidFill>
+                <a:latin typeface="Segoe UI"/>
+              </a:rPr>
+              <a:t>•  Standard-setting potential: if ATOMiK becomes the primitive, switching costs are permanent</a:t>
+            </a:r>
+          </a:p>
+        </p:txBody>
+      </p:sp>
+      <p:sp>
+        <p:nvSpPr>
+          <p:cNvPr id="33" name="TextBox 32"/>
+          <p:cNvSpPr txBox="1"/>
+          <p:nvPr/>
+        </p:nvSpPr>
+        <p:spPr>
+          <a:xfrm>
+            <a:off x="731520" y="5700000"/>
+            <a:ext cx="10500000" cy="400000"/>
+          </a:xfrm>
+          <a:prstGeom prst="rect">
+            <a:avLst/>
+          </a:prstGeom>
+          <a:noFill/>
+        </p:spPr>
+        <p:txBody>
+          <a:bodyPr wrap="square">
+            <a:spAutoFit/>
+          </a:bodyPr>
+          <a:lstStyle/>
+          <a:p>
+            <a:pPr algn="ctr"/>
+            <a:r>
+              <a:rPr sz="1300" b="0">
+                <a:solidFill>
+                  <a:srgbClr val="7F849C"/>
+                </a:solidFill>
+                <a:latin typeface="Segoe UI"/>
+              </a:rPr>
+              <a:t>Each layer is independently defensible. Together they create a compounding barrier that grows stronger over time.</a:t>
+            </a:r>
+          </a:p>
+        </p:txBody>
+      </p:sp>
+      <p:sp>
+        <p:nvSpPr>
+          <p:cNvPr id="34" name="TextBox 33"/>
+          <p:cNvSpPr txBox="1"/>
+          <p:nvPr/>
+        </p:nvSpPr>
+        <p:spPr>
+          <a:xfrm>
+            <a:off x="11277295" y="6492240"/>
+            <a:ext cx="700000" cy="300000"/>
+          </a:xfrm>
+          <a:prstGeom prst="rect">
+            <a:avLst/>
+          </a:prstGeom>
+          <a:noFill/>
+        </p:spPr>
+        <p:txBody>
+          <a:bodyPr wrap="square">
+            <a:spAutoFit/>
+          </a:bodyPr>
+          <a:lstStyle/>
+          <a:p>
+            <a:pPr algn="r"/>
+            <a:r>
+              <a:rPr sz="1000" b="0">
+                <a:solidFill>
+                  <a:srgbClr val="7F849C"/>
+                </a:solidFill>
+                <a:latin typeface="Segoe UI"/>
+              </a:rPr>
+              <a:t>13/15</a:t>
+            </a:r>
+          </a:p>
+        </p:txBody>
+      </p:sp>
     </p:spTree>
     <p:extLst>
       <p:ext uri="{BB962C8B-B14F-4D97-AF65-F5344CB8AC3E}">
@@ -16290,7 +18982,7 @@
                 </a:solidFill>
                 <a:latin typeface="Segoe UI"/>
               </a:rPr>
-              <a:t> (Tango Nano 9k – FPGA)</a:t>
+              <a:t> (Tang Nano 9K – FPGA)</a:t>
             </a:r>
             <a:r>
               <a:rPr sz="1000" b="0" dirty="0">
@@ -16299,7 +18991,7 @@
                 </a:solidFill>
                 <a:latin typeface="Segoe UI"/>
               </a:rPr>
-              <a:t> + 314 </a:t>
+              <a:t> + 353 </a:t>
             </a:r>
             <a:r>
               <a:rPr lang="en-US" sz="1000" b="0" dirty="0">
@@ -16713,7 +19405,7 @@
                 </a:solidFill>
                 <a:latin typeface="Segoe UI"/>
               </a:rPr>
-              <a:t>10/10</a:t>
+              <a:t>14/15</a:t>
             </a:r>
           </a:p>
         </p:txBody>
@@ -16729,6 +19421,14 @@
 <file path=ppt/slides/slide15.xml><?xml version="1.0" encoding="utf-8"?>
 <p:sld xmlns:a="http://schemas.openxmlformats.org/drawingml/2006/main" xmlns:r="http://schemas.openxmlformats.org/officeDocument/2006/relationships" xmlns:p="http://schemas.openxmlformats.org/presentationml/2006/main">
   <p:cSld>
+    <p:bg>
+      <p:bgPr>
+        <a:solidFill>
+          <a:srgbClr val="13131A"/>
+        </a:solidFill>
+        <a:effectLst/>
+      </p:bgPr>
+    </p:bg>
     <p:spTree>
       <p:nvGrpSpPr>
         <p:cNvPr id="1" name=""/>
@@ -16743,122 +19443,1065 @@
           <a:chExt cx="0" cy="0"/>
         </a:xfrm>
       </p:grpSpPr>
+      <p:sp>
+        <p:nvSpPr>
+          <p:cNvPr id="2" name="TextBox 1"/>
+          <p:cNvSpPr txBox="1"/>
+          <p:nvPr/>
+        </p:nvSpPr>
+        <p:spPr>
+          <a:xfrm>
+            <a:off x="731520" y="500000"/>
+            <a:ext cx="10500000" cy="600000"/>
+          </a:xfrm>
+          <a:prstGeom prst="rect">
+            <a:avLst/>
+          </a:prstGeom>
+          <a:noFill/>
+        </p:spPr>
+        <p:txBody>
+          <a:bodyPr wrap="square">
+            <a:spAutoFit/>
+          </a:bodyPr>
+          <a:lstStyle/>
+          <a:p>
+            <a:pPr algn="ctr"/>
+            <a:r>
+              <a:rPr sz="4000" b="1">
+                <a:solidFill>
+                  <a:srgbClr val="89B4FA"/>
+                </a:solidFill>
+                <a:latin typeface="Segoe UI"/>
+              </a:rPr>
+              <a:t>Why ATOMiK Wins</a:t>
+            </a:r>
+          </a:p>
+        </p:txBody>
+      </p:sp>
+      <p:sp>
+        <p:nvSpPr>
+          <p:cNvPr id="3" name="Rectangle 2"/>
+          <p:cNvSpPr/>
+          <p:nvPr/>
+        </p:nvSpPr>
+        <p:spPr>
+          <a:xfrm>
+            <a:off x="609904" y="1100000"/>
+            <a:ext cx="10972800" cy="25400"/>
+          </a:xfrm>
+          <a:prstGeom prst="rect">
+            <a:avLst/>
+          </a:prstGeom>
+          <a:solidFill>
+            <a:srgbClr val="89B4FA"/>
+          </a:solidFill>
+          <a:ln>
+            <a:noFill/>
+          </a:ln>
+        </p:spPr>
+        <p:style>
+          <a:lnRef idx="1">
+            <a:schemeClr val="accent1"/>
+          </a:lnRef>
+          <a:fillRef idx="3">
+            <a:schemeClr val="accent1"/>
+          </a:fillRef>
+          <a:effectRef idx="2">
+            <a:schemeClr val="accent1"/>
+          </a:effectRef>
+          <a:fontRef idx="minor">
+            <a:schemeClr val="lt1"/>
+          </a:fontRef>
+        </p:style>
+        <p:txBody>
+          <a:bodyPr rtlCol="0" anchor="ctr"/>
+          <a:lstStyle/>
+          <a:p>
+            <a:pPr algn="ctr"/>
+          </a:p>
+        </p:txBody>
+      </p:sp>
+      <p:sp>
+        <p:nvSpPr>
+          <p:cNvPr id="4" name="Rounded Rectangle 3"/>
+          <p:cNvSpPr/>
+          <p:nvPr/>
+        </p:nvSpPr>
+        <p:spPr>
+          <a:xfrm>
+            <a:off x="900000" y="1400000"/>
+            <a:ext cx="3200000" cy="2400000"/>
+          </a:xfrm>
+          <a:prstGeom prst="roundRect">
+            <a:avLst/>
+          </a:prstGeom>
+          <a:solidFill>
+            <a:srgbClr val="1E1E2E"/>
+          </a:solidFill>
+          <a:ln>
+            <a:noFill/>
+          </a:ln>
+        </p:spPr>
+        <p:style>
+          <a:lnRef idx="1">
+            <a:schemeClr val="accent1"/>
+          </a:lnRef>
+          <a:fillRef idx="3">
+            <a:schemeClr val="accent1"/>
+          </a:fillRef>
+          <a:effectRef idx="2">
+            <a:schemeClr val="accent1"/>
+          </a:effectRef>
+          <a:fontRef idx="minor">
+            <a:schemeClr val="lt1"/>
+          </a:fontRef>
+        </p:style>
+        <p:txBody>
+          <a:bodyPr rtlCol="0" anchor="ctr"/>
+          <a:lstStyle/>
+          <a:p>
+            <a:pPr algn="ctr"/>
+          </a:p>
+        </p:txBody>
+      </p:sp>
+      <p:sp>
+        <p:nvSpPr>
+          <p:cNvPr id="5" name="TextBox 4"/>
+          <p:cNvSpPr txBox="1"/>
+          <p:nvPr/>
+        </p:nvSpPr>
+        <p:spPr>
+          <a:xfrm>
+            <a:off x="900000" y="1550000"/>
+            <a:ext cx="3200000" cy="550000"/>
+          </a:xfrm>
+          <a:prstGeom prst="rect">
+            <a:avLst/>
+          </a:prstGeom>
+          <a:noFill/>
+        </p:spPr>
+        <p:txBody>
+          <a:bodyPr wrap="square">
+            <a:spAutoFit/>
+          </a:bodyPr>
+          <a:lstStyle/>
+          <a:p>
+            <a:pPr algn="ctr"/>
+            <a:r>
+              <a:rPr sz="2200" b="1">
+                <a:solidFill>
+                  <a:srgbClr val="A6E3A1"/>
+                </a:solidFill>
+                <a:latin typeface="Segoe UI"/>
+              </a:rPr>
+              <a:t>Mathematically
+Inevitable</a:t>
+            </a:r>
+          </a:p>
+        </p:txBody>
+      </p:sp>
+      <p:sp>
+        <p:nvSpPr>
+          <p:cNvPr id="6" name="Rectangle 5"/>
+          <p:cNvSpPr/>
+          <p:nvPr/>
+        </p:nvSpPr>
+        <p:spPr>
+          <a:xfrm>
+            <a:off x="1300000" y="2100000"/>
+            <a:ext cx="2400000" cy="20000"/>
+          </a:xfrm>
+          <a:prstGeom prst="rect">
+            <a:avLst/>
+          </a:prstGeom>
+          <a:solidFill>
+            <a:srgbClr val="313244"/>
+          </a:solidFill>
+          <a:ln>
+            <a:noFill/>
+          </a:ln>
+        </p:spPr>
+        <p:style>
+          <a:lnRef idx="1">
+            <a:schemeClr val="accent1"/>
+          </a:lnRef>
+          <a:fillRef idx="3">
+            <a:schemeClr val="accent1"/>
+          </a:fillRef>
+          <a:effectRef idx="2">
+            <a:schemeClr val="accent1"/>
+          </a:effectRef>
+          <a:fontRef idx="minor">
+            <a:schemeClr val="lt1"/>
+          </a:fontRef>
+        </p:style>
+        <p:txBody>
+          <a:bodyPr rtlCol="0" anchor="ctr"/>
+          <a:lstStyle/>
+          <a:p>
+            <a:pPr algn="ctr"/>
+          </a:p>
+        </p:txBody>
+      </p:sp>
+      <p:sp>
+        <p:nvSpPr>
+          <p:cNvPr id="7" name="TextBox 6"/>
+          <p:cNvSpPr txBox="1"/>
+          <p:nvPr/>
+        </p:nvSpPr>
+        <p:spPr>
+          <a:xfrm>
+            <a:off x="1100000" y="2200000"/>
+            <a:ext cx="2800000" cy="1000000"/>
+          </a:xfrm>
+          <a:prstGeom prst="rect">
+            <a:avLst/>
+          </a:prstGeom>
+          <a:noFill/>
+        </p:spPr>
+        <p:txBody>
+          <a:bodyPr wrap="square">
+            <a:spAutoFit/>
+          </a:bodyPr>
+          <a:lstStyle/>
+          <a:p>
+            <a:pPr>
+              <a:spcAft>
+                <a:spcPts val="400"/>
+              </a:spcAft>
+            </a:pPr>
+            <a:r>
+              <a:rPr sz="1200">
+                <a:solidFill>
+                  <a:srgbClr val="CDD6F4"/>
+                </a:solidFill>
+                <a:latin typeface="Segoe UI"/>
+              </a:rPr>
+              <a:t>92 Lean4 proofs establish</a:t>
+            </a:r>
+          </a:p>
+          <a:p>
+            <a:pPr>
+              <a:spcAft>
+                <a:spcPts val="400"/>
+              </a:spcAft>
+            </a:pPr>
+            <a:r>
+              <a:rPr sz="1200">
+                <a:solidFill>
+                  <a:srgbClr val="CDD6F4"/>
+                </a:solidFill>
+                <a:latin typeface="Segoe UI"/>
+              </a:rPr>
+              <a:t>that delta-state XOR algebra</a:t>
+            </a:r>
+          </a:p>
+          <a:p>
+            <a:pPr>
+              <a:spcAft>
+                <a:spcPts val="400"/>
+              </a:spcAft>
+            </a:pPr>
+            <a:r>
+              <a:rPr sz="1200">
+                <a:solidFill>
+                  <a:srgbClr val="CDD6F4"/>
+                </a:solidFill>
+                <a:latin typeface="Segoe UI"/>
+              </a:rPr>
+              <a:t>is the optimal structure for</a:t>
+            </a:r>
+          </a:p>
+          <a:p>
+            <a:pPr>
+              <a:spcAft>
+                <a:spcPts val="400"/>
+              </a:spcAft>
+            </a:pPr>
+            <a:r>
+              <a:rPr sz="1200">
+                <a:solidFill>
+                  <a:srgbClr val="CDD6F4"/>
+                </a:solidFill>
+                <a:latin typeface="Segoe UI"/>
+              </a:rPr>
+              <a:t>parallel state accumulation.</a:t>
+            </a:r>
+          </a:p>
+        </p:txBody>
+      </p:sp>
+      <p:sp>
+        <p:nvSpPr>
+          <p:cNvPr id="8" name="TextBox 7"/>
+          <p:cNvSpPr txBox="1"/>
+          <p:nvPr/>
+        </p:nvSpPr>
+        <p:spPr>
+          <a:xfrm>
+            <a:off x="900000" y="3300000"/>
+            <a:ext cx="3200000" cy="350000"/>
+          </a:xfrm>
+          <a:prstGeom prst="rect">
+            <a:avLst/>
+          </a:prstGeom>
+          <a:noFill/>
+        </p:spPr>
+        <p:txBody>
+          <a:bodyPr wrap="square">
+            <a:spAutoFit/>
+          </a:bodyPr>
+          <a:lstStyle/>
+          <a:p>
+            <a:pPr algn="ctr"/>
+            <a:r>
+              <a:rPr sz="1800" b="1">
+                <a:solidFill>
+                  <a:srgbClr val="A6E3A1"/>
+                </a:solidFill>
+                <a:latin typeface="Segoe UI"/>
+              </a:rPr>
+              <a:t>92 proofs, 0 sorry</a:t>
+            </a:r>
+          </a:p>
+        </p:txBody>
+      </p:sp>
+      <p:sp>
+        <p:nvSpPr>
+          <p:cNvPr id="9" name="Rounded Rectangle 8"/>
+          <p:cNvSpPr/>
+          <p:nvPr/>
+        </p:nvSpPr>
+        <p:spPr>
+          <a:xfrm>
+            <a:off x="4500000" y="1400000"/>
+            <a:ext cx="3200000" cy="2400000"/>
+          </a:xfrm>
+          <a:prstGeom prst="roundRect">
+            <a:avLst/>
+          </a:prstGeom>
+          <a:solidFill>
+            <a:srgbClr val="1E1E2E"/>
+          </a:solidFill>
+          <a:ln>
+            <a:noFill/>
+          </a:ln>
+        </p:spPr>
+        <p:style>
+          <a:lnRef idx="1">
+            <a:schemeClr val="accent1"/>
+          </a:lnRef>
+          <a:fillRef idx="3">
+            <a:schemeClr val="accent1"/>
+          </a:fillRef>
+          <a:effectRef idx="2">
+            <a:schemeClr val="accent1"/>
+          </a:effectRef>
+          <a:fontRef idx="minor">
+            <a:schemeClr val="lt1"/>
+          </a:fontRef>
+        </p:style>
+        <p:txBody>
+          <a:bodyPr rtlCol="0" anchor="ctr"/>
+          <a:lstStyle/>
+          <a:p>
+            <a:pPr algn="ctr"/>
+          </a:p>
+        </p:txBody>
+      </p:sp>
+      <p:sp>
+        <p:nvSpPr>
+          <p:cNvPr id="10" name="TextBox 9"/>
+          <p:cNvSpPr txBox="1"/>
+          <p:nvPr/>
+        </p:nvSpPr>
+        <p:spPr>
+          <a:xfrm>
+            <a:off x="4500000" y="1550000"/>
+            <a:ext cx="3200000" cy="550000"/>
+          </a:xfrm>
+          <a:prstGeom prst="rect">
+            <a:avLst/>
+          </a:prstGeom>
+          <a:noFill/>
+        </p:spPr>
+        <p:txBody>
+          <a:bodyPr wrap="square">
+            <a:spAutoFit/>
+          </a:bodyPr>
+          <a:lstStyle/>
+          <a:p>
+            <a:pPr algn="ctr"/>
+            <a:r>
+              <a:rPr sz="2200" b="1">
+                <a:solidFill>
+                  <a:srgbClr val="89B4FA"/>
+                </a:solidFill>
+                <a:latin typeface="Segoe UI"/>
+              </a:rPr>
+              <a:t>Hardware
+Validated</a:t>
+            </a:r>
+          </a:p>
+        </p:txBody>
+      </p:sp>
+      <p:sp>
+        <p:nvSpPr>
+          <p:cNvPr id="11" name="Rectangle 10"/>
+          <p:cNvSpPr/>
+          <p:nvPr/>
+        </p:nvSpPr>
+        <p:spPr>
+          <a:xfrm>
+            <a:off x="4900000" y="2100000"/>
+            <a:ext cx="2400000" cy="20000"/>
+          </a:xfrm>
+          <a:prstGeom prst="rect">
+            <a:avLst/>
+          </a:prstGeom>
+          <a:solidFill>
+            <a:srgbClr val="313244"/>
+          </a:solidFill>
+          <a:ln>
+            <a:noFill/>
+          </a:ln>
+        </p:spPr>
+        <p:style>
+          <a:lnRef idx="1">
+            <a:schemeClr val="accent1"/>
+          </a:lnRef>
+          <a:fillRef idx="3">
+            <a:schemeClr val="accent1"/>
+          </a:fillRef>
+          <a:effectRef idx="2">
+            <a:schemeClr val="accent1"/>
+          </a:effectRef>
+          <a:fontRef idx="minor">
+            <a:schemeClr val="lt1"/>
+          </a:fontRef>
+        </p:style>
+        <p:txBody>
+          <a:bodyPr rtlCol="0" anchor="ctr"/>
+          <a:lstStyle/>
+          <a:p>
+            <a:pPr algn="ctr"/>
+          </a:p>
+        </p:txBody>
+      </p:sp>
+      <p:sp>
+        <p:nvSpPr>
+          <p:cNvPr id="12" name="TextBox 11"/>
+          <p:cNvSpPr txBox="1"/>
+          <p:nvPr/>
+        </p:nvSpPr>
+        <p:spPr>
+          <a:xfrm>
+            <a:off x="4700000" y="2200000"/>
+            <a:ext cx="2800000" cy="1000000"/>
+          </a:xfrm>
+          <a:prstGeom prst="rect">
+            <a:avLst/>
+          </a:prstGeom>
+          <a:noFill/>
+        </p:spPr>
+        <p:txBody>
+          <a:bodyPr wrap="square">
+            <a:spAutoFit/>
+          </a:bodyPr>
+          <a:lstStyle/>
+          <a:p>
+            <a:pPr>
+              <a:spcAft>
+                <a:spcPts val="400"/>
+              </a:spcAft>
+            </a:pPr>
+            <a:r>
+              <a:rPr sz="1200">
+                <a:solidFill>
+                  <a:srgbClr val="CDD6F4"/>
+                </a:solidFill>
+                <a:latin typeface="Segoe UI"/>
+              </a:rPr>
+              <a:t>1,056 Mops/s on a $13.50 FPGA.</a:t>
+            </a:r>
+          </a:p>
+          <a:p>
+            <a:pPr>
+              <a:spcAft>
+                <a:spcPts val="400"/>
+              </a:spcAft>
+            </a:pPr>
+            <a:r>
+              <a:rPr sz="1200">
+                <a:solidFill>
+                  <a:srgbClr val="CDD6F4"/>
+                </a:solidFill>
+                <a:latin typeface="Segoe UI"/>
+              </a:rPr>
+              <a:t>80/80 tests passing. Real silicon.</a:t>
+            </a:r>
+          </a:p>
+          <a:p>
+            <a:pPr>
+              <a:spcAft>
+                <a:spcPts val="400"/>
+              </a:spcAft>
+            </a:pPr>
+            <a:r>
+              <a:rPr sz="1200">
+                <a:solidFill>
+                  <a:srgbClr val="CDD6F4"/>
+                </a:solidFill>
+                <a:latin typeface="Segoe UI"/>
+              </a:rPr>
+              <a:t>95-100% memory traffic</a:t>
+            </a:r>
+          </a:p>
+          <a:p>
+            <a:pPr>
+              <a:spcAft>
+                <a:spcPts val="400"/>
+              </a:spcAft>
+            </a:pPr>
+            <a:r>
+              <a:rPr sz="1200">
+                <a:solidFill>
+                  <a:srgbClr val="CDD6F4"/>
+                </a:solidFill>
+                <a:latin typeface="Segoe UI"/>
+              </a:rPr>
+              <a:t>reduction measured.</a:t>
+            </a:r>
+          </a:p>
+        </p:txBody>
+      </p:sp>
+      <p:sp>
+        <p:nvSpPr>
+          <p:cNvPr id="13" name="TextBox 12"/>
+          <p:cNvSpPr txBox="1"/>
+          <p:nvPr/>
+        </p:nvSpPr>
+        <p:spPr>
+          <a:xfrm>
+            <a:off x="4500000" y="3300000"/>
+            <a:ext cx="3200000" cy="350000"/>
+          </a:xfrm>
+          <a:prstGeom prst="rect">
+            <a:avLst/>
+          </a:prstGeom>
+          <a:noFill/>
+        </p:spPr>
+        <p:txBody>
+          <a:bodyPr wrap="square">
+            <a:spAutoFit/>
+          </a:bodyPr>
+          <a:lstStyle/>
+          <a:p>
+            <a:pPr algn="ctr"/>
+            <a:r>
+              <a:rPr sz="1800" b="1">
+                <a:solidFill>
+                  <a:srgbClr val="89B4FA"/>
+                </a:solidFill>
+                <a:latin typeface="Segoe UI"/>
+              </a:rPr>
+              <a:t>1,056 Mops/s</a:t>
+            </a:r>
+          </a:p>
+        </p:txBody>
+      </p:sp>
+      <p:sp>
+        <p:nvSpPr>
+          <p:cNvPr id="14" name="Rounded Rectangle 13"/>
+          <p:cNvSpPr/>
+          <p:nvPr/>
+        </p:nvSpPr>
+        <p:spPr>
+          <a:xfrm>
+            <a:off x="8100000" y="1400000"/>
+            <a:ext cx="3200000" cy="2400000"/>
+          </a:xfrm>
+          <a:prstGeom prst="roundRect">
+            <a:avLst/>
+          </a:prstGeom>
+          <a:solidFill>
+            <a:srgbClr val="1E1E2E"/>
+          </a:solidFill>
+          <a:ln>
+            <a:noFill/>
+          </a:ln>
+        </p:spPr>
+        <p:style>
+          <a:lnRef idx="1">
+            <a:schemeClr val="accent1"/>
+          </a:lnRef>
+          <a:fillRef idx="3">
+            <a:schemeClr val="accent1"/>
+          </a:fillRef>
+          <a:effectRef idx="2">
+            <a:schemeClr val="accent1"/>
+          </a:effectRef>
+          <a:fontRef idx="minor">
+            <a:schemeClr val="lt1"/>
+          </a:fontRef>
+        </p:style>
+        <p:txBody>
+          <a:bodyPr rtlCol="0" anchor="ctr"/>
+          <a:lstStyle/>
+          <a:p>
+            <a:pPr algn="ctr"/>
+          </a:p>
+        </p:txBody>
+      </p:sp>
+      <p:sp>
+        <p:nvSpPr>
+          <p:cNvPr id="15" name="TextBox 14"/>
+          <p:cNvSpPr txBox="1"/>
+          <p:nvPr/>
+        </p:nvSpPr>
+        <p:spPr>
+          <a:xfrm>
+            <a:off x="8100000" y="1550000"/>
+            <a:ext cx="3200000" cy="550000"/>
+          </a:xfrm>
+          <a:prstGeom prst="rect">
+            <a:avLst/>
+          </a:prstGeom>
+          <a:noFill/>
+        </p:spPr>
+        <p:txBody>
+          <a:bodyPr wrap="square">
+            <a:spAutoFit/>
+          </a:bodyPr>
+          <a:lstStyle/>
+          <a:p>
+            <a:pPr algn="ctr"/>
+            <a:r>
+              <a:rPr sz="2200" b="1">
+                <a:solidFill>
+                  <a:srgbClr val="CBA6F7"/>
+                </a:solidFill>
+                <a:latin typeface="Segoe UI"/>
+              </a:rPr>
+              <a:t>Timing
+Is Right</a:t>
+            </a:r>
+          </a:p>
+        </p:txBody>
+      </p:sp>
+      <p:sp>
+        <p:nvSpPr>
+          <p:cNvPr id="16" name="Rectangle 15"/>
+          <p:cNvSpPr/>
+          <p:nvPr/>
+        </p:nvSpPr>
+        <p:spPr>
+          <a:xfrm>
+            <a:off x="8500000" y="2100000"/>
+            <a:ext cx="2400000" cy="20000"/>
+          </a:xfrm>
+          <a:prstGeom prst="rect">
+            <a:avLst/>
+          </a:prstGeom>
+          <a:solidFill>
+            <a:srgbClr val="313244"/>
+          </a:solidFill>
+          <a:ln>
+            <a:noFill/>
+          </a:ln>
+        </p:spPr>
+        <p:style>
+          <a:lnRef idx="1">
+            <a:schemeClr val="accent1"/>
+          </a:lnRef>
+          <a:fillRef idx="3">
+            <a:schemeClr val="accent1"/>
+          </a:fillRef>
+          <a:effectRef idx="2">
+            <a:schemeClr val="accent1"/>
+          </a:effectRef>
+          <a:fontRef idx="minor">
+            <a:schemeClr val="lt1"/>
+          </a:fontRef>
+        </p:style>
+        <p:txBody>
+          <a:bodyPr rtlCol="0" anchor="ctr"/>
+          <a:lstStyle/>
+          <a:p>
+            <a:pPr algn="ctr"/>
+          </a:p>
+        </p:txBody>
+      </p:sp>
+      <p:sp>
+        <p:nvSpPr>
+          <p:cNvPr id="17" name="TextBox 16"/>
+          <p:cNvSpPr txBox="1"/>
+          <p:nvPr/>
+        </p:nvSpPr>
+        <p:spPr>
+          <a:xfrm>
+            <a:off x="8300000" y="2200000"/>
+            <a:ext cx="2800000" cy="1000000"/>
+          </a:xfrm>
+          <a:prstGeom prst="rect">
+            <a:avLst/>
+          </a:prstGeom>
+          <a:noFill/>
+        </p:spPr>
+        <p:txBody>
+          <a:bodyPr wrap="square">
+            <a:spAutoFit/>
+          </a:bodyPr>
+          <a:lstStyle/>
+          <a:p>
+            <a:pPr>
+              <a:spcAft>
+                <a:spcPts val="400"/>
+              </a:spcAft>
+            </a:pPr>
+            <a:r>
+              <a:rPr sz="1200">
+                <a:solidFill>
+                  <a:srgbClr val="CDD6F4"/>
+                </a:solidFill>
+                <a:latin typeface="Segoe UI"/>
+              </a:rPr>
+              <a:t>AI inference crisis, memory wall,</a:t>
+            </a:r>
+          </a:p>
+          <a:p>
+            <a:pPr>
+              <a:spcAft>
+                <a:spcPts val="400"/>
+              </a:spcAft>
+            </a:pPr>
+            <a:r>
+              <a:rPr sz="1200">
+                <a:solidFill>
+                  <a:srgbClr val="CDD6F4"/>
+                </a:solidFill>
+                <a:latin typeface="Segoe UI"/>
+              </a:rPr>
+              <a:t>edge constraints, HBM cost spiral.</a:t>
+            </a:r>
+          </a:p>
+          <a:p>
+            <a:pPr>
+              <a:spcAft>
+                <a:spcPts val="400"/>
+              </a:spcAft>
+            </a:pPr>
+            <a:r>
+              <a:rPr sz="1200">
+                <a:solidFill>
+                  <a:srgbClr val="CDD6F4"/>
+                </a:solidFill>
+                <a:latin typeface="Segoe UI"/>
+              </a:rPr>
+              <a:t>$280B VC + $300B+ hyperscaler</a:t>
+            </a:r>
+          </a:p>
+          <a:p>
+            <a:pPr>
+              <a:spcAft>
+                <a:spcPts val="400"/>
+              </a:spcAft>
+            </a:pPr>
+            <a:r>
+              <a:rPr sz="1200">
+                <a:solidFill>
+                  <a:srgbClr val="CDD6F4"/>
+                </a:solidFill>
+                <a:latin typeface="Segoe UI"/>
+              </a:rPr>
+              <a:t>capex seeking solutions.</a:t>
+            </a:r>
+          </a:p>
+        </p:txBody>
+      </p:sp>
+      <p:sp>
+        <p:nvSpPr>
+          <p:cNvPr id="18" name="TextBox 17"/>
+          <p:cNvSpPr txBox="1"/>
+          <p:nvPr/>
+        </p:nvSpPr>
+        <p:spPr>
+          <a:xfrm>
+            <a:off x="8100000" y="3300000"/>
+            <a:ext cx="3200000" cy="350000"/>
+          </a:xfrm>
+          <a:prstGeom prst="rect">
+            <a:avLst/>
+          </a:prstGeom>
+          <a:noFill/>
+        </p:spPr>
+        <p:txBody>
+          <a:bodyPr wrap="square">
+            <a:spAutoFit/>
+          </a:bodyPr>
+          <a:lstStyle/>
+          <a:p>
+            <a:pPr algn="ctr"/>
+            <a:r>
+              <a:rPr sz="1800" b="1">
+                <a:solidFill>
+                  <a:srgbClr val="CBA6F7"/>
+                </a:solidFill>
+                <a:latin typeface="Segoe UI"/>
+              </a:rPr>
+              <a:t>$300B+ AI capex</a:t>
+            </a:r>
+          </a:p>
+        </p:txBody>
+      </p:sp>
+      <p:sp>
+        <p:nvSpPr>
+          <p:cNvPr id="19" name="TextBox 18"/>
+          <p:cNvSpPr txBox="1"/>
+          <p:nvPr/>
+        </p:nvSpPr>
+        <p:spPr>
+          <a:xfrm>
+            <a:off x="731520" y="4200000"/>
+            <a:ext cx="10500000" cy="400000"/>
+          </a:xfrm>
+          <a:prstGeom prst="rect">
+            <a:avLst/>
+          </a:prstGeom>
+          <a:noFill/>
+        </p:spPr>
+        <p:txBody>
+          <a:bodyPr wrap="square">
+            <a:spAutoFit/>
+          </a:bodyPr>
+          <a:lstStyle/>
+          <a:p>
+            <a:pPr algn="ctr"/>
+            <a:r>
+              <a:rPr sz="2000" b="1">
+                <a:solidFill>
+                  <a:srgbClr val="89B4FA"/>
+                </a:solidFill>
+                <a:latin typeface="Segoe UI"/>
+              </a:rPr>
+              <a:t>Invitation to Investors</a:t>
+            </a:r>
+          </a:p>
+        </p:txBody>
+      </p:sp>
+      <p:sp>
+        <p:nvSpPr>
+          <p:cNvPr id="20" name="TextBox 19"/>
+          <p:cNvSpPr txBox="1"/>
+          <p:nvPr/>
+        </p:nvSpPr>
+        <p:spPr>
+          <a:xfrm>
+            <a:off x="2000000" y="4600000"/>
+            <a:ext cx="8000000" cy="280000"/>
+          </a:xfrm>
+          <a:prstGeom prst="rect">
+            <a:avLst/>
+          </a:prstGeom>
+          <a:noFill/>
+        </p:spPr>
+        <p:txBody>
+          <a:bodyPr wrap="square">
+            <a:spAutoFit/>
+          </a:bodyPr>
+          <a:lstStyle/>
+          <a:p>
+            <a:pPr algn="ctr"/>
+            <a:r>
+              <a:rPr sz="1400" b="0">
+                <a:solidFill>
+                  <a:srgbClr val="CDD6F4"/>
+                </a:solidFill>
+                <a:latin typeface="Segoe UI"/>
+              </a:rPr>
+              <a:t>✓  Review the proofs — Every theorem is in the repository, machine-verified</a:t>
+            </a:r>
+          </a:p>
+        </p:txBody>
+      </p:sp>
+      <p:sp>
+        <p:nvSpPr>
+          <p:cNvPr id="21" name="TextBox 20"/>
+          <p:cNvSpPr txBox="1"/>
+          <p:nvPr/>
+        </p:nvSpPr>
+        <p:spPr>
+          <a:xfrm>
+            <a:off x="2000000" y="4920000"/>
+            <a:ext cx="8000000" cy="280000"/>
+          </a:xfrm>
+          <a:prstGeom prst="rect">
+            <a:avLst/>
+          </a:prstGeom>
+          <a:noFill/>
+        </p:spPr>
+        <p:txBody>
+          <a:bodyPr wrap="square">
+            <a:spAutoFit/>
+          </a:bodyPr>
+          <a:lstStyle/>
+          <a:p>
+            <a:pPr algn="ctr"/>
+            <a:r>
+              <a:rPr sz="1400" b="0">
+                <a:solidFill>
+                  <a:srgbClr val="CDD6F4"/>
+                </a:solidFill>
+                <a:latin typeface="Segoe UI"/>
+              </a:rPr>
+              <a:t>✓  Run the hardware — The demo runs on $13.50 boards — we’ll ship you one</a:t>
+            </a:r>
+          </a:p>
+        </p:txBody>
+      </p:sp>
+      <p:sp>
+        <p:nvSpPr>
+          <p:cNvPr id="22" name="TextBox 21"/>
+          <p:cNvSpPr txBox="1"/>
+          <p:nvPr/>
+        </p:nvSpPr>
+        <p:spPr>
+          <a:xfrm>
+            <a:off x="2000000" y="5240000"/>
+            <a:ext cx="8000000" cy="280000"/>
+          </a:xfrm>
+          <a:prstGeom prst="rect">
+            <a:avLst/>
+          </a:prstGeom>
+          <a:noFill/>
+        </p:spPr>
+        <p:txBody>
+          <a:bodyPr wrap="square">
+            <a:spAutoFit/>
+          </a:bodyPr>
+          <a:lstStyle/>
+          <a:p>
+            <a:pPr algn="ctr"/>
+            <a:r>
+              <a:rPr sz="1400" b="0">
+                <a:solidFill>
+                  <a:srgbClr val="CDD6F4"/>
+                </a:solidFill>
+                <a:latin typeface="Segoe UI"/>
+              </a:rPr>
+              <a:t>✓  Examine the data — Every metric traces to a source file with methodology</a:t>
+            </a:r>
+          </a:p>
+        </p:txBody>
+      </p:sp>
+      <p:sp>
+        <p:nvSpPr>
+          <p:cNvPr id="23" name="TextBox 22"/>
+          <p:cNvSpPr txBox="1"/>
+          <p:nvPr/>
+        </p:nvSpPr>
+        <p:spPr>
+          <a:xfrm>
+            <a:off x="731520" y="5700000"/>
+            <a:ext cx="10500000" cy="400000"/>
+          </a:xfrm>
+          <a:prstGeom prst="rect">
+            <a:avLst/>
+          </a:prstGeom>
+          <a:noFill/>
+        </p:spPr>
+        <p:txBody>
+          <a:bodyPr wrap="square">
+            <a:spAutoFit/>
+          </a:bodyPr>
+          <a:lstStyle/>
+          <a:p>
+            <a:pPr algn="ctr"/>
+            <a:r>
+              <a:rPr sz="2200" b="1">
+                <a:solidFill>
+                  <a:srgbClr val="89B4FA"/>
+                </a:solidFill>
+                <a:latin typeface="Segoe UI"/>
+              </a:rPr>
+              <a:t>ATOMiK — Delta-State Computing in Silicon</a:t>
+            </a:r>
+          </a:p>
+        </p:txBody>
+      </p:sp>
+      <p:sp>
+        <p:nvSpPr>
+          <p:cNvPr id="24" name="TextBox 23"/>
+          <p:cNvSpPr txBox="1"/>
+          <p:nvPr/>
+        </p:nvSpPr>
+        <p:spPr>
+          <a:xfrm>
+            <a:off x="731520" y="6050000"/>
+            <a:ext cx="10500000" cy="300000"/>
+          </a:xfrm>
+          <a:prstGeom prst="rect">
+            <a:avLst/>
+          </a:prstGeom>
+          <a:noFill/>
+        </p:spPr>
+        <p:txBody>
+          <a:bodyPr wrap="square">
+            <a:spAutoFit/>
+          </a:bodyPr>
+          <a:lstStyle/>
+          <a:p>
+            <a:pPr algn="ctr"/>
+            <a:r>
+              <a:rPr sz="1400" b="0">
+                <a:solidFill>
+                  <a:srgbClr val="7F849C"/>
+                </a:solidFill>
+                <a:latin typeface="Segoe UI"/>
+              </a:rPr>
+              <a:t>Patent Pending  •  matt@atomik.dev</a:t>
+            </a:r>
+          </a:p>
+        </p:txBody>
+      </p:sp>
+      <p:sp>
+        <p:nvSpPr>
+          <p:cNvPr id="25" name="TextBox 24"/>
+          <p:cNvSpPr txBox="1"/>
+          <p:nvPr/>
+        </p:nvSpPr>
+        <p:spPr>
+          <a:xfrm>
+            <a:off x="11277295" y="6492240"/>
+            <a:ext cx="700000" cy="300000"/>
+          </a:xfrm>
+          <a:prstGeom prst="rect">
+            <a:avLst/>
+          </a:prstGeom>
+          <a:noFill/>
+        </p:spPr>
+        <p:txBody>
+          <a:bodyPr wrap="square">
+            <a:spAutoFit/>
+          </a:bodyPr>
+          <a:lstStyle/>
+          <a:p>
+            <a:pPr algn="r"/>
+            <a:r>
+              <a:rPr sz="1000" b="0">
+                <a:solidFill>
+                  <a:srgbClr val="7F849C"/>
+                </a:solidFill>
+                <a:latin typeface="Segoe UI"/>
+              </a:rPr>
+              <a:t>15/15</a:t>
+            </a:r>
+          </a:p>
+        </p:txBody>
+      </p:sp>
     </p:spTree>
     <p:extLst>
       <p:ext uri="{BB962C8B-B14F-4D97-AF65-F5344CB8AC3E}">
         <p14:creationId xmlns:p14="http://schemas.microsoft.com/office/powerpoint/2010/main" val="3858414289"/>
-      </p:ext>
-    </p:extLst>
-  </p:cSld>
-  <p:clrMapOvr>
-    <a:masterClrMapping/>
-  </p:clrMapOvr>
-</p:sld>
-</file>
-
-<file path=ppt/slides/slide16.xml><?xml version="1.0" encoding="utf-8"?>
-<p:sld xmlns:a="http://schemas.openxmlformats.org/drawingml/2006/main" xmlns:r="http://schemas.openxmlformats.org/officeDocument/2006/relationships" xmlns:p="http://schemas.openxmlformats.org/presentationml/2006/main">
-  <p:cSld>
-    <p:spTree>
-      <p:nvGrpSpPr>
-        <p:cNvPr id="1" name=""/>
-        <p:cNvGrpSpPr/>
-        <p:nvPr/>
-      </p:nvGrpSpPr>
-      <p:grpSpPr>
-        <a:xfrm>
-          <a:off x="0" y="0"/>
-          <a:ext cx="0" cy="0"/>
-          <a:chOff x="0" y="0"/>
-          <a:chExt cx="0" cy="0"/>
-        </a:xfrm>
-      </p:grpSpPr>
-      <p:sp>
-        <p:nvSpPr>
-          <p:cNvPr id="2" name="TextBox 1">
-            <a:extLst>
-              <a:ext uri="{FF2B5EF4-FFF2-40B4-BE49-F238E27FC236}">
-                <a16:creationId xmlns:a16="http://schemas.microsoft.com/office/drawing/2014/main" id="{FC159BB2-F34F-47FA-5728-F93DF1C297F0}"/>
-              </a:ext>
-            </a:extLst>
-          </p:cNvPr>
-          <p:cNvSpPr txBox="1"/>
-          <p:nvPr/>
-        </p:nvSpPr>
-        <p:spPr>
-          <a:xfrm>
-            <a:off x="2495124" y="2551837"/>
-            <a:ext cx="7872989" cy="1754326"/>
-          </a:xfrm>
-          <a:prstGeom prst="rect">
-            <a:avLst/>
-          </a:prstGeom>
-          <a:noFill/>
-        </p:spPr>
-        <p:txBody>
-          <a:bodyPr wrap="none" rtlCol="0">
-            <a:spAutoFit/>
-          </a:bodyPr>
-          <a:lstStyle/>
-          <a:p>
-            <a:r>
-              <a:rPr lang="en-US" b="1" dirty="0"/>
-              <a:t>Keep it Simple:</a:t>
-            </a:r>
-            <a:r>
-              <a:rPr lang="en-US" dirty="0"/>
-              <a:t> Focus on clarity, not complex designs.</a:t>
-            </a:r>
-          </a:p>
-          <a:p>
-            <a:r>
-              <a:rPr lang="en-US" b="1" dirty="0"/>
-              <a:t>Tell a Story:</a:t>
-            </a:r>
-            <a:r>
-              <a:rPr lang="en-US" dirty="0"/>
-              <a:t> Structure it like a, movie, trailer—hook, struggle, solution, success.</a:t>
-            </a:r>
-          </a:p>
-          <a:p>
-            <a:r>
-              <a:rPr lang="en-US" b="1" dirty="0"/>
-              <a:t>Show, Don't Just Tell:</a:t>
-            </a:r>
-            <a:r>
-              <a:rPr lang="en-US" dirty="0"/>
-              <a:t> Use visuals and data, not just text.</a:t>
-            </a:r>
-          </a:p>
-          <a:p>
-            <a:r>
-              <a:rPr lang="en-US" b="1" dirty="0"/>
-              <a:t>Why Now:</a:t>
-            </a:r>
-            <a:r>
-              <a:rPr lang="en-US" dirty="0"/>
-              <a:t> Justify why this is the perfect time for your solution.</a:t>
-            </a:r>
-          </a:p>
-          <a:p>
-            <a:r>
-              <a:rPr lang="en-US" b="1" dirty="0"/>
-              <a:t>Know Your Numbers:</a:t>
-            </a:r>
-            <a:r>
-              <a:rPr lang="en-US" dirty="0"/>
-              <a:t> Be ready to discuss the assumptions behind your financials. </a:t>
-            </a:r>
-          </a:p>
-          <a:p>
-            <a:endParaRPr lang="en-US" dirty="0"/>
-          </a:p>
-        </p:txBody>
-      </p:sp>
-    </p:spTree>
-    <p:extLst>
-      <p:ext uri="{BB962C8B-B14F-4D97-AF65-F5344CB8AC3E}">
-        <p14:creationId xmlns:p14="http://schemas.microsoft.com/office/powerpoint/2010/main" val="398000268"/>
       </p:ext>
     </p:extLst>
   </p:cSld>
@@ -17847,7 +21490,7 @@
                 </a:solidFill>
                 <a:latin typeface="Segoe UI"/>
               </a:rPr>
-              <a:t>2/10</a:t>
+              <a:t>2/15</a:t>
             </a:r>
           </a:p>
         </p:txBody>
@@ -17863,6 +21506,14 @@
 <file path=ppt/slides/slide3.xml><?xml version="1.0" encoding="utf-8"?>
 <p:sld xmlns:a="http://schemas.openxmlformats.org/drawingml/2006/main" xmlns:r="http://schemas.openxmlformats.org/officeDocument/2006/relationships" xmlns:p="http://schemas.openxmlformats.org/presentationml/2006/main">
   <p:cSld>
+    <p:bg>
+      <p:bgPr>
+        <a:solidFill>
+          <a:srgbClr val="13131A"/>
+        </a:solidFill>
+        <a:effectLst/>
+      </p:bgPr>
+    </p:bg>
     <p:spTree>
       <p:nvGrpSpPr>
         <p:cNvPr id="1" name=""/>
@@ -17877,6 +21528,1293 @@
           <a:chExt cx="0" cy="0"/>
         </a:xfrm>
       </p:grpSpPr>
+      <p:sp>
+        <p:nvSpPr>
+          <p:cNvPr id="2" name="TextBox 1"/>
+          <p:cNvSpPr txBox="1"/>
+          <p:nvPr/>
+        </p:nvSpPr>
+        <p:spPr>
+          <a:xfrm>
+            <a:off x="731520" y="365760"/>
+            <a:ext cx="10500000" cy="600000"/>
+          </a:xfrm>
+          <a:prstGeom prst="rect">
+            <a:avLst/>
+          </a:prstGeom>
+          <a:noFill/>
+        </p:spPr>
+        <p:txBody>
+          <a:bodyPr wrap="square">
+            <a:spAutoFit/>
+          </a:bodyPr>
+          <a:lstStyle/>
+          <a:p>
+            <a:pPr algn="l"/>
+            <a:r>
+              <a:rPr sz="3600" b="1">
+                <a:solidFill>
+                  <a:srgbClr val="89B4FA"/>
+                </a:solidFill>
+                <a:latin typeface="Segoe UI"/>
+              </a:rPr>
+              <a:t>Beyond the Memory Wall</a:t>
+            </a:r>
+          </a:p>
+        </p:txBody>
+      </p:sp>
+      <p:sp>
+        <p:nvSpPr>
+          <p:cNvPr id="3" name="TextBox 2"/>
+          <p:cNvSpPr txBox="1"/>
+          <p:nvPr/>
+        </p:nvSpPr>
+        <p:spPr>
+          <a:xfrm>
+            <a:off x="731520" y="885475"/>
+            <a:ext cx="10500000" cy="400000"/>
+          </a:xfrm>
+          <a:prstGeom prst="rect">
+            <a:avLst/>
+          </a:prstGeom>
+          <a:noFill/>
+        </p:spPr>
+        <p:txBody>
+          <a:bodyPr wrap="square">
+            <a:spAutoFit/>
+          </a:bodyPr>
+          <a:lstStyle/>
+          <a:p>
+            <a:pPr algn="l"/>
+            <a:r>
+              <a:rPr sz="1600" b="0">
+                <a:solidFill>
+                  <a:srgbClr val="CDD6F4"/>
+                </a:solidFill>
+                <a:latin typeface="Segoe UI"/>
+              </a:rPr>
+              <a:t>Three compounding problems that delta-state algebra solves simultaneously.</a:t>
+            </a:r>
+          </a:p>
+        </p:txBody>
+      </p:sp>
+      <p:sp>
+        <p:nvSpPr>
+          <p:cNvPr id="4" name="Rectangle 3"/>
+          <p:cNvSpPr/>
+          <p:nvPr/>
+        </p:nvSpPr>
+        <p:spPr>
+          <a:xfrm>
+            <a:off x="609904" y="1280160"/>
+            <a:ext cx="10972800" cy="25400"/>
+          </a:xfrm>
+          <a:prstGeom prst="rect">
+            <a:avLst/>
+          </a:prstGeom>
+          <a:solidFill>
+            <a:srgbClr val="89B4FA"/>
+          </a:solidFill>
+          <a:ln>
+            <a:noFill/>
+          </a:ln>
+        </p:spPr>
+        <p:style>
+          <a:lnRef idx="1">
+            <a:schemeClr val="accent1"/>
+          </a:lnRef>
+          <a:fillRef idx="3">
+            <a:schemeClr val="accent1"/>
+          </a:fillRef>
+          <a:effectRef idx="2">
+            <a:schemeClr val="accent1"/>
+          </a:effectRef>
+          <a:fontRef idx="minor">
+            <a:schemeClr val="lt1"/>
+          </a:fontRef>
+        </p:style>
+        <p:txBody>
+          <a:bodyPr rtlCol="0" anchor="ctr"/>
+          <a:lstStyle/>
+          <a:p>
+            <a:pPr algn="ctr"/>
+          </a:p>
+        </p:txBody>
+      </p:sp>
+      <p:sp>
+        <p:nvSpPr>
+          <p:cNvPr id="5" name="Rounded Rectangle 4"/>
+          <p:cNvSpPr/>
+          <p:nvPr/>
+        </p:nvSpPr>
+        <p:spPr>
+          <a:xfrm>
+            <a:off x="731520" y="1500000"/>
+            <a:ext cx="3400000" cy="3800000"/>
+          </a:xfrm>
+          <a:prstGeom prst="roundRect">
+            <a:avLst/>
+          </a:prstGeom>
+          <a:solidFill>
+            <a:srgbClr val="1E1E2E"/>
+          </a:solidFill>
+          <a:ln>
+            <a:noFill/>
+          </a:ln>
+        </p:spPr>
+        <p:style>
+          <a:lnRef idx="1">
+            <a:schemeClr val="accent1"/>
+          </a:lnRef>
+          <a:fillRef idx="3">
+            <a:schemeClr val="accent1"/>
+          </a:fillRef>
+          <a:effectRef idx="2">
+            <a:schemeClr val="accent1"/>
+          </a:effectRef>
+          <a:fontRef idx="minor">
+            <a:schemeClr val="lt1"/>
+          </a:fontRef>
+        </p:style>
+        <p:txBody>
+          <a:bodyPr rtlCol="0" anchor="ctr"/>
+          <a:lstStyle/>
+          <a:p>
+            <a:pPr algn="ctr"/>
+          </a:p>
+        </p:txBody>
+      </p:sp>
+      <p:sp>
+        <p:nvSpPr>
+          <p:cNvPr id="6" name="TextBox 5"/>
+          <p:cNvSpPr txBox="1"/>
+          <p:nvPr/>
+        </p:nvSpPr>
+        <p:spPr>
+          <a:xfrm>
+            <a:off x="881520" y="1650000"/>
+            <a:ext cx="3100000" cy="400000"/>
+          </a:xfrm>
+          <a:prstGeom prst="rect">
+            <a:avLst/>
+          </a:prstGeom>
+          <a:noFill/>
+        </p:spPr>
+        <p:txBody>
+          <a:bodyPr wrap="square">
+            <a:spAutoFit/>
+          </a:bodyPr>
+          <a:lstStyle/>
+          <a:p>
+            <a:pPr algn="ctr"/>
+            <a:r>
+              <a:rPr sz="2200" b="1">
+                <a:solidFill>
+                  <a:srgbClr val="F38BA8"/>
+                </a:solidFill>
+                <a:latin typeface="Segoe UI"/>
+              </a:rPr>
+              <a:t>Lock Contention</a:t>
+            </a:r>
+          </a:p>
+        </p:txBody>
+      </p:sp>
+      <p:sp>
+        <p:nvSpPr>
+          <p:cNvPr id="7" name="TextBox 6"/>
+          <p:cNvSpPr txBox="1"/>
+          <p:nvPr/>
+        </p:nvSpPr>
+        <p:spPr>
+          <a:xfrm>
+            <a:off x="881520" y="2050000"/>
+            <a:ext cx="3100000" cy="1200000"/>
+          </a:xfrm>
+          <a:prstGeom prst="rect">
+            <a:avLst/>
+          </a:prstGeom>
+          <a:noFill/>
+        </p:spPr>
+        <p:txBody>
+          <a:bodyPr wrap="square">
+            <a:spAutoFit/>
+          </a:bodyPr>
+          <a:lstStyle/>
+          <a:p>
+            <a:pPr>
+              <a:spcAft>
+                <a:spcPts val="400"/>
+              </a:spcAft>
+            </a:pPr>
+            <a:r>
+              <a:rPr sz="1300">
+                <a:solidFill>
+                  <a:srgbClr val="CDD6F4"/>
+                </a:solidFill>
+                <a:latin typeface="Segoe UI"/>
+              </a:rPr>
+              <a:t>Traditional mutable state requires</a:t>
+            </a:r>
+          </a:p>
+          <a:p>
+            <a:pPr>
+              <a:spcAft>
+                <a:spcPts val="400"/>
+              </a:spcAft>
+            </a:pPr>
+            <a:r>
+              <a:rPr sz="1300">
+                <a:solidFill>
+                  <a:srgbClr val="CDD6F4"/>
+                </a:solidFill>
+                <a:latin typeface="Segoe UI"/>
+              </a:rPr>
+              <a:t>locks for concurrent access.</a:t>
+            </a:r>
+          </a:p>
+          <a:p>
+            <a:pPr>
+              <a:spcAft>
+                <a:spcPts val="400"/>
+              </a:spcAft>
+            </a:pPr>
+            <a:r>
+              <a:rPr sz="1300">
+                <a:solidFill>
+                  <a:srgbClr val="CDD6F4"/>
+                </a:solidFill>
+                <a:latin typeface="Segoe UI"/>
+              </a:rPr>
+              <a:t>Locks serialize execution,</a:t>
+            </a:r>
+          </a:p>
+          <a:p>
+            <a:pPr>
+              <a:spcAft>
+                <a:spcPts val="400"/>
+              </a:spcAft>
+            </a:pPr>
+            <a:r>
+              <a:rPr sz="1300">
+                <a:solidFill>
+                  <a:srgbClr val="CDD6F4"/>
+                </a:solidFill>
+                <a:latin typeface="Segoe UI"/>
+              </a:rPr>
+              <a:t>destroying parallelism.</a:t>
+            </a:r>
+          </a:p>
+        </p:txBody>
+      </p:sp>
+      <p:sp>
+        <p:nvSpPr>
+          <p:cNvPr id="8" name="Rectangle 7"/>
+          <p:cNvSpPr/>
+          <p:nvPr/>
+        </p:nvSpPr>
+        <p:spPr>
+          <a:xfrm>
+            <a:off x="1031520" y="3300000"/>
+            <a:ext cx="2800000" cy="20000"/>
+          </a:xfrm>
+          <a:prstGeom prst="rect">
+            <a:avLst/>
+          </a:prstGeom>
+          <a:solidFill>
+            <a:srgbClr val="313244"/>
+          </a:solidFill>
+          <a:ln>
+            <a:noFill/>
+          </a:ln>
+        </p:spPr>
+        <p:style>
+          <a:lnRef idx="1">
+            <a:schemeClr val="accent1"/>
+          </a:lnRef>
+          <a:fillRef idx="3">
+            <a:schemeClr val="accent1"/>
+          </a:fillRef>
+          <a:effectRef idx="2">
+            <a:schemeClr val="accent1"/>
+          </a:effectRef>
+          <a:fontRef idx="minor">
+            <a:schemeClr val="lt1"/>
+          </a:fontRef>
+        </p:style>
+        <p:txBody>
+          <a:bodyPr rtlCol="0" anchor="ctr"/>
+          <a:lstStyle/>
+          <a:p>
+            <a:pPr algn="ctr"/>
+          </a:p>
+        </p:txBody>
+      </p:sp>
+      <p:sp>
+        <p:nvSpPr>
+          <p:cNvPr id="9" name="TextBox 8"/>
+          <p:cNvSpPr txBox="1"/>
+          <p:nvPr/>
+        </p:nvSpPr>
+        <p:spPr>
+          <a:xfrm>
+            <a:off x="881520" y="3400000"/>
+            <a:ext cx="3100000" cy="300000"/>
+          </a:xfrm>
+          <a:prstGeom prst="rect">
+            <a:avLst/>
+          </a:prstGeom>
+          <a:noFill/>
+        </p:spPr>
+        <p:txBody>
+          <a:bodyPr wrap="square">
+            <a:spAutoFit/>
+          </a:bodyPr>
+          <a:lstStyle/>
+          <a:p>
+            <a:pPr algn="ctr"/>
+            <a:r>
+              <a:rPr sz="1200" b="1">
+                <a:solidFill>
+                  <a:srgbClr val="A6E3A1"/>
+                </a:solidFill>
+                <a:latin typeface="Segoe UI"/>
+              </a:rPr>
+              <a:t>ATOMiK Answer:</a:t>
+            </a:r>
+          </a:p>
+        </p:txBody>
+      </p:sp>
+      <p:sp>
+        <p:nvSpPr>
+          <p:cNvPr id="10" name="TextBox 9"/>
+          <p:cNvSpPr txBox="1"/>
+          <p:nvPr/>
+        </p:nvSpPr>
+        <p:spPr>
+          <a:xfrm>
+            <a:off x="881520" y="3650000"/>
+            <a:ext cx="3100000" cy="300000"/>
+          </a:xfrm>
+          <a:prstGeom prst="rect">
+            <a:avLst/>
+          </a:prstGeom>
+          <a:noFill/>
+        </p:spPr>
+        <p:txBody>
+          <a:bodyPr wrap="square">
+            <a:spAutoFit/>
+          </a:bodyPr>
+          <a:lstStyle/>
+          <a:p>
+            <a:pPr algn="ctr"/>
+            <a:r>
+              <a:rPr sz="1500" b="1">
+                <a:solidFill>
+                  <a:srgbClr val="89B4FA"/>
+                </a:solidFill>
+                <a:latin typeface="Segoe UI"/>
+              </a:rPr>
+              <a:t>XOR commutativity</a:t>
+            </a:r>
+          </a:p>
+        </p:txBody>
+      </p:sp>
+      <p:sp>
+        <p:nvSpPr>
+          <p:cNvPr id="11" name="TextBox 10"/>
+          <p:cNvSpPr txBox="1"/>
+          <p:nvPr/>
+        </p:nvSpPr>
+        <p:spPr>
+          <a:xfrm>
+            <a:off x="881520" y="3950000"/>
+            <a:ext cx="3100000" cy="300000"/>
+          </a:xfrm>
+          <a:prstGeom prst="rect">
+            <a:avLst/>
+          </a:prstGeom>
+          <a:noFill/>
+        </p:spPr>
+        <p:txBody>
+          <a:bodyPr wrap="square">
+            <a:spAutoFit/>
+          </a:bodyPr>
+          <a:lstStyle/>
+          <a:p>
+            <a:pPr algn="ctr"/>
+            <a:r>
+              <a:rPr sz="1800" b="1">
+                <a:solidFill>
+                  <a:srgbClr val="A6E3A1"/>
+                </a:solidFill>
+                <a:latin typeface="Segoe UI"/>
+              </a:rPr>
+              <a:t>δ₁ ⊕ δ₂ = δ₂ ⊕ δ₁</a:t>
+            </a:r>
+          </a:p>
+        </p:txBody>
+      </p:sp>
+      <p:sp>
+        <p:nvSpPr>
+          <p:cNvPr id="12" name="TextBox 11"/>
+          <p:cNvSpPr txBox="1"/>
+          <p:nvPr/>
+        </p:nvSpPr>
+        <p:spPr>
+          <a:xfrm>
+            <a:off x="881520" y="4350000"/>
+            <a:ext cx="3100000" cy="600000"/>
+          </a:xfrm>
+          <a:prstGeom prst="rect">
+            <a:avLst/>
+          </a:prstGeom>
+          <a:noFill/>
+        </p:spPr>
+        <p:txBody>
+          <a:bodyPr wrap="square">
+            <a:spAutoFit/>
+          </a:bodyPr>
+          <a:lstStyle/>
+          <a:p>
+            <a:pPr>
+              <a:spcAft>
+                <a:spcPts val="400"/>
+              </a:spcAft>
+            </a:pPr>
+            <a:r>
+              <a:rPr sz="1200">
+                <a:solidFill>
+                  <a:srgbClr val="7F849C"/>
+                </a:solidFill>
+                <a:latin typeface="Segoe UI"/>
+              </a:rPr>
+              <a:t>Order is irrelevant.</a:t>
+            </a:r>
+          </a:p>
+          <a:p>
+            <a:pPr>
+              <a:spcAft>
+                <a:spcPts val="400"/>
+              </a:spcAft>
+            </a:pPr>
+            <a:r>
+              <a:rPr sz="1200">
+                <a:solidFill>
+                  <a:srgbClr val="7F849C"/>
+                </a:solidFill>
+                <a:latin typeface="Segoe UI"/>
+              </a:rPr>
+              <a:t>No locks needed.</a:t>
+            </a:r>
+          </a:p>
+        </p:txBody>
+      </p:sp>
+      <p:sp>
+        <p:nvSpPr>
+          <p:cNvPr id="13" name="Rounded Rectangle 12"/>
+          <p:cNvSpPr/>
+          <p:nvPr/>
+        </p:nvSpPr>
+        <p:spPr>
+          <a:xfrm>
+            <a:off x="4431520" y="1500000"/>
+            <a:ext cx="3400000" cy="3800000"/>
+          </a:xfrm>
+          <a:prstGeom prst="roundRect">
+            <a:avLst/>
+          </a:prstGeom>
+          <a:solidFill>
+            <a:srgbClr val="1E1E2E"/>
+          </a:solidFill>
+          <a:ln>
+            <a:noFill/>
+          </a:ln>
+        </p:spPr>
+        <p:style>
+          <a:lnRef idx="1">
+            <a:schemeClr val="accent1"/>
+          </a:lnRef>
+          <a:fillRef idx="3">
+            <a:schemeClr val="accent1"/>
+          </a:fillRef>
+          <a:effectRef idx="2">
+            <a:schemeClr val="accent1"/>
+          </a:effectRef>
+          <a:fontRef idx="minor">
+            <a:schemeClr val="lt1"/>
+          </a:fontRef>
+        </p:style>
+        <p:txBody>
+          <a:bodyPr rtlCol="0" anchor="ctr"/>
+          <a:lstStyle/>
+          <a:p>
+            <a:pPr algn="ctr"/>
+          </a:p>
+        </p:txBody>
+      </p:sp>
+      <p:sp>
+        <p:nvSpPr>
+          <p:cNvPr id="14" name="TextBox 13"/>
+          <p:cNvSpPr txBox="1"/>
+          <p:nvPr/>
+        </p:nvSpPr>
+        <p:spPr>
+          <a:xfrm>
+            <a:off x="4581520" y="1650000"/>
+            <a:ext cx="3100000" cy="400000"/>
+          </a:xfrm>
+          <a:prstGeom prst="rect">
+            <a:avLst/>
+          </a:prstGeom>
+          <a:noFill/>
+        </p:spPr>
+        <p:txBody>
+          <a:bodyPr wrap="square">
+            <a:spAutoFit/>
+          </a:bodyPr>
+          <a:lstStyle/>
+          <a:p>
+            <a:pPr algn="ctr"/>
+            <a:r>
+              <a:rPr sz="2200" b="1">
+                <a:solidFill>
+                  <a:srgbClr val="F9E2AF"/>
+                </a:solidFill>
+                <a:latin typeface="Segoe UI"/>
+              </a:rPr>
+              <a:t>No Native Undo</a:t>
+            </a:r>
+          </a:p>
+        </p:txBody>
+      </p:sp>
+      <p:sp>
+        <p:nvSpPr>
+          <p:cNvPr id="15" name="TextBox 14"/>
+          <p:cNvSpPr txBox="1"/>
+          <p:nvPr/>
+        </p:nvSpPr>
+        <p:spPr>
+          <a:xfrm>
+            <a:off x="4581520" y="2050000"/>
+            <a:ext cx="3100000" cy="1200000"/>
+          </a:xfrm>
+          <a:prstGeom prst="rect">
+            <a:avLst/>
+          </a:prstGeom>
+          <a:noFill/>
+        </p:spPr>
+        <p:txBody>
+          <a:bodyPr wrap="square">
+            <a:spAutoFit/>
+          </a:bodyPr>
+          <a:lstStyle/>
+          <a:p>
+            <a:pPr>
+              <a:spcAft>
+                <a:spcPts val="400"/>
+              </a:spcAft>
+            </a:pPr>
+            <a:r>
+              <a:rPr sz="1300">
+                <a:solidFill>
+                  <a:srgbClr val="CDD6F4"/>
+                </a:solidFill>
+                <a:latin typeface="Segoe UI"/>
+              </a:rPr>
+              <a:t>Checkpoint/rollback journals</a:t>
+            </a:r>
+          </a:p>
+          <a:p>
+            <a:pPr>
+              <a:spcAft>
+                <a:spcPts val="400"/>
+              </a:spcAft>
+            </a:pPr>
+            <a:r>
+              <a:rPr sz="1300">
+                <a:solidFill>
+                  <a:srgbClr val="CDD6F4"/>
+                </a:solidFill>
+                <a:latin typeface="Segoe UI"/>
+              </a:rPr>
+              <a:t>add latency, complexity, and</a:t>
+            </a:r>
+          </a:p>
+          <a:p>
+            <a:pPr>
+              <a:spcAft>
+                <a:spcPts val="400"/>
+              </a:spcAft>
+            </a:pPr>
+            <a:r>
+              <a:rPr sz="1300">
+                <a:solidFill>
+                  <a:srgbClr val="CDD6F4"/>
+                </a:solidFill>
+                <a:latin typeface="Segoe UI"/>
+              </a:rPr>
+              <a:t>storage overhead. Financial</a:t>
+            </a:r>
+          </a:p>
+          <a:p>
+            <a:pPr>
+              <a:spcAft>
+                <a:spcPts val="400"/>
+              </a:spcAft>
+            </a:pPr>
+            <a:r>
+              <a:rPr sz="1300">
+                <a:solidFill>
+                  <a:srgbClr val="CDD6F4"/>
+                </a:solidFill>
+                <a:latin typeface="Segoe UI"/>
+              </a:rPr>
+              <a:t>systems spend millions.</a:t>
+            </a:r>
+          </a:p>
+        </p:txBody>
+      </p:sp>
+      <p:sp>
+        <p:nvSpPr>
+          <p:cNvPr id="16" name="Rectangle 15"/>
+          <p:cNvSpPr/>
+          <p:nvPr/>
+        </p:nvSpPr>
+        <p:spPr>
+          <a:xfrm>
+            <a:off x="4731520" y="3300000"/>
+            <a:ext cx="2800000" cy="20000"/>
+          </a:xfrm>
+          <a:prstGeom prst="rect">
+            <a:avLst/>
+          </a:prstGeom>
+          <a:solidFill>
+            <a:srgbClr val="313244"/>
+          </a:solidFill>
+          <a:ln>
+            <a:noFill/>
+          </a:ln>
+        </p:spPr>
+        <p:style>
+          <a:lnRef idx="1">
+            <a:schemeClr val="accent1"/>
+          </a:lnRef>
+          <a:fillRef idx="3">
+            <a:schemeClr val="accent1"/>
+          </a:fillRef>
+          <a:effectRef idx="2">
+            <a:schemeClr val="accent1"/>
+          </a:effectRef>
+          <a:fontRef idx="minor">
+            <a:schemeClr val="lt1"/>
+          </a:fontRef>
+        </p:style>
+        <p:txBody>
+          <a:bodyPr rtlCol="0" anchor="ctr"/>
+          <a:lstStyle/>
+          <a:p>
+            <a:pPr algn="ctr"/>
+          </a:p>
+        </p:txBody>
+      </p:sp>
+      <p:sp>
+        <p:nvSpPr>
+          <p:cNvPr id="17" name="TextBox 16"/>
+          <p:cNvSpPr txBox="1"/>
+          <p:nvPr/>
+        </p:nvSpPr>
+        <p:spPr>
+          <a:xfrm>
+            <a:off x="4581520" y="3400000"/>
+            <a:ext cx="3100000" cy="300000"/>
+          </a:xfrm>
+          <a:prstGeom prst="rect">
+            <a:avLst/>
+          </a:prstGeom>
+          <a:noFill/>
+        </p:spPr>
+        <p:txBody>
+          <a:bodyPr wrap="square">
+            <a:spAutoFit/>
+          </a:bodyPr>
+          <a:lstStyle/>
+          <a:p>
+            <a:pPr algn="ctr"/>
+            <a:r>
+              <a:rPr sz="1200" b="1">
+                <a:solidFill>
+                  <a:srgbClr val="A6E3A1"/>
+                </a:solidFill>
+                <a:latin typeface="Segoe UI"/>
+              </a:rPr>
+              <a:t>ATOMiK Answer:</a:t>
+            </a:r>
+          </a:p>
+        </p:txBody>
+      </p:sp>
+      <p:sp>
+        <p:nvSpPr>
+          <p:cNvPr id="18" name="TextBox 17"/>
+          <p:cNvSpPr txBox="1"/>
+          <p:nvPr/>
+        </p:nvSpPr>
+        <p:spPr>
+          <a:xfrm>
+            <a:off x="4581520" y="3650000"/>
+            <a:ext cx="3100000" cy="300000"/>
+          </a:xfrm>
+          <a:prstGeom prst="rect">
+            <a:avLst/>
+          </a:prstGeom>
+          <a:noFill/>
+        </p:spPr>
+        <p:txBody>
+          <a:bodyPr wrap="square">
+            <a:spAutoFit/>
+          </a:bodyPr>
+          <a:lstStyle/>
+          <a:p>
+            <a:pPr algn="ctr"/>
+            <a:r>
+              <a:rPr sz="1500" b="1">
+                <a:solidFill>
+                  <a:srgbClr val="89B4FA"/>
+                </a:solidFill>
+                <a:latin typeface="Segoe UI"/>
+              </a:rPr>
+              <a:t>Self-inverse property</a:t>
+            </a:r>
+          </a:p>
+        </p:txBody>
+      </p:sp>
+      <p:sp>
+        <p:nvSpPr>
+          <p:cNvPr id="19" name="TextBox 18"/>
+          <p:cNvSpPr txBox="1"/>
+          <p:nvPr/>
+        </p:nvSpPr>
+        <p:spPr>
+          <a:xfrm>
+            <a:off x="4581520" y="3950000"/>
+            <a:ext cx="3100000" cy="300000"/>
+          </a:xfrm>
+          <a:prstGeom prst="rect">
+            <a:avLst/>
+          </a:prstGeom>
+          <a:noFill/>
+        </p:spPr>
+        <p:txBody>
+          <a:bodyPr wrap="square">
+            <a:spAutoFit/>
+          </a:bodyPr>
+          <a:lstStyle/>
+          <a:p>
+            <a:pPr algn="ctr"/>
+            <a:r>
+              <a:rPr sz="1800" b="1">
+                <a:solidFill>
+                  <a:srgbClr val="A6E3A1"/>
+                </a:solidFill>
+                <a:latin typeface="Segoe UI"/>
+              </a:rPr>
+              <a:t>δ ⊕ δ = 0</a:t>
+            </a:r>
+          </a:p>
+        </p:txBody>
+      </p:sp>
+      <p:sp>
+        <p:nvSpPr>
+          <p:cNvPr id="20" name="TextBox 19"/>
+          <p:cNvSpPr txBox="1"/>
+          <p:nvPr/>
+        </p:nvSpPr>
+        <p:spPr>
+          <a:xfrm>
+            <a:off x="4581520" y="4350000"/>
+            <a:ext cx="3100000" cy="600000"/>
+          </a:xfrm>
+          <a:prstGeom prst="rect">
+            <a:avLst/>
+          </a:prstGeom>
+          <a:noFill/>
+        </p:spPr>
+        <p:txBody>
+          <a:bodyPr wrap="square">
+            <a:spAutoFit/>
+          </a:bodyPr>
+          <a:lstStyle/>
+          <a:p>
+            <a:pPr>
+              <a:spcAft>
+                <a:spcPts val="400"/>
+              </a:spcAft>
+            </a:pPr>
+            <a:r>
+              <a:rPr sz="1200">
+                <a:solidFill>
+                  <a:srgbClr val="7F849C"/>
+                </a:solidFill>
+                <a:latin typeface="Segoe UI"/>
+              </a:rPr>
+              <a:t>Every operation is its</a:t>
+            </a:r>
+          </a:p>
+          <a:p>
+            <a:pPr>
+              <a:spcAft>
+                <a:spcPts val="400"/>
+              </a:spcAft>
+            </a:pPr>
+            <a:r>
+              <a:rPr sz="1200">
+                <a:solidFill>
+                  <a:srgbClr val="7F849C"/>
+                </a:solidFill>
+                <a:latin typeface="Segoe UI"/>
+              </a:rPr>
+              <a:t>own undo. Zero cost.</a:t>
+            </a:r>
+          </a:p>
+        </p:txBody>
+      </p:sp>
+      <p:sp>
+        <p:nvSpPr>
+          <p:cNvPr id="21" name="Rounded Rectangle 20"/>
+          <p:cNvSpPr/>
+          <p:nvPr/>
+        </p:nvSpPr>
+        <p:spPr>
+          <a:xfrm>
+            <a:off x="8131520" y="1500000"/>
+            <a:ext cx="3400000" cy="3800000"/>
+          </a:xfrm>
+          <a:prstGeom prst="roundRect">
+            <a:avLst/>
+          </a:prstGeom>
+          <a:solidFill>
+            <a:srgbClr val="1E1E2E"/>
+          </a:solidFill>
+          <a:ln>
+            <a:noFill/>
+          </a:ln>
+        </p:spPr>
+        <p:style>
+          <a:lnRef idx="1">
+            <a:schemeClr val="accent1"/>
+          </a:lnRef>
+          <a:fillRef idx="3">
+            <a:schemeClr val="accent1"/>
+          </a:fillRef>
+          <a:effectRef idx="2">
+            <a:schemeClr val="accent1"/>
+          </a:effectRef>
+          <a:fontRef idx="minor">
+            <a:schemeClr val="lt1"/>
+          </a:fontRef>
+        </p:style>
+        <p:txBody>
+          <a:bodyPr rtlCol="0" anchor="ctr"/>
+          <a:lstStyle/>
+          <a:p>
+            <a:pPr algn="ctr"/>
+          </a:p>
+        </p:txBody>
+      </p:sp>
+      <p:sp>
+        <p:nvSpPr>
+          <p:cNvPr id="22" name="TextBox 21"/>
+          <p:cNvSpPr txBox="1"/>
+          <p:nvPr/>
+        </p:nvSpPr>
+        <p:spPr>
+          <a:xfrm>
+            <a:off x="8281520" y="1650000"/>
+            <a:ext cx="3100000" cy="400000"/>
+          </a:xfrm>
+          <a:prstGeom prst="rect">
+            <a:avLst/>
+          </a:prstGeom>
+          <a:noFill/>
+        </p:spPr>
+        <p:txBody>
+          <a:bodyPr wrap="square">
+            <a:spAutoFit/>
+          </a:bodyPr>
+          <a:lstStyle/>
+          <a:p>
+            <a:pPr algn="ctr"/>
+            <a:r>
+              <a:rPr sz="2200" b="1">
+                <a:solidFill>
+                  <a:srgbClr val="FAB387"/>
+                </a:solidFill>
+                <a:latin typeface="Segoe UI"/>
+              </a:rPr>
+              <a:t>Scaling Wall</a:t>
+            </a:r>
+          </a:p>
+        </p:txBody>
+      </p:sp>
+      <p:sp>
+        <p:nvSpPr>
+          <p:cNvPr id="23" name="TextBox 22"/>
+          <p:cNvSpPr txBox="1"/>
+          <p:nvPr/>
+        </p:nvSpPr>
+        <p:spPr>
+          <a:xfrm>
+            <a:off x="8281520" y="2050000"/>
+            <a:ext cx="3100000" cy="1200000"/>
+          </a:xfrm>
+          <a:prstGeom prst="rect">
+            <a:avLst/>
+          </a:prstGeom>
+          <a:noFill/>
+        </p:spPr>
+        <p:txBody>
+          <a:bodyPr wrap="square">
+            <a:spAutoFit/>
+          </a:bodyPr>
+          <a:lstStyle/>
+          <a:p>
+            <a:pPr>
+              <a:spcAft>
+                <a:spcPts val="400"/>
+              </a:spcAft>
+            </a:pPr>
+            <a:r>
+              <a:rPr sz="1300">
+                <a:solidFill>
+                  <a:srgbClr val="CDD6F4"/>
+                </a:solidFill>
+                <a:latin typeface="Segoe UI"/>
+              </a:rPr>
+              <a:t>Adding cores yields diminishing</a:t>
+            </a:r>
+          </a:p>
+          <a:p>
+            <a:pPr>
+              <a:spcAft>
+                <a:spcPts val="400"/>
+              </a:spcAft>
+            </a:pPr>
+            <a:r>
+              <a:rPr sz="1300">
+                <a:solidFill>
+                  <a:srgbClr val="CDD6F4"/>
+                </a:solidFill>
+                <a:latin typeface="Segoe UI"/>
+              </a:rPr>
+              <a:t>returns from shared-state</a:t>
+            </a:r>
+          </a:p>
+          <a:p>
+            <a:pPr>
+              <a:spcAft>
+                <a:spcPts val="400"/>
+              </a:spcAft>
+            </a:pPr>
+            <a:r>
+              <a:rPr sz="1300">
+                <a:solidFill>
+                  <a:srgbClr val="CDD6F4"/>
+                </a:solidFill>
+                <a:latin typeface="Segoe UI"/>
+              </a:rPr>
+              <a:t>synchronization overhead.</a:t>
+            </a:r>
+          </a:p>
+          <a:p>
+            <a:pPr>
+              <a:spcAft>
+                <a:spcPts val="400"/>
+              </a:spcAft>
+            </a:pPr>
+            <a:r>
+              <a:rPr sz="1300">
+                <a:solidFill>
+                  <a:srgbClr val="CDD6F4"/>
+                </a:solidFill>
+                <a:latin typeface="Segoe UI"/>
+              </a:rPr>
+              <a:t>Amdahl's Law limits speedup.</a:t>
+            </a:r>
+          </a:p>
+        </p:txBody>
+      </p:sp>
+      <p:sp>
+        <p:nvSpPr>
+          <p:cNvPr id="24" name="Rectangle 23"/>
+          <p:cNvSpPr/>
+          <p:nvPr/>
+        </p:nvSpPr>
+        <p:spPr>
+          <a:xfrm>
+            <a:off x="8431520" y="3300000"/>
+            <a:ext cx="2800000" cy="20000"/>
+          </a:xfrm>
+          <a:prstGeom prst="rect">
+            <a:avLst/>
+          </a:prstGeom>
+          <a:solidFill>
+            <a:srgbClr val="313244"/>
+          </a:solidFill>
+          <a:ln>
+            <a:noFill/>
+          </a:ln>
+        </p:spPr>
+        <p:style>
+          <a:lnRef idx="1">
+            <a:schemeClr val="accent1"/>
+          </a:lnRef>
+          <a:fillRef idx="3">
+            <a:schemeClr val="accent1"/>
+          </a:fillRef>
+          <a:effectRef idx="2">
+            <a:schemeClr val="accent1"/>
+          </a:effectRef>
+          <a:fontRef idx="minor">
+            <a:schemeClr val="lt1"/>
+          </a:fontRef>
+        </p:style>
+        <p:txBody>
+          <a:bodyPr rtlCol="0" anchor="ctr"/>
+          <a:lstStyle/>
+          <a:p>
+            <a:pPr algn="ctr"/>
+          </a:p>
+        </p:txBody>
+      </p:sp>
+      <p:sp>
+        <p:nvSpPr>
+          <p:cNvPr id="25" name="TextBox 24"/>
+          <p:cNvSpPr txBox="1"/>
+          <p:nvPr/>
+        </p:nvSpPr>
+        <p:spPr>
+          <a:xfrm>
+            <a:off x="8281520" y="3400000"/>
+            <a:ext cx="3100000" cy="300000"/>
+          </a:xfrm>
+          <a:prstGeom prst="rect">
+            <a:avLst/>
+          </a:prstGeom>
+          <a:noFill/>
+        </p:spPr>
+        <p:txBody>
+          <a:bodyPr wrap="square">
+            <a:spAutoFit/>
+          </a:bodyPr>
+          <a:lstStyle/>
+          <a:p>
+            <a:pPr algn="ctr"/>
+            <a:r>
+              <a:rPr sz="1200" b="1">
+                <a:solidFill>
+                  <a:srgbClr val="A6E3A1"/>
+                </a:solidFill>
+                <a:latin typeface="Segoe UI"/>
+              </a:rPr>
+              <a:t>ATOMiK Answer:</a:t>
+            </a:r>
+          </a:p>
+        </p:txBody>
+      </p:sp>
+      <p:sp>
+        <p:nvSpPr>
+          <p:cNvPr id="26" name="TextBox 25"/>
+          <p:cNvSpPr txBox="1"/>
+          <p:nvPr/>
+        </p:nvSpPr>
+        <p:spPr>
+          <a:xfrm>
+            <a:off x="8281520" y="3650000"/>
+            <a:ext cx="3100000" cy="300000"/>
+          </a:xfrm>
+          <a:prstGeom prst="rect">
+            <a:avLst/>
+          </a:prstGeom>
+          <a:noFill/>
+        </p:spPr>
+        <p:txBody>
+          <a:bodyPr wrap="square">
+            <a:spAutoFit/>
+          </a:bodyPr>
+          <a:lstStyle/>
+          <a:p>
+            <a:pPr algn="ctr"/>
+            <a:r>
+              <a:rPr sz="1500" b="1">
+                <a:solidFill>
+                  <a:srgbClr val="89B4FA"/>
+                </a:solidFill>
+                <a:latin typeface="Segoe UI"/>
+              </a:rPr>
+              <a:t>Linear scaling</a:t>
+            </a:r>
+          </a:p>
+        </p:txBody>
+      </p:sp>
+      <p:sp>
+        <p:nvSpPr>
+          <p:cNvPr id="27" name="TextBox 26"/>
+          <p:cNvSpPr txBox="1"/>
+          <p:nvPr/>
+        </p:nvSpPr>
+        <p:spPr>
+          <a:xfrm>
+            <a:off x="8281520" y="3950000"/>
+            <a:ext cx="3100000" cy="300000"/>
+          </a:xfrm>
+          <a:prstGeom prst="rect">
+            <a:avLst/>
+          </a:prstGeom>
+          <a:noFill/>
+        </p:spPr>
+        <p:txBody>
+          <a:bodyPr wrap="square">
+            <a:spAutoFit/>
+          </a:bodyPr>
+          <a:lstStyle/>
+          <a:p>
+            <a:pPr algn="ctr"/>
+            <a:r>
+              <a:rPr sz="1800" b="1">
+                <a:solidFill>
+                  <a:srgbClr val="A6E3A1"/>
+                </a:solidFill>
+                <a:latin typeface="Segoe UI"/>
+              </a:rPr>
+              <a:t>N banks = N× throughput</a:t>
+            </a:r>
+          </a:p>
+        </p:txBody>
+      </p:sp>
+      <p:sp>
+        <p:nvSpPr>
+          <p:cNvPr id="28" name="TextBox 27"/>
+          <p:cNvSpPr txBox="1"/>
+          <p:nvPr/>
+        </p:nvSpPr>
+        <p:spPr>
+          <a:xfrm>
+            <a:off x="8281520" y="4350000"/>
+            <a:ext cx="3100000" cy="600000"/>
+          </a:xfrm>
+          <a:prstGeom prst="rect">
+            <a:avLst/>
+          </a:prstGeom>
+          <a:noFill/>
+        </p:spPr>
+        <p:txBody>
+          <a:bodyPr wrap="square">
+            <a:spAutoFit/>
+          </a:bodyPr>
+          <a:lstStyle/>
+          <a:p>
+            <a:pPr>
+              <a:spcAft>
+                <a:spcPts val="400"/>
+              </a:spcAft>
+            </a:pPr>
+            <a:r>
+              <a:rPr sz="1200">
+                <a:solidFill>
+                  <a:srgbClr val="7F849C"/>
+                </a:solidFill>
+                <a:latin typeface="Segoe UI"/>
+              </a:rPr>
+              <a:t>Perfect 16× at N=16.</a:t>
+            </a:r>
+          </a:p>
+          <a:p>
+            <a:pPr>
+              <a:spcAft>
+                <a:spcPts val="400"/>
+              </a:spcAft>
+            </a:pPr>
+            <a:r>
+              <a:rPr sz="1200">
+                <a:solidFill>
+                  <a:srgbClr val="7F849C"/>
+                </a:solidFill>
+                <a:latin typeface="Segoe UI"/>
+              </a:rPr>
+              <a:t>Parallel efficiency: 0.85.</a:t>
+            </a:r>
+          </a:p>
+        </p:txBody>
+      </p:sp>
+      <p:sp>
+        <p:nvSpPr>
+          <p:cNvPr id="29" name="TextBox 28"/>
+          <p:cNvSpPr txBox="1"/>
+          <p:nvPr/>
+        </p:nvSpPr>
+        <p:spPr>
+          <a:xfrm>
+            <a:off x="731520" y="5600000"/>
+            <a:ext cx="10500000" cy="400000"/>
+          </a:xfrm>
+          <a:prstGeom prst="rect">
+            <a:avLst/>
+          </a:prstGeom>
+          <a:noFill/>
+        </p:spPr>
+        <p:txBody>
+          <a:bodyPr wrap="square">
+            <a:spAutoFit/>
+          </a:bodyPr>
+          <a:lstStyle/>
+          <a:p>
+            <a:pPr algn="ctr"/>
+            <a:r>
+              <a:rPr sz="1200" b="0">
+                <a:solidFill>
+                  <a:srgbClr val="7F849C"/>
+                </a:solidFill>
+                <a:latin typeface="Segoe UI"/>
+              </a:rPr>
+              <a:t>All three properties proven in Lean4 (92 theorems, 0 sorry statements). Hardware-validated on Tang Nano 9K.</a:t>
+            </a:r>
+          </a:p>
+        </p:txBody>
+      </p:sp>
+      <p:sp>
+        <p:nvSpPr>
+          <p:cNvPr id="30" name="TextBox 29"/>
+          <p:cNvSpPr txBox="1"/>
+          <p:nvPr/>
+        </p:nvSpPr>
+        <p:spPr>
+          <a:xfrm>
+            <a:off x="11277295" y="6492240"/>
+            <a:ext cx="700000" cy="300000"/>
+          </a:xfrm>
+          <a:prstGeom prst="rect">
+            <a:avLst/>
+          </a:prstGeom>
+          <a:noFill/>
+        </p:spPr>
+        <p:txBody>
+          <a:bodyPr wrap="square">
+            <a:spAutoFit/>
+          </a:bodyPr>
+          <a:lstStyle/>
+          <a:p>
+            <a:pPr algn="r"/>
+            <a:r>
+              <a:rPr sz="1000" b="0">
+                <a:solidFill>
+                  <a:srgbClr val="7F849C"/>
+                </a:solidFill>
+                <a:latin typeface="Segoe UI"/>
+              </a:rPr>
+              <a:t>3/15</a:t>
+            </a:r>
+          </a:p>
+        </p:txBody>
+      </p:sp>
     </p:spTree>
     <p:extLst>
       <p:ext uri="{BB962C8B-B14F-4D97-AF65-F5344CB8AC3E}">
@@ -19250,7 +24188,7 @@
                 </a:solidFill>
                 <a:latin typeface="Segoe UI"/>
               </a:rPr>
-              <a:t>3/10</a:t>
+              <a:t>4/15</a:t>
             </a:r>
           </a:p>
         </p:txBody>
@@ -20575,7 +25513,7 @@
                 </a:solidFill>
                 <a:latin typeface="Segoe UI"/>
               </a:rPr>
-              <a:t>6/10</a:t>
+              <a:t>5/15</a:t>
             </a:r>
           </a:p>
         </p:txBody>
@@ -22424,7 +27362,7 @@
                 </a:solidFill>
                 <a:latin typeface="Segoe UI"/>
               </a:rPr>
-              <a:t>4/10</a:t>
+              <a:t>6/15</a:t>
             </a:r>
           </a:p>
         </p:txBody>
@@ -22440,6 +27378,14 @@
 <file path=ppt/slides/slide7.xml><?xml version="1.0" encoding="utf-8"?>
 <p:sld xmlns:a="http://schemas.openxmlformats.org/drawingml/2006/main" xmlns:r="http://schemas.openxmlformats.org/officeDocument/2006/relationships" xmlns:p="http://schemas.openxmlformats.org/presentationml/2006/main">
   <p:cSld>
+    <p:bg>
+      <p:bgPr>
+        <a:solidFill>
+          <a:srgbClr val="13131A"/>
+        </a:solidFill>
+        <a:effectLst/>
+      </p:bgPr>
+    </p:bg>
     <p:spTree>
       <p:nvGrpSpPr>
         <p:cNvPr id="1" name=""/>
@@ -22454,6 +27400,2306 @@
           <a:chExt cx="0" cy="0"/>
         </a:xfrm>
       </p:grpSpPr>
+      <p:sp>
+        <p:nvSpPr>
+          <p:cNvPr id="2" name="TextBox 1"/>
+          <p:cNvSpPr txBox="1"/>
+          <p:nvPr/>
+        </p:nvSpPr>
+        <p:spPr>
+          <a:xfrm>
+            <a:off x="731520" y="365760"/>
+            <a:ext cx="10500000" cy="600000"/>
+          </a:xfrm>
+          <a:prstGeom prst="rect">
+            <a:avLst/>
+          </a:prstGeom>
+          <a:noFill/>
+        </p:spPr>
+        <p:txBody>
+          <a:bodyPr wrap="square">
+            <a:spAutoFit/>
+          </a:bodyPr>
+          <a:lstStyle/>
+          <a:p>
+            <a:pPr algn="l"/>
+            <a:r>
+              <a:rPr sz="3600" b="1">
+                <a:solidFill>
+                  <a:srgbClr val="89B4FA"/>
+                </a:solidFill>
+                <a:latin typeface="Segoe UI"/>
+              </a:rPr>
+              <a:t>How It Works</a:t>
+            </a:r>
+          </a:p>
+        </p:txBody>
+      </p:sp>
+      <p:sp>
+        <p:nvSpPr>
+          <p:cNvPr id="3" name="TextBox 2"/>
+          <p:cNvSpPr txBox="1"/>
+          <p:nvPr/>
+        </p:nvSpPr>
+        <p:spPr>
+          <a:xfrm>
+            <a:off x="731520" y="885475"/>
+            <a:ext cx="10500000" cy="400000"/>
+          </a:xfrm>
+          <a:prstGeom prst="rect">
+            <a:avLst/>
+          </a:prstGeom>
+          <a:noFill/>
+        </p:spPr>
+        <p:txBody>
+          <a:bodyPr wrap="square">
+            <a:spAutoFit/>
+          </a:bodyPr>
+          <a:lstStyle/>
+          <a:p>
+            <a:pPr algn="l"/>
+            <a:r>
+              <a:rPr sz="1600" b="0">
+                <a:solidFill>
+                  <a:srgbClr val="CDD6F4"/>
+                </a:solidFill>
+                <a:latin typeface="Segoe UI"/>
+              </a:rPr>
+              <a:t>From delta to state in one cycle.</a:t>
+            </a:r>
+          </a:p>
+        </p:txBody>
+      </p:sp>
+      <p:sp>
+        <p:nvSpPr>
+          <p:cNvPr id="4" name="Rectangle 3"/>
+          <p:cNvSpPr/>
+          <p:nvPr/>
+        </p:nvSpPr>
+        <p:spPr>
+          <a:xfrm>
+            <a:off x="609904" y="1280160"/>
+            <a:ext cx="10972800" cy="25400"/>
+          </a:xfrm>
+          <a:prstGeom prst="rect">
+            <a:avLst/>
+          </a:prstGeom>
+          <a:solidFill>
+            <a:srgbClr val="89B4FA"/>
+          </a:solidFill>
+          <a:ln>
+            <a:noFill/>
+          </a:ln>
+        </p:spPr>
+        <p:style>
+          <a:lnRef idx="1">
+            <a:schemeClr val="accent1"/>
+          </a:lnRef>
+          <a:fillRef idx="3">
+            <a:schemeClr val="accent1"/>
+          </a:fillRef>
+          <a:effectRef idx="2">
+            <a:schemeClr val="accent1"/>
+          </a:effectRef>
+          <a:fontRef idx="minor">
+            <a:schemeClr val="lt1"/>
+          </a:fontRef>
+        </p:style>
+        <p:txBody>
+          <a:bodyPr rtlCol="0" anchor="ctr"/>
+          <a:lstStyle/>
+          <a:p>
+            <a:pPr algn="ctr"/>
+          </a:p>
+        </p:txBody>
+      </p:sp>
+      <p:sp>
+        <p:nvSpPr>
+          <p:cNvPr id="5" name="Rounded Rectangle 4"/>
+          <p:cNvSpPr/>
+          <p:nvPr/>
+        </p:nvSpPr>
+        <p:spPr>
+          <a:xfrm>
+            <a:off x="731520" y="1600000"/>
+            <a:ext cx="1800000" cy="800000"/>
+          </a:xfrm>
+          <a:prstGeom prst="roundRect">
+            <a:avLst/>
+          </a:prstGeom>
+          <a:solidFill>
+            <a:srgbClr val="1E1E2E"/>
+          </a:solidFill>
+          <a:ln>
+            <a:noFill/>
+          </a:ln>
+        </p:spPr>
+        <p:style>
+          <a:lnRef idx="1">
+            <a:schemeClr val="accent1"/>
+          </a:lnRef>
+          <a:fillRef idx="3">
+            <a:schemeClr val="accent1"/>
+          </a:fillRef>
+          <a:effectRef idx="2">
+            <a:schemeClr val="accent1"/>
+          </a:effectRef>
+          <a:fontRef idx="minor">
+            <a:schemeClr val="lt1"/>
+          </a:fontRef>
+        </p:style>
+        <p:txBody>
+          <a:bodyPr rtlCol="0" anchor="ctr"/>
+          <a:lstStyle/>
+          <a:p>
+            <a:pPr algn="ctr"/>
+          </a:p>
+        </p:txBody>
+      </p:sp>
+      <p:sp>
+        <p:nvSpPr>
+          <p:cNvPr id="6" name="TextBox 5"/>
+          <p:cNvSpPr txBox="1"/>
+          <p:nvPr/>
+        </p:nvSpPr>
+        <p:spPr>
+          <a:xfrm>
+            <a:off x="731520" y="1700000"/>
+            <a:ext cx="1800000" cy="300000"/>
+          </a:xfrm>
+          <a:prstGeom prst="rect">
+            <a:avLst/>
+          </a:prstGeom>
+          <a:noFill/>
+        </p:spPr>
+        <p:txBody>
+          <a:bodyPr wrap="square">
+            <a:spAutoFit/>
+          </a:bodyPr>
+          <a:lstStyle/>
+          <a:p>
+            <a:pPr algn="ctr"/>
+            <a:r>
+              <a:rPr sz="1600" b="1">
+                <a:solidFill>
+                  <a:srgbClr val="89B4FA"/>
+                </a:solidFill>
+                <a:latin typeface="Segoe UI"/>
+              </a:rPr>
+              <a:t>Input Deltas</a:t>
+            </a:r>
+          </a:p>
+        </p:txBody>
+      </p:sp>
+      <p:sp>
+        <p:nvSpPr>
+          <p:cNvPr id="7" name="TextBox 6"/>
+          <p:cNvSpPr txBox="1"/>
+          <p:nvPr/>
+        </p:nvSpPr>
+        <p:spPr>
+          <a:xfrm>
+            <a:off x="731520" y="1980000"/>
+            <a:ext cx="1800000" cy="300000"/>
+          </a:xfrm>
+          <a:prstGeom prst="rect">
+            <a:avLst/>
+          </a:prstGeom>
+          <a:noFill/>
+        </p:spPr>
+        <p:txBody>
+          <a:bodyPr wrap="square">
+            <a:spAutoFit/>
+          </a:bodyPr>
+          <a:lstStyle/>
+          <a:p>
+            <a:pPr algn="ctr"/>
+            <a:r>
+              <a:rPr sz="1400" b="0">
+                <a:solidFill>
+                  <a:srgbClr val="A6E3A1"/>
+                </a:solidFill>
+                <a:latin typeface="Segoe UI"/>
+              </a:rPr>
+              <a:t>δ₁, δ₂, δ₃, ... δₙ</a:t>
+            </a:r>
+          </a:p>
+        </p:txBody>
+      </p:sp>
+      <p:sp>
+        <p:nvSpPr>
+          <p:cNvPr id="8" name="TextBox 7"/>
+          <p:cNvSpPr txBox="1"/>
+          <p:nvPr/>
+        </p:nvSpPr>
+        <p:spPr>
+          <a:xfrm>
+            <a:off x="2600000" y="1800000"/>
+            <a:ext cx="400000" cy="400000"/>
+          </a:xfrm>
+          <a:prstGeom prst="rect">
+            <a:avLst/>
+          </a:prstGeom>
+          <a:noFill/>
+        </p:spPr>
+        <p:txBody>
+          <a:bodyPr wrap="square">
+            <a:spAutoFit/>
+          </a:bodyPr>
+          <a:lstStyle/>
+          <a:p>
+            <a:pPr algn="ctr"/>
+            <a:r>
+              <a:rPr sz="2800" b="0">
+                <a:solidFill>
+                  <a:srgbClr val="89B4FA"/>
+                </a:solidFill>
+                <a:latin typeface="Segoe UI"/>
+              </a:rPr>
+              <a:t>→</a:t>
+            </a:r>
+          </a:p>
+        </p:txBody>
+      </p:sp>
+      <p:sp>
+        <p:nvSpPr>
+          <p:cNvPr id="9" name="Rounded Rectangle 8"/>
+          <p:cNvSpPr/>
+          <p:nvPr/>
+        </p:nvSpPr>
+        <p:spPr>
+          <a:xfrm>
+            <a:off x="3100000" y="1400000"/>
+            <a:ext cx="3600000" cy="1400000"/>
+          </a:xfrm>
+          <a:prstGeom prst="roundRect">
+            <a:avLst/>
+          </a:prstGeom>
+          <a:solidFill>
+            <a:srgbClr val="1E1E2E"/>
+          </a:solidFill>
+          <a:ln>
+            <a:noFill/>
+          </a:ln>
+        </p:spPr>
+        <p:style>
+          <a:lnRef idx="1">
+            <a:schemeClr val="accent1"/>
+          </a:lnRef>
+          <a:fillRef idx="3">
+            <a:schemeClr val="accent1"/>
+          </a:fillRef>
+          <a:effectRef idx="2">
+            <a:schemeClr val="accent1"/>
+          </a:effectRef>
+          <a:fontRef idx="minor">
+            <a:schemeClr val="lt1"/>
+          </a:fontRef>
+        </p:style>
+        <p:txBody>
+          <a:bodyPr rtlCol="0" anchor="ctr"/>
+          <a:lstStyle/>
+          <a:p>
+            <a:pPr algn="ctr"/>
+          </a:p>
+        </p:txBody>
+      </p:sp>
+      <p:sp>
+        <p:nvSpPr>
+          <p:cNvPr id="10" name="TextBox 9"/>
+          <p:cNvSpPr txBox="1"/>
+          <p:nvPr/>
+        </p:nvSpPr>
+        <p:spPr>
+          <a:xfrm>
+            <a:off x="3100000" y="1420000"/>
+            <a:ext cx="3600000" cy="300000"/>
+          </a:xfrm>
+          <a:prstGeom prst="rect">
+            <a:avLst/>
+          </a:prstGeom>
+          <a:noFill/>
+        </p:spPr>
+        <p:txBody>
+          <a:bodyPr wrap="square">
+            <a:spAutoFit/>
+          </a:bodyPr>
+          <a:lstStyle/>
+          <a:p>
+            <a:pPr algn="ctr"/>
+            <a:r>
+              <a:rPr sz="1400" b="1">
+                <a:solidFill>
+                  <a:srgbClr val="89B4FA"/>
+                </a:solidFill>
+                <a:latin typeface="Segoe UI"/>
+              </a:rPr>
+              <a:t>Round-Robin Distributor → N XOR Banks</a:t>
+            </a:r>
+          </a:p>
+        </p:txBody>
+      </p:sp>
+      <p:sp>
+        <p:nvSpPr>
+          <p:cNvPr id="11" name="Rounded Rectangle 10"/>
+          <p:cNvSpPr/>
+          <p:nvPr/>
+        </p:nvSpPr>
+        <p:spPr>
+          <a:xfrm>
+            <a:off x="3250000" y="1750000"/>
+            <a:ext cx="580000" cy="400000"/>
+          </a:xfrm>
+          <a:prstGeom prst="roundRect">
+            <a:avLst/>
+          </a:prstGeom>
+          <a:solidFill>
+            <a:srgbClr val="313244"/>
+          </a:solidFill>
+          <a:ln>
+            <a:noFill/>
+          </a:ln>
+        </p:spPr>
+        <p:style>
+          <a:lnRef idx="1">
+            <a:schemeClr val="accent1"/>
+          </a:lnRef>
+          <a:fillRef idx="3">
+            <a:schemeClr val="accent1"/>
+          </a:fillRef>
+          <a:effectRef idx="2">
+            <a:schemeClr val="accent1"/>
+          </a:effectRef>
+          <a:fontRef idx="minor">
+            <a:schemeClr val="lt1"/>
+          </a:fontRef>
+        </p:style>
+        <p:txBody>
+          <a:bodyPr rtlCol="0" anchor="ctr"/>
+          <a:lstStyle/>
+          <a:p>
+            <a:pPr algn="ctr"/>
+          </a:p>
+        </p:txBody>
+      </p:sp>
+      <p:sp>
+        <p:nvSpPr>
+          <p:cNvPr id="12" name="TextBox 11"/>
+          <p:cNvSpPr txBox="1"/>
+          <p:nvPr/>
+        </p:nvSpPr>
+        <p:spPr>
+          <a:xfrm>
+            <a:off x="3250000" y="1800000"/>
+            <a:ext cx="580000" cy="300000"/>
+          </a:xfrm>
+          <a:prstGeom prst="rect">
+            <a:avLst/>
+          </a:prstGeom>
+          <a:noFill/>
+        </p:spPr>
+        <p:txBody>
+          <a:bodyPr wrap="square">
+            <a:spAutoFit/>
+          </a:bodyPr>
+          <a:lstStyle/>
+          <a:p>
+            <a:pPr algn="ctr"/>
+            <a:r>
+              <a:rPr sz="1100" b="0">
+                <a:solidFill>
+                  <a:srgbClr val="A6E3A1"/>
+                </a:solidFill>
+                <a:latin typeface="Segoe UI"/>
+              </a:rPr>
+              <a:t>Bank 0</a:t>
+            </a:r>
+          </a:p>
+        </p:txBody>
+      </p:sp>
+      <p:sp>
+        <p:nvSpPr>
+          <p:cNvPr id="13" name="TextBox 12"/>
+          <p:cNvSpPr txBox="1"/>
+          <p:nvPr/>
+        </p:nvSpPr>
+        <p:spPr>
+          <a:xfrm>
+            <a:off x="3250000" y="1950000"/>
+            <a:ext cx="580000" cy="200000"/>
+          </a:xfrm>
+          <a:prstGeom prst="rect">
+            <a:avLst/>
+          </a:prstGeom>
+          <a:noFill/>
+        </p:spPr>
+        <p:txBody>
+          <a:bodyPr wrap="square">
+            <a:spAutoFit/>
+          </a:bodyPr>
+          <a:lstStyle/>
+          <a:p>
+            <a:pPr algn="ctr"/>
+            <a:r>
+              <a:rPr sz="900" b="0">
+                <a:solidFill>
+                  <a:srgbClr val="7F849C"/>
+                </a:solidFill>
+                <a:latin typeface="Segoe UI"/>
+              </a:rPr>
+              <a:t>XOR Acc</a:t>
+            </a:r>
+          </a:p>
+        </p:txBody>
+      </p:sp>
+      <p:sp>
+        <p:nvSpPr>
+          <p:cNvPr id="14" name="Rounded Rectangle 13"/>
+          <p:cNvSpPr/>
+          <p:nvPr/>
+        </p:nvSpPr>
+        <p:spPr>
+          <a:xfrm>
+            <a:off x="3910000" y="1750000"/>
+            <a:ext cx="580000" cy="400000"/>
+          </a:xfrm>
+          <a:prstGeom prst="roundRect">
+            <a:avLst/>
+          </a:prstGeom>
+          <a:solidFill>
+            <a:srgbClr val="313244"/>
+          </a:solidFill>
+          <a:ln>
+            <a:noFill/>
+          </a:ln>
+        </p:spPr>
+        <p:style>
+          <a:lnRef idx="1">
+            <a:schemeClr val="accent1"/>
+          </a:lnRef>
+          <a:fillRef idx="3">
+            <a:schemeClr val="accent1"/>
+          </a:fillRef>
+          <a:effectRef idx="2">
+            <a:schemeClr val="accent1"/>
+          </a:effectRef>
+          <a:fontRef idx="minor">
+            <a:schemeClr val="lt1"/>
+          </a:fontRef>
+        </p:style>
+        <p:txBody>
+          <a:bodyPr rtlCol="0" anchor="ctr"/>
+          <a:lstStyle/>
+          <a:p>
+            <a:pPr algn="ctr"/>
+          </a:p>
+        </p:txBody>
+      </p:sp>
+      <p:sp>
+        <p:nvSpPr>
+          <p:cNvPr id="15" name="TextBox 14"/>
+          <p:cNvSpPr txBox="1"/>
+          <p:nvPr/>
+        </p:nvSpPr>
+        <p:spPr>
+          <a:xfrm>
+            <a:off x="3910000" y="1800000"/>
+            <a:ext cx="580000" cy="300000"/>
+          </a:xfrm>
+          <a:prstGeom prst="rect">
+            <a:avLst/>
+          </a:prstGeom>
+          <a:noFill/>
+        </p:spPr>
+        <p:txBody>
+          <a:bodyPr wrap="square">
+            <a:spAutoFit/>
+          </a:bodyPr>
+          <a:lstStyle/>
+          <a:p>
+            <a:pPr algn="ctr"/>
+            <a:r>
+              <a:rPr sz="1100" b="0">
+                <a:solidFill>
+                  <a:srgbClr val="A6E3A1"/>
+                </a:solidFill>
+                <a:latin typeface="Segoe UI"/>
+              </a:rPr>
+              <a:t>Bank 1</a:t>
+            </a:r>
+          </a:p>
+        </p:txBody>
+      </p:sp>
+      <p:sp>
+        <p:nvSpPr>
+          <p:cNvPr id="16" name="TextBox 15"/>
+          <p:cNvSpPr txBox="1"/>
+          <p:nvPr/>
+        </p:nvSpPr>
+        <p:spPr>
+          <a:xfrm>
+            <a:off x="3910000" y="1950000"/>
+            <a:ext cx="580000" cy="200000"/>
+          </a:xfrm>
+          <a:prstGeom prst="rect">
+            <a:avLst/>
+          </a:prstGeom>
+          <a:noFill/>
+        </p:spPr>
+        <p:txBody>
+          <a:bodyPr wrap="square">
+            <a:spAutoFit/>
+          </a:bodyPr>
+          <a:lstStyle/>
+          <a:p>
+            <a:pPr algn="ctr"/>
+            <a:r>
+              <a:rPr sz="900" b="0">
+                <a:solidFill>
+                  <a:srgbClr val="7F849C"/>
+                </a:solidFill>
+                <a:latin typeface="Segoe UI"/>
+              </a:rPr>
+              <a:t>XOR Acc</a:t>
+            </a:r>
+          </a:p>
+        </p:txBody>
+      </p:sp>
+      <p:sp>
+        <p:nvSpPr>
+          <p:cNvPr id="17" name="Rounded Rectangle 16"/>
+          <p:cNvSpPr/>
+          <p:nvPr/>
+        </p:nvSpPr>
+        <p:spPr>
+          <a:xfrm>
+            <a:off x="4570000" y="1750000"/>
+            <a:ext cx="580000" cy="400000"/>
+          </a:xfrm>
+          <a:prstGeom prst="roundRect">
+            <a:avLst/>
+          </a:prstGeom>
+          <a:solidFill>
+            <a:srgbClr val="313244"/>
+          </a:solidFill>
+          <a:ln>
+            <a:noFill/>
+          </a:ln>
+        </p:spPr>
+        <p:style>
+          <a:lnRef idx="1">
+            <a:schemeClr val="accent1"/>
+          </a:lnRef>
+          <a:fillRef idx="3">
+            <a:schemeClr val="accent1"/>
+          </a:fillRef>
+          <a:effectRef idx="2">
+            <a:schemeClr val="accent1"/>
+          </a:effectRef>
+          <a:fontRef idx="minor">
+            <a:schemeClr val="lt1"/>
+          </a:fontRef>
+        </p:style>
+        <p:txBody>
+          <a:bodyPr rtlCol="0" anchor="ctr"/>
+          <a:lstStyle/>
+          <a:p>
+            <a:pPr algn="ctr"/>
+          </a:p>
+        </p:txBody>
+      </p:sp>
+      <p:sp>
+        <p:nvSpPr>
+          <p:cNvPr id="18" name="TextBox 17"/>
+          <p:cNvSpPr txBox="1"/>
+          <p:nvPr/>
+        </p:nvSpPr>
+        <p:spPr>
+          <a:xfrm>
+            <a:off x="4570000" y="1800000"/>
+            <a:ext cx="580000" cy="300000"/>
+          </a:xfrm>
+          <a:prstGeom prst="rect">
+            <a:avLst/>
+          </a:prstGeom>
+          <a:noFill/>
+        </p:spPr>
+        <p:txBody>
+          <a:bodyPr wrap="square">
+            <a:spAutoFit/>
+          </a:bodyPr>
+          <a:lstStyle/>
+          <a:p>
+            <a:pPr algn="ctr"/>
+            <a:r>
+              <a:rPr sz="1100" b="0">
+                <a:solidFill>
+                  <a:srgbClr val="A6E3A1"/>
+                </a:solidFill>
+                <a:latin typeface="Segoe UI"/>
+              </a:rPr>
+              <a:t>Bank 2</a:t>
+            </a:r>
+          </a:p>
+        </p:txBody>
+      </p:sp>
+      <p:sp>
+        <p:nvSpPr>
+          <p:cNvPr id="19" name="TextBox 18"/>
+          <p:cNvSpPr txBox="1"/>
+          <p:nvPr/>
+        </p:nvSpPr>
+        <p:spPr>
+          <a:xfrm>
+            <a:off x="4570000" y="1950000"/>
+            <a:ext cx="580000" cy="200000"/>
+          </a:xfrm>
+          <a:prstGeom prst="rect">
+            <a:avLst/>
+          </a:prstGeom>
+          <a:noFill/>
+        </p:spPr>
+        <p:txBody>
+          <a:bodyPr wrap="square">
+            <a:spAutoFit/>
+          </a:bodyPr>
+          <a:lstStyle/>
+          <a:p>
+            <a:pPr algn="ctr"/>
+            <a:r>
+              <a:rPr sz="900" b="0">
+                <a:solidFill>
+                  <a:srgbClr val="7F849C"/>
+                </a:solidFill>
+                <a:latin typeface="Segoe UI"/>
+              </a:rPr>
+              <a:t>XOR Acc</a:t>
+            </a:r>
+          </a:p>
+        </p:txBody>
+      </p:sp>
+      <p:sp>
+        <p:nvSpPr>
+          <p:cNvPr id="20" name="Rounded Rectangle 19"/>
+          <p:cNvSpPr/>
+          <p:nvPr/>
+        </p:nvSpPr>
+        <p:spPr>
+          <a:xfrm>
+            <a:off x="5230000" y="1750000"/>
+            <a:ext cx="580000" cy="400000"/>
+          </a:xfrm>
+          <a:prstGeom prst="roundRect">
+            <a:avLst/>
+          </a:prstGeom>
+          <a:solidFill>
+            <a:srgbClr val="313244"/>
+          </a:solidFill>
+          <a:ln>
+            <a:noFill/>
+          </a:ln>
+        </p:spPr>
+        <p:style>
+          <a:lnRef idx="1">
+            <a:schemeClr val="accent1"/>
+          </a:lnRef>
+          <a:fillRef idx="3">
+            <a:schemeClr val="accent1"/>
+          </a:fillRef>
+          <a:effectRef idx="2">
+            <a:schemeClr val="accent1"/>
+          </a:effectRef>
+          <a:fontRef idx="minor">
+            <a:schemeClr val="lt1"/>
+          </a:fontRef>
+        </p:style>
+        <p:txBody>
+          <a:bodyPr rtlCol="0" anchor="ctr"/>
+          <a:lstStyle/>
+          <a:p>
+            <a:pPr algn="ctr"/>
+          </a:p>
+        </p:txBody>
+      </p:sp>
+      <p:sp>
+        <p:nvSpPr>
+          <p:cNvPr id="21" name="TextBox 20"/>
+          <p:cNvSpPr txBox="1"/>
+          <p:nvPr/>
+        </p:nvSpPr>
+        <p:spPr>
+          <a:xfrm>
+            <a:off x="5230000" y="1800000"/>
+            <a:ext cx="580000" cy="300000"/>
+          </a:xfrm>
+          <a:prstGeom prst="rect">
+            <a:avLst/>
+          </a:prstGeom>
+          <a:noFill/>
+        </p:spPr>
+        <p:txBody>
+          <a:bodyPr wrap="square">
+            <a:spAutoFit/>
+          </a:bodyPr>
+          <a:lstStyle/>
+          <a:p>
+            <a:pPr algn="ctr"/>
+            <a:r>
+              <a:rPr sz="1100" b="0">
+                <a:solidFill>
+                  <a:srgbClr val="A6E3A1"/>
+                </a:solidFill>
+                <a:latin typeface="Segoe UI"/>
+              </a:rPr>
+              <a:t>...</a:t>
+            </a:r>
+          </a:p>
+        </p:txBody>
+      </p:sp>
+      <p:sp>
+        <p:nvSpPr>
+          <p:cNvPr id="22" name="TextBox 21"/>
+          <p:cNvSpPr txBox="1"/>
+          <p:nvPr/>
+        </p:nvSpPr>
+        <p:spPr>
+          <a:xfrm>
+            <a:off x="5230000" y="1950000"/>
+            <a:ext cx="580000" cy="200000"/>
+          </a:xfrm>
+          <a:prstGeom prst="rect">
+            <a:avLst/>
+          </a:prstGeom>
+          <a:noFill/>
+        </p:spPr>
+        <p:txBody>
+          <a:bodyPr wrap="square">
+            <a:spAutoFit/>
+          </a:bodyPr>
+          <a:lstStyle/>
+          <a:p>
+            <a:pPr algn="ctr"/>
+            <a:r>
+              <a:rPr sz="900" b="0">
+                <a:solidFill>
+                  <a:srgbClr val="7F849C"/>
+                </a:solidFill>
+                <a:latin typeface="Segoe UI"/>
+              </a:rPr>
+              <a:t/>
+            </a:r>
+          </a:p>
+        </p:txBody>
+      </p:sp>
+      <p:sp>
+        <p:nvSpPr>
+          <p:cNvPr id="23" name="Rounded Rectangle 22"/>
+          <p:cNvSpPr/>
+          <p:nvPr/>
+        </p:nvSpPr>
+        <p:spPr>
+          <a:xfrm>
+            <a:off x="5890000" y="1750000"/>
+            <a:ext cx="580000" cy="400000"/>
+          </a:xfrm>
+          <a:prstGeom prst="roundRect">
+            <a:avLst/>
+          </a:prstGeom>
+          <a:solidFill>
+            <a:srgbClr val="313244"/>
+          </a:solidFill>
+          <a:ln>
+            <a:noFill/>
+          </a:ln>
+        </p:spPr>
+        <p:style>
+          <a:lnRef idx="1">
+            <a:schemeClr val="accent1"/>
+          </a:lnRef>
+          <a:fillRef idx="3">
+            <a:schemeClr val="accent1"/>
+          </a:fillRef>
+          <a:effectRef idx="2">
+            <a:schemeClr val="accent1"/>
+          </a:effectRef>
+          <a:fontRef idx="minor">
+            <a:schemeClr val="lt1"/>
+          </a:fontRef>
+        </p:style>
+        <p:txBody>
+          <a:bodyPr rtlCol="0" anchor="ctr"/>
+          <a:lstStyle/>
+          <a:p>
+            <a:pPr algn="ctr"/>
+          </a:p>
+        </p:txBody>
+      </p:sp>
+      <p:sp>
+        <p:nvSpPr>
+          <p:cNvPr id="24" name="TextBox 23"/>
+          <p:cNvSpPr txBox="1"/>
+          <p:nvPr/>
+        </p:nvSpPr>
+        <p:spPr>
+          <a:xfrm>
+            <a:off x="5890000" y="1800000"/>
+            <a:ext cx="580000" cy="300000"/>
+          </a:xfrm>
+          <a:prstGeom prst="rect">
+            <a:avLst/>
+          </a:prstGeom>
+          <a:noFill/>
+        </p:spPr>
+        <p:txBody>
+          <a:bodyPr wrap="square">
+            <a:spAutoFit/>
+          </a:bodyPr>
+          <a:lstStyle/>
+          <a:p>
+            <a:pPr algn="ctr"/>
+            <a:r>
+              <a:rPr sz="1100" b="0">
+                <a:solidFill>
+                  <a:srgbClr val="A6E3A1"/>
+                </a:solidFill>
+                <a:latin typeface="Segoe UI"/>
+              </a:rPr>
+              <a:t>Bank N</a:t>
+            </a:r>
+          </a:p>
+        </p:txBody>
+      </p:sp>
+      <p:sp>
+        <p:nvSpPr>
+          <p:cNvPr id="25" name="TextBox 24"/>
+          <p:cNvSpPr txBox="1"/>
+          <p:nvPr/>
+        </p:nvSpPr>
+        <p:spPr>
+          <a:xfrm>
+            <a:off x="5890000" y="1950000"/>
+            <a:ext cx="580000" cy="200000"/>
+          </a:xfrm>
+          <a:prstGeom prst="rect">
+            <a:avLst/>
+          </a:prstGeom>
+          <a:noFill/>
+        </p:spPr>
+        <p:txBody>
+          <a:bodyPr wrap="square">
+            <a:spAutoFit/>
+          </a:bodyPr>
+          <a:lstStyle/>
+          <a:p>
+            <a:pPr algn="ctr"/>
+            <a:r>
+              <a:rPr sz="900" b="0">
+                <a:solidFill>
+                  <a:srgbClr val="7F849C"/>
+                </a:solidFill>
+                <a:latin typeface="Segoe UI"/>
+              </a:rPr>
+              <a:t>XOR Acc</a:t>
+            </a:r>
+          </a:p>
+        </p:txBody>
+      </p:sp>
+      <p:sp>
+        <p:nvSpPr>
+          <p:cNvPr id="26" name="TextBox 25"/>
+          <p:cNvSpPr txBox="1"/>
+          <p:nvPr/>
+        </p:nvSpPr>
+        <p:spPr>
+          <a:xfrm>
+            <a:off x="3100000" y="2200000"/>
+            <a:ext cx="3600000" cy="300000"/>
+          </a:xfrm>
+          <a:prstGeom prst="rect">
+            <a:avLst/>
+          </a:prstGeom>
+          <a:noFill/>
+        </p:spPr>
+        <p:txBody>
+          <a:bodyPr wrap="square">
+            <a:spAutoFit/>
+          </a:bodyPr>
+          <a:lstStyle/>
+          <a:p>
+            <a:pPr algn="ctr"/>
+            <a:r>
+              <a:rPr sz="1000" b="0">
+                <a:solidFill>
+                  <a:srgbClr val="7F849C"/>
+                </a:solidFill>
+                <a:latin typeface="Segoe UI"/>
+              </a:rPr>
+              <a:t>1 cycle per accumulation  •  Independent banks  •  No inter-bank dependencies</a:t>
+            </a:r>
+          </a:p>
+        </p:txBody>
+      </p:sp>
+      <p:sp>
+        <p:nvSpPr>
+          <p:cNvPr id="27" name="TextBox 26"/>
+          <p:cNvSpPr txBox="1"/>
+          <p:nvPr/>
+        </p:nvSpPr>
+        <p:spPr>
+          <a:xfrm>
+            <a:off x="6800000" y="1800000"/>
+            <a:ext cx="400000" cy="400000"/>
+          </a:xfrm>
+          <a:prstGeom prst="rect">
+            <a:avLst/>
+          </a:prstGeom>
+          <a:noFill/>
+        </p:spPr>
+        <p:txBody>
+          <a:bodyPr wrap="square">
+            <a:spAutoFit/>
+          </a:bodyPr>
+          <a:lstStyle/>
+          <a:p>
+            <a:pPr algn="ctr"/>
+            <a:r>
+              <a:rPr sz="2800" b="0">
+                <a:solidFill>
+                  <a:srgbClr val="89B4FA"/>
+                </a:solidFill>
+                <a:latin typeface="Segoe UI"/>
+              </a:rPr>
+              <a:t>→</a:t>
+            </a:r>
+          </a:p>
+        </p:txBody>
+      </p:sp>
+      <p:sp>
+        <p:nvSpPr>
+          <p:cNvPr id="28" name="Rounded Rectangle 27"/>
+          <p:cNvSpPr/>
+          <p:nvPr/>
+        </p:nvSpPr>
+        <p:spPr>
+          <a:xfrm>
+            <a:off x="7300000" y="1600000"/>
+            <a:ext cx="1800000" cy="800000"/>
+          </a:xfrm>
+          <a:prstGeom prst="roundRect">
+            <a:avLst/>
+          </a:prstGeom>
+          <a:solidFill>
+            <a:srgbClr val="1E1E2E"/>
+          </a:solidFill>
+          <a:ln>
+            <a:noFill/>
+          </a:ln>
+        </p:spPr>
+        <p:style>
+          <a:lnRef idx="1">
+            <a:schemeClr val="accent1"/>
+          </a:lnRef>
+          <a:fillRef idx="3">
+            <a:schemeClr val="accent1"/>
+          </a:fillRef>
+          <a:effectRef idx="2">
+            <a:schemeClr val="accent1"/>
+          </a:effectRef>
+          <a:fontRef idx="minor">
+            <a:schemeClr val="lt1"/>
+          </a:fontRef>
+        </p:style>
+        <p:txBody>
+          <a:bodyPr rtlCol="0" anchor="ctr"/>
+          <a:lstStyle/>
+          <a:p>
+            <a:pPr algn="ctr"/>
+          </a:p>
+        </p:txBody>
+      </p:sp>
+      <p:sp>
+        <p:nvSpPr>
+          <p:cNvPr id="29" name="TextBox 28"/>
+          <p:cNvSpPr txBox="1"/>
+          <p:nvPr/>
+        </p:nvSpPr>
+        <p:spPr>
+          <a:xfrm>
+            <a:off x="7300000" y="1650000"/>
+            <a:ext cx="1800000" cy="300000"/>
+          </a:xfrm>
+          <a:prstGeom prst="rect">
+            <a:avLst/>
+          </a:prstGeom>
+          <a:noFill/>
+        </p:spPr>
+        <p:txBody>
+          <a:bodyPr wrap="square">
+            <a:spAutoFit/>
+          </a:bodyPr>
+          <a:lstStyle/>
+          <a:p>
+            <a:pPr algn="ctr"/>
+            <a:r>
+              <a:rPr sz="1400" b="1">
+                <a:solidFill>
+                  <a:srgbClr val="89B4FA"/>
+                </a:solidFill>
+                <a:latin typeface="Segoe UI"/>
+              </a:rPr>
+              <a:t>Binary Merge Tree</a:t>
+            </a:r>
+          </a:p>
+        </p:txBody>
+      </p:sp>
+      <p:sp>
+        <p:nvSpPr>
+          <p:cNvPr id="30" name="TextBox 29"/>
+          <p:cNvSpPr txBox="1"/>
+          <p:nvPr/>
+        </p:nvSpPr>
+        <p:spPr>
+          <a:xfrm>
+            <a:off x="7300000" y="1940000"/>
+            <a:ext cx="1800000" cy="400000"/>
+          </a:xfrm>
+          <a:prstGeom prst="rect">
+            <a:avLst/>
+          </a:prstGeom>
+          <a:noFill/>
+        </p:spPr>
+        <p:txBody>
+          <a:bodyPr wrap="square">
+            <a:spAutoFit/>
+          </a:bodyPr>
+          <a:lstStyle/>
+          <a:p>
+            <a:pPr algn="ctr"/>
+            <a:r>
+              <a:rPr sz="1200" b="0">
+                <a:solidFill>
+                  <a:srgbClr val="CDD6F4"/>
+                </a:solidFill>
+                <a:latin typeface="Segoe UI"/>
+              </a:rPr>
+              <a:t>O(log₂ N) depth
+Purely combinational</a:t>
+            </a:r>
+          </a:p>
+        </p:txBody>
+      </p:sp>
+      <p:sp>
+        <p:nvSpPr>
+          <p:cNvPr id="31" name="TextBox 30"/>
+          <p:cNvSpPr txBox="1"/>
+          <p:nvPr/>
+        </p:nvSpPr>
+        <p:spPr>
+          <a:xfrm>
+            <a:off x="9200000" y="1800000"/>
+            <a:ext cx="400000" cy="400000"/>
+          </a:xfrm>
+          <a:prstGeom prst="rect">
+            <a:avLst/>
+          </a:prstGeom>
+          <a:noFill/>
+        </p:spPr>
+        <p:txBody>
+          <a:bodyPr wrap="square">
+            <a:spAutoFit/>
+          </a:bodyPr>
+          <a:lstStyle/>
+          <a:p>
+            <a:pPr algn="ctr"/>
+            <a:r>
+              <a:rPr sz="2800" b="0">
+                <a:solidFill>
+                  <a:srgbClr val="89B4FA"/>
+                </a:solidFill>
+                <a:latin typeface="Segoe UI"/>
+              </a:rPr>
+              <a:t>→</a:t>
+            </a:r>
+          </a:p>
+        </p:txBody>
+      </p:sp>
+      <p:sp>
+        <p:nvSpPr>
+          <p:cNvPr id="32" name="Rounded Rectangle 31"/>
+          <p:cNvSpPr/>
+          <p:nvPr/>
+        </p:nvSpPr>
+        <p:spPr>
+          <a:xfrm>
+            <a:off x="9700000" y="1600000"/>
+            <a:ext cx="1800000" cy="800000"/>
+          </a:xfrm>
+          <a:prstGeom prst="roundRect">
+            <a:avLst/>
+          </a:prstGeom>
+          <a:solidFill>
+            <a:srgbClr val="1E1E2E"/>
+          </a:solidFill>
+          <a:ln>
+            <a:noFill/>
+          </a:ln>
+        </p:spPr>
+        <p:style>
+          <a:lnRef idx="1">
+            <a:schemeClr val="accent1"/>
+          </a:lnRef>
+          <a:fillRef idx="3">
+            <a:schemeClr val="accent1"/>
+          </a:fillRef>
+          <a:effectRef idx="2">
+            <a:schemeClr val="accent1"/>
+          </a:effectRef>
+          <a:fontRef idx="minor">
+            <a:schemeClr val="lt1"/>
+          </a:fontRef>
+        </p:style>
+        <p:txBody>
+          <a:bodyPr rtlCol="0" anchor="ctr"/>
+          <a:lstStyle/>
+          <a:p>
+            <a:pPr algn="ctr"/>
+          </a:p>
+        </p:txBody>
+      </p:sp>
+      <p:sp>
+        <p:nvSpPr>
+          <p:cNvPr id="33" name="TextBox 32"/>
+          <p:cNvSpPr txBox="1"/>
+          <p:nvPr/>
+        </p:nvSpPr>
+        <p:spPr>
+          <a:xfrm>
+            <a:off x="9700000" y="1650000"/>
+            <a:ext cx="1800000" cy="300000"/>
+          </a:xfrm>
+          <a:prstGeom prst="rect">
+            <a:avLst/>
+          </a:prstGeom>
+          <a:noFill/>
+        </p:spPr>
+        <p:txBody>
+          <a:bodyPr wrap="square">
+            <a:spAutoFit/>
+          </a:bodyPr>
+          <a:lstStyle/>
+          <a:p>
+            <a:pPr algn="ctr"/>
+            <a:r>
+              <a:rPr sz="1600" b="1">
+                <a:solidFill>
+                  <a:srgbClr val="A6E3A1"/>
+                </a:solidFill>
+                <a:latin typeface="Segoe UI"/>
+              </a:rPr>
+              <a:t>Current State</a:t>
+            </a:r>
+          </a:p>
+        </p:txBody>
+      </p:sp>
+      <p:sp>
+        <p:nvSpPr>
+          <p:cNvPr id="34" name="TextBox 33"/>
+          <p:cNvSpPr txBox="1"/>
+          <p:nvPr/>
+        </p:nvSpPr>
+        <p:spPr>
+          <a:xfrm>
+            <a:off x="9700000" y="1940000"/>
+            <a:ext cx="1800000" cy="400000"/>
+          </a:xfrm>
+          <a:prstGeom prst="rect">
+            <a:avLst/>
+          </a:prstGeom>
+          <a:noFill/>
+        </p:spPr>
+        <p:txBody>
+          <a:bodyPr wrap="square">
+            <a:spAutoFit/>
+          </a:bodyPr>
+          <a:lstStyle/>
+          <a:p>
+            <a:pPr algn="ctr"/>
+            <a:r>
+              <a:rPr sz="1200" b="0">
+                <a:solidFill>
+                  <a:srgbClr val="CDD6F4"/>
+                </a:solidFill>
+                <a:latin typeface="Segoe UI"/>
+              </a:rPr>
+              <a:t>S₀ ⊕ merged_acc
+0-cycle reconstruct</a:t>
+            </a:r>
+          </a:p>
+        </p:txBody>
+      </p:sp>
+      <p:sp>
+        <p:nvSpPr>
+          <p:cNvPr id="35" name="TextBox 34"/>
+          <p:cNvSpPr txBox="1"/>
+          <p:nvPr/>
+        </p:nvSpPr>
+        <p:spPr>
+          <a:xfrm>
+            <a:off x="731520" y="3100000"/>
+            <a:ext cx="5000000" cy="300000"/>
+          </a:xfrm>
+          <a:prstGeom prst="rect">
+            <a:avLst/>
+          </a:prstGeom>
+          <a:noFill/>
+        </p:spPr>
+        <p:txBody>
+          <a:bodyPr wrap="square">
+            <a:spAutoFit/>
+          </a:bodyPr>
+          <a:lstStyle/>
+          <a:p>
+            <a:pPr algn="l"/>
+            <a:r>
+              <a:rPr sz="1800" b="1">
+                <a:solidFill>
+                  <a:srgbClr val="89B4FA"/>
+                </a:solidFill>
+                <a:latin typeface="Segoe UI"/>
+              </a:rPr>
+              <a:t>Operation Cycle (All Single-Clock)</a:t>
+            </a:r>
+          </a:p>
+        </p:txBody>
+      </p:sp>
+      <p:sp>
+        <p:nvSpPr>
+          <p:cNvPr id="36" name="Rectangle 35"/>
+          <p:cNvSpPr/>
+          <p:nvPr/>
+        </p:nvSpPr>
+        <p:spPr>
+          <a:xfrm>
+            <a:off x="731520" y="3450000"/>
+            <a:ext cx="10500000" cy="20000"/>
+          </a:xfrm>
+          <a:prstGeom prst="rect">
+            <a:avLst/>
+          </a:prstGeom>
+          <a:solidFill>
+            <a:srgbClr val="89B4FA"/>
+          </a:solidFill>
+          <a:ln>
+            <a:noFill/>
+          </a:ln>
+        </p:spPr>
+        <p:style>
+          <a:lnRef idx="1">
+            <a:schemeClr val="accent1"/>
+          </a:lnRef>
+          <a:fillRef idx="3">
+            <a:schemeClr val="accent1"/>
+          </a:fillRef>
+          <a:effectRef idx="2">
+            <a:schemeClr val="accent1"/>
+          </a:effectRef>
+          <a:fontRef idx="minor">
+            <a:schemeClr val="lt1"/>
+          </a:fontRef>
+        </p:style>
+        <p:txBody>
+          <a:bodyPr rtlCol="0" anchor="ctr"/>
+          <a:lstStyle/>
+          <a:p>
+            <a:pPr algn="ctr"/>
+          </a:p>
+        </p:txBody>
+      </p:sp>
+      <p:sp>
+        <p:nvSpPr>
+          <p:cNvPr id="37" name="Rounded Rectangle 36"/>
+          <p:cNvSpPr/>
+          <p:nvPr/>
+        </p:nvSpPr>
+        <p:spPr>
+          <a:xfrm>
+            <a:off x="731520" y="3600000"/>
+            <a:ext cx="2500000" cy="700000"/>
+          </a:xfrm>
+          <a:prstGeom prst="roundRect">
+            <a:avLst/>
+          </a:prstGeom>
+          <a:solidFill>
+            <a:srgbClr val="1E1E2E"/>
+          </a:solidFill>
+          <a:ln>
+            <a:noFill/>
+          </a:ln>
+        </p:spPr>
+        <p:style>
+          <a:lnRef idx="1">
+            <a:schemeClr val="accent1"/>
+          </a:lnRef>
+          <a:fillRef idx="3">
+            <a:schemeClr val="accent1"/>
+          </a:fillRef>
+          <a:effectRef idx="2">
+            <a:schemeClr val="accent1"/>
+          </a:effectRef>
+          <a:fontRef idx="minor">
+            <a:schemeClr val="lt1"/>
+          </a:fontRef>
+        </p:style>
+        <p:txBody>
+          <a:bodyPr rtlCol="0" anchor="ctr"/>
+          <a:lstStyle/>
+          <a:p>
+            <a:pPr algn="ctr"/>
+          </a:p>
+        </p:txBody>
+      </p:sp>
+      <p:sp>
+        <p:nvSpPr>
+          <p:cNvPr id="38" name="TextBox 37"/>
+          <p:cNvSpPr txBox="1"/>
+          <p:nvPr/>
+        </p:nvSpPr>
+        <p:spPr>
+          <a:xfrm>
+            <a:off x="831520" y="3630000"/>
+            <a:ext cx="2300000" cy="280000"/>
+          </a:xfrm>
+          <a:prstGeom prst="rect">
+            <a:avLst/>
+          </a:prstGeom>
+          <a:noFill/>
+        </p:spPr>
+        <p:txBody>
+          <a:bodyPr wrap="square">
+            <a:spAutoFit/>
+          </a:bodyPr>
+          <a:lstStyle/>
+          <a:p>
+            <a:pPr algn="l"/>
+            <a:r>
+              <a:rPr sz="1600" b="1">
+                <a:solidFill>
+                  <a:srgbClr val="89B4FA"/>
+                </a:solidFill>
+                <a:latin typeface="Segoe UI"/>
+              </a:rPr>
+              <a:t>LOAD</a:t>
+            </a:r>
+          </a:p>
+        </p:txBody>
+      </p:sp>
+      <p:sp>
+        <p:nvSpPr>
+          <p:cNvPr id="39" name="TextBox 38"/>
+          <p:cNvSpPr txBox="1"/>
+          <p:nvPr/>
+        </p:nvSpPr>
+        <p:spPr>
+          <a:xfrm>
+            <a:off x="831520" y="3880000"/>
+            <a:ext cx="2300000" cy="200000"/>
+          </a:xfrm>
+          <a:prstGeom prst="rect">
+            <a:avLst/>
+          </a:prstGeom>
+          <a:noFill/>
+        </p:spPr>
+        <p:txBody>
+          <a:bodyPr wrap="square">
+            <a:spAutoFit/>
+          </a:bodyPr>
+          <a:lstStyle/>
+          <a:p>
+            <a:pPr algn="l"/>
+            <a:r>
+              <a:rPr sz="1100" b="0">
+                <a:solidFill>
+                  <a:srgbClr val="CDD6F4"/>
+                </a:solidFill>
+                <a:latin typeface="Segoe UI"/>
+              </a:rPr>
+              <a:t>Set initial state S₀</a:t>
+            </a:r>
+          </a:p>
+        </p:txBody>
+      </p:sp>
+      <p:sp>
+        <p:nvSpPr>
+          <p:cNvPr id="40" name="TextBox 39"/>
+          <p:cNvSpPr txBox="1"/>
+          <p:nvPr/>
+        </p:nvSpPr>
+        <p:spPr>
+          <a:xfrm>
+            <a:off x="831520" y="4070000"/>
+            <a:ext cx="2300000" cy="200000"/>
+          </a:xfrm>
+          <a:prstGeom prst="rect">
+            <a:avLst/>
+          </a:prstGeom>
+          <a:noFill/>
+        </p:spPr>
+        <p:txBody>
+          <a:bodyPr wrap="square">
+            <a:spAutoFit/>
+          </a:bodyPr>
+          <a:lstStyle/>
+          <a:p>
+            <a:pPr algn="l"/>
+            <a:r>
+              <a:rPr sz="1300" b="1">
+                <a:solidFill>
+                  <a:srgbClr val="A6E3A1"/>
+                </a:solidFill>
+                <a:latin typeface="Segoe UI"/>
+              </a:rPr>
+              <a:t>1 cycle</a:t>
+            </a:r>
+          </a:p>
+        </p:txBody>
+      </p:sp>
+      <p:sp>
+        <p:nvSpPr>
+          <p:cNvPr id="41" name="Rounded Rectangle 40"/>
+          <p:cNvSpPr/>
+          <p:nvPr/>
+        </p:nvSpPr>
+        <p:spPr>
+          <a:xfrm>
+            <a:off x="3431520" y="3600000"/>
+            <a:ext cx="2500000" cy="700000"/>
+          </a:xfrm>
+          <a:prstGeom prst="roundRect">
+            <a:avLst/>
+          </a:prstGeom>
+          <a:solidFill>
+            <a:srgbClr val="1E1E2E"/>
+          </a:solidFill>
+          <a:ln>
+            <a:noFill/>
+          </a:ln>
+        </p:spPr>
+        <p:style>
+          <a:lnRef idx="1">
+            <a:schemeClr val="accent1"/>
+          </a:lnRef>
+          <a:fillRef idx="3">
+            <a:schemeClr val="accent1"/>
+          </a:fillRef>
+          <a:effectRef idx="2">
+            <a:schemeClr val="accent1"/>
+          </a:effectRef>
+          <a:fontRef idx="minor">
+            <a:schemeClr val="lt1"/>
+          </a:fontRef>
+        </p:style>
+        <p:txBody>
+          <a:bodyPr rtlCol="0" anchor="ctr"/>
+          <a:lstStyle/>
+          <a:p>
+            <a:pPr algn="ctr"/>
+          </a:p>
+        </p:txBody>
+      </p:sp>
+      <p:sp>
+        <p:nvSpPr>
+          <p:cNvPr id="42" name="TextBox 41"/>
+          <p:cNvSpPr txBox="1"/>
+          <p:nvPr/>
+        </p:nvSpPr>
+        <p:spPr>
+          <a:xfrm>
+            <a:off x="3531520" y="3630000"/>
+            <a:ext cx="2300000" cy="280000"/>
+          </a:xfrm>
+          <a:prstGeom prst="rect">
+            <a:avLst/>
+          </a:prstGeom>
+          <a:noFill/>
+        </p:spPr>
+        <p:txBody>
+          <a:bodyPr wrap="square">
+            <a:spAutoFit/>
+          </a:bodyPr>
+          <a:lstStyle/>
+          <a:p>
+            <a:pPr algn="l"/>
+            <a:r>
+              <a:rPr sz="1600" b="1">
+                <a:solidFill>
+                  <a:srgbClr val="89B4FA"/>
+                </a:solidFill>
+                <a:latin typeface="Segoe UI"/>
+              </a:rPr>
+              <a:t>ACCUMULATE</a:t>
+            </a:r>
+          </a:p>
+        </p:txBody>
+      </p:sp>
+      <p:sp>
+        <p:nvSpPr>
+          <p:cNvPr id="43" name="TextBox 42"/>
+          <p:cNvSpPr txBox="1"/>
+          <p:nvPr/>
+        </p:nvSpPr>
+        <p:spPr>
+          <a:xfrm>
+            <a:off x="3531520" y="3880000"/>
+            <a:ext cx="2300000" cy="200000"/>
+          </a:xfrm>
+          <a:prstGeom prst="rect">
+            <a:avLst/>
+          </a:prstGeom>
+          <a:noFill/>
+        </p:spPr>
+        <p:txBody>
+          <a:bodyPr wrap="square">
+            <a:spAutoFit/>
+          </a:bodyPr>
+          <a:lstStyle/>
+          <a:p>
+            <a:pPr algn="l"/>
+            <a:r>
+              <a:rPr sz="1100" b="0">
+                <a:solidFill>
+                  <a:srgbClr val="CDD6F4"/>
+                </a:solidFill>
+                <a:latin typeface="Segoe UI"/>
+              </a:rPr>
+              <a:t>XOR delta into assigned bank</a:t>
+            </a:r>
+          </a:p>
+        </p:txBody>
+      </p:sp>
+      <p:sp>
+        <p:nvSpPr>
+          <p:cNvPr id="44" name="TextBox 43"/>
+          <p:cNvSpPr txBox="1"/>
+          <p:nvPr/>
+        </p:nvSpPr>
+        <p:spPr>
+          <a:xfrm>
+            <a:off x="3531520" y="4070000"/>
+            <a:ext cx="2300000" cy="200000"/>
+          </a:xfrm>
+          <a:prstGeom prst="rect">
+            <a:avLst/>
+          </a:prstGeom>
+          <a:noFill/>
+        </p:spPr>
+        <p:txBody>
+          <a:bodyPr wrap="square">
+            <a:spAutoFit/>
+          </a:bodyPr>
+          <a:lstStyle/>
+          <a:p>
+            <a:pPr algn="l"/>
+            <a:r>
+              <a:rPr sz="1300" b="1">
+                <a:solidFill>
+                  <a:srgbClr val="A6E3A1"/>
+                </a:solidFill>
+                <a:latin typeface="Segoe UI"/>
+              </a:rPr>
+              <a:t>1 cycle</a:t>
+            </a:r>
+          </a:p>
+        </p:txBody>
+      </p:sp>
+      <p:sp>
+        <p:nvSpPr>
+          <p:cNvPr id="45" name="Rounded Rectangle 44"/>
+          <p:cNvSpPr/>
+          <p:nvPr/>
+        </p:nvSpPr>
+        <p:spPr>
+          <a:xfrm>
+            <a:off x="6131520" y="3600000"/>
+            <a:ext cx="2500000" cy="700000"/>
+          </a:xfrm>
+          <a:prstGeom prst="roundRect">
+            <a:avLst/>
+          </a:prstGeom>
+          <a:solidFill>
+            <a:srgbClr val="1E1E2E"/>
+          </a:solidFill>
+          <a:ln>
+            <a:noFill/>
+          </a:ln>
+        </p:spPr>
+        <p:style>
+          <a:lnRef idx="1">
+            <a:schemeClr val="accent1"/>
+          </a:lnRef>
+          <a:fillRef idx="3">
+            <a:schemeClr val="accent1"/>
+          </a:fillRef>
+          <a:effectRef idx="2">
+            <a:schemeClr val="accent1"/>
+          </a:effectRef>
+          <a:fontRef idx="minor">
+            <a:schemeClr val="lt1"/>
+          </a:fontRef>
+        </p:style>
+        <p:txBody>
+          <a:bodyPr rtlCol="0" anchor="ctr"/>
+          <a:lstStyle/>
+          <a:p>
+            <a:pPr algn="ctr"/>
+          </a:p>
+        </p:txBody>
+      </p:sp>
+      <p:sp>
+        <p:nvSpPr>
+          <p:cNvPr id="46" name="TextBox 45"/>
+          <p:cNvSpPr txBox="1"/>
+          <p:nvPr/>
+        </p:nvSpPr>
+        <p:spPr>
+          <a:xfrm>
+            <a:off x="6231520" y="3630000"/>
+            <a:ext cx="2300000" cy="280000"/>
+          </a:xfrm>
+          <a:prstGeom prst="rect">
+            <a:avLst/>
+          </a:prstGeom>
+          <a:noFill/>
+        </p:spPr>
+        <p:txBody>
+          <a:bodyPr wrap="square">
+            <a:spAutoFit/>
+          </a:bodyPr>
+          <a:lstStyle/>
+          <a:p>
+            <a:pPr algn="l"/>
+            <a:r>
+              <a:rPr sz="1600" b="1">
+                <a:solidFill>
+                  <a:srgbClr val="89B4FA"/>
+                </a:solidFill>
+                <a:latin typeface="Segoe UI"/>
+              </a:rPr>
+              <a:t>READ</a:t>
+            </a:r>
+          </a:p>
+        </p:txBody>
+      </p:sp>
+      <p:sp>
+        <p:nvSpPr>
+          <p:cNvPr id="47" name="TextBox 46"/>
+          <p:cNvSpPr txBox="1"/>
+          <p:nvPr/>
+        </p:nvSpPr>
+        <p:spPr>
+          <a:xfrm>
+            <a:off x="6231520" y="3880000"/>
+            <a:ext cx="2300000" cy="200000"/>
+          </a:xfrm>
+          <a:prstGeom prst="rect">
+            <a:avLst/>
+          </a:prstGeom>
+          <a:noFill/>
+        </p:spPr>
+        <p:txBody>
+          <a:bodyPr wrap="square">
+            <a:spAutoFit/>
+          </a:bodyPr>
+          <a:lstStyle/>
+          <a:p>
+            <a:pPr algn="l"/>
+            <a:r>
+              <a:rPr sz="1100" b="0">
+                <a:solidFill>
+                  <a:srgbClr val="CDD6F4"/>
+                </a:solidFill>
+                <a:latin typeface="Segoe UI"/>
+              </a:rPr>
+              <a:t>Compute S₀ ⊕ merged_accumulator</a:t>
+            </a:r>
+          </a:p>
+        </p:txBody>
+      </p:sp>
+      <p:sp>
+        <p:nvSpPr>
+          <p:cNvPr id="48" name="TextBox 47"/>
+          <p:cNvSpPr txBox="1"/>
+          <p:nvPr/>
+        </p:nvSpPr>
+        <p:spPr>
+          <a:xfrm>
+            <a:off x="6231520" y="4070000"/>
+            <a:ext cx="2300000" cy="200000"/>
+          </a:xfrm>
+          <a:prstGeom prst="rect">
+            <a:avLst/>
+          </a:prstGeom>
+          <a:noFill/>
+        </p:spPr>
+        <p:txBody>
+          <a:bodyPr wrap="square">
+            <a:spAutoFit/>
+          </a:bodyPr>
+          <a:lstStyle/>
+          <a:p>
+            <a:pPr algn="l"/>
+            <a:r>
+              <a:rPr sz="1300" b="1">
+                <a:solidFill>
+                  <a:srgbClr val="A6E3A1"/>
+                </a:solidFill>
+                <a:latin typeface="Segoe UI"/>
+              </a:rPr>
+              <a:t>1 cycle</a:t>
+            </a:r>
+          </a:p>
+        </p:txBody>
+      </p:sp>
+      <p:sp>
+        <p:nvSpPr>
+          <p:cNvPr id="49" name="Rounded Rectangle 48"/>
+          <p:cNvSpPr/>
+          <p:nvPr/>
+        </p:nvSpPr>
+        <p:spPr>
+          <a:xfrm>
+            <a:off x="8831520" y="3600000"/>
+            <a:ext cx="2500000" cy="700000"/>
+          </a:xfrm>
+          <a:prstGeom prst="roundRect">
+            <a:avLst/>
+          </a:prstGeom>
+          <a:solidFill>
+            <a:srgbClr val="1E1E2E"/>
+          </a:solidFill>
+          <a:ln>
+            <a:noFill/>
+          </a:ln>
+        </p:spPr>
+        <p:style>
+          <a:lnRef idx="1">
+            <a:schemeClr val="accent1"/>
+          </a:lnRef>
+          <a:fillRef idx="3">
+            <a:schemeClr val="accent1"/>
+          </a:fillRef>
+          <a:effectRef idx="2">
+            <a:schemeClr val="accent1"/>
+          </a:effectRef>
+          <a:fontRef idx="minor">
+            <a:schemeClr val="lt1"/>
+          </a:fontRef>
+        </p:style>
+        <p:txBody>
+          <a:bodyPr rtlCol="0" anchor="ctr"/>
+          <a:lstStyle/>
+          <a:p>
+            <a:pPr algn="ctr"/>
+          </a:p>
+        </p:txBody>
+      </p:sp>
+      <p:sp>
+        <p:nvSpPr>
+          <p:cNvPr id="50" name="TextBox 49"/>
+          <p:cNvSpPr txBox="1"/>
+          <p:nvPr/>
+        </p:nvSpPr>
+        <p:spPr>
+          <a:xfrm>
+            <a:off x="8931520" y="3630000"/>
+            <a:ext cx="2300000" cy="280000"/>
+          </a:xfrm>
+          <a:prstGeom prst="rect">
+            <a:avLst/>
+          </a:prstGeom>
+          <a:noFill/>
+        </p:spPr>
+        <p:txBody>
+          <a:bodyPr wrap="square">
+            <a:spAutoFit/>
+          </a:bodyPr>
+          <a:lstStyle/>
+          <a:p>
+            <a:pPr algn="l"/>
+            <a:r>
+              <a:rPr sz="1600" b="1">
+                <a:solidFill>
+                  <a:srgbClr val="89B4FA"/>
+                </a:solidFill>
+                <a:latin typeface="Segoe UI"/>
+              </a:rPr>
+              <a:t>STATUS</a:t>
+            </a:r>
+          </a:p>
+        </p:txBody>
+      </p:sp>
+      <p:sp>
+        <p:nvSpPr>
+          <p:cNvPr id="51" name="TextBox 50"/>
+          <p:cNvSpPr txBox="1"/>
+          <p:nvPr/>
+        </p:nvSpPr>
+        <p:spPr>
+          <a:xfrm>
+            <a:off x="8931520" y="3880000"/>
+            <a:ext cx="2300000" cy="200000"/>
+          </a:xfrm>
+          <a:prstGeom prst="rect">
+            <a:avLst/>
+          </a:prstGeom>
+          <a:noFill/>
+        </p:spPr>
+        <p:txBody>
+          <a:bodyPr wrap="square">
+            <a:spAutoFit/>
+          </a:bodyPr>
+          <a:lstStyle/>
+          <a:p>
+            <a:pPr algn="l"/>
+            <a:r>
+              <a:rPr sz="1100" b="0">
+                <a:solidFill>
+                  <a:srgbClr val="CDD6F4"/>
+                </a:solidFill>
+                <a:latin typeface="Segoe UI"/>
+              </a:rPr>
+              <a:t>Check if accumulator is zero</a:t>
+            </a:r>
+          </a:p>
+        </p:txBody>
+      </p:sp>
+      <p:sp>
+        <p:nvSpPr>
+          <p:cNvPr id="52" name="TextBox 51"/>
+          <p:cNvSpPr txBox="1"/>
+          <p:nvPr/>
+        </p:nvSpPr>
+        <p:spPr>
+          <a:xfrm>
+            <a:off x="8931520" y="4070000"/>
+            <a:ext cx="2300000" cy="200000"/>
+          </a:xfrm>
+          <a:prstGeom prst="rect">
+            <a:avLst/>
+          </a:prstGeom>
+          <a:noFill/>
+        </p:spPr>
+        <p:txBody>
+          <a:bodyPr wrap="square">
+            <a:spAutoFit/>
+          </a:bodyPr>
+          <a:lstStyle/>
+          <a:p>
+            <a:pPr algn="l"/>
+            <a:r>
+              <a:rPr sz="1300" b="1">
+                <a:solidFill>
+                  <a:srgbClr val="A6E3A1"/>
+                </a:solidFill>
+                <a:latin typeface="Segoe UI"/>
+              </a:rPr>
+              <a:t>1 cycle</a:t>
+            </a:r>
+          </a:p>
+        </p:txBody>
+      </p:sp>
+      <p:sp>
+        <p:nvSpPr>
+          <p:cNvPr id="53" name="TextBox 52"/>
+          <p:cNvSpPr txBox="1"/>
+          <p:nvPr/>
+        </p:nvSpPr>
+        <p:spPr>
+          <a:xfrm>
+            <a:off x="731520" y="4600000"/>
+            <a:ext cx="5000000" cy="300000"/>
+          </a:xfrm>
+          <a:prstGeom prst="rect">
+            <a:avLst/>
+          </a:prstGeom>
+          <a:noFill/>
+        </p:spPr>
+        <p:txBody>
+          <a:bodyPr wrap="square">
+            <a:spAutoFit/>
+          </a:bodyPr>
+          <a:lstStyle/>
+          <a:p>
+            <a:pPr algn="l"/>
+            <a:r>
+              <a:rPr sz="1800" b="1">
+                <a:solidFill>
+                  <a:srgbClr val="89B4FA"/>
+                </a:solidFill>
+                <a:latin typeface="Segoe UI"/>
+              </a:rPr>
+              <a:t>Key Design Decisions</a:t>
+            </a:r>
+          </a:p>
+        </p:txBody>
+      </p:sp>
+      <p:sp>
+        <p:nvSpPr>
+          <p:cNvPr id="54" name="Rectangle 53"/>
+          <p:cNvSpPr/>
+          <p:nvPr/>
+        </p:nvSpPr>
+        <p:spPr>
+          <a:xfrm>
+            <a:off x="731520" y="4950000"/>
+            <a:ext cx="10500000" cy="20000"/>
+          </a:xfrm>
+          <a:prstGeom prst="rect">
+            <a:avLst/>
+          </a:prstGeom>
+          <a:solidFill>
+            <a:srgbClr val="89B4FA"/>
+          </a:solidFill>
+          <a:ln>
+            <a:noFill/>
+          </a:ln>
+        </p:spPr>
+        <p:style>
+          <a:lnRef idx="1">
+            <a:schemeClr val="accent1"/>
+          </a:lnRef>
+          <a:fillRef idx="3">
+            <a:schemeClr val="accent1"/>
+          </a:fillRef>
+          <a:effectRef idx="2">
+            <a:schemeClr val="accent1"/>
+          </a:effectRef>
+          <a:fontRef idx="minor">
+            <a:schemeClr val="lt1"/>
+          </a:fontRef>
+        </p:style>
+        <p:txBody>
+          <a:bodyPr rtlCol="0" anchor="ctr"/>
+          <a:lstStyle/>
+          <a:p>
+            <a:pPr algn="ctr"/>
+          </a:p>
+        </p:txBody>
+      </p:sp>
+      <p:sp>
+        <p:nvSpPr>
+          <p:cNvPr id="55" name="TextBox 54"/>
+          <p:cNvSpPr txBox="1"/>
+          <p:nvPr/>
+        </p:nvSpPr>
+        <p:spPr>
+          <a:xfrm>
+            <a:off x="731520" y="5100000"/>
+            <a:ext cx="2400000" cy="250000"/>
+          </a:xfrm>
+          <a:prstGeom prst="rect">
+            <a:avLst/>
+          </a:prstGeom>
+          <a:noFill/>
+        </p:spPr>
+        <p:txBody>
+          <a:bodyPr wrap="square">
+            <a:spAutoFit/>
+          </a:bodyPr>
+          <a:lstStyle/>
+          <a:p>
+            <a:pPr algn="l"/>
+            <a:r>
+              <a:rPr sz="1300" b="1">
+                <a:solidFill>
+                  <a:srgbClr val="A6E3A1"/>
+                </a:solidFill>
+                <a:latin typeface="Segoe UI"/>
+              </a:rPr>
+              <a:t>Round-robin distribution</a:t>
+            </a:r>
+          </a:p>
+        </p:txBody>
+      </p:sp>
+      <p:sp>
+        <p:nvSpPr>
+          <p:cNvPr id="56" name="TextBox 55"/>
+          <p:cNvSpPr txBox="1"/>
+          <p:nvPr/>
+        </p:nvSpPr>
+        <p:spPr>
+          <a:xfrm>
+            <a:off x="3231520" y="5100000"/>
+            <a:ext cx="2800000" cy="250000"/>
+          </a:xfrm>
+          <a:prstGeom prst="rect">
+            <a:avLst/>
+          </a:prstGeom>
+          <a:noFill/>
+        </p:spPr>
+        <p:txBody>
+          <a:bodyPr wrap="square">
+            <a:spAutoFit/>
+          </a:bodyPr>
+          <a:lstStyle/>
+          <a:p>
+            <a:pPr algn="l"/>
+            <a:r>
+              <a:rPr sz="1200" b="0">
+                <a:solidFill>
+                  <a:srgbClr val="7F849C"/>
+                </a:solidFill>
+                <a:latin typeface="Segoe UI"/>
+              </a:rPr>
+              <a:t>Even bank utilization, no load balancer</a:t>
+            </a:r>
+          </a:p>
+        </p:txBody>
+      </p:sp>
+      <p:sp>
+        <p:nvSpPr>
+          <p:cNvPr id="57" name="TextBox 56"/>
+          <p:cNvSpPr txBox="1"/>
+          <p:nvPr/>
+        </p:nvSpPr>
+        <p:spPr>
+          <a:xfrm>
+            <a:off x="6131520" y="5100000"/>
+            <a:ext cx="2400000" cy="250000"/>
+          </a:xfrm>
+          <a:prstGeom prst="rect">
+            <a:avLst/>
+          </a:prstGeom>
+          <a:noFill/>
+        </p:spPr>
+        <p:txBody>
+          <a:bodyPr wrap="square">
+            <a:spAutoFit/>
+          </a:bodyPr>
+          <a:lstStyle/>
+          <a:p>
+            <a:pPr algn="l"/>
+            <a:r>
+              <a:rPr sz="1300" b="1">
+                <a:solidFill>
+                  <a:srgbClr val="A6E3A1"/>
+                </a:solidFill>
+                <a:latin typeface="Segoe UI"/>
+              </a:rPr>
+              <a:t>Binary merge tree</a:t>
+            </a:r>
+          </a:p>
+        </p:txBody>
+      </p:sp>
+      <p:sp>
+        <p:nvSpPr>
+          <p:cNvPr id="58" name="TextBox 57"/>
+          <p:cNvSpPr txBox="1"/>
+          <p:nvPr/>
+        </p:nvSpPr>
+        <p:spPr>
+          <a:xfrm>
+            <a:off x="8631520" y="5100000"/>
+            <a:ext cx="2800000" cy="250000"/>
+          </a:xfrm>
+          <a:prstGeom prst="rect">
+            <a:avLst/>
+          </a:prstGeom>
+          <a:noFill/>
+        </p:spPr>
+        <p:txBody>
+          <a:bodyPr wrap="square">
+            <a:spAutoFit/>
+          </a:bodyPr>
+          <a:lstStyle/>
+          <a:p>
+            <a:pPr algn="l"/>
+            <a:r>
+              <a:rPr sz="1200" b="0">
+                <a:solidFill>
+                  <a:srgbClr val="7F849C"/>
+                </a:solidFill>
+                <a:latin typeface="Segoe UI"/>
+              </a:rPr>
+              <a:t>O(log₂ N) depth, purely combinational</a:t>
+            </a:r>
+          </a:p>
+        </p:txBody>
+      </p:sp>
+      <p:sp>
+        <p:nvSpPr>
+          <p:cNvPr id="59" name="TextBox 58"/>
+          <p:cNvSpPr txBox="1"/>
+          <p:nvPr/>
+        </p:nvSpPr>
+        <p:spPr>
+          <a:xfrm>
+            <a:off x="731520" y="5650000"/>
+            <a:ext cx="2400000" cy="250000"/>
+          </a:xfrm>
+          <a:prstGeom prst="rect">
+            <a:avLst/>
+          </a:prstGeom>
+          <a:noFill/>
+        </p:spPr>
+        <p:txBody>
+          <a:bodyPr wrap="square">
+            <a:spAutoFit/>
+          </a:bodyPr>
+          <a:lstStyle/>
+          <a:p>
+            <a:pPr algn="l"/>
+            <a:r>
+              <a:rPr sz="1300" b="1">
+                <a:solidFill>
+                  <a:srgbClr val="A6E3A1"/>
+                </a:solidFill>
+                <a:latin typeface="Segoe UI"/>
+              </a:rPr>
+              <a:t>syn_keep attributes</a:t>
+            </a:r>
+          </a:p>
+        </p:txBody>
+      </p:sp>
+      <p:sp>
+        <p:nvSpPr>
+          <p:cNvPr id="60" name="TextBox 59"/>
+          <p:cNvSpPr txBox="1"/>
+          <p:nvPr/>
+        </p:nvSpPr>
+        <p:spPr>
+          <a:xfrm>
+            <a:off x="3231520" y="5650000"/>
+            <a:ext cx="2800000" cy="250000"/>
+          </a:xfrm>
+          <a:prstGeom prst="rect">
+            <a:avLst/>
+          </a:prstGeom>
+          <a:noFill/>
+        </p:spPr>
+        <p:txBody>
+          <a:bodyPr wrap="square">
+            <a:spAutoFit/>
+          </a:bodyPr>
+          <a:lstStyle/>
+          <a:p>
+            <a:pPr algn="l"/>
+            <a:r>
+              <a:rPr sz="1200" b="0">
+                <a:solidFill>
+                  <a:srgbClr val="7F849C"/>
+                </a:solidFill>
+                <a:latin typeface="Segoe UI"/>
+              </a:rPr>
+              <a:t>Prevent carry-chain inference (+42% Fmax)</a:t>
+            </a:r>
+          </a:p>
+        </p:txBody>
+      </p:sp>
+      <p:sp>
+        <p:nvSpPr>
+          <p:cNvPr id="61" name="TextBox 60"/>
+          <p:cNvSpPr txBox="1"/>
+          <p:nvPr/>
+        </p:nvSpPr>
+        <p:spPr>
+          <a:xfrm>
+            <a:off x="6131520" y="5650000"/>
+            <a:ext cx="2400000" cy="250000"/>
+          </a:xfrm>
+          <a:prstGeom prst="rect">
+            <a:avLst/>
+          </a:prstGeom>
+          <a:noFill/>
+        </p:spPr>
+        <p:txBody>
+          <a:bodyPr wrap="square">
+            <a:spAutoFit/>
+          </a:bodyPr>
+          <a:lstStyle/>
+          <a:p>
+            <a:pPr algn="l"/>
+            <a:r>
+              <a:rPr sz="1300" b="1">
+                <a:solidFill>
+                  <a:srgbClr val="A6E3A1"/>
+                </a:solidFill>
+                <a:latin typeface="Segoe UI"/>
+              </a:rPr>
+              <a:t>~65 LUT + 64 FF per bank</a:t>
+            </a:r>
+          </a:p>
+        </p:txBody>
+      </p:sp>
+      <p:sp>
+        <p:nvSpPr>
+          <p:cNvPr id="62" name="TextBox 61"/>
+          <p:cNvSpPr txBox="1"/>
+          <p:nvPr/>
+        </p:nvSpPr>
+        <p:spPr>
+          <a:xfrm>
+            <a:off x="8631520" y="5650000"/>
+            <a:ext cx="2800000" cy="250000"/>
+          </a:xfrm>
+          <a:prstGeom prst="rect">
+            <a:avLst/>
+          </a:prstGeom>
+          <a:noFill/>
+        </p:spPr>
+        <p:txBody>
+          <a:bodyPr wrap="square">
+            <a:spAutoFit/>
+          </a:bodyPr>
+          <a:lstStyle/>
+          <a:p>
+            <a:pPr algn="l"/>
+            <a:r>
+              <a:rPr sz="1200" b="0">
+                <a:solidFill>
+                  <a:srgbClr val="7F849C"/>
+                </a:solidFill>
+                <a:latin typeface="Segoe UI"/>
+              </a:rPr>
+              <a:t>Sub-linear resource growth</a:t>
+            </a:r>
+          </a:p>
+        </p:txBody>
+      </p:sp>
+      <p:sp>
+        <p:nvSpPr>
+          <p:cNvPr id="63" name="TextBox 62"/>
+          <p:cNvSpPr txBox="1"/>
+          <p:nvPr/>
+        </p:nvSpPr>
+        <p:spPr>
+          <a:xfrm>
+            <a:off x="11277295" y="6492240"/>
+            <a:ext cx="700000" cy="300000"/>
+          </a:xfrm>
+          <a:prstGeom prst="rect">
+            <a:avLst/>
+          </a:prstGeom>
+          <a:noFill/>
+        </p:spPr>
+        <p:txBody>
+          <a:bodyPr wrap="square">
+            <a:spAutoFit/>
+          </a:bodyPr>
+          <a:lstStyle/>
+          <a:p>
+            <a:pPr algn="r"/>
+            <a:r>
+              <a:rPr sz="1000" b="0">
+                <a:solidFill>
+                  <a:srgbClr val="7F849C"/>
+                </a:solidFill>
+                <a:latin typeface="Segoe UI"/>
+              </a:rPr>
+              <a:t>7/15</a:t>
+            </a:r>
+          </a:p>
+        </p:txBody>
+      </p:sp>
     </p:spTree>
     <p:extLst>
       <p:ext uri="{BB962C8B-B14F-4D97-AF65-F5344CB8AC3E}">
@@ -24420,7 +31666,7 @@
                 </a:solidFill>
                 <a:latin typeface="Segoe UI"/>
               </a:rPr>
-              <a:t>7/10</a:t>
+              <a:t>8/15</a:t>
             </a:r>
           </a:p>
         </p:txBody>
@@ -25387,7 +32633,7 @@
                 </a:solidFill>
                 <a:latin typeface="Segoe UI"/>
               </a:rPr>
-              <a:t>314 tests</a:t>
+              <a:t>353 tests</a:t>
             </a:r>
           </a:p>
         </p:txBody>
@@ -26795,7 +34041,7 @@
                 </a:solidFill>
                 <a:latin typeface="Segoe UI"/>
               </a:rPr>
-              <a:t>5/10</a:t>
+              <a:t>9/15</a:t>
             </a:r>
           </a:p>
         </p:txBody>

--- a/business/pitch_deck/ATOMiK_Investor_Deck.pptx
+++ b/business/pitch_deck/ATOMiK_Investor_Deck.pptx
@@ -5,7 +5,7 @@
     <p:sldMasterId id="2147483648" r:id="rId1"/>
   </p:sldMasterIdLst>
   <p:notesMasterIdLst>
-    <p:notesMasterId r:id="rId18"/>
+    <p:notesMasterId r:id="rId17"/>
   </p:notesMasterIdLst>
   <p:sldIdLst>
     <p:sldId id="256" r:id="rId2"/>
@@ -143,2247 +143,9 @@
 <file path=ppt/revisionInfo.xml><?xml version="1.0" encoding="utf-8"?>
 <p1510:revInfo xmlns:a="http://schemas.openxmlformats.org/drawingml/2006/main" xmlns:r="http://schemas.openxmlformats.org/officeDocument/2006/relationships" xmlns:p1510="http://schemas.microsoft.com/office/powerpoint/2015/10/main">
   <p1510:revLst>
-    <p1510:client id="{D614558C-10A4-4989-93D8-98B84FC007FF}" v="17" dt="2026-02-03T20:42:43.590"/>
+    <p1510:client id="{B6141F78-074F-4D7D-9A53-A3CE91297885}" v="299" dt="2026-03-10T00:50:20.102"/>
   </p1510:revLst>
 </p1510:revInfo>
-</file>
-
-<file path=ppt/changesInfos/changesInfo1.xml><?xml version="1.0" encoding="utf-8"?>
-<pc:chgInfo xmlns:a="http://schemas.openxmlformats.org/drawingml/2006/main" xmlns:r="http://schemas.openxmlformats.org/officeDocument/2006/relationships" xmlns:ac="http://schemas.microsoft.com/office/drawing/2013/main/command" xmlns:pc="http://schemas.microsoft.com/office/powerpoint/2013/main/command">
-  <pc:docChgLst>
-    <pc:chgData name="Matthew Rockwell" userId="be3989a97b66b923" providerId="LiveId" clId="{B89F934C-8C3B-4D2B-ADD7-B5452E27AB91}"/>
-    <pc:docChg chg="undo redo custSel addSld modSld sldOrd">
-      <pc:chgData name="Matthew Rockwell" userId="be3989a97b66b923" providerId="LiveId" clId="{B89F934C-8C3B-4D2B-ADD7-B5452E27AB91}" dt="2026-02-03T20:42:47.398" v="1669" actId="1076"/>
-      <pc:docMkLst>
-        <pc:docMk/>
-      </pc:docMkLst>
-      <pc:sldChg chg="addSp modSp mod modNotesTx">
-        <pc:chgData name="Matthew Rockwell" userId="be3989a97b66b923" providerId="LiveId" clId="{B89F934C-8C3B-4D2B-ADD7-B5452E27AB91}" dt="2026-02-03T20:28:47.212" v="1112" actId="20577"/>
-        <pc:sldMkLst>
-          <pc:docMk/>
-          <pc:sldMk cId="0" sldId="256"/>
-        </pc:sldMkLst>
-        <pc:spChg chg="mod">
-          <ac:chgData name="Matthew Rockwell" userId="be3989a97b66b923" providerId="LiveId" clId="{B89F934C-8C3B-4D2B-ADD7-B5452E27AB91}" dt="2026-02-03T08:46:24.668" v="292" actId="1076"/>
-          <ac:spMkLst>
-            <pc:docMk/>
-            <pc:sldMk cId="0" sldId="256"/>
-            <ac:spMk id="3" creationId="{00000000-0000-0000-0000-000000000000}"/>
-          </ac:spMkLst>
-        </pc:spChg>
-        <pc:spChg chg="mod">
-          <ac:chgData name="Matthew Rockwell" userId="be3989a97b66b923" providerId="LiveId" clId="{B89F934C-8C3B-4D2B-ADD7-B5452E27AB91}" dt="2026-02-03T08:47:03.895" v="298" actId="1076"/>
-          <ac:spMkLst>
-            <pc:docMk/>
-            <pc:sldMk cId="0" sldId="256"/>
-            <ac:spMk id="4" creationId="{00000000-0000-0000-0000-000000000000}"/>
-          </ac:spMkLst>
-        </pc:spChg>
-        <pc:spChg chg="mod">
-          <ac:chgData name="Matthew Rockwell" userId="be3989a97b66b923" providerId="LiveId" clId="{B89F934C-8C3B-4D2B-ADD7-B5452E27AB91}" dt="2026-02-03T19:42:48.527" v="533" actId="1076"/>
-          <ac:spMkLst>
-            <pc:docMk/>
-            <pc:sldMk cId="0" sldId="256"/>
-            <ac:spMk id="5" creationId="{00000000-0000-0000-0000-000000000000}"/>
-          </ac:spMkLst>
-        </pc:spChg>
-        <pc:spChg chg="mod">
-          <ac:chgData name="Matthew Rockwell" userId="be3989a97b66b923" providerId="LiveId" clId="{B89F934C-8C3B-4D2B-ADD7-B5452E27AB91}" dt="2026-02-03T20:12:56.391" v="857" actId="115"/>
-          <ac:spMkLst>
-            <pc:docMk/>
-            <pc:sldMk cId="0" sldId="256"/>
-            <ac:spMk id="6" creationId="{00000000-0000-0000-0000-000000000000}"/>
-          </ac:spMkLst>
-        </pc:spChg>
-        <pc:spChg chg="mod">
-          <ac:chgData name="Matthew Rockwell" userId="be3989a97b66b923" providerId="LiveId" clId="{B89F934C-8C3B-4D2B-ADD7-B5452E27AB91}" dt="2026-02-03T19:42:46.310" v="532" actId="1076"/>
-          <ac:spMkLst>
-            <pc:docMk/>
-            <pc:sldMk cId="0" sldId="256"/>
-            <ac:spMk id="7" creationId="{00000000-0000-0000-0000-000000000000}"/>
-          </ac:spMkLst>
-        </pc:spChg>
-        <pc:spChg chg="mod">
-          <ac:chgData name="Matthew Rockwell" userId="be3989a97b66b923" providerId="LiveId" clId="{B89F934C-8C3B-4D2B-ADD7-B5452E27AB91}" dt="2026-02-03T20:11:47.720" v="849" actId="1076"/>
-          <ac:spMkLst>
-            <pc:docMk/>
-            <pc:sldMk cId="0" sldId="256"/>
-            <ac:spMk id="8" creationId="{00000000-0000-0000-0000-000000000000}"/>
-          </ac:spMkLst>
-        </pc:spChg>
-        <pc:spChg chg="mod">
-          <ac:chgData name="Matthew Rockwell" userId="be3989a97b66b923" providerId="LiveId" clId="{B89F934C-8C3B-4D2B-ADD7-B5452E27AB91}" dt="2026-02-03T20:11:47.720" v="849" actId="1076"/>
-          <ac:spMkLst>
-            <pc:docMk/>
-            <pc:sldMk cId="0" sldId="256"/>
-            <ac:spMk id="9" creationId="{00000000-0000-0000-0000-000000000000}"/>
-          </ac:spMkLst>
-        </pc:spChg>
-        <pc:spChg chg="mod">
-          <ac:chgData name="Matthew Rockwell" userId="be3989a97b66b923" providerId="LiveId" clId="{B89F934C-8C3B-4D2B-ADD7-B5452E27AB91}" dt="2026-02-03T20:12:11.173" v="851" actId="1076"/>
-          <ac:spMkLst>
-            <pc:docMk/>
-            <pc:sldMk cId="0" sldId="256"/>
-            <ac:spMk id="10" creationId="{00000000-0000-0000-0000-000000000000}"/>
-          </ac:spMkLst>
-        </pc:spChg>
-        <pc:spChg chg="mod">
-          <ac:chgData name="Matthew Rockwell" userId="be3989a97b66b923" providerId="LiveId" clId="{B89F934C-8C3B-4D2B-ADD7-B5452E27AB91}" dt="2026-02-03T08:47:17.075" v="302" actId="1076"/>
-          <ac:spMkLst>
-            <pc:docMk/>
-            <pc:sldMk cId="0" sldId="256"/>
-            <ac:spMk id="11" creationId="{00000000-0000-0000-0000-000000000000}"/>
-          </ac:spMkLst>
-        </pc:spChg>
-        <pc:spChg chg="mod">
-          <ac:chgData name="Matthew Rockwell" userId="be3989a97b66b923" providerId="LiveId" clId="{B89F934C-8C3B-4D2B-ADD7-B5452E27AB91}" dt="2026-02-03T20:11:47.720" v="849" actId="1076"/>
-          <ac:spMkLst>
-            <pc:docMk/>
-            <pc:sldMk cId="0" sldId="256"/>
-            <ac:spMk id="12" creationId="{00000000-0000-0000-0000-000000000000}"/>
-          </ac:spMkLst>
-        </pc:spChg>
-        <pc:spChg chg="mod">
-          <ac:chgData name="Matthew Rockwell" userId="be3989a97b66b923" providerId="LiveId" clId="{B89F934C-8C3B-4D2B-ADD7-B5452E27AB91}" dt="2026-02-03T20:12:11.173" v="851" actId="1076"/>
-          <ac:spMkLst>
-            <pc:docMk/>
-            <pc:sldMk cId="0" sldId="256"/>
-            <ac:spMk id="13" creationId="{00000000-0000-0000-0000-000000000000}"/>
-          </ac:spMkLst>
-        </pc:spChg>
-        <pc:spChg chg="mod">
-          <ac:chgData name="Matthew Rockwell" userId="be3989a97b66b923" providerId="LiveId" clId="{B89F934C-8C3B-4D2B-ADD7-B5452E27AB91}" dt="2026-02-03T20:11:47.720" v="849" actId="1076"/>
-          <ac:spMkLst>
-            <pc:docMk/>
-            <pc:sldMk cId="0" sldId="256"/>
-            <ac:spMk id="14" creationId="{00000000-0000-0000-0000-000000000000}"/>
-          </ac:spMkLst>
-        </pc:spChg>
-        <pc:spChg chg="mod">
-          <ac:chgData name="Matthew Rockwell" userId="be3989a97b66b923" providerId="LiveId" clId="{B89F934C-8C3B-4D2B-ADD7-B5452E27AB91}" dt="2026-02-03T20:11:47.720" v="849" actId="1076"/>
-          <ac:spMkLst>
-            <pc:docMk/>
-            <pc:sldMk cId="0" sldId="256"/>
-            <ac:spMk id="15" creationId="{00000000-0000-0000-0000-000000000000}"/>
-          </ac:spMkLst>
-        </pc:spChg>
-        <pc:spChg chg="mod">
-          <ac:chgData name="Matthew Rockwell" userId="be3989a97b66b923" providerId="LiveId" clId="{B89F934C-8C3B-4D2B-ADD7-B5452E27AB91}" dt="2026-02-03T20:12:11.173" v="851" actId="1076"/>
-          <ac:spMkLst>
-            <pc:docMk/>
-            <pc:sldMk cId="0" sldId="256"/>
-            <ac:spMk id="16" creationId="{00000000-0000-0000-0000-000000000000}"/>
-          </ac:spMkLst>
-        </pc:spChg>
-        <pc:spChg chg="mod">
-          <ac:chgData name="Matthew Rockwell" userId="be3989a97b66b923" providerId="LiveId" clId="{B89F934C-8C3B-4D2B-ADD7-B5452E27AB91}" dt="2026-02-03T20:11:47.720" v="849" actId="1076"/>
-          <ac:spMkLst>
-            <pc:docMk/>
-            <pc:sldMk cId="0" sldId="256"/>
-            <ac:spMk id="17" creationId="{00000000-0000-0000-0000-000000000000}"/>
-          </ac:spMkLst>
-        </pc:spChg>
-        <pc:spChg chg="mod">
-          <ac:chgData name="Matthew Rockwell" userId="be3989a97b66b923" providerId="LiveId" clId="{B89F934C-8C3B-4D2B-ADD7-B5452E27AB91}" dt="2026-02-03T20:11:47.720" v="849" actId="1076"/>
-          <ac:spMkLst>
-            <pc:docMk/>
-            <pc:sldMk cId="0" sldId="256"/>
-            <ac:spMk id="18" creationId="{00000000-0000-0000-0000-000000000000}"/>
-          </ac:spMkLst>
-        </pc:spChg>
-        <pc:spChg chg="mod">
-          <ac:chgData name="Matthew Rockwell" userId="be3989a97b66b923" providerId="LiveId" clId="{B89F934C-8C3B-4D2B-ADD7-B5452E27AB91}" dt="2026-02-03T20:12:11.173" v="851" actId="1076"/>
-          <ac:spMkLst>
-            <pc:docMk/>
-            <pc:sldMk cId="0" sldId="256"/>
-            <ac:spMk id="19" creationId="{00000000-0000-0000-0000-000000000000}"/>
-          </ac:spMkLst>
-        </pc:spChg>
-        <pc:spChg chg="mod">
-          <ac:chgData name="Matthew Rockwell" userId="be3989a97b66b923" providerId="LiveId" clId="{B89F934C-8C3B-4D2B-ADD7-B5452E27AB91}" dt="2026-02-03T08:16:34.535" v="24" actId="1076"/>
-          <ac:spMkLst>
-            <pc:docMk/>
-            <pc:sldMk cId="0" sldId="256"/>
-            <ac:spMk id="20" creationId="{00000000-0000-0000-0000-000000000000}"/>
-          </ac:spMkLst>
-        </pc:spChg>
-        <pc:picChg chg="add mod">
-          <ac:chgData name="Matthew Rockwell" userId="be3989a97b66b923" providerId="LiveId" clId="{B89F934C-8C3B-4D2B-ADD7-B5452E27AB91}" dt="2026-02-03T20:11:56.192" v="850" actId="1076"/>
-          <ac:picMkLst>
-            <pc:docMk/>
-            <pc:sldMk cId="0" sldId="256"/>
-            <ac:picMk id="23" creationId="{F1A8A962-12C9-7356-E89F-372FA2904C6B}"/>
-          </ac:picMkLst>
-        </pc:picChg>
-        <pc:picChg chg="add mod">
-          <ac:chgData name="Matthew Rockwell" userId="be3989a97b66b923" providerId="LiveId" clId="{B89F934C-8C3B-4D2B-ADD7-B5452E27AB91}" dt="2026-02-03T08:18:30.748" v="39" actId="14100"/>
-          <ac:picMkLst>
-            <pc:docMk/>
-            <pc:sldMk cId="0" sldId="256"/>
-            <ac:picMk id="24" creationId="{70A1005D-65CF-A8ED-DAC8-03221AC798A8}"/>
-          </ac:picMkLst>
-        </pc:picChg>
-        <pc:picChg chg="add mod">
-          <ac:chgData name="Matthew Rockwell" userId="be3989a97b66b923" providerId="LiveId" clId="{B89F934C-8C3B-4D2B-ADD7-B5452E27AB91}" dt="2026-02-03T20:12:18.396" v="852" actId="1076"/>
-          <ac:picMkLst>
-            <pc:docMk/>
-            <pc:sldMk cId="0" sldId="256"/>
-            <ac:picMk id="25" creationId="{8EE4E9B9-DBD8-F328-E3E6-E37776204195}"/>
-          </ac:picMkLst>
-        </pc:picChg>
-        <pc:picChg chg="add mod">
-          <ac:chgData name="Matthew Rockwell" userId="be3989a97b66b923" providerId="LiveId" clId="{B89F934C-8C3B-4D2B-ADD7-B5452E27AB91}" dt="2026-02-03T08:19:05.497" v="48" actId="1076"/>
-          <ac:picMkLst>
-            <pc:docMk/>
-            <pc:sldMk cId="0" sldId="256"/>
-            <ac:picMk id="26" creationId="{0DD58A02-0623-905F-DF05-119B9F8FF818}"/>
-          </ac:picMkLst>
-        </pc:picChg>
-      </pc:sldChg>
-      <pc:sldChg chg="modSp mod modNotesTx">
-        <pc:chgData name="Matthew Rockwell" userId="be3989a97b66b923" providerId="LiveId" clId="{B89F934C-8C3B-4D2B-ADD7-B5452E27AB91}" dt="2026-02-03T20:30:22.727" v="1133" actId="1076"/>
-        <pc:sldMkLst>
-          <pc:docMk/>
-          <pc:sldMk cId="0" sldId="257"/>
-        </pc:sldMkLst>
-        <pc:spChg chg="mod">
-          <ac:chgData name="Matthew Rockwell" userId="be3989a97b66b923" providerId="LiveId" clId="{B89F934C-8C3B-4D2B-ADD7-B5452E27AB91}" dt="2026-02-03T20:29:16.544" v="1125" actId="1076"/>
-          <ac:spMkLst>
-            <pc:docMk/>
-            <pc:sldMk cId="0" sldId="257"/>
-            <ac:spMk id="3" creationId="{00000000-0000-0000-0000-000000000000}"/>
-          </ac:spMkLst>
-        </pc:spChg>
-        <pc:spChg chg="mod">
-          <ac:chgData name="Matthew Rockwell" userId="be3989a97b66b923" providerId="LiveId" clId="{B89F934C-8C3B-4D2B-ADD7-B5452E27AB91}" dt="2026-02-03T19:43:57.572" v="544" actId="14100"/>
-          <ac:spMkLst>
-            <pc:docMk/>
-            <pc:sldMk cId="0" sldId="257"/>
-            <ac:spMk id="5" creationId="{00000000-0000-0000-0000-000000000000}"/>
-          </ac:spMkLst>
-        </pc:spChg>
-        <pc:spChg chg="mod">
-          <ac:chgData name="Matthew Rockwell" userId="be3989a97b66b923" providerId="LiveId" clId="{B89F934C-8C3B-4D2B-ADD7-B5452E27AB91}" dt="2026-02-03T20:29:06.130" v="1124" actId="1076"/>
-          <ac:spMkLst>
-            <pc:docMk/>
-            <pc:sldMk cId="0" sldId="257"/>
-            <ac:spMk id="6" creationId="{00000000-0000-0000-0000-000000000000}"/>
-          </ac:spMkLst>
-        </pc:spChg>
-        <pc:spChg chg="mod">
-          <ac:chgData name="Matthew Rockwell" userId="be3989a97b66b923" providerId="LiveId" clId="{B89F934C-8C3B-4D2B-ADD7-B5452E27AB91}" dt="2026-02-03T19:43:58.835" v="546" actId="1076"/>
-          <ac:spMkLst>
-            <pc:docMk/>
-            <pc:sldMk cId="0" sldId="257"/>
-            <ac:spMk id="7" creationId="{00000000-0000-0000-0000-000000000000}"/>
-          </ac:spMkLst>
-        </pc:spChg>
-        <pc:spChg chg="mod">
-          <ac:chgData name="Matthew Rockwell" userId="be3989a97b66b923" providerId="LiveId" clId="{B89F934C-8C3B-4D2B-ADD7-B5452E27AB91}" dt="2026-02-03T19:43:58.136" v="545" actId="1076"/>
-          <ac:spMkLst>
-            <pc:docMk/>
-            <pc:sldMk cId="0" sldId="257"/>
-            <ac:spMk id="8" creationId="{00000000-0000-0000-0000-000000000000}"/>
-          </ac:spMkLst>
-        </pc:spChg>
-        <pc:spChg chg="mod">
-          <ac:chgData name="Matthew Rockwell" userId="be3989a97b66b923" providerId="LiveId" clId="{B89F934C-8C3B-4D2B-ADD7-B5452E27AB91}" dt="2026-02-03T20:29:51.524" v="1132" actId="1076"/>
-          <ac:spMkLst>
-            <pc:docMk/>
-            <pc:sldMk cId="0" sldId="257"/>
-            <ac:spMk id="9" creationId="{00000000-0000-0000-0000-000000000000}"/>
-          </ac:spMkLst>
-        </pc:spChg>
-        <pc:spChg chg="mod">
-          <ac:chgData name="Matthew Rockwell" userId="be3989a97b66b923" providerId="LiveId" clId="{B89F934C-8C3B-4D2B-ADD7-B5452E27AB91}" dt="2026-02-03T20:29:43.369" v="1131" actId="403"/>
-          <ac:spMkLst>
-            <pc:docMk/>
-            <pc:sldMk cId="0" sldId="257"/>
-            <ac:spMk id="10" creationId="{00000000-0000-0000-0000-000000000000}"/>
-          </ac:spMkLst>
-        </pc:spChg>
-        <pc:spChg chg="mod">
-          <ac:chgData name="Matthew Rockwell" userId="be3989a97b66b923" providerId="LiveId" clId="{B89F934C-8C3B-4D2B-ADD7-B5452E27AB91}" dt="2026-02-03T09:00:13.884" v="393" actId="1076"/>
-          <ac:spMkLst>
-            <pc:docMk/>
-            <pc:sldMk cId="0" sldId="257"/>
-            <ac:spMk id="11" creationId="{00000000-0000-0000-0000-000000000000}"/>
-          </ac:spMkLst>
-        </pc:spChg>
-        <pc:spChg chg="mod">
-          <ac:chgData name="Matthew Rockwell" userId="be3989a97b66b923" providerId="LiveId" clId="{B89F934C-8C3B-4D2B-ADD7-B5452E27AB91}" dt="2026-02-03T09:00:13.884" v="393" actId="1076"/>
-          <ac:spMkLst>
-            <pc:docMk/>
-            <pc:sldMk cId="0" sldId="257"/>
-            <ac:spMk id="12" creationId="{00000000-0000-0000-0000-000000000000}"/>
-          </ac:spMkLst>
-        </pc:spChg>
-        <pc:spChg chg="mod">
-          <ac:chgData name="Matthew Rockwell" userId="be3989a97b66b923" providerId="LiveId" clId="{B89F934C-8C3B-4D2B-ADD7-B5452E27AB91}" dt="2026-02-03T09:00:13.884" v="393" actId="1076"/>
-          <ac:spMkLst>
-            <pc:docMk/>
-            <pc:sldMk cId="0" sldId="257"/>
-            <ac:spMk id="13" creationId="{00000000-0000-0000-0000-000000000000}"/>
-          </ac:spMkLst>
-        </pc:spChg>
-        <pc:spChg chg="mod">
-          <ac:chgData name="Matthew Rockwell" userId="be3989a97b66b923" providerId="LiveId" clId="{B89F934C-8C3B-4D2B-ADD7-B5452E27AB91}" dt="2026-02-03T09:00:13.884" v="393" actId="1076"/>
-          <ac:spMkLst>
-            <pc:docMk/>
-            <pc:sldMk cId="0" sldId="257"/>
-            <ac:spMk id="14" creationId="{00000000-0000-0000-0000-000000000000}"/>
-          </ac:spMkLst>
-        </pc:spChg>
-        <pc:spChg chg="mod">
-          <ac:chgData name="Matthew Rockwell" userId="be3989a97b66b923" providerId="LiveId" clId="{B89F934C-8C3B-4D2B-ADD7-B5452E27AB91}" dt="2026-02-03T09:00:13.884" v="393" actId="1076"/>
-          <ac:spMkLst>
-            <pc:docMk/>
-            <pc:sldMk cId="0" sldId="257"/>
-            <ac:spMk id="15" creationId="{00000000-0000-0000-0000-000000000000}"/>
-          </ac:spMkLst>
-        </pc:spChg>
-        <pc:spChg chg="mod">
-          <ac:chgData name="Matthew Rockwell" userId="be3989a97b66b923" providerId="LiveId" clId="{B89F934C-8C3B-4D2B-ADD7-B5452E27AB91}" dt="2026-02-03T08:48:47.571" v="312" actId="1076"/>
-          <ac:spMkLst>
-            <pc:docMk/>
-            <pc:sldMk cId="0" sldId="257"/>
-            <ac:spMk id="16" creationId="{00000000-0000-0000-0000-000000000000}"/>
-          </ac:spMkLst>
-        </pc:spChg>
-        <pc:spChg chg="mod">
-          <ac:chgData name="Matthew Rockwell" userId="be3989a97b66b923" providerId="LiveId" clId="{B89F934C-8C3B-4D2B-ADD7-B5452E27AB91}" dt="2026-02-03T09:00:13.884" v="393" actId="1076"/>
-          <ac:spMkLst>
-            <pc:docMk/>
-            <pc:sldMk cId="0" sldId="257"/>
-            <ac:spMk id="17" creationId="{00000000-0000-0000-0000-000000000000}"/>
-          </ac:spMkLst>
-        </pc:spChg>
-        <pc:spChg chg="mod">
-          <ac:chgData name="Matthew Rockwell" userId="be3989a97b66b923" providerId="LiveId" clId="{B89F934C-8C3B-4D2B-ADD7-B5452E27AB91}" dt="2026-02-03T09:00:13.884" v="393" actId="1076"/>
-          <ac:spMkLst>
-            <pc:docMk/>
-            <pc:sldMk cId="0" sldId="257"/>
-            <ac:spMk id="18" creationId="{00000000-0000-0000-0000-000000000000}"/>
-          </ac:spMkLst>
-        </pc:spChg>
-        <pc:spChg chg="mod">
-          <ac:chgData name="Matthew Rockwell" userId="be3989a97b66b923" providerId="LiveId" clId="{B89F934C-8C3B-4D2B-ADD7-B5452E27AB91}" dt="2026-02-03T09:00:13.884" v="393" actId="1076"/>
-          <ac:spMkLst>
-            <pc:docMk/>
-            <pc:sldMk cId="0" sldId="257"/>
-            <ac:spMk id="19" creationId="{00000000-0000-0000-0000-000000000000}"/>
-          </ac:spMkLst>
-        </pc:spChg>
-        <pc:spChg chg="mod">
-          <ac:chgData name="Matthew Rockwell" userId="be3989a97b66b923" providerId="LiveId" clId="{B89F934C-8C3B-4D2B-ADD7-B5452E27AB91}" dt="2026-02-03T20:30:22.727" v="1133" actId="1076"/>
-          <ac:spMkLst>
-            <pc:docMk/>
-            <pc:sldMk cId="0" sldId="257"/>
-            <ac:spMk id="20" creationId="{00000000-0000-0000-0000-000000000000}"/>
-          </ac:spMkLst>
-        </pc:spChg>
-        <pc:spChg chg="mod">
-          <ac:chgData name="Matthew Rockwell" userId="be3989a97b66b923" providerId="LiveId" clId="{B89F934C-8C3B-4D2B-ADD7-B5452E27AB91}" dt="2026-02-03T20:30:22.727" v="1133" actId="1076"/>
-          <ac:spMkLst>
-            <pc:docMk/>
-            <pc:sldMk cId="0" sldId="257"/>
-            <ac:spMk id="21" creationId="{00000000-0000-0000-0000-000000000000}"/>
-          </ac:spMkLst>
-        </pc:spChg>
-        <pc:spChg chg="mod">
-          <ac:chgData name="Matthew Rockwell" userId="be3989a97b66b923" providerId="LiveId" clId="{B89F934C-8C3B-4D2B-ADD7-B5452E27AB91}" dt="2026-02-03T08:30:47.863" v="137" actId="242"/>
-          <ac:spMkLst>
-            <pc:docMk/>
-            <pc:sldMk cId="0" sldId="257"/>
-            <ac:spMk id="22" creationId="{00000000-0000-0000-0000-000000000000}"/>
-          </ac:spMkLst>
-        </pc:spChg>
-      </pc:sldChg>
-      <pc:sldChg chg="modSp mod modNotesTx">
-        <pc:chgData name="Matthew Rockwell" userId="be3989a97b66b923" providerId="LiveId" clId="{B89F934C-8C3B-4D2B-ADD7-B5452E27AB91}" dt="2026-02-03T20:30:58.359" v="1149" actId="20577"/>
-        <pc:sldMkLst>
-          <pc:docMk/>
-          <pc:sldMk cId="0" sldId="258"/>
-        </pc:sldMkLst>
-        <pc:spChg chg="mod">
-          <ac:chgData name="Matthew Rockwell" userId="be3989a97b66b923" providerId="LiveId" clId="{B89F934C-8C3B-4D2B-ADD7-B5452E27AB91}" dt="2026-02-03T09:00:28.177" v="394" actId="1076"/>
-          <ac:spMkLst>
-            <pc:docMk/>
-            <pc:sldMk cId="0" sldId="258"/>
-            <ac:spMk id="5" creationId="{00000000-0000-0000-0000-000000000000}"/>
-          </ac:spMkLst>
-        </pc:spChg>
-        <pc:spChg chg="mod">
-          <ac:chgData name="Matthew Rockwell" userId="be3989a97b66b923" providerId="LiveId" clId="{B89F934C-8C3B-4D2B-ADD7-B5452E27AB91}" dt="2026-02-03T08:50:27.082" v="327" actId="1076"/>
-          <ac:spMkLst>
-            <pc:docMk/>
-            <pc:sldMk cId="0" sldId="258"/>
-            <ac:spMk id="6" creationId="{00000000-0000-0000-0000-000000000000}"/>
-          </ac:spMkLst>
-        </pc:spChg>
-        <pc:spChg chg="mod">
-          <ac:chgData name="Matthew Rockwell" userId="be3989a97b66b923" providerId="LiveId" clId="{B89F934C-8C3B-4D2B-ADD7-B5452E27AB91}" dt="2026-02-03T09:00:28.177" v="394" actId="1076"/>
-          <ac:spMkLst>
-            <pc:docMk/>
-            <pc:sldMk cId="0" sldId="258"/>
-            <ac:spMk id="7" creationId="{00000000-0000-0000-0000-000000000000}"/>
-          </ac:spMkLst>
-        </pc:spChg>
-        <pc:spChg chg="mod">
-          <ac:chgData name="Matthew Rockwell" userId="be3989a97b66b923" providerId="LiveId" clId="{B89F934C-8C3B-4D2B-ADD7-B5452E27AB91}" dt="2026-02-03T09:00:28.177" v="394" actId="1076"/>
-          <ac:spMkLst>
-            <pc:docMk/>
-            <pc:sldMk cId="0" sldId="258"/>
-            <ac:spMk id="8" creationId="{00000000-0000-0000-0000-000000000000}"/>
-          </ac:spMkLst>
-        </pc:spChg>
-        <pc:spChg chg="mod">
-          <ac:chgData name="Matthew Rockwell" userId="be3989a97b66b923" providerId="LiveId" clId="{B89F934C-8C3B-4D2B-ADD7-B5452E27AB91}" dt="2026-02-03T09:00:28.177" v="394" actId="1076"/>
-          <ac:spMkLst>
-            <pc:docMk/>
-            <pc:sldMk cId="0" sldId="258"/>
-            <ac:spMk id="9" creationId="{00000000-0000-0000-0000-000000000000}"/>
-          </ac:spMkLst>
-        </pc:spChg>
-        <pc:spChg chg="mod">
-          <ac:chgData name="Matthew Rockwell" userId="be3989a97b66b923" providerId="LiveId" clId="{B89F934C-8C3B-4D2B-ADD7-B5452E27AB91}" dt="2026-02-03T08:49:46.438" v="319" actId="242"/>
-          <ac:spMkLst>
-            <pc:docMk/>
-            <pc:sldMk cId="0" sldId="258"/>
-            <ac:spMk id="12" creationId="{00000000-0000-0000-0000-000000000000}"/>
-          </ac:spMkLst>
-        </pc:spChg>
-        <pc:spChg chg="mod">
-          <ac:chgData name="Matthew Rockwell" userId="be3989a97b66b923" providerId="LiveId" clId="{B89F934C-8C3B-4D2B-ADD7-B5452E27AB91}" dt="2026-02-03T08:50:27.082" v="327" actId="1076"/>
-          <ac:spMkLst>
-            <pc:docMk/>
-            <pc:sldMk cId="0" sldId="258"/>
-            <ac:spMk id="13" creationId="{00000000-0000-0000-0000-000000000000}"/>
-          </ac:spMkLst>
-        </pc:spChg>
-        <pc:spChg chg="mod">
-          <ac:chgData name="Matthew Rockwell" userId="be3989a97b66b923" providerId="LiveId" clId="{B89F934C-8C3B-4D2B-ADD7-B5452E27AB91}" dt="2026-02-03T08:49:56.242" v="323" actId="242"/>
-          <ac:spMkLst>
-            <pc:docMk/>
-            <pc:sldMk cId="0" sldId="258"/>
-            <ac:spMk id="14" creationId="{00000000-0000-0000-0000-000000000000}"/>
-          </ac:spMkLst>
-        </pc:spChg>
-        <pc:spChg chg="mod">
-          <ac:chgData name="Matthew Rockwell" userId="be3989a97b66b923" providerId="LiveId" clId="{B89F934C-8C3B-4D2B-ADD7-B5452E27AB91}" dt="2026-02-03T09:00:28.177" v="394" actId="1076"/>
-          <ac:spMkLst>
-            <pc:docMk/>
-            <pc:sldMk cId="0" sldId="258"/>
-            <ac:spMk id="15" creationId="{00000000-0000-0000-0000-000000000000}"/>
-          </ac:spMkLst>
-        </pc:spChg>
-        <pc:spChg chg="mod">
-          <ac:chgData name="Matthew Rockwell" userId="be3989a97b66b923" providerId="LiveId" clId="{B89F934C-8C3B-4D2B-ADD7-B5452E27AB91}" dt="2026-02-03T08:50:27.082" v="327" actId="1076"/>
-          <ac:spMkLst>
-            <pc:docMk/>
-            <pc:sldMk cId="0" sldId="258"/>
-            <ac:spMk id="18" creationId="{00000000-0000-0000-0000-000000000000}"/>
-          </ac:spMkLst>
-        </pc:spChg>
-        <pc:spChg chg="mod">
-          <ac:chgData name="Matthew Rockwell" userId="be3989a97b66b923" providerId="LiveId" clId="{B89F934C-8C3B-4D2B-ADD7-B5452E27AB91}" dt="2026-02-03T08:50:27.082" v="327" actId="1076"/>
-          <ac:spMkLst>
-            <pc:docMk/>
-            <pc:sldMk cId="0" sldId="258"/>
-            <ac:spMk id="19" creationId="{00000000-0000-0000-0000-000000000000}"/>
-          </ac:spMkLst>
-        </pc:spChg>
-        <pc:spChg chg="mod">
-          <ac:chgData name="Matthew Rockwell" userId="be3989a97b66b923" providerId="LiveId" clId="{B89F934C-8C3B-4D2B-ADD7-B5452E27AB91}" dt="2026-02-03T08:50:27.082" v="327" actId="1076"/>
-          <ac:spMkLst>
-            <pc:docMk/>
-            <pc:sldMk cId="0" sldId="258"/>
-            <ac:spMk id="20" creationId="{00000000-0000-0000-0000-000000000000}"/>
-          </ac:spMkLst>
-        </pc:spChg>
-        <pc:spChg chg="mod">
-          <ac:chgData name="Matthew Rockwell" userId="be3989a97b66b923" providerId="LiveId" clId="{B89F934C-8C3B-4D2B-ADD7-B5452E27AB91}" dt="2026-02-03T08:49:20.789" v="314" actId="242"/>
-          <ac:spMkLst>
-            <pc:docMk/>
-            <pc:sldMk cId="0" sldId="258"/>
-            <ac:spMk id="21" creationId="{00000000-0000-0000-0000-000000000000}"/>
-          </ac:spMkLst>
-        </pc:spChg>
-        <pc:spChg chg="mod">
-          <ac:chgData name="Matthew Rockwell" userId="be3989a97b66b923" providerId="LiveId" clId="{B89F934C-8C3B-4D2B-ADD7-B5452E27AB91}" dt="2026-02-03T09:00:28.177" v="394" actId="1076"/>
-          <ac:spMkLst>
-            <pc:docMk/>
-            <pc:sldMk cId="0" sldId="258"/>
-            <ac:spMk id="23" creationId="{00000000-0000-0000-0000-000000000000}"/>
-          </ac:spMkLst>
-        </pc:spChg>
-        <pc:spChg chg="mod">
-          <ac:chgData name="Matthew Rockwell" userId="be3989a97b66b923" providerId="LiveId" clId="{B89F934C-8C3B-4D2B-ADD7-B5452E27AB91}" dt="2026-02-03T08:50:27.082" v="327" actId="1076"/>
-          <ac:spMkLst>
-            <pc:docMk/>
-            <pc:sldMk cId="0" sldId="258"/>
-            <ac:spMk id="24" creationId="{00000000-0000-0000-0000-000000000000}"/>
-          </ac:spMkLst>
-        </pc:spChg>
-        <pc:spChg chg="mod">
-          <ac:chgData name="Matthew Rockwell" userId="be3989a97b66b923" providerId="LiveId" clId="{B89F934C-8C3B-4D2B-ADD7-B5452E27AB91}" dt="2026-02-03T08:50:27.082" v="327" actId="1076"/>
-          <ac:spMkLst>
-            <pc:docMk/>
-            <pc:sldMk cId="0" sldId="258"/>
-            <ac:spMk id="25" creationId="{00000000-0000-0000-0000-000000000000}"/>
-          </ac:spMkLst>
-        </pc:spChg>
-        <pc:spChg chg="mod">
-          <ac:chgData name="Matthew Rockwell" userId="be3989a97b66b923" providerId="LiveId" clId="{B89F934C-8C3B-4D2B-ADD7-B5452E27AB91}" dt="2026-02-03T08:50:27.082" v="327" actId="1076"/>
-          <ac:spMkLst>
-            <pc:docMk/>
-            <pc:sldMk cId="0" sldId="258"/>
-            <ac:spMk id="26" creationId="{00000000-0000-0000-0000-000000000000}"/>
-          </ac:spMkLst>
-        </pc:spChg>
-        <pc:spChg chg="mod">
-          <ac:chgData name="Matthew Rockwell" userId="be3989a97b66b923" providerId="LiveId" clId="{B89F934C-8C3B-4D2B-ADD7-B5452E27AB91}" dt="2026-02-03T09:00:28.177" v="394" actId="1076"/>
-          <ac:spMkLst>
-            <pc:docMk/>
-            <pc:sldMk cId="0" sldId="258"/>
-            <ac:spMk id="27" creationId="{00000000-0000-0000-0000-000000000000}"/>
-          </ac:spMkLst>
-        </pc:spChg>
-        <pc:spChg chg="mod">
-          <ac:chgData name="Matthew Rockwell" userId="be3989a97b66b923" providerId="LiveId" clId="{B89F934C-8C3B-4D2B-ADD7-B5452E27AB91}" dt="2026-02-03T09:00:28.177" v="394" actId="1076"/>
-          <ac:spMkLst>
-            <pc:docMk/>
-            <pc:sldMk cId="0" sldId="258"/>
-            <ac:spMk id="28" creationId="{00000000-0000-0000-0000-000000000000}"/>
-          </ac:spMkLst>
-        </pc:spChg>
-        <pc:spChg chg="mod">
-          <ac:chgData name="Matthew Rockwell" userId="be3989a97b66b923" providerId="LiveId" clId="{B89F934C-8C3B-4D2B-ADD7-B5452E27AB91}" dt="2026-02-03T09:00:28.177" v="394" actId="1076"/>
-          <ac:spMkLst>
-            <pc:docMk/>
-            <pc:sldMk cId="0" sldId="258"/>
-            <ac:spMk id="29" creationId="{00000000-0000-0000-0000-000000000000}"/>
-          </ac:spMkLst>
-        </pc:spChg>
-        <pc:spChg chg="mod">
-          <ac:chgData name="Matthew Rockwell" userId="be3989a97b66b923" providerId="LiveId" clId="{B89F934C-8C3B-4D2B-ADD7-B5452E27AB91}" dt="2026-02-03T09:00:28.177" v="394" actId="1076"/>
-          <ac:spMkLst>
-            <pc:docMk/>
-            <pc:sldMk cId="0" sldId="258"/>
-            <ac:spMk id="30" creationId="{00000000-0000-0000-0000-000000000000}"/>
-          </ac:spMkLst>
-        </pc:spChg>
-      </pc:sldChg>
-      <pc:sldChg chg="modSp mod modNotesTx">
-        <pc:chgData name="Matthew Rockwell" userId="be3989a97b66b923" providerId="LiveId" clId="{B89F934C-8C3B-4D2B-ADD7-B5452E27AB91}" dt="2026-02-03T20:35:53.208" v="1273" actId="1076"/>
-        <pc:sldMkLst>
-          <pc:docMk/>
-          <pc:sldMk cId="0" sldId="259"/>
-        </pc:sldMkLst>
-        <pc:spChg chg="mod">
-          <ac:chgData name="Matthew Rockwell" userId="be3989a97b66b923" providerId="LiveId" clId="{B89F934C-8C3B-4D2B-ADD7-B5452E27AB91}" dt="2026-02-03T08:26:36.727" v="98" actId="207"/>
-          <ac:spMkLst>
-            <pc:docMk/>
-            <pc:sldMk cId="0" sldId="259"/>
-            <ac:spMk id="3" creationId="{00000000-0000-0000-0000-000000000000}"/>
-          </ac:spMkLst>
-        </pc:spChg>
-        <pc:spChg chg="mod">
-          <ac:chgData name="Matthew Rockwell" userId="be3989a97b66b923" providerId="LiveId" clId="{B89F934C-8C3B-4D2B-ADD7-B5452E27AB91}" dt="2026-02-03T08:26:48.206" v="99" actId="207"/>
-          <ac:spMkLst>
-            <pc:docMk/>
-            <pc:sldMk cId="0" sldId="259"/>
-            <ac:spMk id="8" creationId="{00000000-0000-0000-0000-000000000000}"/>
-          </ac:spMkLst>
-        </pc:spChg>
-        <pc:spChg chg="mod">
-          <ac:chgData name="Matthew Rockwell" userId="be3989a97b66b923" providerId="LiveId" clId="{B89F934C-8C3B-4D2B-ADD7-B5452E27AB91}" dt="2026-02-03T08:26:48.206" v="99" actId="207"/>
-          <ac:spMkLst>
-            <pc:docMk/>
-            <pc:sldMk cId="0" sldId="259"/>
-            <ac:spMk id="12" creationId="{00000000-0000-0000-0000-000000000000}"/>
-          </ac:spMkLst>
-        </pc:spChg>
-        <pc:spChg chg="mod">
-          <ac:chgData name="Matthew Rockwell" userId="be3989a97b66b923" providerId="LiveId" clId="{B89F934C-8C3B-4D2B-ADD7-B5452E27AB91}" dt="2026-02-03T08:26:30.448" v="97" actId="207"/>
-          <ac:spMkLst>
-            <pc:docMk/>
-            <pc:sldMk cId="0" sldId="259"/>
-            <ac:spMk id="13" creationId="{00000000-0000-0000-0000-000000000000}"/>
-          </ac:spMkLst>
-        </pc:spChg>
-        <pc:spChg chg="mod">
-          <ac:chgData name="Matthew Rockwell" userId="be3989a97b66b923" providerId="LiveId" clId="{B89F934C-8C3B-4D2B-ADD7-B5452E27AB91}" dt="2026-02-03T08:21:29.585" v="58" actId="14100"/>
-          <ac:spMkLst>
-            <pc:docMk/>
-            <pc:sldMk cId="0" sldId="259"/>
-            <ac:spMk id="15" creationId="{00000000-0000-0000-0000-000000000000}"/>
-          </ac:spMkLst>
-        </pc:spChg>
-        <pc:spChg chg="mod">
-          <ac:chgData name="Matthew Rockwell" userId="be3989a97b66b923" providerId="LiveId" clId="{B89F934C-8C3B-4D2B-ADD7-B5452E27AB91}" dt="2026-02-03T08:24:47.571" v="85" actId="1076"/>
-          <ac:spMkLst>
-            <pc:docMk/>
-            <pc:sldMk cId="0" sldId="259"/>
-            <ac:spMk id="16" creationId="{00000000-0000-0000-0000-000000000000}"/>
-          </ac:spMkLst>
-        </pc:spChg>
-        <pc:spChg chg="mod">
-          <ac:chgData name="Matthew Rockwell" userId="be3989a97b66b923" providerId="LiveId" clId="{B89F934C-8C3B-4D2B-ADD7-B5452E27AB91}" dt="2026-02-03T20:35:46.496" v="1272" actId="1076"/>
-          <ac:spMkLst>
-            <pc:docMk/>
-            <pc:sldMk cId="0" sldId="259"/>
-            <ac:spMk id="17" creationId="{00000000-0000-0000-0000-000000000000}"/>
-          </ac:spMkLst>
-        </pc:spChg>
-        <pc:spChg chg="mod">
-          <ac:chgData name="Matthew Rockwell" userId="be3989a97b66b923" providerId="LiveId" clId="{B89F934C-8C3B-4D2B-ADD7-B5452E27AB91}" dt="2026-02-03T08:22:48.637" v="66" actId="1076"/>
-          <ac:spMkLst>
-            <pc:docMk/>
-            <pc:sldMk cId="0" sldId="259"/>
-            <ac:spMk id="18" creationId="{00000000-0000-0000-0000-000000000000}"/>
-          </ac:spMkLst>
-        </pc:spChg>
-        <pc:spChg chg="mod">
-          <ac:chgData name="Matthew Rockwell" userId="be3989a97b66b923" providerId="LiveId" clId="{B89F934C-8C3B-4D2B-ADD7-B5452E27AB91}" dt="2026-02-03T08:26:48.206" v="99" actId="207"/>
-          <ac:spMkLst>
-            <pc:docMk/>
-            <pc:sldMk cId="0" sldId="259"/>
-            <ac:spMk id="19" creationId="{00000000-0000-0000-0000-000000000000}"/>
-          </ac:spMkLst>
-        </pc:spChg>
-        <pc:spChg chg="mod">
-          <ac:chgData name="Matthew Rockwell" userId="be3989a97b66b923" providerId="LiveId" clId="{B89F934C-8C3B-4D2B-ADD7-B5452E27AB91}" dt="2026-02-03T08:22:48.637" v="66" actId="1076"/>
-          <ac:spMkLst>
-            <pc:docMk/>
-            <pc:sldMk cId="0" sldId="259"/>
-            <ac:spMk id="20" creationId="{00000000-0000-0000-0000-000000000000}"/>
-          </ac:spMkLst>
-        </pc:spChg>
-        <pc:spChg chg="mod">
-          <ac:chgData name="Matthew Rockwell" userId="be3989a97b66b923" providerId="LiveId" clId="{B89F934C-8C3B-4D2B-ADD7-B5452E27AB91}" dt="2026-02-03T08:24:41.337" v="84" actId="1076"/>
-          <ac:spMkLst>
-            <pc:docMk/>
-            <pc:sldMk cId="0" sldId="259"/>
-            <ac:spMk id="21" creationId="{00000000-0000-0000-0000-000000000000}"/>
-          </ac:spMkLst>
-        </pc:spChg>
-        <pc:spChg chg="mod">
-          <ac:chgData name="Matthew Rockwell" userId="be3989a97b66b923" providerId="LiveId" clId="{B89F934C-8C3B-4D2B-ADD7-B5452E27AB91}" dt="2026-02-03T20:35:38.626" v="1271" actId="1076"/>
-          <ac:spMkLst>
-            <pc:docMk/>
-            <pc:sldMk cId="0" sldId="259"/>
-            <ac:spMk id="22" creationId="{00000000-0000-0000-0000-000000000000}"/>
-          </ac:spMkLst>
-        </pc:spChg>
-        <pc:spChg chg="mod">
-          <ac:chgData name="Matthew Rockwell" userId="be3989a97b66b923" providerId="LiveId" clId="{B89F934C-8C3B-4D2B-ADD7-B5452E27AB91}" dt="2026-02-03T08:24:10.814" v="78" actId="14100"/>
-          <ac:spMkLst>
-            <pc:docMk/>
-            <pc:sldMk cId="0" sldId="259"/>
-            <ac:spMk id="23" creationId="{00000000-0000-0000-0000-000000000000}"/>
-          </ac:spMkLst>
-        </pc:spChg>
-        <pc:spChg chg="mod">
-          <ac:chgData name="Matthew Rockwell" userId="be3989a97b66b923" providerId="LiveId" clId="{B89F934C-8C3B-4D2B-ADD7-B5452E27AB91}" dt="2026-02-03T20:35:24.544" v="1270" actId="1076"/>
-          <ac:spMkLst>
-            <pc:docMk/>
-            <pc:sldMk cId="0" sldId="259"/>
-            <ac:spMk id="24" creationId="{00000000-0000-0000-0000-000000000000}"/>
-          </ac:spMkLst>
-        </pc:spChg>
-        <pc:spChg chg="mod">
-          <ac:chgData name="Matthew Rockwell" userId="be3989a97b66b923" providerId="LiveId" clId="{B89F934C-8C3B-4D2B-ADD7-B5452E27AB91}" dt="2026-02-03T08:22:21.678" v="64" actId="14100"/>
-          <ac:spMkLst>
-            <pc:docMk/>
-            <pc:sldMk cId="0" sldId="259"/>
-            <ac:spMk id="25" creationId="{00000000-0000-0000-0000-000000000000}"/>
-          </ac:spMkLst>
-        </pc:spChg>
-        <pc:spChg chg="mod">
-          <ac:chgData name="Matthew Rockwell" userId="be3989a97b66b923" providerId="LiveId" clId="{B89F934C-8C3B-4D2B-ADD7-B5452E27AB91}" dt="2026-02-03T08:24:37.360" v="83" actId="1076"/>
-          <ac:spMkLst>
-            <pc:docMk/>
-            <pc:sldMk cId="0" sldId="259"/>
-            <ac:spMk id="26" creationId="{00000000-0000-0000-0000-000000000000}"/>
-          </ac:spMkLst>
-        </pc:spChg>
-        <pc:spChg chg="mod">
-          <ac:chgData name="Matthew Rockwell" userId="be3989a97b66b923" providerId="LiveId" clId="{B89F934C-8C3B-4D2B-ADD7-B5452E27AB91}" dt="2026-02-03T20:35:53.208" v="1273" actId="1076"/>
-          <ac:spMkLst>
-            <pc:docMk/>
-            <pc:sldMk cId="0" sldId="259"/>
-            <ac:spMk id="27" creationId="{00000000-0000-0000-0000-000000000000}"/>
-          </ac:spMkLst>
-        </pc:spChg>
-        <pc:spChg chg="mod">
-          <ac:chgData name="Matthew Rockwell" userId="be3989a97b66b923" providerId="LiveId" clId="{B89F934C-8C3B-4D2B-ADD7-B5452E27AB91}" dt="2026-02-03T08:22:48.637" v="66" actId="1076"/>
-          <ac:spMkLst>
-            <pc:docMk/>
-            <pc:sldMk cId="0" sldId="259"/>
-            <ac:spMk id="28" creationId="{00000000-0000-0000-0000-000000000000}"/>
-          </ac:spMkLst>
-        </pc:spChg>
-        <pc:spChg chg="mod">
-          <ac:chgData name="Matthew Rockwell" userId="be3989a97b66b923" providerId="LiveId" clId="{B89F934C-8C3B-4D2B-ADD7-B5452E27AB91}" dt="2026-02-03T08:26:48.206" v="99" actId="207"/>
-          <ac:spMkLst>
-            <pc:docMk/>
-            <pc:sldMk cId="0" sldId="259"/>
-            <ac:spMk id="29" creationId="{00000000-0000-0000-0000-000000000000}"/>
-          </ac:spMkLst>
-        </pc:spChg>
-        <pc:graphicFrameChg chg="mod modGraphic">
-          <ac:chgData name="Matthew Rockwell" userId="be3989a97b66b923" providerId="LiveId" clId="{B89F934C-8C3B-4D2B-ADD7-B5452E27AB91}" dt="2026-02-03T08:23:12.791" v="69" actId="122"/>
-          <ac:graphicFrameMkLst>
-            <pc:docMk/>
-            <pc:sldMk cId="0" sldId="259"/>
-            <ac:graphicFrameMk id="14" creationId="{00000000-0000-0000-0000-000000000000}"/>
-          </ac:graphicFrameMkLst>
-        </pc:graphicFrameChg>
-      </pc:sldChg>
-      <pc:sldChg chg="addSp delSp modSp mod modNotesTx">
-        <pc:chgData name="Matthew Rockwell" userId="be3989a97b66b923" providerId="LiveId" clId="{B89F934C-8C3B-4D2B-ADD7-B5452E27AB91}" dt="2026-02-03T20:31:34.800" v="1186" actId="20577"/>
-        <pc:sldMkLst>
-          <pc:docMk/>
-          <pc:sldMk cId="0" sldId="260"/>
-        </pc:sldMkLst>
-        <pc:spChg chg="mod">
-          <ac:chgData name="Matthew Rockwell" userId="be3989a97b66b923" providerId="LiveId" clId="{B89F934C-8C3B-4D2B-ADD7-B5452E27AB91}" dt="2026-02-03T19:55:36.285" v="615" actId="207"/>
-          <ac:spMkLst>
-            <pc:docMk/>
-            <pc:sldMk cId="0" sldId="260"/>
-            <ac:spMk id="7" creationId="{00000000-0000-0000-0000-000000000000}"/>
-          </ac:spMkLst>
-        </pc:spChg>
-        <pc:spChg chg="mod">
-          <ac:chgData name="Matthew Rockwell" userId="be3989a97b66b923" providerId="LiveId" clId="{B89F934C-8C3B-4D2B-ADD7-B5452E27AB91}" dt="2026-02-03T19:55:17.180" v="614" actId="242"/>
-          <ac:spMkLst>
-            <pc:docMk/>
-            <pc:sldMk cId="0" sldId="260"/>
-            <ac:spMk id="10" creationId="{00000000-0000-0000-0000-000000000000}"/>
-          </ac:spMkLst>
-        </pc:spChg>
-        <pc:spChg chg="mod">
-          <ac:chgData name="Matthew Rockwell" userId="be3989a97b66b923" providerId="LiveId" clId="{B89F934C-8C3B-4D2B-ADD7-B5452E27AB91}" dt="2026-02-03T19:55:36.285" v="615" actId="207"/>
-          <ac:spMkLst>
-            <pc:docMk/>
-            <pc:sldMk cId="0" sldId="260"/>
-            <ac:spMk id="11" creationId="{00000000-0000-0000-0000-000000000000}"/>
-          </ac:spMkLst>
-        </pc:spChg>
-        <pc:spChg chg="mod">
-          <ac:chgData name="Matthew Rockwell" userId="be3989a97b66b923" providerId="LiveId" clId="{B89F934C-8C3B-4D2B-ADD7-B5452E27AB91}" dt="2026-02-03T19:55:04.367" v="612" actId="242"/>
-          <ac:spMkLst>
-            <pc:docMk/>
-            <pc:sldMk cId="0" sldId="260"/>
-            <ac:spMk id="14" creationId="{00000000-0000-0000-0000-000000000000}"/>
-          </ac:spMkLst>
-        </pc:spChg>
-        <pc:spChg chg="mod">
-          <ac:chgData name="Matthew Rockwell" userId="be3989a97b66b923" providerId="LiveId" clId="{B89F934C-8C3B-4D2B-ADD7-B5452E27AB91}" dt="2026-02-03T19:55:36.285" v="615" actId="207"/>
-          <ac:spMkLst>
-            <pc:docMk/>
-            <pc:sldMk cId="0" sldId="260"/>
-            <ac:spMk id="15" creationId="{00000000-0000-0000-0000-000000000000}"/>
-          </ac:spMkLst>
-        </pc:spChg>
-        <pc:spChg chg="mod">
-          <ac:chgData name="Matthew Rockwell" userId="be3989a97b66b923" providerId="LiveId" clId="{B89F934C-8C3B-4D2B-ADD7-B5452E27AB91}" dt="2026-02-03T19:55:17.180" v="614" actId="242"/>
-          <ac:spMkLst>
-            <pc:docMk/>
-            <pc:sldMk cId="0" sldId="260"/>
-            <ac:spMk id="16" creationId="{00000000-0000-0000-0000-000000000000}"/>
-          </ac:spMkLst>
-        </pc:spChg>
-        <pc:spChg chg="mod">
-          <ac:chgData name="Matthew Rockwell" userId="be3989a97b66b923" providerId="LiveId" clId="{B89F934C-8C3B-4D2B-ADD7-B5452E27AB91}" dt="2026-02-03T19:55:36.285" v="615" actId="207"/>
-          <ac:spMkLst>
-            <pc:docMk/>
-            <pc:sldMk cId="0" sldId="260"/>
-            <ac:spMk id="19" creationId="{00000000-0000-0000-0000-000000000000}"/>
-          </ac:spMkLst>
-        </pc:spChg>
-        <pc:spChg chg="mod">
-          <ac:chgData name="Matthew Rockwell" userId="be3989a97b66b923" providerId="LiveId" clId="{B89F934C-8C3B-4D2B-ADD7-B5452E27AB91}" dt="2026-02-03T19:55:36.285" v="615" actId="207"/>
-          <ac:spMkLst>
-            <pc:docMk/>
-            <pc:sldMk cId="0" sldId="260"/>
-            <ac:spMk id="23" creationId="{00000000-0000-0000-0000-000000000000}"/>
-          </ac:spMkLst>
-        </pc:spChg>
-        <pc:spChg chg="mod">
-          <ac:chgData name="Matthew Rockwell" userId="be3989a97b66b923" providerId="LiveId" clId="{B89F934C-8C3B-4D2B-ADD7-B5452E27AB91}" dt="2026-02-03T19:55:17.180" v="614" actId="242"/>
-          <ac:spMkLst>
-            <pc:docMk/>
-            <pc:sldMk cId="0" sldId="260"/>
-            <ac:spMk id="25" creationId="{00000000-0000-0000-0000-000000000000}"/>
-          </ac:spMkLst>
-        </pc:spChg>
-        <pc:spChg chg="mod">
-          <ac:chgData name="Matthew Rockwell" userId="be3989a97b66b923" providerId="LiveId" clId="{B89F934C-8C3B-4D2B-ADD7-B5452E27AB91}" dt="2026-02-03T19:55:04.367" v="612" actId="242"/>
-          <ac:spMkLst>
-            <pc:docMk/>
-            <pc:sldMk cId="0" sldId="260"/>
-            <ac:spMk id="26" creationId="{00000000-0000-0000-0000-000000000000}"/>
-          </ac:spMkLst>
-        </pc:spChg>
-        <pc:spChg chg="mod">
-          <ac:chgData name="Matthew Rockwell" userId="be3989a97b66b923" providerId="LiveId" clId="{B89F934C-8C3B-4D2B-ADD7-B5452E27AB91}" dt="2026-02-03T19:55:36.285" v="615" actId="207"/>
-          <ac:spMkLst>
-            <pc:docMk/>
-            <pc:sldMk cId="0" sldId="260"/>
-            <ac:spMk id="27" creationId="{00000000-0000-0000-0000-000000000000}"/>
-          </ac:spMkLst>
-        </pc:spChg>
-        <pc:spChg chg="mod">
-          <ac:chgData name="Matthew Rockwell" userId="be3989a97b66b923" providerId="LiveId" clId="{B89F934C-8C3B-4D2B-ADD7-B5452E27AB91}" dt="2026-02-03T19:55:17.180" v="614" actId="242"/>
-          <ac:spMkLst>
-            <pc:docMk/>
-            <pc:sldMk cId="0" sldId="260"/>
-            <ac:spMk id="29" creationId="{00000000-0000-0000-0000-000000000000}"/>
-          </ac:spMkLst>
-        </pc:spChg>
-        <pc:spChg chg="mod">
-          <ac:chgData name="Matthew Rockwell" userId="be3989a97b66b923" providerId="LiveId" clId="{B89F934C-8C3B-4D2B-ADD7-B5452E27AB91}" dt="2026-02-03T19:55:36.285" v="615" actId="207"/>
-          <ac:spMkLst>
-            <pc:docMk/>
-            <pc:sldMk cId="0" sldId="260"/>
-            <ac:spMk id="31" creationId="{00000000-0000-0000-0000-000000000000}"/>
-          </ac:spMkLst>
-        </pc:spChg>
-        <pc:spChg chg="mod">
-          <ac:chgData name="Matthew Rockwell" userId="be3989a97b66b923" providerId="LiveId" clId="{B89F934C-8C3B-4D2B-ADD7-B5452E27AB91}" dt="2026-02-03T19:55:17.180" v="614" actId="242"/>
-          <ac:spMkLst>
-            <pc:docMk/>
-            <pc:sldMk cId="0" sldId="260"/>
-            <ac:spMk id="34" creationId="{00000000-0000-0000-0000-000000000000}"/>
-          </ac:spMkLst>
-        </pc:spChg>
-        <pc:spChg chg="mod">
-          <ac:chgData name="Matthew Rockwell" userId="be3989a97b66b923" providerId="LiveId" clId="{B89F934C-8C3B-4D2B-ADD7-B5452E27AB91}" dt="2026-02-03T19:55:36.285" v="615" actId="207"/>
-          <ac:spMkLst>
-            <pc:docMk/>
-            <pc:sldMk cId="0" sldId="260"/>
-            <ac:spMk id="35" creationId="{00000000-0000-0000-0000-000000000000}"/>
-          </ac:spMkLst>
-        </pc:spChg>
-        <pc:spChg chg="mod">
-          <ac:chgData name="Matthew Rockwell" userId="be3989a97b66b923" providerId="LiveId" clId="{B89F934C-8C3B-4D2B-ADD7-B5452E27AB91}" dt="2026-02-03T19:55:17.180" v="614" actId="242"/>
-          <ac:spMkLst>
-            <pc:docMk/>
-            <pc:sldMk cId="0" sldId="260"/>
-            <ac:spMk id="38" creationId="{00000000-0000-0000-0000-000000000000}"/>
-          </ac:spMkLst>
-        </pc:spChg>
-        <pc:spChg chg="mod">
-          <ac:chgData name="Matthew Rockwell" userId="be3989a97b66b923" providerId="LiveId" clId="{B89F934C-8C3B-4D2B-ADD7-B5452E27AB91}" dt="2026-02-03T19:55:36.285" v="615" actId="207"/>
-          <ac:spMkLst>
-            <pc:docMk/>
-            <pc:sldMk cId="0" sldId="260"/>
-            <ac:spMk id="39" creationId="{00000000-0000-0000-0000-000000000000}"/>
-          </ac:spMkLst>
-        </pc:spChg>
-        <pc:spChg chg="mod">
-          <ac:chgData name="Matthew Rockwell" userId="be3989a97b66b923" providerId="LiveId" clId="{B89F934C-8C3B-4D2B-ADD7-B5452E27AB91}" dt="2026-02-03T19:46:09.709" v="551" actId="1076"/>
-          <ac:spMkLst>
-            <pc:docMk/>
-            <pc:sldMk cId="0" sldId="260"/>
-            <ac:spMk id="40" creationId="{00000000-0000-0000-0000-000000000000}"/>
-          </ac:spMkLst>
-        </pc:spChg>
-        <pc:spChg chg="mod">
-          <ac:chgData name="Matthew Rockwell" userId="be3989a97b66b923" providerId="LiveId" clId="{B89F934C-8C3B-4D2B-ADD7-B5452E27AB91}" dt="2026-02-03T08:25:23.555" v="87" actId="1076"/>
-          <ac:spMkLst>
-            <pc:docMk/>
-            <pc:sldMk cId="0" sldId="260"/>
-            <ac:spMk id="41" creationId="{00000000-0000-0000-0000-000000000000}"/>
-          </ac:spMkLst>
-        </pc:spChg>
-        <pc:spChg chg="mod">
-          <ac:chgData name="Matthew Rockwell" userId="be3989a97b66b923" providerId="LiveId" clId="{B89F934C-8C3B-4D2B-ADD7-B5452E27AB91}" dt="2026-02-03T19:50:32.880" v="581" actId="1076"/>
-          <ac:spMkLst>
-            <pc:docMk/>
-            <pc:sldMk cId="0" sldId="260"/>
-            <ac:spMk id="42" creationId="{00000000-0000-0000-0000-000000000000}"/>
-          </ac:spMkLst>
-        </pc:spChg>
-        <pc:spChg chg="mod">
-          <ac:chgData name="Matthew Rockwell" userId="be3989a97b66b923" providerId="LiveId" clId="{B89F934C-8C3B-4D2B-ADD7-B5452E27AB91}" dt="2026-02-03T19:50:44.608" v="582" actId="1076"/>
-          <ac:spMkLst>
-            <pc:docMk/>
-            <pc:sldMk cId="0" sldId="260"/>
-            <ac:spMk id="43" creationId="{00000000-0000-0000-0000-000000000000}"/>
-          </ac:spMkLst>
-        </pc:spChg>
-        <pc:spChg chg="mod">
-          <ac:chgData name="Matthew Rockwell" userId="be3989a97b66b923" providerId="LiveId" clId="{B89F934C-8C3B-4D2B-ADD7-B5452E27AB91}" dt="2026-02-03T08:25:23.555" v="87" actId="1076"/>
-          <ac:spMkLst>
-            <pc:docMk/>
-            <pc:sldMk cId="0" sldId="260"/>
-            <ac:spMk id="44" creationId="{00000000-0000-0000-0000-000000000000}"/>
-          </ac:spMkLst>
-        </pc:spChg>
-        <pc:spChg chg="mod">
-          <ac:chgData name="Matthew Rockwell" userId="be3989a97b66b923" providerId="LiveId" clId="{B89F934C-8C3B-4D2B-ADD7-B5452E27AB91}" dt="2026-02-03T19:50:32.880" v="581" actId="1076"/>
-          <ac:spMkLst>
-            <pc:docMk/>
-            <pc:sldMk cId="0" sldId="260"/>
-            <ac:spMk id="45" creationId="{00000000-0000-0000-0000-000000000000}"/>
-          </ac:spMkLst>
-        </pc:spChg>
-        <pc:spChg chg="mod">
-          <ac:chgData name="Matthew Rockwell" userId="be3989a97b66b923" providerId="LiveId" clId="{B89F934C-8C3B-4D2B-ADD7-B5452E27AB91}" dt="2026-02-03T19:50:44.608" v="582" actId="1076"/>
-          <ac:spMkLst>
-            <pc:docMk/>
-            <pc:sldMk cId="0" sldId="260"/>
-            <ac:spMk id="46" creationId="{00000000-0000-0000-0000-000000000000}"/>
-          </ac:spMkLst>
-        </pc:spChg>
-        <pc:spChg chg="mod">
-          <ac:chgData name="Matthew Rockwell" userId="be3989a97b66b923" providerId="LiveId" clId="{B89F934C-8C3B-4D2B-ADD7-B5452E27AB91}" dt="2026-02-03T19:50:32.880" v="581" actId="1076"/>
-          <ac:spMkLst>
-            <pc:docMk/>
-            <pc:sldMk cId="0" sldId="260"/>
-            <ac:spMk id="48" creationId="{00000000-0000-0000-0000-000000000000}"/>
-          </ac:spMkLst>
-        </pc:spChg>
-        <pc:spChg chg="mod">
-          <ac:chgData name="Matthew Rockwell" userId="be3989a97b66b923" providerId="LiveId" clId="{B89F934C-8C3B-4D2B-ADD7-B5452E27AB91}" dt="2026-02-03T19:50:44.608" v="582" actId="1076"/>
-          <ac:spMkLst>
-            <pc:docMk/>
-            <pc:sldMk cId="0" sldId="260"/>
-            <ac:spMk id="49" creationId="{00000000-0000-0000-0000-000000000000}"/>
-          </ac:spMkLst>
-        </pc:spChg>
-        <pc:spChg chg="mod">
-          <ac:chgData name="Matthew Rockwell" userId="be3989a97b66b923" providerId="LiveId" clId="{B89F934C-8C3B-4D2B-ADD7-B5452E27AB91}" dt="2026-02-03T19:55:17.180" v="614" actId="242"/>
-          <ac:spMkLst>
-            <pc:docMk/>
-            <pc:sldMk cId="0" sldId="260"/>
-            <ac:spMk id="51" creationId="{00000000-0000-0000-0000-000000000000}"/>
-          </ac:spMkLst>
-        </pc:spChg>
-        <pc:spChg chg="mod">
-          <ac:chgData name="Matthew Rockwell" userId="be3989a97b66b923" providerId="LiveId" clId="{B89F934C-8C3B-4D2B-ADD7-B5452E27AB91}" dt="2026-02-03T19:50:44.608" v="582" actId="1076"/>
-          <ac:spMkLst>
-            <pc:docMk/>
-            <pc:sldMk cId="0" sldId="260"/>
-            <ac:spMk id="52" creationId="{00000000-0000-0000-0000-000000000000}"/>
-          </ac:spMkLst>
-        </pc:spChg>
-        <pc:spChg chg="mod">
-          <ac:chgData name="Matthew Rockwell" userId="be3989a97b66b923" providerId="LiveId" clId="{B89F934C-8C3B-4D2B-ADD7-B5452E27AB91}" dt="2026-02-03T19:49:39.153" v="578" actId="1076"/>
-          <ac:spMkLst>
-            <pc:docMk/>
-            <pc:sldMk cId="0" sldId="260"/>
-            <ac:spMk id="53" creationId="{00000000-0000-0000-0000-000000000000}"/>
-          </ac:spMkLst>
-        </pc:spChg>
-        <pc:spChg chg="add mod">
-          <ac:chgData name="Matthew Rockwell" userId="be3989a97b66b923" providerId="LiveId" clId="{B89F934C-8C3B-4D2B-ADD7-B5452E27AB91}" dt="2026-02-03T19:50:06.349" v="580" actId="948"/>
-          <ac:spMkLst>
-            <pc:docMk/>
-            <pc:sldMk cId="0" sldId="260"/>
-            <ac:spMk id="55" creationId="{B4CD9FB4-8EDA-CD65-5A19-F25B2E83691A}"/>
-          </ac:spMkLst>
-        </pc:spChg>
-        <pc:spChg chg="add del mod">
-          <ac:chgData name="Matthew Rockwell" userId="be3989a97b66b923" providerId="LiveId" clId="{B89F934C-8C3B-4D2B-ADD7-B5452E27AB91}" dt="2026-02-03T19:47:32.905" v="567" actId="478"/>
-          <ac:spMkLst>
-            <pc:docMk/>
-            <pc:sldMk cId="0" sldId="260"/>
-            <ac:spMk id="56" creationId="{D7100D82-DC34-BDC5-93B6-363781A3310B}"/>
-          </ac:spMkLst>
-        </pc:spChg>
-        <pc:spChg chg="add del">
-          <ac:chgData name="Matthew Rockwell" userId="be3989a97b66b923" providerId="LiveId" clId="{B89F934C-8C3B-4D2B-ADD7-B5452E27AB91}" dt="2026-02-03T19:51:19.201" v="584" actId="478"/>
-          <ac:spMkLst>
-            <pc:docMk/>
-            <pc:sldMk cId="0" sldId="260"/>
-            <ac:spMk id="57" creationId="{D8B0E346-3C07-DD60-EFD4-038875751749}"/>
-          </ac:spMkLst>
-        </pc:spChg>
-        <pc:spChg chg="add mod">
-          <ac:chgData name="Matthew Rockwell" userId="be3989a97b66b923" providerId="LiveId" clId="{B89F934C-8C3B-4D2B-ADD7-B5452E27AB91}" dt="2026-02-03T19:55:47.578" v="616" actId="208"/>
-          <ac:spMkLst>
-            <pc:docMk/>
-            <pc:sldMk cId="0" sldId="260"/>
-            <ac:spMk id="63" creationId="{022A7E07-DC45-A9B9-6AAE-80499F5910C5}"/>
-          </ac:spMkLst>
-        </pc:spChg>
-        <pc:cxnChg chg="add del mod">
-          <ac:chgData name="Matthew Rockwell" userId="be3989a97b66b923" providerId="LiveId" clId="{B89F934C-8C3B-4D2B-ADD7-B5452E27AB91}" dt="2026-02-03T19:51:51.463" v="589" actId="478"/>
-          <ac:cxnSpMkLst>
-            <pc:docMk/>
-            <pc:sldMk cId="0" sldId="260"/>
-            <ac:cxnSpMk id="59" creationId="{504503C5-C1C9-EBF9-C43F-5173945C587F}"/>
-          </ac:cxnSpMkLst>
-        </pc:cxnChg>
-      </pc:sldChg>
-      <pc:sldChg chg="modSp mod ord modNotesTx">
-        <pc:chgData name="Matthew Rockwell" userId="be3989a97b66b923" providerId="LiveId" clId="{B89F934C-8C3B-4D2B-ADD7-B5452E27AB91}" dt="2026-02-03T20:34:53.610" v="1266"/>
-        <pc:sldMkLst>
-          <pc:docMk/>
-          <pc:sldMk cId="0" sldId="261"/>
-        </pc:sldMkLst>
-        <pc:spChg chg="mod">
-          <ac:chgData name="Matthew Rockwell" userId="be3989a97b66b923" providerId="LiveId" clId="{B89F934C-8C3B-4D2B-ADD7-B5452E27AB91}" dt="2026-02-03T20:00:39.379" v="634" actId="1076"/>
-          <ac:spMkLst>
-            <pc:docMk/>
-            <pc:sldMk cId="0" sldId="261"/>
-            <ac:spMk id="4" creationId="{00000000-0000-0000-0000-000000000000}"/>
-          </ac:spMkLst>
-        </pc:spChg>
-        <pc:spChg chg="mod">
-          <ac:chgData name="Matthew Rockwell" userId="be3989a97b66b923" providerId="LiveId" clId="{B89F934C-8C3B-4D2B-ADD7-B5452E27AB91}" dt="2026-02-03T20:00:39.379" v="634" actId="1076"/>
-          <ac:spMkLst>
-            <pc:docMk/>
-            <pc:sldMk cId="0" sldId="261"/>
-            <ac:spMk id="5" creationId="{00000000-0000-0000-0000-000000000000}"/>
-          </ac:spMkLst>
-        </pc:spChg>
-        <pc:spChg chg="mod">
-          <ac:chgData name="Matthew Rockwell" userId="be3989a97b66b923" providerId="LiveId" clId="{B89F934C-8C3B-4D2B-ADD7-B5452E27AB91}" dt="2026-02-03T20:00:39.379" v="634" actId="1076"/>
-          <ac:spMkLst>
-            <pc:docMk/>
-            <pc:sldMk cId="0" sldId="261"/>
-            <ac:spMk id="6" creationId="{00000000-0000-0000-0000-000000000000}"/>
-          </ac:spMkLst>
-        </pc:spChg>
-        <pc:spChg chg="mod">
-          <ac:chgData name="Matthew Rockwell" userId="be3989a97b66b923" providerId="LiveId" clId="{B89F934C-8C3B-4D2B-ADD7-B5452E27AB91}" dt="2026-02-03T20:00:39.379" v="634" actId="1076"/>
-          <ac:spMkLst>
-            <pc:docMk/>
-            <pc:sldMk cId="0" sldId="261"/>
-            <ac:spMk id="7" creationId="{00000000-0000-0000-0000-000000000000}"/>
-          </ac:spMkLst>
-        </pc:spChg>
-        <pc:spChg chg="mod">
-          <ac:chgData name="Matthew Rockwell" userId="be3989a97b66b923" providerId="LiveId" clId="{B89F934C-8C3B-4D2B-ADD7-B5452E27AB91}" dt="2026-02-03T20:00:39.379" v="634" actId="1076"/>
-          <ac:spMkLst>
-            <pc:docMk/>
-            <pc:sldMk cId="0" sldId="261"/>
-            <ac:spMk id="8" creationId="{00000000-0000-0000-0000-000000000000}"/>
-          </ac:spMkLst>
-        </pc:spChg>
-        <pc:spChg chg="mod">
-          <ac:chgData name="Matthew Rockwell" userId="be3989a97b66b923" providerId="LiveId" clId="{B89F934C-8C3B-4D2B-ADD7-B5452E27AB91}" dt="2026-02-03T20:00:39.379" v="634" actId="1076"/>
-          <ac:spMkLst>
-            <pc:docMk/>
-            <pc:sldMk cId="0" sldId="261"/>
-            <ac:spMk id="9" creationId="{00000000-0000-0000-0000-000000000000}"/>
-          </ac:spMkLst>
-        </pc:spChg>
-        <pc:spChg chg="mod">
-          <ac:chgData name="Matthew Rockwell" userId="be3989a97b66b923" providerId="LiveId" clId="{B89F934C-8C3B-4D2B-ADD7-B5452E27AB91}" dt="2026-02-03T20:00:59.326" v="636" actId="207"/>
-          <ac:spMkLst>
-            <pc:docMk/>
-            <pc:sldMk cId="0" sldId="261"/>
-            <ac:spMk id="10" creationId="{00000000-0000-0000-0000-000000000000}"/>
-          </ac:spMkLst>
-        </pc:spChg>
-        <pc:spChg chg="mod">
-          <ac:chgData name="Matthew Rockwell" userId="be3989a97b66b923" providerId="LiveId" clId="{B89F934C-8C3B-4D2B-ADD7-B5452E27AB91}" dt="2026-02-03T19:57:19.713" v="620" actId="1076"/>
-          <ac:spMkLst>
-            <pc:docMk/>
-            <pc:sldMk cId="0" sldId="261"/>
-            <ac:spMk id="11" creationId="{00000000-0000-0000-0000-000000000000}"/>
-          </ac:spMkLst>
-        </pc:spChg>
-        <pc:spChg chg="mod">
-          <ac:chgData name="Matthew Rockwell" userId="be3989a97b66b923" providerId="LiveId" clId="{B89F934C-8C3B-4D2B-ADD7-B5452E27AB91}" dt="2026-02-03T19:57:19.713" v="620" actId="1076"/>
-          <ac:spMkLst>
-            <pc:docMk/>
-            <pc:sldMk cId="0" sldId="261"/>
-            <ac:spMk id="12" creationId="{00000000-0000-0000-0000-000000000000}"/>
-          </ac:spMkLst>
-        </pc:spChg>
-        <pc:spChg chg="mod">
-          <ac:chgData name="Matthew Rockwell" userId="be3989a97b66b923" providerId="LiveId" clId="{B89F934C-8C3B-4D2B-ADD7-B5452E27AB91}" dt="2026-02-03T19:57:19.713" v="620" actId="1076"/>
-          <ac:spMkLst>
-            <pc:docMk/>
-            <pc:sldMk cId="0" sldId="261"/>
-            <ac:spMk id="13" creationId="{00000000-0000-0000-0000-000000000000}"/>
-          </ac:spMkLst>
-        </pc:spChg>
-        <pc:spChg chg="mod">
-          <ac:chgData name="Matthew Rockwell" userId="be3989a97b66b923" providerId="LiveId" clId="{B89F934C-8C3B-4D2B-ADD7-B5452E27AB91}" dt="2026-02-03T19:57:19.713" v="620" actId="1076"/>
-          <ac:spMkLst>
-            <pc:docMk/>
-            <pc:sldMk cId="0" sldId="261"/>
-            <ac:spMk id="14" creationId="{00000000-0000-0000-0000-000000000000}"/>
-          </ac:spMkLst>
-        </pc:spChg>
-        <pc:spChg chg="mod">
-          <ac:chgData name="Matthew Rockwell" userId="be3989a97b66b923" providerId="LiveId" clId="{B89F934C-8C3B-4D2B-ADD7-B5452E27AB91}" dt="2026-02-03T19:57:19.713" v="620" actId="1076"/>
-          <ac:spMkLst>
-            <pc:docMk/>
-            <pc:sldMk cId="0" sldId="261"/>
-            <ac:spMk id="15" creationId="{00000000-0000-0000-0000-000000000000}"/>
-          </ac:spMkLst>
-        </pc:spChg>
-        <pc:spChg chg="mod">
-          <ac:chgData name="Matthew Rockwell" userId="be3989a97b66b923" providerId="LiveId" clId="{B89F934C-8C3B-4D2B-ADD7-B5452E27AB91}" dt="2026-02-03T19:56:49.273" v="619" actId="1076"/>
-          <ac:spMkLst>
-            <pc:docMk/>
-            <pc:sldMk cId="0" sldId="261"/>
-            <ac:spMk id="16" creationId="{00000000-0000-0000-0000-000000000000}"/>
-          </ac:spMkLst>
-        </pc:spChg>
-        <pc:spChg chg="mod">
-          <ac:chgData name="Matthew Rockwell" userId="be3989a97b66b923" providerId="LiveId" clId="{B89F934C-8C3B-4D2B-ADD7-B5452E27AB91}" dt="2026-02-03T19:57:19.713" v="620" actId="1076"/>
-          <ac:spMkLst>
-            <pc:docMk/>
-            <pc:sldMk cId="0" sldId="261"/>
-            <ac:spMk id="17" creationId="{00000000-0000-0000-0000-000000000000}"/>
-          </ac:spMkLst>
-        </pc:spChg>
-        <pc:spChg chg="mod">
-          <ac:chgData name="Matthew Rockwell" userId="be3989a97b66b923" providerId="LiveId" clId="{B89F934C-8C3B-4D2B-ADD7-B5452E27AB91}" dt="2026-02-03T19:57:19.713" v="620" actId="1076"/>
-          <ac:spMkLst>
-            <pc:docMk/>
-            <pc:sldMk cId="0" sldId="261"/>
-            <ac:spMk id="18" creationId="{00000000-0000-0000-0000-000000000000}"/>
-          </ac:spMkLst>
-        </pc:spChg>
-        <pc:spChg chg="mod">
-          <ac:chgData name="Matthew Rockwell" userId="be3989a97b66b923" providerId="LiveId" clId="{B89F934C-8C3B-4D2B-ADD7-B5452E27AB91}" dt="2026-02-03T19:56:49.273" v="619" actId="1076"/>
-          <ac:spMkLst>
-            <pc:docMk/>
-            <pc:sldMk cId="0" sldId="261"/>
-            <ac:spMk id="19" creationId="{00000000-0000-0000-0000-000000000000}"/>
-          </ac:spMkLst>
-        </pc:spChg>
-        <pc:spChg chg="mod">
-          <ac:chgData name="Matthew Rockwell" userId="be3989a97b66b923" providerId="LiveId" clId="{B89F934C-8C3B-4D2B-ADD7-B5452E27AB91}" dt="2026-02-03T19:56:49.273" v="619" actId="1076"/>
-          <ac:spMkLst>
-            <pc:docMk/>
-            <pc:sldMk cId="0" sldId="261"/>
-            <ac:spMk id="20" creationId="{00000000-0000-0000-0000-000000000000}"/>
-          </ac:spMkLst>
-        </pc:spChg>
-        <pc:spChg chg="mod">
-          <ac:chgData name="Matthew Rockwell" userId="be3989a97b66b923" providerId="LiveId" clId="{B89F934C-8C3B-4D2B-ADD7-B5452E27AB91}" dt="2026-02-03T19:56:36.031" v="618" actId="1076"/>
-          <ac:spMkLst>
-            <pc:docMk/>
-            <pc:sldMk cId="0" sldId="261"/>
-            <ac:spMk id="21" creationId="{00000000-0000-0000-0000-000000000000}"/>
-          </ac:spMkLst>
-        </pc:spChg>
-        <pc:spChg chg="mod">
-          <ac:chgData name="Matthew Rockwell" userId="be3989a97b66b923" providerId="LiveId" clId="{B89F934C-8C3B-4D2B-ADD7-B5452E27AB91}" dt="2026-02-03T19:56:36.031" v="618" actId="1076"/>
-          <ac:spMkLst>
-            <pc:docMk/>
-            <pc:sldMk cId="0" sldId="261"/>
-            <ac:spMk id="22" creationId="{00000000-0000-0000-0000-000000000000}"/>
-          </ac:spMkLst>
-        </pc:spChg>
-        <pc:spChg chg="mod">
-          <ac:chgData name="Matthew Rockwell" userId="be3989a97b66b923" providerId="LiveId" clId="{B89F934C-8C3B-4D2B-ADD7-B5452E27AB91}" dt="2026-02-03T19:57:19.713" v="620" actId="1076"/>
-          <ac:spMkLst>
-            <pc:docMk/>
-            <pc:sldMk cId="0" sldId="261"/>
-            <ac:spMk id="23" creationId="{00000000-0000-0000-0000-000000000000}"/>
-          </ac:spMkLst>
-        </pc:spChg>
-        <pc:spChg chg="mod">
-          <ac:chgData name="Matthew Rockwell" userId="be3989a97b66b923" providerId="LiveId" clId="{B89F934C-8C3B-4D2B-ADD7-B5452E27AB91}" dt="2026-02-03T19:56:36.031" v="618" actId="1076"/>
-          <ac:spMkLst>
-            <pc:docMk/>
-            <pc:sldMk cId="0" sldId="261"/>
-            <ac:spMk id="24" creationId="{00000000-0000-0000-0000-000000000000}"/>
-          </ac:spMkLst>
-        </pc:spChg>
-        <pc:spChg chg="mod">
-          <ac:chgData name="Matthew Rockwell" userId="be3989a97b66b923" providerId="LiveId" clId="{B89F934C-8C3B-4D2B-ADD7-B5452E27AB91}" dt="2026-02-03T19:57:19.713" v="620" actId="1076"/>
-          <ac:spMkLst>
-            <pc:docMk/>
-            <pc:sldMk cId="0" sldId="261"/>
-            <ac:spMk id="25" creationId="{00000000-0000-0000-0000-000000000000}"/>
-          </ac:spMkLst>
-        </pc:spChg>
-        <pc:spChg chg="mod">
-          <ac:chgData name="Matthew Rockwell" userId="be3989a97b66b923" providerId="LiveId" clId="{B89F934C-8C3B-4D2B-ADD7-B5452E27AB91}" dt="2026-02-03T19:57:33.217" v="622" actId="20577"/>
-          <ac:spMkLst>
-            <pc:docMk/>
-            <pc:sldMk cId="0" sldId="261"/>
-            <ac:spMk id="26" creationId="{00000000-0000-0000-0000-000000000000}"/>
-          </ac:spMkLst>
-        </pc:spChg>
-        <pc:spChg chg="mod">
-          <ac:chgData name="Matthew Rockwell" userId="be3989a97b66b923" providerId="LiveId" clId="{B89F934C-8C3B-4D2B-ADD7-B5452E27AB91}" dt="2026-02-03T19:57:19.713" v="620" actId="1076"/>
-          <ac:spMkLst>
-            <pc:docMk/>
-            <pc:sldMk cId="0" sldId="261"/>
-            <ac:spMk id="27" creationId="{00000000-0000-0000-0000-000000000000}"/>
-          </ac:spMkLst>
-        </pc:spChg>
-      </pc:sldChg>
-      <pc:sldChg chg="modSp mod ord modNotesTx">
-        <pc:chgData name="Matthew Rockwell" userId="be3989a97b66b923" providerId="LiveId" clId="{B89F934C-8C3B-4D2B-ADD7-B5452E27AB91}" dt="2026-02-03T20:36:32.610" v="1275"/>
-        <pc:sldMkLst>
-          <pc:docMk/>
-          <pc:sldMk cId="0" sldId="262"/>
-        </pc:sldMkLst>
-        <pc:spChg chg="mod">
-          <ac:chgData name="Matthew Rockwell" userId="be3989a97b66b923" providerId="LiveId" clId="{B89F934C-8C3B-4D2B-ADD7-B5452E27AB91}" dt="2026-02-03T08:53:36.710" v="352" actId="1076"/>
-          <ac:spMkLst>
-            <pc:docMk/>
-            <pc:sldMk cId="0" sldId="262"/>
-            <ac:spMk id="3" creationId="{00000000-0000-0000-0000-000000000000}"/>
-          </ac:spMkLst>
-        </pc:spChg>
-        <pc:spChg chg="mod">
-          <ac:chgData name="Matthew Rockwell" userId="be3989a97b66b923" providerId="LiveId" clId="{B89F934C-8C3B-4D2B-ADD7-B5452E27AB91}" dt="2026-02-03T08:53:03.597" v="348" actId="1076"/>
-          <ac:spMkLst>
-            <pc:docMk/>
-            <pc:sldMk cId="0" sldId="262"/>
-            <ac:spMk id="8" creationId="{00000000-0000-0000-0000-000000000000}"/>
-          </ac:spMkLst>
-        </pc:spChg>
-        <pc:spChg chg="mod">
-          <ac:chgData name="Matthew Rockwell" userId="be3989a97b66b923" providerId="LiveId" clId="{B89F934C-8C3B-4D2B-ADD7-B5452E27AB91}" dt="2026-02-03T20:04:14.964" v="642" actId="1076"/>
-          <ac:spMkLst>
-            <pc:docMk/>
-            <pc:sldMk cId="0" sldId="262"/>
-            <ac:spMk id="9" creationId="{00000000-0000-0000-0000-000000000000}"/>
-          </ac:spMkLst>
-        </pc:spChg>
-        <pc:spChg chg="mod">
-          <ac:chgData name="Matthew Rockwell" userId="be3989a97b66b923" providerId="LiveId" clId="{B89F934C-8C3B-4D2B-ADD7-B5452E27AB91}" dt="2026-02-03T20:04:14.964" v="642" actId="1076"/>
-          <ac:spMkLst>
-            <pc:docMk/>
-            <pc:sldMk cId="0" sldId="262"/>
-            <ac:spMk id="10" creationId="{00000000-0000-0000-0000-000000000000}"/>
-          </ac:spMkLst>
-        </pc:spChg>
-        <pc:spChg chg="mod">
-          <ac:chgData name="Matthew Rockwell" userId="be3989a97b66b923" providerId="LiveId" clId="{B89F934C-8C3B-4D2B-ADD7-B5452E27AB91}" dt="2026-02-03T08:52:45.608" v="346" actId="242"/>
-          <ac:spMkLst>
-            <pc:docMk/>
-            <pc:sldMk cId="0" sldId="262"/>
-            <ac:spMk id="11" creationId="{00000000-0000-0000-0000-000000000000}"/>
-          </ac:spMkLst>
-        </pc:spChg>
-        <pc:spChg chg="mod">
-          <ac:chgData name="Matthew Rockwell" userId="be3989a97b66b923" providerId="LiveId" clId="{B89F934C-8C3B-4D2B-ADD7-B5452E27AB91}" dt="2026-02-03T08:53:03.597" v="348" actId="1076"/>
-          <ac:spMkLst>
-            <pc:docMk/>
-            <pc:sldMk cId="0" sldId="262"/>
-            <ac:spMk id="15" creationId="{00000000-0000-0000-0000-000000000000}"/>
-          </ac:spMkLst>
-        </pc:spChg>
-        <pc:spChg chg="mod">
-          <ac:chgData name="Matthew Rockwell" userId="be3989a97b66b923" providerId="LiveId" clId="{B89F934C-8C3B-4D2B-ADD7-B5452E27AB91}" dt="2026-02-03T20:04:14.964" v="642" actId="1076"/>
-          <ac:spMkLst>
-            <pc:docMk/>
-            <pc:sldMk cId="0" sldId="262"/>
-            <ac:spMk id="16" creationId="{00000000-0000-0000-0000-000000000000}"/>
-          </ac:spMkLst>
-        </pc:spChg>
-        <pc:spChg chg="mod">
-          <ac:chgData name="Matthew Rockwell" userId="be3989a97b66b923" providerId="LiveId" clId="{B89F934C-8C3B-4D2B-ADD7-B5452E27AB91}" dt="2026-02-03T20:04:14.964" v="642" actId="1076"/>
-          <ac:spMkLst>
-            <pc:docMk/>
-            <pc:sldMk cId="0" sldId="262"/>
-            <ac:spMk id="17" creationId="{00000000-0000-0000-0000-000000000000}"/>
-          </ac:spMkLst>
-        </pc:spChg>
-        <pc:spChg chg="mod">
-          <ac:chgData name="Matthew Rockwell" userId="be3989a97b66b923" providerId="LiveId" clId="{B89F934C-8C3B-4D2B-ADD7-B5452E27AB91}" dt="2026-02-03T08:52:45.608" v="346" actId="242"/>
-          <ac:spMkLst>
-            <pc:docMk/>
-            <pc:sldMk cId="0" sldId="262"/>
-            <ac:spMk id="18" creationId="{00000000-0000-0000-0000-000000000000}"/>
-          </ac:spMkLst>
-        </pc:spChg>
-        <pc:spChg chg="mod">
-          <ac:chgData name="Matthew Rockwell" userId="be3989a97b66b923" providerId="LiveId" clId="{B89F934C-8C3B-4D2B-ADD7-B5452E27AB91}" dt="2026-02-03T08:53:03.597" v="348" actId="1076"/>
-          <ac:spMkLst>
-            <pc:docMk/>
-            <pc:sldMk cId="0" sldId="262"/>
-            <ac:spMk id="22" creationId="{00000000-0000-0000-0000-000000000000}"/>
-          </ac:spMkLst>
-        </pc:spChg>
-        <pc:spChg chg="mod">
-          <ac:chgData name="Matthew Rockwell" userId="be3989a97b66b923" providerId="LiveId" clId="{B89F934C-8C3B-4D2B-ADD7-B5452E27AB91}" dt="2026-02-03T20:04:14.964" v="642" actId="1076"/>
-          <ac:spMkLst>
-            <pc:docMk/>
-            <pc:sldMk cId="0" sldId="262"/>
-            <ac:spMk id="23" creationId="{00000000-0000-0000-0000-000000000000}"/>
-          </ac:spMkLst>
-        </pc:spChg>
-        <pc:spChg chg="mod">
-          <ac:chgData name="Matthew Rockwell" userId="be3989a97b66b923" providerId="LiveId" clId="{B89F934C-8C3B-4D2B-ADD7-B5452E27AB91}" dt="2026-02-03T20:04:14.964" v="642" actId="1076"/>
-          <ac:spMkLst>
-            <pc:docMk/>
-            <pc:sldMk cId="0" sldId="262"/>
-            <ac:spMk id="24" creationId="{00000000-0000-0000-0000-000000000000}"/>
-          </ac:spMkLst>
-        </pc:spChg>
-        <pc:spChg chg="mod">
-          <ac:chgData name="Matthew Rockwell" userId="be3989a97b66b923" providerId="LiveId" clId="{B89F934C-8C3B-4D2B-ADD7-B5452E27AB91}" dt="2026-02-03T08:52:45.608" v="346" actId="242"/>
-          <ac:spMkLst>
-            <pc:docMk/>
-            <pc:sldMk cId="0" sldId="262"/>
-            <ac:spMk id="25" creationId="{00000000-0000-0000-0000-000000000000}"/>
-          </ac:spMkLst>
-        </pc:spChg>
-        <pc:spChg chg="mod">
-          <ac:chgData name="Matthew Rockwell" userId="be3989a97b66b923" providerId="LiveId" clId="{B89F934C-8C3B-4D2B-ADD7-B5452E27AB91}" dt="2026-02-03T08:53:03.597" v="348" actId="1076"/>
-          <ac:spMkLst>
-            <pc:docMk/>
-            <pc:sldMk cId="0" sldId="262"/>
-            <ac:spMk id="29" creationId="{00000000-0000-0000-0000-000000000000}"/>
-          </ac:spMkLst>
-        </pc:spChg>
-        <pc:spChg chg="mod">
-          <ac:chgData name="Matthew Rockwell" userId="be3989a97b66b923" providerId="LiveId" clId="{B89F934C-8C3B-4D2B-ADD7-B5452E27AB91}" dt="2026-02-03T20:04:14.964" v="642" actId="1076"/>
-          <ac:spMkLst>
-            <pc:docMk/>
-            <pc:sldMk cId="0" sldId="262"/>
-            <ac:spMk id="30" creationId="{00000000-0000-0000-0000-000000000000}"/>
-          </ac:spMkLst>
-        </pc:spChg>
-        <pc:spChg chg="mod">
-          <ac:chgData name="Matthew Rockwell" userId="be3989a97b66b923" providerId="LiveId" clId="{B89F934C-8C3B-4D2B-ADD7-B5452E27AB91}" dt="2026-02-03T20:04:14.964" v="642" actId="1076"/>
-          <ac:spMkLst>
-            <pc:docMk/>
-            <pc:sldMk cId="0" sldId="262"/>
-            <ac:spMk id="31" creationId="{00000000-0000-0000-0000-000000000000}"/>
-          </ac:spMkLst>
-        </pc:spChg>
-        <pc:spChg chg="mod">
-          <ac:chgData name="Matthew Rockwell" userId="be3989a97b66b923" providerId="LiveId" clId="{B89F934C-8C3B-4D2B-ADD7-B5452E27AB91}" dt="2026-02-03T08:31:43.366" v="142" actId="207"/>
-          <ac:spMkLst>
-            <pc:docMk/>
-            <pc:sldMk cId="0" sldId="262"/>
-            <ac:spMk id="32" creationId="{00000000-0000-0000-0000-000000000000}"/>
-          </ac:spMkLst>
-        </pc:spChg>
-        <pc:spChg chg="mod">
-          <ac:chgData name="Matthew Rockwell" userId="be3989a97b66b923" providerId="LiveId" clId="{B89F934C-8C3B-4D2B-ADD7-B5452E27AB91}" dt="2026-02-03T20:33:06.137" v="1221" actId="1076"/>
-          <ac:spMkLst>
-            <pc:docMk/>
-            <pc:sldMk cId="0" sldId="262"/>
-            <ac:spMk id="33" creationId="{00000000-0000-0000-0000-000000000000}"/>
-          </ac:spMkLst>
-        </pc:spChg>
-        <pc:spChg chg="mod">
-          <ac:chgData name="Matthew Rockwell" userId="be3989a97b66b923" providerId="LiveId" clId="{B89F934C-8C3B-4D2B-ADD7-B5452E27AB91}" dt="2026-02-03T20:33:06.137" v="1221" actId="1076"/>
-          <ac:spMkLst>
-            <pc:docMk/>
-            <pc:sldMk cId="0" sldId="262"/>
-            <ac:spMk id="34" creationId="{00000000-0000-0000-0000-000000000000}"/>
-          </ac:spMkLst>
-        </pc:spChg>
-        <pc:spChg chg="mod">
-          <ac:chgData name="Matthew Rockwell" userId="be3989a97b66b923" providerId="LiveId" clId="{B89F934C-8C3B-4D2B-ADD7-B5452E27AB91}" dt="2026-02-03T20:33:06.137" v="1221" actId="1076"/>
-          <ac:spMkLst>
-            <pc:docMk/>
-            <pc:sldMk cId="0" sldId="262"/>
-            <ac:spMk id="35" creationId="{00000000-0000-0000-0000-000000000000}"/>
-          </ac:spMkLst>
-        </pc:spChg>
-        <pc:spChg chg="mod">
-          <ac:chgData name="Matthew Rockwell" userId="be3989a97b66b923" providerId="LiveId" clId="{B89F934C-8C3B-4D2B-ADD7-B5452E27AB91}" dt="2026-02-03T20:33:06.137" v="1221" actId="1076"/>
-          <ac:spMkLst>
-            <pc:docMk/>
-            <pc:sldMk cId="0" sldId="262"/>
-            <ac:spMk id="36" creationId="{00000000-0000-0000-0000-000000000000}"/>
-          </ac:spMkLst>
-        </pc:spChg>
-        <pc:spChg chg="mod">
-          <ac:chgData name="Matthew Rockwell" userId="be3989a97b66b923" providerId="LiveId" clId="{B89F934C-8C3B-4D2B-ADD7-B5452E27AB91}" dt="2026-02-03T20:33:06.137" v="1221" actId="1076"/>
-          <ac:spMkLst>
-            <pc:docMk/>
-            <pc:sldMk cId="0" sldId="262"/>
-            <ac:spMk id="37" creationId="{00000000-0000-0000-0000-000000000000}"/>
-          </ac:spMkLst>
-        </pc:spChg>
-        <pc:spChg chg="mod">
-          <ac:chgData name="Matthew Rockwell" userId="be3989a97b66b923" providerId="LiveId" clId="{B89F934C-8C3B-4D2B-ADD7-B5452E27AB91}" dt="2026-02-03T20:33:06.137" v="1221" actId="1076"/>
-          <ac:spMkLst>
-            <pc:docMk/>
-            <pc:sldMk cId="0" sldId="262"/>
-            <ac:spMk id="38" creationId="{00000000-0000-0000-0000-000000000000}"/>
-          </ac:spMkLst>
-        </pc:spChg>
-        <pc:spChg chg="mod">
-          <ac:chgData name="Matthew Rockwell" userId="be3989a97b66b923" providerId="LiveId" clId="{B89F934C-8C3B-4D2B-ADD7-B5452E27AB91}" dt="2026-02-03T20:33:06.137" v="1221" actId="1076"/>
-          <ac:spMkLst>
-            <pc:docMk/>
-            <pc:sldMk cId="0" sldId="262"/>
-            <ac:spMk id="39" creationId="{00000000-0000-0000-0000-000000000000}"/>
-          </ac:spMkLst>
-        </pc:spChg>
-        <pc:spChg chg="mod">
-          <ac:chgData name="Matthew Rockwell" userId="be3989a97b66b923" providerId="LiveId" clId="{B89F934C-8C3B-4D2B-ADD7-B5452E27AB91}" dt="2026-02-03T20:33:06.137" v="1221" actId="1076"/>
-          <ac:spMkLst>
-            <pc:docMk/>
-            <pc:sldMk cId="0" sldId="262"/>
-            <ac:spMk id="40" creationId="{00000000-0000-0000-0000-000000000000}"/>
-          </ac:spMkLst>
-        </pc:spChg>
-        <pc:spChg chg="mod">
-          <ac:chgData name="Matthew Rockwell" userId="be3989a97b66b923" providerId="LiveId" clId="{B89F934C-8C3B-4D2B-ADD7-B5452E27AB91}" dt="2026-02-03T20:33:06.137" v="1221" actId="1076"/>
-          <ac:spMkLst>
-            <pc:docMk/>
-            <pc:sldMk cId="0" sldId="262"/>
-            <ac:spMk id="41" creationId="{00000000-0000-0000-0000-000000000000}"/>
-          </ac:spMkLst>
-        </pc:spChg>
-        <pc:spChg chg="mod">
-          <ac:chgData name="Matthew Rockwell" userId="be3989a97b66b923" providerId="LiveId" clId="{B89F934C-8C3B-4D2B-ADD7-B5452E27AB91}" dt="2026-02-03T20:33:06.137" v="1221" actId="1076"/>
-          <ac:spMkLst>
-            <pc:docMk/>
-            <pc:sldMk cId="0" sldId="262"/>
-            <ac:spMk id="42" creationId="{00000000-0000-0000-0000-000000000000}"/>
-          </ac:spMkLst>
-        </pc:spChg>
-        <pc:spChg chg="mod">
-          <ac:chgData name="Matthew Rockwell" userId="be3989a97b66b923" providerId="LiveId" clId="{B89F934C-8C3B-4D2B-ADD7-B5452E27AB91}" dt="2026-02-03T20:32:06.620" v="1219" actId="403"/>
-          <ac:spMkLst>
-            <pc:docMk/>
-            <pc:sldMk cId="0" sldId="262"/>
-            <ac:spMk id="43" creationId="{00000000-0000-0000-0000-000000000000}"/>
-          </ac:spMkLst>
-        </pc:spChg>
-      </pc:sldChg>
-      <pc:sldChg chg="modSp mod modNotesTx">
-        <pc:chgData name="Matthew Rockwell" userId="be3989a97b66b923" providerId="LiveId" clId="{B89F934C-8C3B-4D2B-ADD7-B5452E27AB91}" dt="2026-02-03T20:33:44.404" v="1232" actId="20577"/>
-        <pc:sldMkLst>
-          <pc:docMk/>
-          <pc:sldMk cId="0" sldId="263"/>
-        </pc:sldMkLst>
-        <pc:spChg chg="mod">
-          <ac:chgData name="Matthew Rockwell" userId="be3989a97b66b923" providerId="LiveId" clId="{B89F934C-8C3B-4D2B-ADD7-B5452E27AB91}" dt="2026-02-03T08:33:03.156" v="153" actId="207"/>
-          <ac:spMkLst>
-            <pc:docMk/>
-            <pc:sldMk cId="0" sldId="263"/>
-            <ac:spMk id="4" creationId="{00000000-0000-0000-0000-000000000000}"/>
-          </ac:spMkLst>
-        </pc:spChg>
-        <pc:spChg chg="mod">
-          <ac:chgData name="Matthew Rockwell" userId="be3989a97b66b923" providerId="LiveId" clId="{B89F934C-8C3B-4D2B-ADD7-B5452E27AB91}" dt="2026-02-03T08:32:58.692" v="152" actId="207"/>
-          <ac:spMkLst>
-            <pc:docMk/>
-            <pc:sldMk cId="0" sldId="263"/>
-            <ac:spMk id="6" creationId="{00000000-0000-0000-0000-000000000000}"/>
-          </ac:spMkLst>
-        </pc:spChg>
-        <pc:graphicFrameChg chg="mod modGraphic">
-          <ac:chgData name="Matthew Rockwell" userId="be3989a97b66b923" providerId="LiveId" clId="{B89F934C-8C3B-4D2B-ADD7-B5452E27AB91}" dt="2026-02-03T20:05:26.087" v="650" actId="27107"/>
-          <ac:graphicFrameMkLst>
-            <pc:docMk/>
-            <pc:sldMk cId="0" sldId="263"/>
-            <ac:graphicFrameMk id="5" creationId="{00000000-0000-0000-0000-000000000000}"/>
-          </ac:graphicFrameMkLst>
-        </pc:graphicFrameChg>
-        <pc:graphicFrameChg chg="modGraphic">
-          <ac:chgData name="Matthew Rockwell" userId="be3989a97b66b923" providerId="LiveId" clId="{B89F934C-8C3B-4D2B-ADD7-B5452E27AB91}" dt="2026-02-03T08:53:55.399" v="354" actId="207"/>
-          <ac:graphicFrameMkLst>
-            <pc:docMk/>
-            <pc:sldMk cId="0" sldId="263"/>
-            <ac:graphicFrameMk id="7" creationId="{00000000-0000-0000-0000-000000000000}"/>
-          </ac:graphicFrameMkLst>
-        </pc:graphicFrameChg>
-      </pc:sldChg>
-      <pc:sldChg chg="addSp delSp modSp mod modNotesTx">
-        <pc:chgData name="Matthew Rockwell" userId="be3989a97b66b923" providerId="LiveId" clId="{B89F934C-8C3B-4D2B-ADD7-B5452E27AB91}" dt="2026-02-03T20:34:19.439" v="1257" actId="20577"/>
-        <pc:sldMkLst>
-          <pc:docMk/>
-          <pc:sldMk cId="0" sldId="264"/>
-        </pc:sldMkLst>
-        <pc:spChg chg="mod">
-          <ac:chgData name="Matthew Rockwell" userId="be3989a97b66b923" providerId="LiveId" clId="{B89F934C-8C3B-4D2B-ADD7-B5452E27AB91}" dt="2026-02-03T08:35:52.122" v="173" actId="207"/>
-          <ac:spMkLst>
-            <pc:docMk/>
-            <pc:sldMk cId="0" sldId="264"/>
-            <ac:spMk id="3" creationId="{00000000-0000-0000-0000-000000000000}"/>
-          </ac:spMkLst>
-        </pc:spChg>
-        <pc:spChg chg="mod">
-          <ac:chgData name="Matthew Rockwell" userId="be3989a97b66b923" providerId="LiveId" clId="{B89F934C-8C3B-4D2B-ADD7-B5452E27AB91}" dt="2026-02-03T08:33:32.811" v="154" actId="1076"/>
-          <ac:spMkLst>
-            <pc:docMk/>
-            <pc:sldMk cId="0" sldId="264"/>
-            <ac:spMk id="7" creationId="{00000000-0000-0000-0000-000000000000}"/>
-          </ac:spMkLst>
-        </pc:spChg>
-        <pc:spChg chg="mod">
-          <ac:chgData name="Matthew Rockwell" userId="be3989a97b66b923" providerId="LiveId" clId="{B89F934C-8C3B-4D2B-ADD7-B5452E27AB91}" dt="2026-02-03T20:06:44.899" v="657" actId="1076"/>
-          <ac:spMkLst>
-            <pc:docMk/>
-            <pc:sldMk cId="0" sldId="264"/>
-            <ac:spMk id="10" creationId="{00000000-0000-0000-0000-000000000000}"/>
-          </ac:spMkLst>
-        </pc:spChg>
-        <pc:spChg chg="mod">
-          <ac:chgData name="Matthew Rockwell" userId="be3989a97b66b923" providerId="LiveId" clId="{B89F934C-8C3B-4D2B-ADD7-B5452E27AB91}" dt="2026-02-03T08:34:19.587" v="159" actId="1076"/>
-          <ac:spMkLst>
-            <pc:docMk/>
-            <pc:sldMk cId="0" sldId="264"/>
-            <ac:spMk id="12" creationId="{00000000-0000-0000-0000-000000000000}"/>
-          </ac:spMkLst>
-        </pc:spChg>
-        <pc:spChg chg="mod">
-          <ac:chgData name="Matthew Rockwell" userId="be3989a97b66b923" providerId="LiveId" clId="{B89F934C-8C3B-4D2B-ADD7-B5452E27AB91}" dt="2026-02-03T20:06:39.075" v="656" actId="1076"/>
-          <ac:spMkLst>
-            <pc:docMk/>
-            <pc:sldMk cId="0" sldId="264"/>
-            <ac:spMk id="15" creationId="{00000000-0000-0000-0000-000000000000}"/>
-          </ac:spMkLst>
-        </pc:spChg>
-        <pc:spChg chg="mod">
-          <ac:chgData name="Matthew Rockwell" userId="be3989a97b66b923" providerId="LiveId" clId="{B89F934C-8C3B-4D2B-ADD7-B5452E27AB91}" dt="2026-02-03T08:33:44.407" v="156" actId="1076"/>
-          <ac:spMkLst>
-            <pc:docMk/>
-            <pc:sldMk cId="0" sldId="264"/>
-            <ac:spMk id="17" creationId="{00000000-0000-0000-0000-000000000000}"/>
-          </ac:spMkLst>
-        </pc:spChg>
-        <pc:spChg chg="mod">
-          <ac:chgData name="Matthew Rockwell" userId="be3989a97b66b923" providerId="LiveId" clId="{B89F934C-8C3B-4D2B-ADD7-B5452E27AB91}" dt="2026-02-03T20:06:30.880" v="655" actId="1076"/>
-          <ac:spMkLst>
-            <pc:docMk/>
-            <pc:sldMk cId="0" sldId="264"/>
-            <ac:spMk id="20" creationId="{00000000-0000-0000-0000-000000000000}"/>
-          </ac:spMkLst>
-        </pc:spChg>
-        <pc:spChg chg="mod">
-          <ac:chgData name="Matthew Rockwell" userId="be3989a97b66b923" providerId="LiveId" clId="{B89F934C-8C3B-4D2B-ADD7-B5452E27AB91}" dt="2026-02-03T08:33:56.344" v="157" actId="1076"/>
-          <ac:spMkLst>
-            <pc:docMk/>
-            <pc:sldMk cId="0" sldId="264"/>
-            <ac:spMk id="22" creationId="{00000000-0000-0000-0000-000000000000}"/>
-          </ac:spMkLst>
-        </pc:spChg>
-        <pc:spChg chg="mod">
-          <ac:chgData name="Matthew Rockwell" userId="be3989a97b66b923" providerId="LiveId" clId="{B89F934C-8C3B-4D2B-ADD7-B5452E27AB91}" dt="2026-02-03T08:35:23.010" v="169" actId="207"/>
-          <ac:spMkLst>
-            <pc:docMk/>
-            <pc:sldMk cId="0" sldId="264"/>
-            <ac:spMk id="25" creationId="{00000000-0000-0000-0000-000000000000}"/>
-          </ac:spMkLst>
-        </pc:spChg>
-        <pc:spChg chg="mod">
-          <ac:chgData name="Matthew Rockwell" userId="be3989a97b66b923" providerId="LiveId" clId="{B89F934C-8C3B-4D2B-ADD7-B5452E27AB91}" dt="2026-02-03T08:33:56.344" v="157" actId="1076"/>
-          <ac:spMkLst>
-            <pc:docMk/>
-            <pc:sldMk cId="0" sldId="264"/>
-            <ac:spMk id="27" creationId="{00000000-0000-0000-0000-000000000000}"/>
-          </ac:spMkLst>
-        </pc:spChg>
-        <pc:spChg chg="mod">
-          <ac:chgData name="Matthew Rockwell" userId="be3989a97b66b923" providerId="LiveId" clId="{B89F934C-8C3B-4D2B-ADD7-B5452E27AB91}" dt="2026-02-03T08:35:23.010" v="169" actId="207"/>
-          <ac:spMkLst>
-            <pc:docMk/>
-            <pc:sldMk cId="0" sldId="264"/>
-            <ac:spMk id="30" creationId="{00000000-0000-0000-0000-000000000000}"/>
-          </ac:spMkLst>
-        </pc:spChg>
-        <pc:spChg chg="mod">
-          <ac:chgData name="Matthew Rockwell" userId="be3989a97b66b923" providerId="LiveId" clId="{B89F934C-8C3B-4D2B-ADD7-B5452E27AB91}" dt="2026-02-03T08:33:56.344" v="157" actId="1076"/>
-          <ac:spMkLst>
-            <pc:docMk/>
-            <pc:sldMk cId="0" sldId="264"/>
-            <ac:spMk id="32" creationId="{00000000-0000-0000-0000-000000000000}"/>
-          </ac:spMkLst>
-        </pc:spChg>
-        <pc:spChg chg="mod">
-          <ac:chgData name="Matthew Rockwell" userId="be3989a97b66b923" providerId="LiveId" clId="{B89F934C-8C3B-4D2B-ADD7-B5452E27AB91}" dt="2026-02-03T20:06:21.109" v="654" actId="1076"/>
-          <ac:spMkLst>
-            <pc:docMk/>
-            <pc:sldMk cId="0" sldId="264"/>
-            <ac:spMk id="35" creationId="{00000000-0000-0000-0000-000000000000}"/>
-          </ac:spMkLst>
-        </pc:spChg>
-        <pc:spChg chg="mod">
-          <ac:chgData name="Matthew Rockwell" userId="be3989a97b66b923" providerId="LiveId" clId="{B89F934C-8C3B-4D2B-ADD7-B5452E27AB91}" dt="2026-02-03T19:33:58.258" v="409" actId="1076"/>
-          <ac:spMkLst>
-            <pc:docMk/>
-            <pc:sldMk cId="0" sldId="264"/>
-            <ac:spMk id="36" creationId="{00000000-0000-0000-0000-000000000000}"/>
-          </ac:spMkLst>
-        </pc:spChg>
-        <pc:spChg chg="mod">
-          <ac:chgData name="Matthew Rockwell" userId="be3989a97b66b923" providerId="LiveId" clId="{B89F934C-8C3B-4D2B-ADD7-B5452E27AB91}" dt="2026-02-03T19:33:58.258" v="409" actId="1076"/>
-          <ac:spMkLst>
-            <pc:docMk/>
-            <pc:sldMk cId="0" sldId="264"/>
-            <ac:spMk id="37" creationId="{00000000-0000-0000-0000-000000000000}"/>
-          </ac:spMkLst>
-        </pc:spChg>
-        <pc:spChg chg="mod">
-          <ac:chgData name="Matthew Rockwell" userId="be3989a97b66b923" providerId="LiveId" clId="{B89F934C-8C3B-4D2B-ADD7-B5452E27AB91}" dt="2026-02-03T19:33:58.258" v="409" actId="1076"/>
-          <ac:spMkLst>
-            <pc:docMk/>
-            <pc:sldMk cId="0" sldId="264"/>
-            <ac:spMk id="38" creationId="{00000000-0000-0000-0000-000000000000}"/>
-          </ac:spMkLst>
-        </pc:spChg>
-        <pc:spChg chg="mod">
-          <ac:chgData name="Matthew Rockwell" userId="be3989a97b66b923" providerId="LiveId" clId="{B89F934C-8C3B-4D2B-ADD7-B5452E27AB91}" dt="2026-02-03T19:33:58.258" v="409" actId="1076"/>
-          <ac:spMkLst>
-            <pc:docMk/>
-            <pc:sldMk cId="0" sldId="264"/>
-            <ac:spMk id="39" creationId="{00000000-0000-0000-0000-000000000000}"/>
-          </ac:spMkLst>
-        </pc:spChg>
-        <pc:spChg chg="mod">
-          <ac:chgData name="Matthew Rockwell" userId="be3989a97b66b923" providerId="LiveId" clId="{B89F934C-8C3B-4D2B-ADD7-B5452E27AB91}" dt="2026-02-03T19:33:58.258" v="409" actId="1076"/>
-          <ac:spMkLst>
-            <pc:docMk/>
-            <pc:sldMk cId="0" sldId="264"/>
-            <ac:spMk id="40" creationId="{00000000-0000-0000-0000-000000000000}"/>
-          </ac:spMkLst>
-        </pc:spChg>
-        <pc:spChg chg="mod">
-          <ac:chgData name="Matthew Rockwell" userId="be3989a97b66b923" providerId="LiveId" clId="{B89F934C-8C3B-4D2B-ADD7-B5452E27AB91}" dt="2026-02-03T19:33:58.258" v="409" actId="1076"/>
-          <ac:spMkLst>
-            <pc:docMk/>
-            <pc:sldMk cId="0" sldId="264"/>
-            <ac:spMk id="41" creationId="{00000000-0000-0000-0000-000000000000}"/>
-          </ac:spMkLst>
-        </pc:spChg>
-        <pc:spChg chg="mod">
-          <ac:chgData name="Matthew Rockwell" userId="be3989a97b66b923" providerId="LiveId" clId="{B89F934C-8C3B-4D2B-ADD7-B5452E27AB91}" dt="2026-02-03T19:33:58.258" v="409" actId="1076"/>
-          <ac:spMkLst>
-            <pc:docMk/>
-            <pc:sldMk cId="0" sldId="264"/>
-            <ac:spMk id="42" creationId="{00000000-0000-0000-0000-000000000000}"/>
-          </ac:spMkLst>
-        </pc:spChg>
-        <pc:spChg chg="del mod">
-          <ac:chgData name="Matthew Rockwell" userId="be3989a97b66b923" providerId="LiveId" clId="{B89F934C-8C3B-4D2B-ADD7-B5452E27AB91}" dt="2026-02-03T19:34:18.536" v="412" actId="478"/>
-          <ac:spMkLst>
-            <pc:docMk/>
-            <pc:sldMk cId="0" sldId="264"/>
-            <ac:spMk id="43" creationId="{00000000-0000-0000-0000-000000000000}"/>
-          </ac:spMkLst>
-        </pc:spChg>
-        <pc:spChg chg="mod">
-          <ac:chgData name="Matthew Rockwell" userId="be3989a97b66b923" providerId="LiveId" clId="{B89F934C-8C3B-4D2B-ADD7-B5452E27AB91}" dt="2026-02-03T19:34:01.159" v="410" actId="1076"/>
-          <ac:spMkLst>
-            <pc:docMk/>
-            <pc:sldMk cId="0" sldId="264"/>
-            <ac:spMk id="44" creationId="{00000000-0000-0000-0000-000000000000}"/>
-          </ac:spMkLst>
-        </pc:spChg>
-        <pc:spChg chg="mod">
-          <ac:chgData name="Matthew Rockwell" userId="be3989a97b66b923" providerId="LiveId" clId="{B89F934C-8C3B-4D2B-ADD7-B5452E27AB91}" dt="2026-02-03T08:34:54.708" v="165" actId="1076"/>
-          <ac:spMkLst>
-            <pc:docMk/>
-            <pc:sldMk cId="0" sldId="264"/>
-            <ac:spMk id="47" creationId="{00000000-0000-0000-0000-000000000000}"/>
-          </ac:spMkLst>
-        </pc:spChg>
-        <pc:spChg chg="mod">
-          <ac:chgData name="Matthew Rockwell" userId="be3989a97b66b923" providerId="LiveId" clId="{B89F934C-8C3B-4D2B-ADD7-B5452E27AB91}" dt="2026-02-03T08:36:09.103" v="174" actId="207"/>
-          <ac:spMkLst>
-            <pc:docMk/>
-            <pc:sldMk cId="0" sldId="264"/>
-            <ac:spMk id="49" creationId="{00000000-0000-0000-0000-000000000000}"/>
-          </ac:spMkLst>
-        </pc:spChg>
-        <pc:spChg chg="mod">
-          <ac:chgData name="Matthew Rockwell" userId="be3989a97b66b923" providerId="LiveId" clId="{B89F934C-8C3B-4D2B-ADD7-B5452E27AB91}" dt="2026-02-03T08:34:48.275" v="164" actId="1076"/>
-          <ac:spMkLst>
-            <pc:docMk/>
-            <pc:sldMk cId="0" sldId="264"/>
-            <ac:spMk id="51" creationId="{00000000-0000-0000-0000-000000000000}"/>
-          </ac:spMkLst>
-        </pc:spChg>
-        <pc:spChg chg="mod">
-          <ac:chgData name="Matthew Rockwell" userId="be3989a97b66b923" providerId="LiveId" clId="{B89F934C-8C3B-4D2B-ADD7-B5452E27AB91}" dt="2026-02-03T08:36:09.103" v="174" actId="207"/>
-          <ac:spMkLst>
-            <pc:docMk/>
-            <pc:sldMk cId="0" sldId="264"/>
-            <ac:spMk id="53" creationId="{00000000-0000-0000-0000-000000000000}"/>
-          </ac:spMkLst>
-        </pc:spChg>
-        <pc:spChg chg="mod">
-          <ac:chgData name="Matthew Rockwell" userId="be3989a97b66b923" providerId="LiveId" clId="{B89F934C-8C3B-4D2B-ADD7-B5452E27AB91}" dt="2026-02-03T08:34:35.086" v="161" actId="1076"/>
-          <ac:spMkLst>
-            <pc:docMk/>
-            <pc:sldMk cId="0" sldId="264"/>
-            <ac:spMk id="55" creationId="{00000000-0000-0000-0000-000000000000}"/>
-          </ac:spMkLst>
-        </pc:spChg>
-        <pc:spChg chg="mod">
-          <ac:chgData name="Matthew Rockwell" userId="be3989a97b66b923" providerId="LiveId" clId="{B89F934C-8C3B-4D2B-ADD7-B5452E27AB91}" dt="2026-02-03T19:31:15.315" v="397" actId="1076"/>
-          <ac:spMkLst>
-            <pc:docMk/>
-            <pc:sldMk cId="0" sldId="264"/>
-            <ac:spMk id="56" creationId="{00000000-0000-0000-0000-000000000000}"/>
-          </ac:spMkLst>
-        </pc:spChg>
-        <pc:spChg chg="mod">
-          <ac:chgData name="Matthew Rockwell" userId="be3989a97b66b923" providerId="LiveId" clId="{B89F934C-8C3B-4D2B-ADD7-B5452E27AB91}" dt="2026-02-03T08:36:09.103" v="174" actId="207"/>
-          <ac:spMkLst>
-            <pc:docMk/>
-            <pc:sldMk cId="0" sldId="264"/>
-            <ac:spMk id="57" creationId="{00000000-0000-0000-0000-000000000000}"/>
-          </ac:spMkLst>
-        </pc:spChg>
-        <pc:spChg chg="mod">
-          <ac:chgData name="Matthew Rockwell" userId="be3989a97b66b923" providerId="LiveId" clId="{B89F934C-8C3B-4D2B-ADD7-B5452E27AB91}" dt="2026-02-03T08:34:29.353" v="160" actId="1076"/>
-          <ac:spMkLst>
-            <pc:docMk/>
-            <pc:sldMk cId="0" sldId="264"/>
-            <ac:spMk id="59" creationId="{00000000-0000-0000-0000-000000000000}"/>
-          </ac:spMkLst>
-        </pc:spChg>
-        <pc:spChg chg="mod">
-          <ac:chgData name="Matthew Rockwell" userId="be3989a97b66b923" providerId="LiveId" clId="{B89F934C-8C3B-4D2B-ADD7-B5452E27AB91}" dt="2026-02-03T08:36:09.103" v="174" actId="207"/>
-          <ac:spMkLst>
-            <pc:docMk/>
-            <pc:sldMk cId="0" sldId="264"/>
-            <ac:spMk id="61" creationId="{00000000-0000-0000-0000-000000000000}"/>
-          </ac:spMkLst>
-        </pc:spChg>
-        <pc:spChg chg="mod">
-          <ac:chgData name="Matthew Rockwell" userId="be3989a97b66b923" providerId="LiveId" clId="{B89F934C-8C3B-4D2B-ADD7-B5452E27AB91}" dt="2026-02-03T20:09:07.027" v="840" actId="14100"/>
-          <ac:spMkLst>
-            <pc:docMk/>
-            <pc:sldMk cId="0" sldId="264"/>
-            <ac:spMk id="62" creationId="{00000000-0000-0000-0000-000000000000}"/>
-          </ac:spMkLst>
-        </pc:spChg>
-        <pc:spChg chg="mod">
-          <ac:chgData name="Matthew Rockwell" userId="be3989a97b66b923" providerId="LiveId" clId="{B89F934C-8C3B-4D2B-ADD7-B5452E27AB91}" dt="2026-02-03T08:54:56.194" v="359" actId="1076"/>
-          <ac:spMkLst>
-            <pc:docMk/>
-            <pc:sldMk cId="0" sldId="264"/>
-            <ac:spMk id="63" creationId="{00000000-0000-0000-0000-000000000000}"/>
-          </ac:spMkLst>
-        </pc:spChg>
-        <pc:spChg chg="mod">
-          <ac:chgData name="Matthew Rockwell" userId="be3989a97b66b923" providerId="LiveId" clId="{B89F934C-8C3B-4D2B-ADD7-B5452E27AB91}" dt="2026-02-03T08:55:33.298" v="369" actId="1076"/>
-          <ac:spMkLst>
-            <pc:docMk/>
-            <pc:sldMk cId="0" sldId="264"/>
-            <ac:spMk id="64" creationId="{00000000-0000-0000-0000-000000000000}"/>
-          </ac:spMkLst>
-        </pc:spChg>
-        <pc:spChg chg="mod">
-          <ac:chgData name="Matthew Rockwell" userId="be3989a97b66b923" providerId="LiveId" clId="{B89F934C-8C3B-4D2B-ADD7-B5452E27AB91}" dt="2026-02-03T08:55:57.757" v="374" actId="1076"/>
-          <ac:spMkLst>
-            <pc:docMk/>
-            <pc:sldMk cId="0" sldId="264"/>
-            <ac:spMk id="65" creationId="{00000000-0000-0000-0000-000000000000}"/>
-          </ac:spMkLst>
-        </pc:spChg>
-        <pc:spChg chg="mod">
-          <ac:chgData name="Matthew Rockwell" userId="be3989a97b66b923" providerId="LiveId" clId="{B89F934C-8C3B-4D2B-ADD7-B5452E27AB91}" dt="2026-02-03T19:31:38.015" v="398" actId="1076"/>
-          <ac:spMkLst>
-            <pc:docMk/>
-            <pc:sldMk cId="0" sldId="264"/>
-            <ac:spMk id="66" creationId="{00000000-0000-0000-0000-000000000000}"/>
-          </ac:spMkLst>
-        </pc:spChg>
-        <pc:spChg chg="mod">
-          <ac:chgData name="Matthew Rockwell" userId="be3989a97b66b923" providerId="LiveId" clId="{B89F934C-8C3B-4D2B-ADD7-B5452E27AB91}" dt="2026-02-03T20:09:20.166" v="841" actId="1076"/>
-          <ac:spMkLst>
-            <pc:docMk/>
-            <pc:sldMk cId="0" sldId="264"/>
-            <ac:spMk id="67" creationId="{00000000-0000-0000-0000-000000000000}"/>
-          </ac:spMkLst>
-        </pc:spChg>
-        <pc:spChg chg="add del mod">
-          <ac:chgData name="Matthew Rockwell" userId="be3989a97b66b923" providerId="LiveId" clId="{B89F934C-8C3B-4D2B-ADD7-B5452E27AB91}" dt="2026-02-03T19:34:12.998" v="411" actId="478"/>
-          <ac:spMkLst>
-            <pc:docMk/>
-            <pc:sldMk cId="0" sldId="264"/>
-            <ac:spMk id="69" creationId="{66809538-DD93-03C7-3FC7-6577EF7E4956}"/>
-          </ac:spMkLst>
-        </pc:spChg>
-        <pc:spChg chg="add mod">
-          <ac:chgData name="Matthew Rockwell" userId="be3989a97b66b923" providerId="LiveId" clId="{B89F934C-8C3B-4D2B-ADD7-B5452E27AB91}" dt="2026-02-03T19:33:58.258" v="409" actId="1076"/>
-          <ac:spMkLst>
-            <pc:docMk/>
-            <pc:sldMk cId="0" sldId="264"/>
-            <ac:spMk id="70" creationId="{69DD6251-175D-2795-A40E-3C118E124D93}"/>
-          </ac:spMkLst>
-        </pc:spChg>
-        <pc:spChg chg="add mod">
-          <ac:chgData name="Matthew Rockwell" userId="be3989a97b66b923" providerId="LiveId" clId="{B89F934C-8C3B-4D2B-ADD7-B5452E27AB91}" dt="2026-02-03T20:09:29.526" v="842" actId="14100"/>
-          <ac:spMkLst>
-            <pc:docMk/>
-            <pc:sldMk cId="0" sldId="264"/>
-            <ac:spMk id="71" creationId="{839FB0E2-DAB6-083A-AA0D-EC231084F07E}"/>
-          </ac:spMkLst>
-        </pc:spChg>
-        <pc:spChg chg="add mod">
-          <ac:chgData name="Matthew Rockwell" userId="be3989a97b66b923" providerId="LiveId" clId="{B89F934C-8C3B-4D2B-ADD7-B5452E27AB91}" dt="2026-02-03T20:08:41.323" v="835" actId="207"/>
-          <ac:spMkLst>
-            <pc:docMk/>
-            <pc:sldMk cId="0" sldId="264"/>
-            <ac:spMk id="72" creationId="{3EA87A69-23E3-BE74-EC31-F3F821846D1A}"/>
-          </ac:spMkLst>
-        </pc:spChg>
-      </pc:sldChg>
-      <pc:sldChg chg="delSp modSp mod modNotesTx">
-        <pc:chgData name="Matthew Rockwell" userId="be3989a97b66b923" providerId="LiveId" clId="{B89F934C-8C3B-4D2B-ADD7-B5452E27AB91}" dt="2026-02-03T20:34:31.824" v="1264" actId="20577"/>
-        <pc:sldMkLst>
-          <pc:docMk/>
-          <pc:sldMk cId="0" sldId="265"/>
-        </pc:sldMkLst>
-        <pc:spChg chg="mod">
-          <ac:chgData name="Matthew Rockwell" userId="be3989a97b66b923" providerId="LiveId" clId="{B89F934C-8C3B-4D2B-ADD7-B5452E27AB91}" dt="2026-02-03T20:21:44.953" v="969" actId="20577"/>
-          <ac:spMkLst>
-            <pc:docMk/>
-            <pc:sldMk cId="0" sldId="265"/>
-            <ac:spMk id="3" creationId="{00000000-0000-0000-0000-000000000000}"/>
-          </ac:spMkLst>
-        </pc:spChg>
-        <pc:spChg chg="mod">
-          <ac:chgData name="Matthew Rockwell" userId="be3989a97b66b923" providerId="LiveId" clId="{B89F934C-8C3B-4D2B-ADD7-B5452E27AB91}" dt="2026-02-03T20:26:34.178" v="1088" actId="20577"/>
-          <ac:spMkLst>
-            <pc:docMk/>
-            <pc:sldMk cId="0" sldId="265"/>
-            <ac:spMk id="5" creationId="{00000000-0000-0000-0000-000000000000}"/>
-          </ac:spMkLst>
-        </pc:spChg>
-        <pc:spChg chg="mod">
-          <ac:chgData name="Matthew Rockwell" userId="be3989a97b66b923" providerId="LiveId" clId="{B89F934C-8C3B-4D2B-ADD7-B5452E27AB91}" dt="2026-02-03T08:58:07.691" v="383" actId="14100"/>
-          <ac:spMkLst>
-            <pc:docMk/>
-            <pc:sldMk cId="0" sldId="265"/>
-            <ac:spMk id="6" creationId="{00000000-0000-0000-0000-000000000000}"/>
-          </ac:spMkLst>
-        </pc:spChg>
-        <pc:spChg chg="mod">
-          <ac:chgData name="Matthew Rockwell" userId="be3989a97b66b923" providerId="LiveId" clId="{B89F934C-8C3B-4D2B-ADD7-B5452E27AB91}" dt="2026-02-03T08:58:44.546" v="387" actId="1076"/>
-          <ac:spMkLst>
-            <pc:docMk/>
-            <pc:sldMk cId="0" sldId="265"/>
-            <ac:spMk id="7" creationId="{00000000-0000-0000-0000-000000000000}"/>
-          </ac:spMkLst>
-        </pc:spChg>
-        <pc:spChg chg="mod">
-          <ac:chgData name="Matthew Rockwell" userId="be3989a97b66b923" providerId="LiveId" clId="{B89F934C-8C3B-4D2B-ADD7-B5452E27AB91}" dt="2026-02-03T08:58:07.691" v="383" actId="14100"/>
-          <ac:spMkLst>
-            <pc:docMk/>
-            <pc:sldMk cId="0" sldId="265"/>
-            <ac:spMk id="8" creationId="{00000000-0000-0000-0000-000000000000}"/>
-          </ac:spMkLst>
-        </pc:spChg>
-        <pc:spChg chg="mod">
-          <ac:chgData name="Matthew Rockwell" userId="be3989a97b66b923" providerId="LiveId" clId="{B89F934C-8C3B-4D2B-ADD7-B5452E27AB91}" dt="2026-02-03T08:58:39.268" v="386" actId="1076"/>
-          <ac:spMkLst>
-            <pc:docMk/>
-            <pc:sldMk cId="0" sldId="265"/>
-            <ac:spMk id="9" creationId="{00000000-0000-0000-0000-000000000000}"/>
-          </ac:spMkLst>
-        </pc:spChg>
-        <pc:spChg chg="mod">
-          <ac:chgData name="Matthew Rockwell" userId="be3989a97b66b923" providerId="LiveId" clId="{B89F934C-8C3B-4D2B-ADD7-B5452E27AB91}" dt="2026-02-03T08:58:07.691" v="383" actId="14100"/>
-          <ac:spMkLst>
-            <pc:docMk/>
-            <pc:sldMk cId="0" sldId="265"/>
-            <ac:spMk id="10" creationId="{00000000-0000-0000-0000-000000000000}"/>
-          </ac:spMkLst>
-        </pc:spChg>
-        <pc:spChg chg="mod">
-          <ac:chgData name="Matthew Rockwell" userId="be3989a97b66b923" providerId="LiveId" clId="{B89F934C-8C3B-4D2B-ADD7-B5452E27AB91}" dt="2026-02-03T08:58:26.978" v="384" actId="1076"/>
-          <ac:spMkLst>
-            <pc:docMk/>
-            <pc:sldMk cId="0" sldId="265"/>
-            <ac:spMk id="11" creationId="{00000000-0000-0000-0000-000000000000}"/>
-          </ac:spMkLst>
-        </pc:spChg>
-        <pc:spChg chg="mod">
-          <ac:chgData name="Matthew Rockwell" userId="be3989a97b66b923" providerId="LiveId" clId="{B89F934C-8C3B-4D2B-ADD7-B5452E27AB91}" dt="2026-02-03T08:58:07.691" v="383" actId="14100"/>
-          <ac:spMkLst>
-            <pc:docMk/>
-            <pc:sldMk cId="0" sldId="265"/>
-            <ac:spMk id="12" creationId="{00000000-0000-0000-0000-000000000000}"/>
-          </ac:spMkLst>
-        </pc:spChg>
-        <pc:spChg chg="mod">
-          <ac:chgData name="Matthew Rockwell" userId="be3989a97b66b923" providerId="LiveId" clId="{B89F934C-8C3B-4D2B-ADD7-B5452E27AB91}" dt="2026-02-03T08:58:30.568" v="385" actId="1076"/>
-          <ac:spMkLst>
-            <pc:docMk/>
-            <pc:sldMk cId="0" sldId="265"/>
-            <ac:spMk id="13" creationId="{00000000-0000-0000-0000-000000000000}"/>
-          </ac:spMkLst>
-        </pc:spChg>
-        <pc:spChg chg="mod">
-          <ac:chgData name="Matthew Rockwell" userId="be3989a97b66b923" providerId="LiveId" clId="{B89F934C-8C3B-4D2B-ADD7-B5452E27AB91}" dt="2026-02-03T20:22:20.218" v="986" actId="20577"/>
-          <ac:spMkLst>
-            <pc:docMk/>
-            <pc:sldMk cId="0" sldId="265"/>
-            <ac:spMk id="17" creationId="{00000000-0000-0000-0000-000000000000}"/>
-          </ac:spMkLst>
-        </pc:spChg>
-        <pc:spChg chg="mod">
-          <ac:chgData name="Matthew Rockwell" userId="be3989a97b66b923" providerId="LiveId" clId="{B89F934C-8C3B-4D2B-ADD7-B5452E27AB91}" dt="2026-02-03T08:43:11.455" v="255" actId="1076"/>
-          <ac:spMkLst>
-            <pc:docMk/>
-            <pc:sldMk cId="0" sldId="265"/>
-            <ac:spMk id="18" creationId="{00000000-0000-0000-0000-000000000000}"/>
-          </ac:spMkLst>
-        </pc:spChg>
-        <pc:spChg chg="mod">
-          <ac:chgData name="Matthew Rockwell" userId="be3989a97b66b923" providerId="LiveId" clId="{B89F934C-8C3B-4D2B-ADD7-B5452E27AB91}" dt="2026-02-03T08:43:11.455" v="255" actId="1076"/>
-          <ac:spMkLst>
-            <pc:docMk/>
-            <pc:sldMk cId="0" sldId="265"/>
-            <ac:spMk id="19" creationId="{00000000-0000-0000-0000-000000000000}"/>
-          </ac:spMkLst>
-        </pc:spChg>
-        <pc:spChg chg="mod">
-          <ac:chgData name="Matthew Rockwell" userId="be3989a97b66b923" providerId="LiveId" clId="{B89F934C-8C3B-4D2B-ADD7-B5452E27AB91}" dt="2026-02-03T08:43:11.455" v="255" actId="1076"/>
-          <ac:spMkLst>
-            <pc:docMk/>
-            <pc:sldMk cId="0" sldId="265"/>
-            <ac:spMk id="20" creationId="{00000000-0000-0000-0000-000000000000}"/>
-          </ac:spMkLst>
-        </pc:spChg>
-        <pc:spChg chg="mod">
-          <ac:chgData name="Matthew Rockwell" userId="be3989a97b66b923" providerId="LiveId" clId="{B89F934C-8C3B-4D2B-ADD7-B5452E27AB91}" dt="2026-02-03T20:22:47.957" v="1001" actId="20577"/>
-          <ac:spMkLst>
-            <pc:docMk/>
-            <pc:sldMk cId="0" sldId="265"/>
-            <ac:spMk id="21" creationId="{00000000-0000-0000-0000-000000000000}"/>
-          </ac:spMkLst>
-        </pc:spChg>
-        <pc:spChg chg="mod">
-          <ac:chgData name="Matthew Rockwell" userId="be3989a97b66b923" providerId="LiveId" clId="{B89F934C-8C3B-4D2B-ADD7-B5452E27AB91}" dt="2026-02-03T08:43:20.946" v="256" actId="1076"/>
-          <ac:spMkLst>
-            <pc:docMk/>
-            <pc:sldMk cId="0" sldId="265"/>
-            <ac:spMk id="22" creationId="{00000000-0000-0000-0000-000000000000}"/>
-          </ac:spMkLst>
-        </pc:spChg>
-        <pc:spChg chg="mod">
-          <ac:chgData name="Matthew Rockwell" userId="be3989a97b66b923" providerId="LiveId" clId="{B89F934C-8C3B-4D2B-ADD7-B5452E27AB91}" dt="2026-02-03T08:43:20.946" v="256" actId="1076"/>
-          <ac:spMkLst>
-            <pc:docMk/>
-            <pc:sldMk cId="0" sldId="265"/>
-            <ac:spMk id="23" creationId="{00000000-0000-0000-0000-000000000000}"/>
-          </ac:spMkLst>
-        </pc:spChg>
-        <pc:spChg chg="mod">
-          <ac:chgData name="Matthew Rockwell" userId="be3989a97b66b923" providerId="LiveId" clId="{B89F934C-8C3B-4D2B-ADD7-B5452E27AB91}" dt="2026-02-03T08:43:20.946" v="256" actId="1076"/>
-          <ac:spMkLst>
-            <pc:docMk/>
-            <pc:sldMk cId="0" sldId="265"/>
-            <ac:spMk id="24" creationId="{00000000-0000-0000-0000-000000000000}"/>
-          </ac:spMkLst>
-        </pc:spChg>
-        <pc:spChg chg="mod">
-          <ac:chgData name="Matthew Rockwell" userId="be3989a97b66b923" providerId="LiveId" clId="{B89F934C-8C3B-4D2B-ADD7-B5452E27AB91}" dt="2026-02-03T20:23:01.248" v="1016" actId="20577"/>
-          <ac:spMkLst>
-            <pc:docMk/>
-            <pc:sldMk cId="0" sldId="265"/>
-            <ac:spMk id="25" creationId="{00000000-0000-0000-0000-000000000000}"/>
-          </ac:spMkLst>
-        </pc:spChg>
-        <pc:spChg chg="mod">
-          <ac:chgData name="Matthew Rockwell" userId="be3989a97b66b923" providerId="LiveId" clId="{B89F934C-8C3B-4D2B-ADD7-B5452E27AB91}" dt="2026-02-03T08:42:45.889" v="253" actId="1076"/>
-          <ac:spMkLst>
-            <pc:docMk/>
-            <pc:sldMk cId="0" sldId="265"/>
-            <ac:spMk id="26" creationId="{00000000-0000-0000-0000-000000000000}"/>
-          </ac:spMkLst>
-        </pc:spChg>
-        <pc:spChg chg="mod">
-          <ac:chgData name="Matthew Rockwell" userId="be3989a97b66b923" providerId="LiveId" clId="{B89F934C-8C3B-4D2B-ADD7-B5452E27AB91}" dt="2026-02-03T08:42:45.889" v="253" actId="1076"/>
-          <ac:spMkLst>
-            <pc:docMk/>
-            <pc:sldMk cId="0" sldId="265"/>
-            <ac:spMk id="27" creationId="{00000000-0000-0000-0000-000000000000}"/>
-          </ac:spMkLst>
-        </pc:spChg>
-        <pc:spChg chg="mod">
-          <ac:chgData name="Matthew Rockwell" userId="be3989a97b66b923" providerId="LiveId" clId="{B89F934C-8C3B-4D2B-ADD7-B5452E27AB91}" dt="2026-02-03T08:42:45.889" v="253" actId="1076"/>
-          <ac:spMkLst>
-            <pc:docMk/>
-            <pc:sldMk cId="0" sldId="265"/>
-            <ac:spMk id="28" creationId="{00000000-0000-0000-0000-000000000000}"/>
-          </ac:spMkLst>
-        </pc:spChg>
-        <pc:spChg chg="mod">
-          <ac:chgData name="Matthew Rockwell" userId="be3989a97b66b923" providerId="LiveId" clId="{B89F934C-8C3B-4D2B-ADD7-B5452E27AB91}" dt="2026-02-03T20:23:43.501" v="1035" actId="20577"/>
-          <ac:spMkLst>
-            <pc:docMk/>
-            <pc:sldMk cId="0" sldId="265"/>
-            <ac:spMk id="29" creationId="{00000000-0000-0000-0000-000000000000}"/>
-          </ac:spMkLst>
-        </pc:spChg>
-        <pc:spChg chg="mod">
-          <ac:chgData name="Matthew Rockwell" userId="be3989a97b66b923" providerId="LiveId" clId="{B89F934C-8C3B-4D2B-ADD7-B5452E27AB91}" dt="2026-02-03T08:42:19.888" v="252" actId="207"/>
-          <ac:spMkLst>
-            <pc:docMk/>
-            <pc:sldMk cId="0" sldId="265"/>
-            <ac:spMk id="30" creationId="{00000000-0000-0000-0000-000000000000}"/>
-          </ac:spMkLst>
-        </pc:spChg>
-        <pc:spChg chg="mod">
-          <ac:chgData name="Matthew Rockwell" userId="be3989a97b66b923" providerId="LiveId" clId="{B89F934C-8C3B-4D2B-ADD7-B5452E27AB91}" dt="2026-02-03T20:24:57.921" v="1042" actId="1076"/>
-          <ac:spMkLst>
-            <pc:docMk/>
-            <pc:sldMk cId="0" sldId="265"/>
-            <ac:spMk id="32" creationId="{00000000-0000-0000-0000-000000000000}"/>
-          </ac:spMkLst>
-        </pc:spChg>
-        <pc:spChg chg="mod">
-          <ac:chgData name="Matthew Rockwell" userId="be3989a97b66b923" providerId="LiveId" clId="{B89F934C-8C3B-4D2B-ADD7-B5452E27AB91}" dt="2026-02-03T20:24:57.921" v="1042" actId="1076"/>
-          <ac:spMkLst>
-            <pc:docMk/>
-            <pc:sldMk cId="0" sldId="265"/>
-            <ac:spMk id="33" creationId="{00000000-0000-0000-0000-000000000000}"/>
-          </ac:spMkLst>
-        </pc:spChg>
-        <pc:spChg chg="mod">
-          <ac:chgData name="Matthew Rockwell" userId="be3989a97b66b923" providerId="LiveId" clId="{B89F934C-8C3B-4D2B-ADD7-B5452E27AB91}" dt="2026-02-03T20:24:57.921" v="1042" actId="1076"/>
-          <ac:spMkLst>
-            <pc:docMk/>
-            <pc:sldMk cId="0" sldId="265"/>
-            <ac:spMk id="35" creationId="{00000000-0000-0000-0000-000000000000}"/>
-          </ac:spMkLst>
-        </pc:spChg>
-        <pc:spChg chg="mod">
-          <ac:chgData name="Matthew Rockwell" userId="be3989a97b66b923" providerId="LiveId" clId="{B89F934C-8C3B-4D2B-ADD7-B5452E27AB91}" dt="2026-02-03T20:11:15.057" v="848" actId="207"/>
-          <ac:spMkLst>
-            <pc:docMk/>
-            <pc:sldMk cId="0" sldId="265"/>
-            <ac:spMk id="36" creationId="{00000000-0000-0000-0000-000000000000}"/>
-          </ac:spMkLst>
-        </pc:spChg>
-        <pc:spChg chg="mod">
-          <ac:chgData name="Matthew Rockwell" userId="be3989a97b66b923" providerId="LiveId" clId="{B89F934C-8C3B-4D2B-ADD7-B5452E27AB91}" dt="2026-02-03T20:24:57.921" v="1042" actId="1076"/>
-          <ac:spMkLst>
-            <pc:docMk/>
-            <pc:sldMk cId="0" sldId="265"/>
-            <ac:spMk id="37" creationId="{00000000-0000-0000-0000-000000000000}"/>
-          </ac:spMkLst>
-        </pc:spChg>
-        <pc:spChg chg="mod">
-          <ac:chgData name="Matthew Rockwell" userId="be3989a97b66b923" providerId="LiveId" clId="{B89F934C-8C3B-4D2B-ADD7-B5452E27AB91}" dt="2026-02-03T20:24:57.921" v="1042" actId="1076"/>
-          <ac:spMkLst>
-            <pc:docMk/>
-            <pc:sldMk cId="0" sldId="265"/>
-            <ac:spMk id="38" creationId="{00000000-0000-0000-0000-000000000000}"/>
-          </ac:spMkLst>
-        </pc:spChg>
-        <pc:spChg chg="mod">
-          <ac:chgData name="Matthew Rockwell" userId="be3989a97b66b923" providerId="LiveId" clId="{B89F934C-8C3B-4D2B-ADD7-B5452E27AB91}" dt="2026-02-03T20:24:57.921" v="1042" actId="1076"/>
-          <ac:spMkLst>
-            <pc:docMk/>
-            <pc:sldMk cId="0" sldId="265"/>
-            <ac:spMk id="39" creationId="{00000000-0000-0000-0000-000000000000}"/>
-          </ac:spMkLst>
-        </pc:spChg>
-        <pc:spChg chg="mod">
-          <ac:chgData name="Matthew Rockwell" userId="be3989a97b66b923" providerId="LiveId" clId="{B89F934C-8C3B-4D2B-ADD7-B5452E27AB91}" dt="2026-02-03T20:24:57.921" v="1042" actId="1076"/>
-          <ac:spMkLst>
-            <pc:docMk/>
-            <pc:sldMk cId="0" sldId="265"/>
-            <ac:spMk id="40" creationId="{00000000-0000-0000-0000-000000000000}"/>
-          </ac:spMkLst>
-        </pc:spChg>
-        <pc:spChg chg="mod">
-          <ac:chgData name="Matthew Rockwell" userId="be3989a97b66b923" providerId="LiveId" clId="{B89F934C-8C3B-4D2B-ADD7-B5452E27AB91}" dt="2026-02-03T20:10:28.640" v="843" actId="1076"/>
-          <ac:spMkLst>
-            <pc:docMk/>
-            <pc:sldMk cId="0" sldId="265"/>
-            <ac:spMk id="41" creationId="{00000000-0000-0000-0000-000000000000}"/>
-          </ac:spMkLst>
-        </pc:spChg>
-        <pc:spChg chg="mod">
-          <ac:chgData name="Matthew Rockwell" userId="be3989a97b66b923" providerId="LiveId" clId="{B89F934C-8C3B-4D2B-ADD7-B5452E27AB91}" dt="2026-02-03T20:24:57.921" v="1042" actId="1076"/>
-          <ac:spMkLst>
-            <pc:docMk/>
-            <pc:sldMk cId="0" sldId="265"/>
-            <ac:spMk id="42" creationId="{00000000-0000-0000-0000-000000000000}"/>
-          </ac:spMkLst>
-        </pc:spChg>
-        <pc:spChg chg="mod">
-          <ac:chgData name="Matthew Rockwell" userId="be3989a97b66b923" providerId="LiveId" clId="{B89F934C-8C3B-4D2B-ADD7-B5452E27AB91}" dt="2026-02-03T20:24:57.921" v="1042" actId="1076"/>
-          <ac:spMkLst>
-            <pc:docMk/>
-            <pc:sldMk cId="0" sldId="265"/>
-            <ac:spMk id="43" creationId="{00000000-0000-0000-0000-000000000000}"/>
-          </ac:spMkLst>
-        </pc:spChg>
-        <pc:spChg chg="mod">
-          <ac:chgData name="Matthew Rockwell" userId="be3989a97b66b923" providerId="LiveId" clId="{B89F934C-8C3B-4D2B-ADD7-B5452E27AB91}" dt="2026-02-03T20:10:28.640" v="843" actId="1076"/>
-          <ac:spMkLst>
-            <pc:docMk/>
-            <pc:sldMk cId="0" sldId="265"/>
-            <ac:spMk id="44" creationId="{00000000-0000-0000-0000-000000000000}"/>
-          </ac:spMkLst>
-        </pc:spChg>
-        <pc:spChg chg="mod">
-          <ac:chgData name="Matthew Rockwell" userId="be3989a97b66b923" providerId="LiveId" clId="{B89F934C-8C3B-4D2B-ADD7-B5452E27AB91}" dt="2026-02-03T20:24:57.921" v="1042" actId="1076"/>
-          <ac:spMkLst>
-            <pc:docMk/>
-            <pc:sldMk cId="0" sldId="265"/>
-            <ac:spMk id="45" creationId="{00000000-0000-0000-0000-000000000000}"/>
-          </ac:spMkLst>
-        </pc:spChg>
-        <pc:spChg chg="mod">
-          <ac:chgData name="Matthew Rockwell" userId="be3989a97b66b923" providerId="LiveId" clId="{B89F934C-8C3B-4D2B-ADD7-B5452E27AB91}" dt="2026-02-03T20:24:43.398" v="1041" actId="14100"/>
-          <ac:spMkLst>
-            <pc:docMk/>
-            <pc:sldMk cId="0" sldId="265"/>
-            <ac:spMk id="46" creationId="{00000000-0000-0000-0000-000000000000}"/>
-          </ac:spMkLst>
-        </pc:spChg>
-        <pc:spChg chg="mod">
-          <ac:chgData name="Matthew Rockwell" userId="be3989a97b66b923" providerId="LiveId" clId="{B89F934C-8C3B-4D2B-ADD7-B5452E27AB91}" dt="2026-02-03T20:24:21.174" v="1036" actId="1076"/>
-          <ac:spMkLst>
-            <pc:docMk/>
-            <pc:sldMk cId="0" sldId="265"/>
-            <ac:spMk id="47" creationId="{00000000-0000-0000-0000-000000000000}"/>
-          </ac:spMkLst>
-        </pc:spChg>
-        <pc:spChg chg="mod">
-          <ac:chgData name="Matthew Rockwell" userId="be3989a97b66b923" providerId="LiveId" clId="{B89F934C-8C3B-4D2B-ADD7-B5452E27AB91}" dt="2026-02-03T08:40:51.797" v="245" actId="1076"/>
-          <ac:spMkLst>
-            <pc:docMk/>
-            <pc:sldMk cId="0" sldId="265"/>
-            <ac:spMk id="48" creationId="{00000000-0000-0000-0000-000000000000}"/>
-          </ac:spMkLst>
-        </pc:spChg>
-        <pc:spChg chg="mod">
-          <ac:chgData name="Matthew Rockwell" userId="be3989a97b66b923" providerId="LiveId" clId="{B89F934C-8C3B-4D2B-ADD7-B5452E27AB91}" dt="2026-02-03T08:40:51.797" v="245" actId="1076"/>
-          <ac:spMkLst>
-            <pc:docMk/>
-            <pc:sldMk cId="0" sldId="265"/>
-            <ac:spMk id="49" creationId="{00000000-0000-0000-0000-000000000000}"/>
-          </ac:spMkLst>
-        </pc:spChg>
-        <pc:spChg chg="mod">
-          <ac:chgData name="Matthew Rockwell" userId="be3989a97b66b923" providerId="LiveId" clId="{B89F934C-8C3B-4D2B-ADD7-B5452E27AB91}" dt="2026-02-03T08:40:51.797" v="245" actId="1076"/>
-          <ac:spMkLst>
-            <pc:docMk/>
-            <pc:sldMk cId="0" sldId="265"/>
-            <ac:spMk id="50" creationId="{00000000-0000-0000-0000-000000000000}"/>
-          </ac:spMkLst>
-        </pc:spChg>
-        <pc:spChg chg="mod">
-          <ac:chgData name="Matthew Rockwell" userId="be3989a97b66b923" providerId="LiveId" clId="{B89F934C-8C3B-4D2B-ADD7-B5452E27AB91}" dt="2026-02-03T08:40:51.797" v="245" actId="1076"/>
-          <ac:spMkLst>
-            <pc:docMk/>
-            <pc:sldMk cId="0" sldId="265"/>
-            <ac:spMk id="51" creationId="{00000000-0000-0000-0000-000000000000}"/>
-          </ac:spMkLst>
-        </pc:spChg>
-        <pc:spChg chg="mod">
-          <ac:chgData name="Matthew Rockwell" userId="be3989a97b66b923" providerId="LiveId" clId="{B89F934C-8C3B-4D2B-ADD7-B5452E27AB91}" dt="2026-02-03T08:40:51.797" v="245" actId="1076"/>
-          <ac:spMkLst>
-            <pc:docMk/>
-            <pc:sldMk cId="0" sldId="265"/>
-            <ac:spMk id="52" creationId="{00000000-0000-0000-0000-000000000000}"/>
-          </ac:spMkLst>
-        </pc:spChg>
-        <pc:spChg chg="mod">
-          <ac:chgData name="Matthew Rockwell" userId="be3989a97b66b923" providerId="LiveId" clId="{B89F934C-8C3B-4D2B-ADD7-B5452E27AB91}" dt="2026-02-03T08:40:51.797" v="245" actId="1076"/>
-          <ac:spMkLst>
-            <pc:docMk/>
-            <pc:sldMk cId="0" sldId="265"/>
-            <ac:spMk id="53" creationId="{00000000-0000-0000-0000-000000000000}"/>
-          </ac:spMkLst>
-        </pc:spChg>
-        <pc:spChg chg="mod">
-          <ac:chgData name="Matthew Rockwell" userId="be3989a97b66b923" providerId="LiveId" clId="{B89F934C-8C3B-4D2B-ADD7-B5452E27AB91}" dt="2026-02-03T08:40:51.797" v="245" actId="1076"/>
-          <ac:spMkLst>
-            <pc:docMk/>
-            <pc:sldMk cId="0" sldId="265"/>
-            <ac:spMk id="54" creationId="{00000000-0000-0000-0000-000000000000}"/>
-          </ac:spMkLst>
-        </pc:spChg>
-        <pc:spChg chg="mod">
-          <ac:chgData name="Matthew Rockwell" userId="be3989a97b66b923" providerId="LiveId" clId="{B89F934C-8C3B-4D2B-ADD7-B5452E27AB91}" dt="2026-02-03T08:43:50.157" v="268" actId="20577"/>
-          <ac:spMkLst>
-            <pc:docMk/>
-            <pc:sldMk cId="0" sldId="265"/>
-            <ac:spMk id="55" creationId="{00000000-0000-0000-0000-000000000000}"/>
-          </ac:spMkLst>
-        </pc:spChg>
-        <pc:spChg chg="del mod">
-          <ac:chgData name="Matthew Rockwell" userId="be3989a97b66b923" providerId="LiveId" clId="{B89F934C-8C3B-4D2B-ADD7-B5452E27AB91}" dt="2026-02-03T08:39:57.699" v="239" actId="478"/>
-          <ac:spMkLst>
-            <pc:docMk/>
-            <pc:sldMk cId="0" sldId="265"/>
-            <ac:spMk id="56" creationId="{00000000-0000-0000-0000-000000000000}"/>
-          </ac:spMkLst>
-        </pc:spChg>
-        <pc:spChg chg="mod">
-          <ac:chgData name="Matthew Rockwell" userId="be3989a97b66b923" providerId="LiveId" clId="{B89F934C-8C3B-4D2B-ADD7-B5452E27AB91}" dt="2026-02-03T20:10:38.953" v="845" actId="1076"/>
-          <ac:spMkLst>
-            <pc:docMk/>
-            <pc:sldMk cId="0" sldId="265"/>
-            <ac:spMk id="57" creationId="{00000000-0000-0000-0000-000000000000}"/>
-          </ac:spMkLst>
-        </pc:spChg>
-        <pc:spChg chg="mod">
-          <ac:chgData name="Matthew Rockwell" userId="be3989a97b66b923" providerId="LiveId" clId="{B89F934C-8C3B-4D2B-ADD7-B5452E27AB91}" dt="2026-02-03T20:24:23.833" v="1037" actId="1076"/>
-          <ac:spMkLst>
-            <pc:docMk/>
-            <pc:sldMk cId="0" sldId="265"/>
-            <ac:spMk id="58" creationId="{00000000-0000-0000-0000-000000000000}"/>
-          </ac:spMkLst>
-        </pc:spChg>
-      </pc:sldChg>
-      <pc:sldChg chg="new modNotesTx">
-        <pc:chgData name="Matthew Rockwell" userId="be3989a97b66b923" providerId="LiveId" clId="{B89F934C-8C3B-4D2B-ADD7-B5452E27AB91}" dt="2026-02-03T20:38:10.593" v="1339" actId="20577"/>
-        <pc:sldMkLst>
-          <pc:docMk/>
-          <pc:sldMk cId="1369964729" sldId="266"/>
-        </pc:sldMkLst>
-      </pc:sldChg>
-      <pc:sldChg chg="new modNotesTx">
-        <pc:chgData name="Matthew Rockwell" userId="be3989a97b66b923" providerId="LiveId" clId="{B89F934C-8C3B-4D2B-ADD7-B5452E27AB91}" dt="2026-02-03T20:39:25.039" v="1422" actId="20577"/>
-        <pc:sldMkLst>
-          <pc:docMk/>
-          <pc:sldMk cId="103691717" sldId="267"/>
-        </pc:sldMkLst>
-      </pc:sldChg>
-      <pc:sldChg chg="new modNotesTx">
-        <pc:chgData name="Matthew Rockwell" userId="be3989a97b66b923" providerId="LiveId" clId="{B89F934C-8C3B-4D2B-ADD7-B5452E27AB91}" dt="2026-02-03T20:40:29.306" v="1526" actId="20577"/>
-        <pc:sldMkLst>
-          <pc:docMk/>
-          <pc:sldMk cId="1460704355" sldId="268"/>
-        </pc:sldMkLst>
-      </pc:sldChg>
-      <pc:sldChg chg="new modNotesTx">
-        <pc:chgData name="Matthew Rockwell" userId="be3989a97b66b923" providerId="LiveId" clId="{B89F934C-8C3B-4D2B-ADD7-B5452E27AB91}" dt="2026-02-03T20:41:22.285" v="1628" actId="20577"/>
-        <pc:sldMkLst>
-          <pc:docMk/>
-          <pc:sldMk cId="1559956752" sldId="269"/>
-        </pc:sldMkLst>
-      </pc:sldChg>
-      <pc:sldChg chg="new modNotesTx">
-        <pc:chgData name="Matthew Rockwell" userId="be3989a97b66b923" providerId="LiveId" clId="{B89F934C-8C3B-4D2B-ADD7-B5452E27AB91}" dt="2026-02-03T20:41:54.757" v="1634" actId="20577"/>
-        <pc:sldMkLst>
-          <pc:docMk/>
-          <pc:sldMk cId="3858414289" sldId="270"/>
-        </pc:sldMkLst>
-      </pc:sldChg>
-      <pc:sldChg chg="addSp modSp new mod modNotesTx">
-        <pc:chgData name="Matthew Rockwell" userId="be3989a97b66b923" providerId="LiveId" clId="{B89F934C-8C3B-4D2B-ADD7-B5452E27AB91}" dt="2026-02-03T20:42:47.398" v="1669" actId="1076"/>
-        <pc:sldMkLst>
-          <pc:docMk/>
-          <pc:sldMk cId="398000268" sldId="271"/>
-        </pc:sldMkLst>
-        <pc:spChg chg="add mod">
-          <ac:chgData name="Matthew Rockwell" userId="be3989a97b66b923" providerId="LiveId" clId="{B89F934C-8C3B-4D2B-ADD7-B5452E27AB91}" dt="2026-02-03T20:42:47.398" v="1669" actId="1076"/>
-          <ac:spMkLst>
-            <pc:docMk/>
-            <pc:sldMk cId="398000268" sldId="271"/>
-            <ac:spMk id="2" creationId="{FC159BB2-F34F-47FA-5728-F93DF1C297F0}"/>
-          </ac:spMkLst>
-        </pc:spChg>
-      </pc:sldChg>
-    </pc:docChg>
-  </pc:docChgLst>
-</pc:chgInfo>
 </file>
 
 <file path=ppt/notesMasters/notesMaster1.xml><?xml version="1.0" encoding="utf-8"?>
@@ -2468,7 +230,7 @@
           <a:p>
             <a:fld id="{9B16EB17-4F0B-4A55-9BAD-374C917578F6}" type="datetimeFigureOut">
               <a:rPr lang="en-US" smtClean="0"/>
-              <a:t>2/3/2026</a:t>
+              <a:t>3/11/2026</a:t>
             </a:fld>
             <a:endParaRPr lang="en-US"/>
           </a:p>
@@ -4226,7 +1988,7 @@
           <a:p>
             <a:fld id="{5BCAD085-E8A6-8845-BD4E-CB4CCA059FC4}" type="datetimeFigureOut">
               <a:rPr lang="en-US" smtClean="0"/>
-              <a:t>2/3/2026</a:t>
+              <a:t>3/11/2026</a:t>
             </a:fld>
             <a:endParaRPr lang="en-US"/>
           </a:p>
@@ -4394,7 +2156,7 @@
           <a:p>
             <a:fld id="{5BCAD085-E8A6-8845-BD4E-CB4CCA059FC4}" type="datetimeFigureOut">
               <a:rPr lang="en-US" smtClean="0"/>
-              <a:t>2/3/2026</a:t>
+              <a:t>3/11/2026</a:t>
             </a:fld>
             <a:endParaRPr lang="en-US"/>
           </a:p>
@@ -4572,7 +2334,7 @@
           <a:p>
             <a:fld id="{5BCAD085-E8A6-8845-BD4E-CB4CCA059FC4}" type="datetimeFigureOut">
               <a:rPr lang="en-US" smtClean="0"/>
-              <a:t>2/3/2026</a:t>
+              <a:t>3/11/2026</a:t>
             </a:fld>
             <a:endParaRPr lang="en-US"/>
           </a:p>
@@ -4740,7 +2502,7 @@
           <a:p>
             <a:fld id="{5BCAD085-E8A6-8845-BD4E-CB4CCA059FC4}" type="datetimeFigureOut">
               <a:rPr lang="en-US" smtClean="0"/>
-              <a:t>2/3/2026</a:t>
+              <a:t>3/11/2026</a:t>
             </a:fld>
             <a:endParaRPr lang="en-US"/>
           </a:p>
@@ -4985,7 +2747,7 @@
           <a:p>
             <a:fld id="{5BCAD085-E8A6-8845-BD4E-CB4CCA059FC4}" type="datetimeFigureOut">
               <a:rPr lang="en-US" smtClean="0"/>
-              <a:t>2/3/2026</a:t>
+              <a:t>3/11/2026</a:t>
             </a:fld>
             <a:endParaRPr lang="en-US"/>
           </a:p>
@@ -5270,7 +3032,7 @@
           <a:p>
             <a:fld id="{5BCAD085-E8A6-8845-BD4E-CB4CCA059FC4}" type="datetimeFigureOut">
               <a:rPr lang="en-US" smtClean="0"/>
-              <a:t>2/3/2026</a:t>
+              <a:t>3/11/2026</a:t>
             </a:fld>
             <a:endParaRPr lang="en-US"/>
           </a:p>
@@ -5689,7 +3451,7 @@
           <a:p>
             <a:fld id="{5BCAD085-E8A6-8845-BD4E-CB4CCA059FC4}" type="datetimeFigureOut">
               <a:rPr lang="en-US" smtClean="0"/>
-              <a:t>2/3/2026</a:t>
+              <a:t>3/11/2026</a:t>
             </a:fld>
             <a:endParaRPr lang="en-US"/>
           </a:p>
@@ -5806,7 +3568,7 @@
           <a:p>
             <a:fld id="{5BCAD085-E8A6-8845-BD4E-CB4CCA059FC4}" type="datetimeFigureOut">
               <a:rPr lang="en-US" smtClean="0"/>
-              <a:t>2/3/2026</a:t>
+              <a:t>3/11/2026</a:t>
             </a:fld>
             <a:endParaRPr lang="en-US"/>
           </a:p>
@@ -5901,7 +3663,7 @@
           <a:p>
             <a:fld id="{5BCAD085-E8A6-8845-BD4E-CB4CCA059FC4}" type="datetimeFigureOut">
               <a:rPr lang="en-US" smtClean="0"/>
-              <a:t>2/3/2026</a:t>
+              <a:t>3/11/2026</a:t>
             </a:fld>
             <a:endParaRPr lang="en-US"/>
           </a:p>
@@ -6176,7 +3938,7 @@
           <a:p>
             <a:fld id="{5BCAD085-E8A6-8845-BD4E-CB4CCA059FC4}" type="datetimeFigureOut">
               <a:rPr lang="en-US" smtClean="0"/>
-              <a:t>2/3/2026</a:t>
+              <a:t>3/11/2026</a:t>
             </a:fld>
             <a:endParaRPr lang="en-US"/>
           </a:p>
@@ -6428,7 +4190,7 @@
           <a:p>
             <a:fld id="{5BCAD085-E8A6-8845-BD4E-CB4CCA059FC4}" type="datetimeFigureOut">
               <a:rPr lang="en-US" smtClean="0"/>
-              <a:t>2/3/2026</a:t>
+              <a:t>3/11/2026</a:t>
             </a:fld>
             <a:endParaRPr lang="en-US"/>
           </a:p>
@@ -6639,7 +4401,7 @@
           <a:p>
             <a:fld id="{5BCAD085-E8A6-8845-BD4E-CB4CCA059FC4}" type="datetimeFigureOut">
               <a:rPr lang="en-US" smtClean="0"/>
-              <a:t>2/3/2026</a:t>
+              <a:t>3/11/2026</a:t>
             </a:fld>
             <a:endParaRPr lang="en-US"/>
           </a:p>
@@ -7191,7 +4953,7 @@
                 </a:solidFill>
                 <a:latin typeface="Segoe UI"/>
               </a:rPr>
-              <a:t>Delta-State Computing in Silicon</a:t>
+              <a:t>Delta-State Execution for Real-Time Embedded Systems</a:t>
             </a:r>
           </a:p>
         </p:txBody>
@@ -7234,25 +4996,7 @@
                 </a:solidFill>
                 <a:latin typeface="Segoe UI"/>
               </a:rPr>
-              <a:t>1 </a:t>
-            </a:r>
-            <a:r>
-              <a:rPr sz="2200" b="1" u="sng" dirty="0">
-                <a:solidFill>
-                  <a:srgbClr val="A6E3A1"/>
-                </a:solidFill>
-                <a:latin typeface="Segoe UI"/>
-              </a:rPr>
-              <a:t>Billion</a:t>
-            </a:r>
-            <a:r>
-              <a:rPr sz="2200" b="1" dirty="0">
-                <a:solidFill>
-                  <a:srgbClr val="A6E3A1"/>
-                </a:solidFill>
-                <a:latin typeface="Segoe UI"/>
-              </a:rPr>
-              <a:t> Operations/Second on a $13.50 Chip</a:t>
+              <a:t>Accumulate changes, not full state — in hardware</a:t>
             </a:r>
           </a:p>
         </p:txBody>
@@ -7265,7 +5009,7 @@
         </p:nvSpPr>
         <p:spPr>
           <a:xfrm>
-            <a:off x="380848" y="2768077"/>
+            <a:off x="-9000000" y="-9000000"/>
             <a:ext cx="7315200" cy="365760"/>
           </a:xfrm>
           <a:prstGeom prst="rect">
@@ -7295,25 +5039,7 @@
                 </a:solidFill>
                 <a:latin typeface="Segoe UI"/>
               </a:rPr>
-              <a:t>Mathematically proven  •  Hardware validated  •  </a:t>
-            </a:r>
-            <a:r>
-              <a:rPr lang="en-US" sz="1600" b="0" dirty="0">
-                <a:solidFill>
-                  <a:schemeClr val="bg1"/>
-                </a:solidFill>
-                <a:latin typeface="Segoe UI"/>
-              </a:rPr>
-              <a:t>Provisional </a:t>
-            </a:r>
-            <a:r>
-              <a:rPr sz="1600" b="0" dirty="0">
-                <a:solidFill>
-                  <a:schemeClr val="bg1"/>
-                </a:solidFill>
-                <a:latin typeface="Segoe UI"/>
-              </a:rPr>
-              <a:t>Patent pending</a:t>
+              <a:t/>
             </a:r>
           </a:p>
         </p:txBody>
@@ -7326,7 +5052,7 @@
         </p:nvSpPr>
         <p:spPr>
           <a:xfrm>
-            <a:off x="1043787" y="4231117"/>
+            <a:off x="-9000000" y="-9000000"/>
             <a:ext cx="2286000" cy="1005840"/>
           </a:xfrm>
           <a:prstGeom prst="roundRect">
@@ -7374,7 +5100,7 @@
         </p:nvSpPr>
         <p:spPr>
           <a:xfrm>
-            <a:off x="1226667" y="4260696"/>
+            <a:off x="-9000000" y="-9000000"/>
             <a:ext cx="1920240" cy="457200"/>
           </a:xfrm>
           <a:prstGeom prst="rect">
@@ -7404,7 +5130,7 @@
                 </a:solidFill>
                 <a:latin typeface="Segoe UI"/>
               </a:rPr>
-              <a:t>1,056 Mops/s</a:t>
+              <a:t/>
             </a:r>
           </a:p>
         </p:txBody>
@@ -7417,7 +5143,7 @@
         </p:nvSpPr>
         <p:spPr>
           <a:xfrm>
-            <a:off x="1226667" y="5377815"/>
+            <a:off x="-9000000" y="-9000000"/>
             <a:ext cx="1920240" cy="365760"/>
           </a:xfrm>
           <a:prstGeom prst="rect">
@@ -7447,25 +5173,7 @@
                 </a:solidFill>
                 <a:latin typeface="Segoe UI"/>
               </a:rPr>
-              <a:t>Peak Throughput (16 banks</a:t>
-            </a:r>
-            <a:r>
-              <a:rPr lang="en-US" sz="1100" b="0" dirty="0">
-                <a:solidFill>
-                  <a:schemeClr val="bg1"/>
-                </a:solidFill>
-                <a:latin typeface="Segoe UI"/>
-              </a:rPr>
-              <a:t> – limited by hardware</a:t>
-            </a:r>
-            <a:r>
-              <a:rPr sz="1100" b="0" dirty="0">
-                <a:solidFill>
-                  <a:schemeClr val="bg1"/>
-                </a:solidFill>
-                <a:latin typeface="Segoe UI"/>
-              </a:rPr>
-              <a:t>)</a:t>
+              <a:t/>
             </a:r>
           </a:p>
         </p:txBody>
@@ -7478,7 +5186,7 @@
         </p:nvSpPr>
         <p:spPr>
           <a:xfrm>
-            <a:off x="3649827" y="4231117"/>
+            <a:off x="-9000000" y="-9000000"/>
             <a:ext cx="2286000" cy="1005840"/>
           </a:xfrm>
           <a:prstGeom prst="roundRect">
@@ -7526,7 +5234,7 @@
         </p:nvSpPr>
         <p:spPr>
           <a:xfrm>
-            <a:off x="3856911" y="4286245"/>
+            <a:off x="-9000000" y="-9000000"/>
             <a:ext cx="1920240" cy="457200"/>
           </a:xfrm>
           <a:prstGeom prst="rect">
@@ -7556,16 +5264,7 @@
                 </a:solidFill>
                 <a:latin typeface="Segoe UI"/>
               </a:rPr>
-              <a:t>10.6 ns</a:t>
-            </a:r>
-            <a:r>
-              <a:rPr lang="en-US" sz="2800" b="1" dirty="0">
-                <a:solidFill>
-                  <a:srgbClr val="89B4FA"/>
-                </a:solidFill>
-                <a:latin typeface="Segoe UI"/>
-              </a:rPr>
-              <a:t> latency</a:t>
+              <a:t/>
             </a:r>
             <a:endParaRPr sz="2800" b="1" dirty="0">
               <a:solidFill>
@@ -7584,7 +5283,7 @@
         </p:nvSpPr>
         <p:spPr>
           <a:xfrm>
-            <a:off x="3832707" y="5400675"/>
+            <a:off x="-9000000" y="-9000000"/>
             <a:ext cx="1920240" cy="365760"/>
           </a:xfrm>
           <a:prstGeom prst="rect">
@@ -7614,16 +5313,7 @@
                 </a:solidFill>
                 <a:latin typeface="Segoe UI"/>
               </a:rPr>
-              <a:t>Deterministic </a:t>
-            </a:r>
-            <a:r>
-              <a:rPr sz="1100" b="0" dirty="0">
-                <a:solidFill>
-                  <a:schemeClr val="bg1"/>
-                </a:solidFill>
-                <a:latin typeface="Segoe UI"/>
-              </a:rPr>
-              <a:t>Single-Op Latency</a:t>
+              <a:t/>
             </a:r>
           </a:p>
         </p:txBody>
@@ -7636,7 +5326,7 @@
         </p:nvSpPr>
         <p:spPr>
           <a:xfrm>
-            <a:off x="6255867" y="4231117"/>
+            <a:off x="-9000000" y="-9000000"/>
             <a:ext cx="2286000" cy="1005840"/>
           </a:xfrm>
           <a:prstGeom prst="roundRect">
@@ -7684,7 +5374,7 @@
         </p:nvSpPr>
         <p:spPr>
           <a:xfrm>
-            <a:off x="6438747" y="4286245"/>
+            <a:off x="-9000000" y="-9000000"/>
             <a:ext cx="1920240" cy="457200"/>
           </a:xfrm>
           <a:prstGeom prst="rect">
@@ -7714,16 +5404,7 @@
                 </a:solidFill>
                 <a:latin typeface="Segoe UI"/>
               </a:rPr>
-              <a:t>92 Proofs</a:t>
-            </a:r>
-            <a:r>
-              <a:rPr lang="en-US" sz="2800" b="1" dirty="0">
-                <a:solidFill>
-                  <a:srgbClr val="CBA6F7"/>
-                </a:solidFill>
-                <a:latin typeface="Segoe UI"/>
-              </a:rPr>
-              <a:t> confirmed</a:t>
+              <a:t/>
             </a:r>
             <a:endParaRPr sz="2800" b="1" dirty="0">
               <a:solidFill>
@@ -7742,7 +5423,7 @@
         </p:nvSpPr>
         <p:spPr>
           <a:xfrm>
-            <a:off x="6438747" y="5377815"/>
+            <a:off x="-9000000" y="-9000000"/>
             <a:ext cx="1920240" cy="365760"/>
           </a:xfrm>
           <a:prstGeom prst="rect">
@@ -7772,34 +5453,7 @@
                 </a:solidFill>
                 <a:latin typeface="Segoe UI"/>
               </a:rPr>
-              <a:t>Delta-Algebra proofs, </a:t>
-            </a:r>
-            <a:r>
-              <a:rPr sz="1100" b="0" dirty="0">
-                <a:solidFill>
-                  <a:schemeClr val="bg1"/>
-                </a:solidFill>
-                <a:latin typeface="Segoe UI"/>
-              </a:rPr>
-              <a:t>Lean4 Verified</a:t>
-            </a:r>
-            <a:r>
-              <a:rPr lang="en-US" sz="1100" b="0" dirty="0">
-                <a:solidFill>
-                  <a:schemeClr val="bg1"/>
-                </a:solidFill>
-                <a:latin typeface="Segoe UI"/>
-              </a:rPr>
-              <a:t> -</a:t>
-            </a:r>
-            <a:r>
-              <a:rPr sz="1100" b="0" dirty="0">
-                <a:solidFill>
-                  <a:schemeClr val="bg1"/>
-                </a:solidFill>
-                <a:latin typeface="Segoe UI"/>
-              </a:rPr>
-              <a:t> 0 Sorry</a:t>
+              <a:t/>
             </a:r>
           </a:p>
         </p:txBody>
@@ -7812,7 +5466,7 @@
         </p:nvSpPr>
         <p:spPr>
           <a:xfrm>
-            <a:off x="8861907" y="4231117"/>
+            <a:off x="-9000000" y="-9000000"/>
             <a:ext cx="2286000" cy="1005840"/>
           </a:xfrm>
           <a:prstGeom prst="roundRect">
@@ -7860,7 +5514,7 @@
         </p:nvSpPr>
         <p:spPr>
           <a:xfrm>
-            <a:off x="9044787" y="4299697"/>
+            <a:off x="-9000000" y="-9000000"/>
             <a:ext cx="1920240" cy="457200"/>
           </a:xfrm>
           <a:prstGeom prst="rect">
@@ -7890,7 +5544,7 @@
                 </a:solidFill>
                 <a:latin typeface="Segoe UI"/>
               </a:rPr>
-              <a:t>$13.50 Device</a:t>
+              <a:t/>
             </a:r>
           </a:p>
         </p:txBody>
@@ -7903,7 +5557,7 @@
         </p:nvSpPr>
         <p:spPr>
           <a:xfrm>
-            <a:off x="9044787" y="5400675"/>
+            <a:off x="-9000000" y="-9000000"/>
             <a:ext cx="1920240" cy="365760"/>
           </a:xfrm>
           <a:prstGeom prst="rect">
@@ -7933,25 +5587,7 @@
                 </a:solidFill>
                 <a:latin typeface="Segoe UI"/>
               </a:rPr>
-              <a:t>Sipeed </a:t>
-            </a:r>
-            <a:r>
-              <a:rPr sz="1100" b="0" dirty="0">
-                <a:solidFill>
-                  <a:schemeClr val="bg1"/>
-                </a:solidFill>
-                <a:latin typeface="Segoe UI"/>
-              </a:rPr>
-              <a:t>Tang Nano 9K FPGA</a:t>
-            </a:r>
-            <a:r>
-              <a:rPr lang="en-US" sz="1100" b="0" dirty="0">
-                <a:solidFill>
-                  <a:schemeClr val="bg1"/>
-                </a:solidFill>
-                <a:latin typeface="Segoe UI"/>
-              </a:rPr>
-              <a:t> – GW1NR-9</a:t>
+              <a:t/>
             </a:r>
             <a:endParaRPr sz="1100" b="0" dirty="0">
               <a:solidFill>
@@ -8100,7 +5736,7 @@
         </p:blipFill>
         <p:spPr>
           <a:xfrm>
-            <a:off x="-329453" y="6858000"/>
+            <a:off x="-5000000" y="-5000000"/>
             <a:ext cx="13326035" cy="3654458"/>
           </a:xfrm>
           <a:prstGeom prst="rect">
@@ -8239,7 +5875,7 @@
                 </a:solidFill>
                 <a:latin typeface="Segoe UI"/>
               </a:rPr>
-              <a:t>Competitive Landscape</a:t>
+              <a:t>How Customers Handle State Today</a:t>
             </a:r>
           </a:p>
         </p:txBody>
@@ -8296,7 +5932,7 @@
         </p:nvSpPr>
         <p:spPr>
           <a:xfrm>
-            <a:off x="731520" y="1097280"/>
+            <a:off x="731519" y="1039406"/>
             <a:ext cx="5486400" cy="365760"/>
           </a:xfrm>
           <a:prstGeom prst="rect">
@@ -8326,7 +5962,7 @@
                 </a:solidFill>
                 <a:latin typeface="Segoe UI"/>
               </a:rPr>
-              <a:t>Technical Comparison</a:t>
+              <a:t>Approach Comparison</a:t>
             </a:r>
           </a:p>
         </p:txBody>
@@ -8340,14 +5976,14 @@
           <p:nvPr>
             <p:extLst>
               <p:ext uri="{D42A27DB-BD31-4B8C-83A1-F6EECF244321}">
-                <p14:modId xmlns:p14="http://schemas.microsoft.com/office/powerpoint/2010/main" val="124609961"/>
+                <p14:modId xmlns:p14="http://schemas.microsoft.com/office/powerpoint/2010/main" val="3082359145"/>
               </p:ext>
             </p:extLst>
           </p:nvPr>
         </p:nvGraphicFramePr>
         <p:xfrm>
-          <a:off x="731519" y="1417320"/>
-          <a:ext cx="9414286" cy="2377440"/>
+          <a:off x="731518" y="1426965"/>
+          <a:ext cx="9414284" cy="2660456"/>
         </p:xfrm>
         <a:graphic>
           <a:graphicData uri="http://schemas.openxmlformats.org/drawingml/2006/table">
@@ -8356,50 +5992,36 @@
                 <a:tableStyleId>{5C22544A-7EE6-4342-B048-85BDC9FD1C3A}</a:tableStyleId>
               </a:tblPr>
               <a:tblGrid>
-                <a:gridCol w="1661345">
+                <a:gridCol w="2455900">
                   <a:extLst>
                     <a:ext uri="{9D8B030D-6E8A-4147-A177-3AD203B41FA5}">
                       <a16:colId xmlns:a16="http://schemas.microsoft.com/office/drawing/2014/main" val="20000"/>
                     </a:ext>
                   </a:extLst>
                 </a:gridCol>
-                <a:gridCol w="1569047">
+                <a:gridCol w="2319460">
                   <a:extLst>
                     <a:ext uri="{9D8B030D-6E8A-4147-A177-3AD203B41FA5}">
                       <a16:colId xmlns:a16="http://schemas.microsoft.com/office/drawing/2014/main" val="20001"/>
                     </a:ext>
                   </a:extLst>
                 </a:gridCol>
-                <a:gridCol w="1661345">
+                <a:gridCol w="2455900">
                   <a:extLst>
                     <a:ext uri="{9D8B030D-6E8A-4147-A177-3AD203B41FA5}">
                       <a16:colId xmlns:a16="http://schemas.microsoft.com/office/drawing/2014/main" val="20002"/>
                     </a:ext>
                   </a:extLst>
                 </a:gridCol>
-                <a:gridCol w="1476751">
+                <a:gridCol w="2183022">
                   <a:extLst>
                     <a:ext uri="{9D8B030D-6E8A-4147-A177-3AD203B41FA5}">
                       <a16:colId xmlns:a16="http://schemas.microsoft.com/office/drawing/2014/main" val="20003"/>
                     </a:ext>
                   </a:extLst>
                 </a:gridCol>
-                <a:gridCol w="1569047">
-                  <a:extLst>
-                    <a:ext uri="{9D8B030D-6E8A-4147-A177-3AD203B41FA5}">
-                      <a16:colId xmlns:a16="http://schemas.microsoft.com/office/drawing/2014/main" val="20004"/>
-                    </a:ext>
-                  </a:extLst>
-                </a:gridCol>
-                <a:gridCol w="1476751">
-                  <a:extLst>
-                    <a:ext uri="{9D8B030D-6E8A-4147-A177-3AD203B41FA5}">
-                      <a16:colId xmlns:a16="http://schemas.microsoft.com/office/drawing/2014/main" val="20005"/>
-                    </a:ext>
-                  </a:extLst>
-                </a:gridCol>
               </a:tblGrid>
-              <a:tr h="339634">
+              <a:tr h="609020">
                 <a:tc>
                   <a:txBody>
                     <a:bodyPr/>
@@ -8464,15 +6086,7 @@
                       </a:pPr>
                       <a:r>
                         <a:rPr dirty="0"/>
-                        <a:t>Event</a:t>
-                      </a:r>
-                      <a:r>
-                        <a:rPr lang="en-US" dirty="0"/>
-                        <a:t> </a:t>
-                      </a:r>
-                      <a:r>
-                        <a:rPr dirty="0"/>
-                        <a:t>Sourcing</a:t>
+                        <a:t>Conventional Memory + Locks</a:t>
                       </a:r>
                     </a:p>
                   </a:txBody>
@@ -8496,56 +6110,7 @@
                         </a:defRPr>
                       </a:pPr>
                       <a:r>
-                        <a:t>CRDTs</a:t>
-                      </a:r>
-                    </a:p>
-                  </a:txBody>
-                  <a:tcPr marL="73152" marR="73152" marT="36576" marB="36576">
-                    <a:solidFill>
-                      <a:srgbClr val="252538"/>
-                    </a:solidFill>
-                  </a:tcPr>
-                </a:tc>
-                <a:tc>
-                  <a:txBody>
-                    <a:bodyPr/>
-                    <a:lstStyle/>
-                    <a:p>
-                      <a:pPr algn="ctr">
-                        <a:defRPr sz="1100" b="1">
-                          <a:solidFill>
-                            <a:srgbClr val="89B4FA"/>
-                          </a:solidFill>
-                          <a:latin typeface="Segoe UI"/>
-                        </a:defRPr>
-                      </a:pPr>
-                      <a:r>
-                        <a:t>GPU</a:t>
-                      </a:r>
-                    </a:p>
-                  </a:txBody>
-                  <a:tcPr marL="73152" marR="73152" marT="36576" marB="36576">
-                    <a:solidFill>
-                      <a:srgbClr val="252538"/>
-                    </a:solidFill>
-                  </a:tcPr>
-                </a:tc>
-                <a:tc>
-                  <a:txBody>
-                    <a:bodyPr/>
-                    <a:lstStyle/>
-                    <a:p>
-                      <a:pPr algn="ctr">
-                        <a:defRPr sz="1100" b="1">
-                          <a:solidFill>
-                            <a:srgbClr val="89B4FA"/>
-                          </a:solidFill>
-                          <a:latin typeface="Segoe UI"/>
-                        </a:defRPr>
-                      </a:pPr>
-                      <a:r>
-                        <a:rPr dirty="0"/>
-                        <a:t>Near-Memory</a:t>
+                        <a:t>Checkpoint / Journal</a:t>
                       </a:r>
                     </a:p>
                   </a:txBody>
@@ -8561,7 +6126,7 @@
                   </a:ext>
                 </a:extLst>
               </a:tr>
-              <a:tr h="339634">
+              <a:tr h="341906">
                 <a:tc>
                   <a:txBody>
                     <a:bodyPr/>
@@ -8581,7 +6146,7 @@
                             <a:schemeClr val="bg1"/>
                           </a:solidFill>
                         </a:rPr>
-                        <a:t>Reconstruction</a:t>
+                        <a:t>State Update</a:t>
                       </a:r>
                     </a:p>
                   </a:txBody>
@@ -8610,7 +6175,7 @@
                             <a:schemeClr val="bg1"/>
                           </a:solidFill>
                         </a:rPr>
-                        <a:t>O(1)/cycle</a:t>
+                        <a:t>XOR delta (O(1))</a:t>
                       </a:r>
                     </a:p>
                   </a:txBody>
@@ -8639,7 +6204,7 @@
                             <a:schemeClr val="bg1"/>
                           </a:solidFill>
                         </a:rPr>
-                        <a:t>O(N) replay</a:t>
+                        <a:t>Full copy + lock</a:t>
                       </a:r>
                     </a:p>
                   </a:txBody>
@@ -8668,7 +6233,166 @@
                             <a:schemeClr val="bg1"/>
                           </a:solidFill>
                         </a:rPr>
-                        <a:t>O(N) merge</a:t>
+                        <a:t>Write-ahead log + replay</a:t>
+                      </a:r>
+                    </a:p>
+                  </a:txBody>
+                  <a:tcPr marL="73152" marR="73152" marT="36576" marB="36576">
+                    <a:solidFill>
+                      <a:srgbClr val="1E1E2E"/>
+                    </a:solidFill>
+                  </a:tcPr>
+                </a:tc>
+                <a:extLst>
+                  <a:ext uri="{0D108BD9-81ED-4DB2-BD59-A6C34878D82A}">
+                    <a16:rowId xmlns:a16="http://schemas.microsoft.com/office/drawing/2014/main" val="10001"/>
+                  </a:ext>
+                </a:extLst>
+              </a:tr>
+              <a:tr h="341906">
+                <a:tc>
+                  <a:txBody>
+                    <a:bodyPr/>
+                    <a:lstStyle/>
+                    <a:p>
+                      <a:pPr algn="l">
+                        <a:defRPr sz="1100" b="0">
+                          <a:solidFill>
+                            <a:srgbClr val="CDD6F4"/>
+                          </a:solidFill>
+                          <a:latin typeface="Segoe UI"/>
+                        </a:defRPr>
+                      </a:pPr>
+                      <a:r>
+                        <a:rPr>
+                          <a:solidFill>
+                            <a:schemeClr val="bg1"/>
+                          </a:solidFill>
+                        </a:rPr>
+                        <a:t>Reconstruction</a:t>
+                      </a:r>
+                    </a:p>
+                  </a:txBody>
+                  <a:tcPr marL="73152" marR="73152" marT="36576" marB="36576">
+                    <a:solidFill>
+                      <a:srgbClr val="1A1A28"/>
+                    </a:solidFill>
+                  </a:tcPr>
+                </a:tc>
+                <a:tc>
+                  <a:txBody>
+                    <a:bodyPr/>
+                    <a:lstStyle/>
+                    <a:p>
+                      <a:pPr algn="ctr">
+                        <a:defRPr sz="1100" b="0">
+                          <a:solidFill>
+                            <a:srgbClr val="CDD6F4"/>
+                          </a:solidFill>
+                          <a:latin typeface="Segoe UI"/>
+                        </a:defRPr>
+                      </a:pPr>
+                      <a:r>
+                        <a:rPr>
+                          <a:solidFill>
+                            <a:schemeClr val="bg1"/>
+                          </a:solidFill>
+                        </a:rPr>
+                        <a:t>O(1) per cycle</a:t>
+                      </a:r>
+                    </a:p>
+                  </a:txBody>
+                  <a:tcPr marL="73152" marR="73152" marT="36576" marB="36576">
+                    <a:solidFill>
+                      <a:srgbClr val="1A1A28"/>
+                    </a:solidFill>
+                  </a:tcPr>
+                </a:tc>
+                <a:tc>
+                  <a:txBody>
+                    <a:bodyPr/>
+                    <a:lstStyle/>
+                    <a:p>
+                      <a:pPr algn="ctr">
+                        <a:defRPr sz="1100" b="0">
+                          <a:solidFill>
+                            <a:srgbClr val="CDD6F4"/>
+                          </a:solidFill>
+                          <a:latin typeface="Segoe UI"/>
+                        </a:defRPr>
+                      </a:pPr>
+                      <a:r>
+                        <a:rPr>
+                          <a:solidFill>
+                            <a:schemeClr val="bg1"/>
+                          </a:solidFill>
+                        </a:rPr>
+                        <a:t>Re-read from memory</a:t>
+                      </a:r>
+                    </a:p>
+                  </a:txBody>
+                  <a:tcPr marL="73152" marR="73152" marT="36576" marB="36576">
+                    <a:solidFill>
+                      <a:srgbClr val="1A1A28"/>
+                    </a:solidFill>
+                  </a:tcPr>
+                </a:tc>
+                <a:tc>
+                  <a:txBody>
+                    <a:bodyPr/>
+                    <a:lstStyle/>
+                    <a:p>
+                      <a:pPr algn="ctr">
+                        <a:defRPr sz="1100" b="0">
+                          <a:solidFill>
+                            <a:srgbClr val="CDD6F4"/>
+                          </a:solidFill>
+                          <a:latin typeface="Segoe UI"/>
+                        </a:defRPr>
+                      </a:pPr>
+                      <a:r>
+                        <a:rPr>
+                          <a:solidFill>
+                            <a:schemeClr val="bg1"/>
+                          </a:solidFill>
+                        </a:rPr>
+                        <a:t>O(N) log replay</a:t>
+                      </a:r>
+                    </a:p>
+                  </a:txBody>
+                  <a:tcPr marL="73152" marR="73152" marT="36576" marB="36576">
+                    <a:solidFill>
+                      <a:srgbClr val="1A1A28"/>
+                    </a:solidFill>
+                  </a:tcPr>
+                </a:tc>
+                <a:extLst>
+                  <a:ext uri="{0D108BD9-81ED-4DB2-BD59-A6C34878D82A}">
+                    <a16:rowId xmlns:a16="http://schemas.microsoft.com/office/drawing/2014/main" val="10002"/>
+                  </a:ext>
+                </a:extLst>
+              </a:tr>
+              <a:tr h="341906">
+                <a:tc>
+                  <a:txBody>
+                    <a:bodyPr/>
+                    <a:lstStyle/>
+                    <a:p>
+                      <a:pPr algn="l">
+                        <a:defRPr sz="1100" b="0">
+                          <a:solidFill>
+                            <a:srgbClr val="CDD6F4"/>
+                          </a:solidFill>
+                          <a:latin typeface="Segoe UI"/>
+                        </a:defRPr>
+                      </a:pPr>
+                      <a:r>
+                        <a:rPr>
+                          <a:solidFill>
+                            <a:schemeClr val="bg1"/>
+                          </a:solidFill>
+                        </a:rPr>
+                        <a:t>Parallelism</a:t>
                       </a:r>
                     </a:p>
                   </a:txBody>
@@ -8697,7 +6421,7 @@
                             <a:schemeClr val="bg1"/>
                           </a:solidFill>
                         </a:rPr>
-                        <a:t>Batch</a:t>
+                        <a:t>Lock-free (commutative)</a:t>
                       </a:r>
                     </a:p>
                   </a:txBody>
@@ -8726,7 +6450,36 @@
                             <a:schemeClr val="bg1"/>
                           </a:solidFill>
                         </a:rPr>
-                        <a:t>O(1) local</a:t>
+                        <a:t>Mutex / spinlock</a:t>
+                      </a:r>
+                    </a:p>
+                  </a:txBody>
+                  <a:tcPr marL="73152" marR="73152" marT="36576" marB="36576">
+                    <a:solidFill>
+                      <a:srgbClr val="1E1E2E"/>
+                    </a:solidFill>
+                  </a:tcPr>
+                </a:tc>
+                <a:tc>
+                  <a:txBody>
+                    <a:bodyPr/>
+                    <a:lstStyle/>
+                    <a:p>
+                      <a:pPr algn="ctr">
+                        <a:defRPr sz="1100" b="0">
+                          <a:solidFill>
+                            <a:srgbClr val="CDD6F4"/>
+                          </a:solidFill>
+                          <a:latin typeface="Segoe UI"/>
+                        </a:defRPr>
+                      </a:pPr>
+                      <a:r>
+                        <a:rPr>
+                          <a:solidFill>
+                            <a:schemeClr val="bg1"/>
+                          </a:solidFill>
+                        </a:rPr>
+                        <a:t>Sequential writes</a:t>
                       </a:r>
                     </a:p>
                   </a:txBody>
@@ -8738,11 +6491,11 @@
                 </a:tc>
                 <a:extLst>
                   <a:ext uri="{0D108BD9-81ED-4DB2-BD59-A6C34878D82A}">
-                    <a16:rowId xmlns:a16="http://schemas.microsoft.com/office/drawing/2014/main" val="10001"/>
+                    <a16:rowId xmlns:a16="http://schemas.microsoft.com/office/drawing/2014/main" val="10003"/>
                   </a:ext>
                 </a:extLst>
               </a:tr>
-              <a:tr h="339634">
+              <a:tr h="341906">
                 <a:tc>
                   <a:txBody>
                     <a:bodyPr/>
@@ -8762,7 +6515,7 @@
                             <a:schemeClr val="bg1"/>
                           </a:solidFill>
                         </a:rPr>
-                        <a:t>Formal Proofs</a:t>
+                        <a:t>Undo / Reversal</a:t>
                       </a:r>
                     </a:p>
                   </a:txBody>
@@ -8791,7 +6544,7 @@
                             <a:schemeClr val="bg1"/>
                           </a:solidFill>
                         </a:rPr>
-                        <a:t>92 Lean4</a:t>
+                        <a:t>Free (self-inverse)</a:t>
                       </a:r>
                     </a:p>
                   </a:txBody>
@@ -8820,7 +6573,7 @@
                             <a:schemeClr val="bg1"/>
                           </a:solidFill>
                         </a:rPr>
-                        <a:t>None</a:t>
+                        <a:t>Not supported</a:t>
                       </a:r>
                     </a:p>
                   </a:txBody>
@@ -8849,7 +6602,195 @@
                             <a:schemeClr val="bg1"/>
                           </a:solidFill>
                         </a:rPr>
-                        <a:t>Manual</a:t>
+                        <a:t>Replay from checkpoint</a:t>
+                      </a:r>
+                    </a:p>
+                  </a:txBody>
+                  <a:tcPr marL="73152" marR="73152" marT="36576" marB="36576">
+                    <a:solidFill>
+                      <a:srgbClr val="1A1A28"/>
+                    </a:solidFill>
+                  </a:tcPr>
+                </a:tc>
+                <a:extLst>
+                  <a:ext uri="{0D108BD9-81ED-4DB2-BD59-A6C34878D82A}">
+                    <a16:rowId xmlns:a16="http://schemas.microsoft.com/office/drawing/2014/main" val="10004"/>
+                  </a:ext>
+                </a:extLst>
+              </a:tr>
+              <a:tr h="341906">
+                <a:tc>
+                  <a:txBody>
+                    <a:bodyPr/>
+                    <a:lstStyle/>
+                    <a:p>
+                      <a:pPr algn="l">
+                        <a:defRPr sz="1100" b="0">
+                          <a:solidFill>
+                            <a:srgbClr val="CDD6F4"/>
+                          </a:solidFill>
+                          <a:latin typeface="Segoe UI"/>
+                        </a:defRPr>
+                      </a:pPr>
+                      <a:r>
+                        <a:rPr>
+                          <a:solidFill>
+                            <a:schemeClr val="bg1"/>
+                          </a:solidFill>
+                        </a:rPr>
+                        <a:t>Power (edge)</a:t>
+                      </a:r>
+                    </a:p>
+                  </a:txBody>
+                  <a:tcPr marL="73152" marR="73152" marT="36576" marB="36576">
+                    <a:solidFill>
+                      <a:srgbClr val="1E1E2E"/>
+                    </a:solidFill>
+                  </a:tcPr>
+                </a:tc>
+                <a:tc>
+                  <a:txBody>
+                    <a:bodyPr/>
+                    <a:lstStyle/>
+                    <a:p>
+                      <a:pPr algn="ctr">
+                        <a:defRPr sz="1100" b="0">
+                          <a:solidFill>
+                            <a:srgbClr val="CDD6F4"/>
+                          </a:solidFill>
+                          <a:latin typeface="Segoe UI"/>
+                        </a:defRPr>
+                      </a:pPr>
+                      <a:r>
+                        <a:rPr dirty="0">
+                          <a:solidFill>
+                            <a:schemeClr val="bg1"/>
+                          </a:solidFill>
+                        </a:rPr>
+                        <a:t>~20 mW</a:t>
+                      </a:r>
+                    </a:p>
+                  </a:txBody>
+                  <a:tcPr marL="73152" marR="73152" marT="36576" marB="36576">
+                    <a:solidFill>
+                      <a:srgbClr val="1E1E2E"/>
+                    </a:solidFill>
+                  </a:tcPr>
+                </a:tc>
+                <a:tc>
+                  <a:txBody>
+                    <a:bodyPr/>
+                    <a:lstStyle/>
+                    <a:p>
+                      <a:pPr algn="ctr">
+                        <a:defRPr sz="1100" b="0">
+                          <a:solidFill>
+                            <a:srgbClr val="CDD6F4"/>
+                          </a:solidFill>
+                          <a:latin typeface="Segoe UI"/>
+                        </a:defRPr>
+                      </a:pPr>
+                      <a:r>
+                        <a:rPr>
+                          <a:solidFill>
+                            <a:schemeClr val="bg1"/>
+                          </a:solidFill>
+                        </a:rPr>
+                        <a:t>CPU-bound</a:t>
+                      </a:r>
+                    </a:p>
+                  </a:txBody>
+                  <a:tcPr marL="73152" marR="73152" marT="36576" marB="36576">
+                    <a:solidFill>
+                      <a:srgbClr val="1E1E2E"/>
+                    </a:solidFill>
+                  </a:tcPr>
+                </a:tc>
+                <a:tc>
+                  <a:txBody>
+                    <a:bodyPr/>
+                    <a:lstStyle/>
+                    <a:p>
+                      <a:pPr algn="ctr">
+                        <a:defRPr sz="1100" b="0">
+                          <a:solidFill>
+                            <a:srgbClr val="CDD6F4"/>
+                          </a:solidFill>
+                          <a:latin typeface="Segoe UI"/>
+                        </a:defRPr>
+                      </a:pPr>
+                      <a:r>
+                        <a:rPr>
+                          <a:solidFill>
+                            <a:schemeClr val="bg1"/>
+                          </a:solidFill>
+                        </a:rPr>
+                        <a:t>CPU + storage I/O</a:t>
+                      </a:r>
+                    </a:p>
+                  </a:txBody>
+                  <a:tcPr marL="73152" marR="73152" marT="36576" marB="36576">
+                    <a:solidFill>
+                      <a:srgbClr val="1E1E2E"/>
+                    </a:solidFill>
+                  </a:tcPr>
+                </a:tc>
+                <a:extLst>
+                  <a:ext uri="{0D108BD9-81ED-4DB2-BD59-A6C34878D82A}">
+                    <a16:rowId xmlns:a16="http://schemas.microsoft.com/office/drawing/2014/main" val="10005"/>
+                  </a:ext>
+                </a:extLst>
+              </a:tr>
+              <a:tr h="341906">
+                <a:tc>
+                  <a:txBody>
+                    <a:bodyPr/>
+                    <a:lstStyle/>
+                    <a:p>
+                      <a:pPr algn="l">
+                        <a:defRPr sz="1100" b="0">
+                          <a:solidFill>
+                            <a:srgbClr val="CDD6F4"/>
+                          </a:solidFill>
+                          <a:latin typeface="Segoe UI"/>
+                        </a:defRPr>
+                      </a:pPr>
+                      <a:r>
+                        <a:rPr dirty="0">
+                          <a:solidFill>
+                            <a:schemeClr val="bg1"/>
+                          </a:solidFill>
+                        </a:rPr>
+                        <a:t>Formal Verification</a:t>
+                      </a:r>
+                    </a:p>
+                  </a:txBody>
+                  <a:tcPr marL="73152" marR="73152" marT="36576" marB="36576">
+                    <a:solidFill>
+                      <a:srgbClr val="1A1A28"/>
+                    </a:solidFill>
+                  </a:tcPr>
+                </a:tc>
+                <a:tc>
+                  <a:txBody>
+                    <a:bodyPr/>
+                    <a:lstStyle/>
+                    <a:p>
+                      <a:pPr algn="ctr">
+                        <a:defRPr sz="1100" b="0">
+                          <a:solidFill>
+                            <a:srgbClr val="CDD6F4"/>
+                          </a:solidFill>
+                          <a:latin typeface="Segoe UI"/>
+                        </a:defRPr>
+                      </a:pPr>
+                      <a:r>
+                        <a:rPr>
+                          <a:solidFill>
+                            <a:schemeClr val="bg1"/>
+                          </a:solidFill>
+                        </a:rPr>
+                        <a:t>92 Lean4 proofs</a:t>
                       </a:r>
                     </a:p>
                   </a:txBody>
@@ -8919,730 +6860,6 @@
                 </a:tc>
                 <a:extLst>
                   <a:ext uri="{0D108BD9-81ED-4DB2-BD59-A6C34878D82A}">
-                    <a16:rowId xmlns:a16="http://schemas.microsoft.com/office/drawing/2014/main" val="10002"/>
-                  </a:ext>
-                </a:extLst>
-              </a:tr>
-              <a:tr h="339634">
-                <a:tc>
-                  <a:txBody>
-                    <a:bodyPr/>
-                    <a:lstStyle/>
-                    <a:p>
-                      <a:pPr algn="l">
-                        <a:defRPr sz="1100" b="0">
-                          <a:solidFill>
-                            <a:srgbClr val="CDD6F4"/>
-                          </a:solidFill>
-                          <a:latin typeface="Segoe UI"/>
-                        </a:defRPr>
-                      </a:pPr>
-                      <a:r>
-                        <a:rPr>
-                          <a:solidFill>
-                            <a:schemeClr val="bg1"/>
-                          </a:solidFill>
-                        </a:rPr>
-                        <a:t>Undo/Reversal</a:t>
-                      </a:r>
-                    </a:p>
-                  </a:txBody>
-                  <a:tcPr marL="73152" marR="73152" marT="36576" marB="36576">
-                    <a:solidFill>
-                      <a:srgbClr val="1E1E2E"/>
-                    </a:solidFill>
-                  </a:tcPr>
-                </a:tc>
-                <a:tc>
-                  <a:txBody>
-                    <a:bodyPr/>
-                    <a:lstStyle/>
-                    <a:p>
-                      <a:pPr algn="ctr">
-                        <a:defRPr sz="1100" b="0">
-                          <a:solidFill>
-                            <a:srgbClr val="CDD6F4"/>
-                          </a:solidFill>
-                          <a:latin typeface="Segoe UI"/>
-                        </a:defRPr>
-                      </a:pPr>
-                      <a:r>
-                        <a:rPr>
-                          <a:solidFill>
-                            <a:schemeClr val="bg1"/>
-                          </a:solidFill>
-                        </a:rPr>
-                        <a:t>Free</a:t>
-                      </a:r>
-                    </a:p>
-                  </a:txBody>
-                  <a:tcPr marL="73152" marR="73152" marT="36576" marB="36576">
-                    <a:solidFill>
-                      <a:srgbClr val="1E1E2E"/>
-                    </a:solidFill>
-                  </a:tcPr>
-                </a:tc>
-                <a:tc>
-                  <a:txBody>
-                    <a:bodyPr/>
-                    <a:lstStyle/>
-                    <a:p>
-                      <a:pPr algn="ctr">
-                        <a:defRPr sz="1100" b="0">
-                          <a:solidFill>
-                            <a:srgbClr val="CDD6F4"/>
-                          </a:solidFill>
-                          <a:latin typeface="Segoe UI"/>
-                        </a:defRPr>
-                      </a:pPr>
-                      <a:r>
-                        <a:rPr>
-                          <a:solidFill>
-                            <a:schemeClr val="bg1"/>
-                          </a:solidFill>
-                        </a:rPr>
-                        <a:t>Log replay</a:t>
-                      </a:r>
-                    </a:p>
-                  </a:txBody>
-                  <a:tcPr marL="73152" marR="73152" marT="36576" marB="36576">
-                    <a:solidFill>
-                      <a:srgbClr val="1E1E2E"/>
-                    </a:solidFill>
-                  </a:tcPr>
-                </a:tc>
-                <a:tc>
-                  <a:txBody>
-                    <a:bodyPr/>
-                    <a:lstStyle/>
-                    <a:p>
-                      <a:pPr algn="ctr">
-                        <a:defRPr sz="1100" b="0">
-                          <a:solidFill>
-                            <a:srgbClr val="CDD6F4"/>
-                          </a:solidFill>
-                          <a:latin typeface="Segoe UI"/>
-                        </a:defRPr>
-                      </a:pPr>
-                      <a:r>
-                        <a:rPr>
-                          <a:solidFill>
-                            <a:schemeClr val="bg1"/>
-                          </a:solidFill>
-                        </a:rPr>
-                        <a:t>N/A</a:t>
-                      </a:r>
-                    </a:p>
-                  </a:txBody>
-                  <a:tcPr marL="73152" marR="73152" marT="36576" marB="36576">
-                    <a:solidFill>
-                      <a:srgbClr val="1E1E2E"/>
-                    </a:solidFill>
-                  </a:tcPr>
-                </a:tc>
-                <a:tc>
-                  <a:txBody>
-                    <a:bodyPr/>
-                    <a:lstStyle/>
-                    <a:p>
-                      <a:pPr algn="ctr">
-                        <a:defRPr sz="1100" b="0">
-                          <a:solidFill>
-                            <a:srgbClr val="CDD6F4"/>
-                          </a:solidFill>
-                          <a:latin typeface="Segoe UI"/>
-                        </a:defRPr>
-                      </a:pPr>
-                      <a:r>
-                        <a:rPr>
-                          <a:solidFill>
-                            <a:schemeClr val="bg1"/>
-                          </a:solidFill>
-                        </a:rPr>
-                        <a:t>N/A</a:t>
-                      </a:r>
-                    </a:p>
-                  </a:txBody>
-                  <a:tcPr marL="73152" marR="73152" marT="36576" marB="36576">
-                    <a:solidFill>
-                      <a:srgbClr val="1E1E2E"/>
-                    </a:solidFill>
-                  </a:tcPr>
-                </a:tc>
-                <a:tc>
-                  <a:txBody>
-                    <a:bodyPr/>
-                    <a:lstStyle/>
-                    <a:p>
-                      <a:pPr algn="ctr">
-                        <a:defRPr sz="1100" b="0">
-                          <a:solidFill>
-                            <a:srgbClr val="CDD6F4"/>
-                          </a:solidFill>
-                          <a:latin typeface="Segoe UI"/>
-                        </a:defRPr>
-                      </a:pPr>
-                      <a:r>
-                        <a:rPr>
-                          <a:solidFill>
-                            <a:schemeClr val="bg1"/>
-                          </a:solidFill>
-                        </a:rPr>
-                        <a:t>N/A</a:t>
-                      </a:r>
-                    </a:p>
-                  </a:txBody>
-                  <a:tcPr marL="73152" marR="73152" marT="36576" marB="36576">
-                    <a:solidFill>
-                      <a:srgbClr val="1E1E2E"/>
-                    </a:solidFill>
-                  </a:tcPr>
-                </a:tc>
-                <a:extLst>
-                  <a:ext uri="{0D108BD9-81ED-4DB2-BD59-A6C34878D82A}">
-                    <a16:rowId xmlns:a16="http://schemas.microsoft.com/office/drawing/2014/main" val="10003"/>
-                  </a:ext>
-                </a:extLst>
-              </a:tr>
-              <a:tr h="339634">
-                <a:tc>
-                  <a:txBody>
-                    <a:bodyPr/>
-                    <a:lstStyle/>
-                    <a:p>
-                      <a:pPr algn="l">
-                        <a:defRPr sz="1100" b="0">
-                          <a:solidFill>
-                            <a:srgbClr val="CDD6F4"/>
-                          </a:solidFill>
-                          <a:latin typeface="Segoe UI"/>
-                        </a:defRPr>
-                      </a:pPr>
-                      <a:r>
-                        <a:rPr>
-                          <a:solidFill>
-                            <a:schemeClr val="bg1"/>
-                          </a:solidFill>
-                        </a:rPr>
-                        <a:t>Parallelism</a:t>
-                      </a:r>
-                    </a:p>
-                  </a:txBody>
-                  <a:tcPr marL="73152" marR="73152" marT="36576" marB="36576">
-                    <a:solidFill>
-                      <a:srgbClr val="1A1A28"/>
-                    </a:solidFill>
-                  </a:tcPr>
-                </a:tc>
-                <a:tc>
-                  <a:txBody>
-                    <a:bodyPr/>
-                    <a:lstStyle/>
-                    <a:p>
-                      <a:pPr algn="ctr">
-                        <a:defRPr sz="1100" b="0">
-                          <a:solidFill>
-                            <a:srgbClr val="CDD6F4"/>
-                          </a:solidFill>
-                          <a:latin typeface="Segoe UI"/>
-                        </a:defRPr>
-                      </a:pPr>
-                      <a:r>
-                        <a:rPr>
-                          <a:solidFill>
-                            <a:schemeClr val="bg1"/>
-                          </a:solidFill>
-                        </a:rPr>
-                        <a:t>Linear</a:t>
-                      </a:r>
-                    </a:p>
-                  </a:txBody>
-                  <a:tcPr marL="73152" marR="73152" marT="36576" marB="36576">
-                    <a:solidFill>
-                      <a:srgbClr val="1A1A28"/>
-                    </a:solidFill>
-                  </a:tcPr>
-                </a:tc>
-                <a:tc>
-                  <a:txBody>
-                    <a:bodyPr/>
-                    <a:lstStyle/>
-                    <a:p>
-                      <a:pPr algn="ctr">
-                        <a:defRPr sz="1100" b="0">
-                          <a:solidFill>
-                            <a:srgbClr val="CDD6F4"/>
-                          </a:solidFill>
-                          <a:latin typeface="Segoe UI"/>
-                        </a:defRPr>
-                      </a:pPr>
-                      <a:r>
-                        <a:rPr>
-                          <a:solidFill>
-                            <a:schemeClr val="bg1"/>
-                          </a:solidFill>
-                        </a:rPr>
-                        <a:t>Limited</a:t>
-                      </a:r>
-                    </a:p>
-                  </a:txBody>
-                  <a:tcPr marL="73152" marR="73152" marT="36576" marB="36576">
-                    <a:solidFill>
-                      <a:srgbClr val="1A1A28"/>
-                    </a:solidFill>
-                  </a:tcPr>
-                </a:tc>
-                <a:tc>
-                  <a:txBody>
-                    <a:bodyPr/>
-                    <a:lstStyle/>
-                    <a:p>
-                      <a:pPr algn="ctr">
-                        <a:defRPr sz="1100" b="0">
-                          <a:solidFill>
-                            <a:srgbClr val="CDD6F4"/>
-                          </a:solidFill>
-                          <a:latin typeface="Segoe UI"/>
-                        </a:defRPr>
-                      </a:pPr>
-                      <a:r>
-                        <a:rPr>
-                          <a:solidFill>
-                            <a:schemeClr val="bg1"/>
-                          </a:solidFill>
-                        </a:rPr>
-                        <a:t>Eventual</a:t>
-                      </a:r>
-                    </a:p>
-                  </a:txBody>
-                  <a:tcPr marL="73152" marR="73152" marT="36576" marB="36576">
-                    <a:solidFill>
-                      <a:srgbClr val="1A1A28"/>
-                    </a:solidFill>
-                  </a:tcPr>
-                </a:tc>
-                <a:tc>
-                  <a:txBody>
-                    <a:bodyPr/>
-                    <a:lstStyle/>
-                    <a:p>
-                      <a:pPr algn="ctr">
-                        <a:defRPr sz="1100" b="0">
-                          <a:solidFill>
-                            <a:srgbClr val="CDD6F4"/>
-                          </a:solidFill>
-                          <a:latin typeface="Segoe UI"/>
-                        </a:defRPr>
-                      </a:pPr>
-                      <a:r>
-                        <a:rPr>
-                          <a:solidFill>
-                            <a:schemeClr val="bg1"/>
-                          </a:solidFill>
-                        </a:rPr>
-                        <a:t>SIMT</a:t>
-                      </a:r>
-                    </a:p>
-                  </a:txBody>
-                  <a:tcPr marL="73152" marR="73152" marT="36576" marB="36576">
-                    <a:solidFill>
-                      <a:srgbClr val="1A1A28"/>
-                    </a:solidFill>
-                  </a:tcPr>
-                </a:tc>
-                <a:tc>
-                  <a:txBody>
-                    <a:bodyPr/>
-                    <a:lstStyle/>
-                    <a:p>
-                      <a:pPr algn="ctr">
-                        <a:defRPr sz="1100" b="0">
-                          <a:solidFill>
-                            <a:srgbClr val="CDD6F4"/>
-                          </a:solidFill>
-                          <a:latin typeface="Segoe UI"/>
-                        </a:defRPr>
-                      </a:pPr>
-                      <a:r>
-                        <a:rPr>
-                          <a:solidFill>
-                            <a:schemeClr val="bg1"/>
-                          </a:solidFill>
-                        </a:rPr>
-                        <a:t>Ctrl-bound</a:t>
-                      </a:r>
-                    </a:p>
-                  </a:txBody>
-                  <a:tcPr marL="73152" marR="73152" marT="36576" marB="36576">
-                    <a:solidFill>
-                      <a:srgbClr val="1A1A28"/>
-                    </a:solidFill>
-                  </a:tcPr>
-                </a:tc>
-                <a:extLst>
-                  <a:ext uri="{0D108BD9-81ED-4DB2-BD59-A6C34878D82A}">
-                    <a16:rowId xmlns:a16="http://schemas.microsoft.com/office/drawing/2014/main" val="10004"/>
-                  </a:ext>
-                </a:extLst>
-              </a:tr>
-              <a:tr h="339634">
-                <a:tc>
-                  <a:txBody>
-                    <a:bodyPr/>
-                    <a:lstStyle/>
-                    <a:p>
-                      <a:pPr algn="l">
-                        <a:defRPr sz="1100" b="0">
-                          <a:solidFill>
-                            <a:srgbClr val="CDD6F4"/>
-                          </a:solidFill>
-                          <a:latin typeface="Segoe UI"/>
-                        </a:defRPr>
-                      </a:pPr>
-                      <a:r>
-                        <a:rPr>
-                          <a:solidFill>
-                            <a:schemeClr val="bg1"/>
-                          </a:solidFill>
-                        </a:rPr>
-                        <a:t>Power</a:t>
-                      </a:r>
-                    </a:p>
-                  </a:txBody>
-                  <a:tcPr marL="73152" marR="73152" marT="36576" marB="36576">
-                    <a:solidFill>
-                      <a:srgbClr val="1E1E2E"/>
-                    </a:solidFill>
-                  </a:tcPr>
-                </a:tc>
-                <a:tc>
-                  <a:txBody>
-                    <a:bodyPr/>
-                    <a:lstStyle/>
-                    <a:p>
-                      <a:pPr algn="ctr">
-                        <a:defRPr sz="1100" b="0">
-                          <a:solidFill>
-                            <a:srgbClr val="CDD6F4"/>
-                          </a:solidFill>
-                          <a:latin typeface="Segoe UI"/>
-                        </a:defRPr>
-                      </a:pPr>
-                      <a:r>
-                        <a:rPr dirty="0">
-                          <a:solidFill>
-                            <a:schemeClr val="bg1"/>
-                          </a:solidFill>
-                        </a:rPr>
-                        <a:t>~20 mW</a:t>
-                      </a:r>
-                    </a:p>
-                  </a:txBody>
-                  <a:tcPr marL="73152" marR="73152" marT="36576" marB="36576">
-                    <a:solidFill>
-                      <a:srgbClr val="1E1E2E"/>
-                    </a:solidFill>
-                  </a:tcPr>
-                </a:tc>
-                <a:tc>
-                  <a:txBody>
-                    <a:bodyPr/>
-                    <a:lstStyle/>
-                    <a:p>
-                      <a:pPr algn="ctr">
-                        <a:defRPr sz="1100" b="0">
-                          <a:solidFill>
-                            <a:srgbClr val="CDD6F4"/>
-                          </a:solidFill>
-                          <a:latin typeface="Segoe UI"/>
-                        </a:defRPr>
-                      </a:pPr>
-                      <a:r>
-                        <a:rPr>
-                          <a:solidFill>
-                            <a:schemeClr val="bg1"/>
-                          </a:solidFill>
-                        </a:rPr>
-                        <a:t>50–200W</a:t>
-                      </a:r>
-                    </a:p>
-                  </a:txBody>
-                  <a:tcPr marL="73152" marR="73152" marT="36576" marB="36576">
-                    <a:solidFill>
-                      <a:srgbClr val="1E1E2E"/>
-                    </a:solidFill>
-                  </a:tcPr>
-                </a:tc>
-                <a:tc>
-                  <a:txBody>
-                    <a:bodyPr/>
-                    <a:lstStyle/>
-                    <a:p>
-                      <a:pPr algn="ctr">
-                        <a:defRPr sz="1100" b="0">
-                          <a:solidFill>
-                            <a:srgbClr val="CDD6F4"/>
-                          </a:solidFill>
-                          <a:latin typeface="Segoe UI"/>
-                        </a:defRPr>
-                      </a:pPr>
-                      <a:r>
-                        <a:rPr>
-                          <a:solidFill>
-                            <a:schemeClr val="bg1"/>
-                          </a:solidFill>
-                        </a:rPr>
-                        <a:t>50–200W</a:t>
-                      </a:r>
-                    </a:p>
-                  </a:txBody>
-                  <a:tcPr marL="73152" marR="73152" marT="36576" marB="36576">
-                    <a:solidFill>
-                      <a:srgbClr val="1E1E2E"/>
-                    </a:solidFill>
-                  </a:tcPr>
-                </a:tc>
-                <a:tc>
-                  <a:txBody>
-                    <a:bodyPr/>
-                    <a:lstStyle/>
-                    <a:p>
-                      <a:pPr algn="ctr">
-                        <a:defRPr sz="1100" b="0">
-                          <a:solidFill>
-                            <a:srgbClr val="CDD6F4"/>
-                          </a:solidFill>
-                          <a:latin typeface="Segoe UI"/>
-                        </a:defRPr>
-                      </a:pPr>
-                      <a:r>
-                        <a:rPr>
-                          <a:solidFill>
-                            <a:schemeClr val="bg1"/>
-                          </a:solidFill>
-                        </a:rPr>
-                        <a:t>300–700W</a:t>
-                      </a:r>
-                    </a:p>
-                  </a:txBody>
-                  <a:tcPr marL="73152" marR="73152" marT="36576" marB="36576">
-                    <a:solidFill>
-                      <a:srgbClr val="1E1E2E"/>
-                    </a:solidFill>
-                  </a:tcPr>
-                </a:tc>
-                <a:tc>
-                  <a:txBody>
-                    <a:bodyPr/>
-                    <a:lstStyle/>
-                    <a:p>
-                      <a:pPr algn="ctr">
-                        <a:defRPr sz="1100" b="0">
-                          <a:solidFill>
-                            <a:srgbClr val="CDD6F4"/>
-                          </a:solidFill>
-                          <a:latin typeface="Segoe UI"/>
-                        </a:defRPr>
-                      </a:pPr>
-                      <a:r>
-                        <a:rPr>
-                          <a:solidFill>
-                            <a:schemeClr val="bg1"/>
-                          </a:solidFill>
-                        </a:rPr>
-                        <a:t>10–50W</a:t>
-                      </a:r>
-                    </a:p>
-                  </a:txBody>
-                  <a:tcPr marL="73152" marR="73152" marT="36576" marB="36576">
-                    <a:solidFill>
-                      <a:srgbClr val="1E1E2E"/>
-                    </a:solidFill>
-                  </a:tcPr>
-                </a:tc>
-                <a:extLst>
-                  <a:ext uri="{0D108BD9-81ED-4DB2-BD59-A6C34878D82A}">
-                    <a16:rowId xmlns:a16="http://schemas.microsoft.com/office/drawing/2014/main" val="10005"/>
-                  </a:ext>
-                </a:extLst>
-              </a:tr>
-              <a:tr h="339636">
-                <a:tc>
-                  <a:txBody>
-                    <a:bodyPr/>
-                    <a:lstStyle/>
-                    <a:p>
-                      <a:pPr algn="l">
-                        <a:defRPr sz="1100" b="0">
-                          <a:solidFill>
-                            <a:srgbClr val="CDD6F4"/>
-                          </a:solidFill>
-                          <a:latin typeface="Segoe UI"/>
-                        </a:defRPr>
-                      </a:pPr>
-                      <a:r>
-                        <a:rPr dirty="0">
-                          <a:solidFill>
-                            <a:schemeClr val="bg1"/>
-                          </a:solidFill>
-                        </a:rPr>
-                        <a:t>Latency</a:t>
-                      </a:r>
-                    </a:p>
-                  </a:txBody>
-                  <a:tcPr marL="73152" marR="73152" marT="36576" marB="36576">
-                    <a:solidFill>
-                      <a:srgbClr val="1A1A28"/>
-                    </a:solidFill>
-                  </a:tcPr>
-                </a:tc>
-                <a:tc>
-                  <a:txBody>
-                    <a:bodyPr/>
-                    <a:lstStyle/>
-                    <a:p>
-                      <a:pPr algn="ctr">
-                        <a:defRPr sz="1100" b="0">
-                          <a:solidFill>
-                            <a:srgbClr val="CDD6F4"/>
-                          </a:solidFill>
-                          <a:latin typeface="Segoe UI"/>
-                        </a:defRPr>
-                      </a:pPr>
-                      <a:r>
-                        <a:rPr>
-                          <a:solidFill>
-                            <a:schemeClr val="bg1"/>
-                          </a:solidFill>
-                        </a:rPr>
-                        <a:t>10.6 ns</a:t>
-                      </a:r>
-                    </a:p>
-                  </a:txBody>
-                  <a:tcPr marL="73152" marR="73152" marT="36576" marB="36576">
-                    <a:solidFill>
-                      <a:srgbClr val="1A1A28"/>
-                    </a:solidFill>
-                  </a:tcPr>
-                </a:tc>
-                <a:tc>
-                  <a:txBody>
-                    <a:bodyPr/>
-                    <a:lstStyle/>
-                    <a:p>
-                      <a:pPr algn="ctr">
-                        <a:defRPr sz="1100" b="0">
-                          <a:solidFill>
-                            <a:srgbClr val="CDD6F4"/>
-                          </a:solidFill>
-                          <a:latin typeface="Segoe UI"/>
-                        </a:defRPr>
-                      </a:pPr>
-                      <a:r>
-                        <a:rPr>
-                          <a:solidFill>
-                            <a:schemeClr val="bg1"/>
-                          </a:solidFill>
-                        </a:rPr>
-                        <a:t>ms-scale</a:t>
-                      </a:r>
-                    </a:p>
-                  </a:txBody>
-                  <a:tcPr marL="73152" marR="73152" marT="36576" marB="36576">
-                    <a:solidFill>
-                      <a:srgbClr val="1A1A28"/>
-                    </a:solidFill>
-                  </a:tcPr>
-                </a:tc>
-                <a:tc>
-                  <a:txBody>
-                    <a:bodyPr/>
-                    <a:lstStyle/>
-                    <a:p>
-                      <a:pPr algn="ctr">
-                        <a:defRPr sz="1100" b="0">
-                          <a:solidFill>
-                            <a:srgbClr val="CDD6F4"/>
-                          </a:solidFill>
-                          <a:latin typeface="Segoe UI"/>
-                        </a:defRPr>
-                      </a:pPr>
-                      <a:r>
-                        <a:rPr>
-                          <a:solidFill>
-                            <a:schemeClr val="bg1"/>
-                          </a:solidFill>
-                        </a:rPr>
-                        <a:t>ms-scale</a:t>
-                      </a:r>
-                    </a:p>
-                  </a:txBody>
-                  <a:tcPr marL="73152" marR="73152" marT="36576" marB="36576">
-                    <a:solidFill>
-                      <a:srgbClr val="1A1A28"/>
-                    </a:solidFill>
-                  </a:tcPr>
-                </a:tc>
-                <a:tc>
-                  <a:txBody>
-                    <a:bodyPr/>
-                    <a:lstStyle/>
-                    <a:p>
-                      <a:pPr algn="ctr">
-                        <a:defRPr sz="1100" b="0">
-                          <a:solidFill>
-                            <a:srgbClr val="CDD6F4"/>
-                          </a:solidFill>
-                          <a:latin typeface="Segoe UI"/>
-                        </a:defRPr>
-                      </a:pPr>
-                      <a:r>
-                        <a:rPr>
-                          <a:solidFill>
-                            <a:schemeClr val="bg1"/>
-                          </a:solidFill>
-                        </a:rPr>
-                        <a:t>µs-scale</a:t>
-                      </a:r>
-                    </a:p>
-                  </a:txBody>
-                  <a:tcPr marL="73152" marR="73152" marT="36576" marB="36576">
-                    <a:solidFill>
-                      <a:srgbClr val="1A1A28"/>
-                    </a:solidFill>
-                  </a:tcPr>
-                </a:tc>
-                <a:tc>
-                  <a:txBody>
-                    <a:bodyPr/>
-                    <a:lstStyle/>
-                    <a:p>
-                      <a:pPr algn="ctr">
-                        <a:defRPr sz="1100" b="0">
-                          <a:solidFill>
-                            <a:srgbClr val="CDD6F4"/>
-                          </a:solidFill>
-                          <a:latin typeface="Segoe UI"/>
-                        </a:defRPr>
-                      </a:pPr>
-                      <a:r>
-                        <a:rPr dirty="0">
-                          <a:solidFill>
-                            <a:schemeClr val="bg1"/>
-                          </a:solidFill>
-                        </a:rPr>
-                        <a:t>ns-scale</a:t>
-                      </a:r>
-                    </a:p>
-                  </a:txBody>
-                  <a:tcPr marL="73152" marR="73152" marT="36576" marB="36576">
-                    <a:solidFill>
-                      <a:srgbClr val="1A1A28"/>
-                    </a:solidFill>
-                  </a:tcPr>
-                </a:tc>
-                <a:extLst>
-                  <a:ext uri="{0D108BD9-81ED-4DB2-BD59-A6C34878D82A}">
                     <a16:rowId xmlns:a16="http://schemas.microsoft.com/office/drawing/2014/main" val="10006"/>
                   </a:ext>
                 </a:extLst>
@@ -9659,7 +6876,7 @@
         </p:nvSpPr>
         <p:spPr>
           <a:xfrm>
-            <a:off x="731520" y="3977639"/>
+            <a:off x="721874" y="4228424"/>
             <a:ext cx="5486400" cy="365760"/>
           </a:xfrm>
           <a:prstGeom prst="rect">
@@ -9689,7 +6906,7 @@
                 </a:solidFill>
                 <a:latin typeface="Segoe UI"/>
               </a:rPr>
-              <a:t>Market Comparables</a:t>
+              <a:t>Market Comparables (licensing model reference)</a:t>
             </a:r>
           </a:p>
         </p:txBody>
@@ -9703,14 +6920,14 @@
           <p:nvPr>
             <p:extLst>
               <p:ext uri="{D42A27DB-BD31-4B8C-83A1-F6EECF244321}">
-                <p14:modId xmlns:p14="http://schemas.microsoft.com/office/powerpoint/2010/main" val="1767320888"/>
+                <p14:modId xmlns:p14="http://schemas.microsoft.com/office/powerpoint/2010/main" val="4170730462"/>
               </p:ext>
             </p:extLst>
           </p:nvPr>
         </p:nvGraphicFramePr>
         <p:xfrm>
-          <a:off x="731520" y="4297680"/>
-          <a:ext cx="10515600" cy="2286000"/>
+          <a:off x="721874" y="4615984"/>
+          <a:ext cx="10515600" cy="1036203"/>
         </p:xfrm>
         <a:graphic>
           <a:graphicData uri="http://schemas.openxmlformats.org/drawingml/2006/table">
@@ -9748,7 +6965,7 @@
                   </a:extLst>
                 </a:gridCol>
               </a:tblGrid>
-              <a:tr h="326571">
+              <a:tr h="345401">
                 <a:tc>
                   <a:txBody>
                     <a:bodyPr/>
@@ -9763,6 +6980,7 @@
                         </a:defRPr>
                       </a:pPr>
                       <a:r>
+                        <a:rPr dirty="0"/>
                         <a:t>Company</a:t>
                       </a:r>
                     </a:p>
@@ -9787,6 +7005,7 @@
                         </a:defRPr>
                       </a:pPr>
                       <a:r>
+                        <a:rPr dirty="0"/>
                         <a:t>Valuation / Revenue</a:t>
                       </a:r>
                     </a:p>
@@ -9811,6 +7030,7 @@
                         </a:defRPr>
                       </a:pPr>
                       <a:r>
+                        <a:rPr dirty="0"/>
                         <a:t>Model</a:t>
                       </a:r>
                     </a:p>
@@ -9835,6 +7055,7 @@
                         </a:defRPr>
                       </a:pPr>
                       <a:r>
+                        <a:rPr dirty="0"/>
                         <a:t>Source</a:t>
                       </a:r>
                     </a:p>
@@ -9851,7 +7072,7 @@
                   </a:ext>
                 </a:extLst>
               </a:tr>
-              <a:tr h="326571">
+              <a:tr h="345401">
                 <a:tc>
                   <a:txBody>
                     <a:bodyPr/>
@@ -9866,7 +7087,7 @@
                         </a:defRPr>
                       </a:pPr>
                       <a:r>
-                        <a:rPr>
+                        <a:rPr dirty="0">
                           <a:solidFill>
                             <a:schemeClr val="bg1"/>
                           </a:solidFill>
@@ -9895,7 +7116,7 @@
                         </a:defRPr>
                       </a:pPr>
                       <a:r>
-                        <a:rPr>
+                        <a:rPr dirty="0">
                           <a:solidFill>
                             <a:schemeClr val="bg1"/>
                           </a:solidFill>
@@ -9924,7 +7145,7 @@
                         </a:defRPr>
                       </a:pPr>
                       <a:r>
-                        <a:rPr>
+                        <a:rPr dirty="0">
                           <a:solidFill>
                             <a:schemeClr val="bg1"/>
                           </a:solidFill>
@@ -9953,7 +7174,7 @@
                         </a:defRPr>
                       </a:pPr>
                       <a:r>
-                        <a:rPr>
+                        <a:rPr dirty="0">
                           <a:solidFill>
                             <a:schemeClr val="bg1"/>
                           </a:solidFill>
@@ -9974,7 +7195,7 @@
                   </a:ext>
                 </a:extLst>
               </a:tr>
-              <a:tr h="326571">
+              <a:tr h="345401">
                 <a:tc>
                   <a:txBody>
                     <a:bodyPr/>
@@ -9989,135 +7210,12 @@
                         </a:defRPr>
                       </a:pPr>
                       <a:r>
-                        <a:rPr>
+                        <a:rPr err="1">
                           <a:solidFill>
                             <a:schemeClr val="bg1"/>
                           </a:solidFill>
                         </a:rPr>
-                        <a:t>Lattice Semi</a:t>
-                      </a:r>
-                    </a:p>
-                  </a:txBody>
-                  <a:tcPr marL="73152" marR="73152" marT="36576" marB="36576">
-                    <a:solidFill>
-                      <a:srgbClr val="1A1A28"/>
-                    </a:solidFill>
-                  </a:tcPr>
-                </a:tc>
-                <a:tc>
-                  <a:txBody>
-                    <a:bodyPr/>
-                    <a:lstStyle/>
-                    <a:p>
-                      <a:pPr algn="ctr">
-                        <a:defRPr sz="1100" b="0">
-                          <a:solidFill>
-                            <a:srgbClr val="CDD6F4"/>
-                          </a:solidFill>
-                          <a:latin typeface="Segoe UI"/>
-                        </a:defRPr>
-                      </a:pPr>
-                      <a:r>
-                        <a:rPr>
-                          <a:solidFill>
-                            <a:schemeClr val="bg1"/>
-                          </a:solidFill>
-                        </a:rPr>
-                        <a:t>$489M rev, 21.6× EV/Rev</a:t>
-                      </a:r>
-                    </a:p>
-                  </a:txBody>
-                  <a:tcPr marL="73152" marR="73152" marT="36576" marB="36576">
-                    <a:solidFill>
-                      <a:srgbClr val="1A1A28"/>
-                    </a:solidFill>
-                  </a:tcPr>
-                </a:tc>
-                <a:tc>
-                  <a:txBody>
-                    <a:bodyPr/>
-                    <a:lstStyle/>
-                    <a:p>
-                      <a:pPr algn="ctr">
-                        <a:defRPr sz="1100" b="0">
-                          <a:solidFill>
-                            <a:srgbClr val="CDD6F4"/>
-                          </a:solidFill>
-                          <a:latin typeface="Segoe UI"/>
-                        </a:defRPr>
-                      </a:pPr>
-                      <a:r>
-                        <a:rPr>
-                          <a:solidFill>
-                            <a:schemeClr val="bg1"/>
-                          </a:solidFill>
-                        </a:rPr>
-                        <a:t>Low-power FPGA</a:t>
-                      </a:r>
-                    </a:p>
-                  </a:txBody>
-                  <a:tcPr marL="73152" marR="73152" marT="36576" marB="36576">
-                    <a:solidFill>
-                      <a:srgbClr val="1A1A28"/>
-                    </a:solidFill>
-                  </a:tcPr>
-                </a:tc>
-                <a:tc>
-                  <a:txBody>
-                    <a:bodyPr/>
-                    <a:lstStyle/>
-                    <a:p>
-                      <a:pPr algn="ctr">
-                        <a:defRPr sz="1100" b="0">
-                          <a:solidFill>
-                            <a:srgbClr val="CDD6F4"/>
-                          </a:solidFill>
-                          <a:latin typeface="Segoe UI"/>
-                        </a:defRPr>
-                      </a:pPr>
-                      <a:r>
-                        <a:rPr>
-                          <a:solidFill>
-                            <a:schemeClr val="bg1"/>
-                          </a:solidFill>
-                        </a:rPr>
-                        <a:t>Earnings, 2025</a:t>
-                      </a:r>
-                    </a:p>
-                  </a:txBody>
-                  <a:tcPr marL="73152" marR="73152" marT="36576" marB="36576">
-                    <a:solidFill>
-                      <a:srgbClr val="1A1A28"/>
-                    </a:solidFill>
-                  </a:tcPr>
-                </a:tc>
-                <a:extLst>
-                  <a:ext uri="{0D108BD9-81ED-4DB2-BD59-A6C34878D82A}">
-                    <a16:rowId xmlns:a16="http://schemas.microsoft.com/office/drawing/2014/main" val="10002"/>
-                  </a:ext>
-                </a:extLst>
-              </a:tr>
-              <a:tr h="326571">
-                <a:tc>
-                  <a:txBody>
-                    <a:bodyPr/>
-                    <a:lstStyle/>
-                    <a:p>
-                      <a:pPr algn="l">
-                        <a:defRPr sz="1100" b="0">
-                          <a:solidFill>
-                            <a:srgbClr val="CDD6F4"/>
-                          </a:solidFill>
-                          <a:latin typeface="Segoe UI"/>
-                        </a:defRPr>
-                      </a:pPr>
-                      <a:r>
-                        <a:rPr>
-                          <a:solidFill>
-                            <a:schemeClr val="bg1"/>
-                          </a:solidFill>
-                        </a:rPr>
-                        <a:t>Cerebras</a:t>
+                        <a:t>CEVA</a:t>
                       </a:r>
                     </a:p>
                   </a:txBody>
@@ -10141,12 +7239,12 @@
                         </a:defRPr>
                       </a:pPr>
                       <a:r>
-                        <a:rPr>
+                        <a:rPr dirty="0">
                           <a:solidFill>
                             <a:schemeClr val="bg1"/>
                           </a:solidFill>
                         </a:rPr>
-                        <a:t>$8.1B valuation</a:t>
+                        <a:t>$118M rev, $2.2B mkt cap</a:t>
                       </a:r>
                     </a:p>
                   </a:txBody>
@@ -10170,12 +7268,12 @@
                         </a:defRPr>
                       </a:pPr>
                       <a:r>
-                        <a:rPr>
+                        <a:rPr dirty="0">
                           <a:solidFill>
                             <a:schemeClr val="bg1"/>
                           </a:solidFill>
                         </a:rPr>
-                        <a:t>AI chip hardware</a:t>
+                        <a:t>IP license + royalty</a:t>
                       </a:r>
                     </a:p>
                   </a:txBody>
@@ -10199,12 +7297,12 @@
                         </a:defRPr>
                       </a:pPr>
                       <a:r>
-                        <a:rPr>
+                        <a:rPr dirty="0">
                           <a:solidFill>
                             <a:schemeClr val="bg1"/>
                           </a:solidFill>
                         </a:rPr>
-                        <a:t>Crunchbase, Sep 2025</a:t>
+                        <a:t>SEC filing, 2025</a:t>
                       </a:r>
                     </a:p>
                   </a:txBody>
@@ -10217,375 +7315,6 @@
                 <a:extLst>
                   <a:ext uri="{0D108BD9-81ED-4DB2-BD59-A6C34878D82A}">
                     <a16:rowId xmlns:a16="http://schemas.microsoft.com/office/drawing/2014/main" val="10003"/>
-                  </a:ext>
-                </a:extLst>
-              </a:tr>
-              <a:tr h="326571">
-                <a:tc>
-                  <a:txBody>
-                    <a:bodyPr/>
-                    <a:lstStyle/>
-                    <a:p>
-                      <a:pPr algn="l">
-                        <a:defRPr sz="1100" b="0">
-                          <a:solidFill>
-                            <a:srgbClr val="CDD6F4"/>
-                          </a:solidFill>
-                          <a:latin typeface="Segoe UI"/>
-                        </a:defRPr>
-                      </a:pPr>
-                      <a:r>
-                        <a:rPr>
-                          <a:solidFill>
-                            <a:schemeClr val="bg1"/>
-                          </a:solidFill>
-                        </a:rPr>
-                        <a:t>Groq</a:t>
-                      </a:r>
-                    </a:p>
-                  </a:txBody>
-                  <a:tcPr marL="73152" marR="73152" marT="36576" marB="36576">
-                    <a:solidFill>
-                      <a:srgbClr val="1A1A28"/>
-                    </a:solidFill>
-                  </a:tcPr>
-                </a:tc>
-                <a:tc>
-                  <a:txBody>
-                    <a:bodyPr/>
-                    <a:lstStyle/>
-                    <a:p>
-                      <a:pPr algn="ctr">
-                        <a:defRPr sz="1100" b="0">
-                          <a:solidFill>
-                            <a:srgbClr val="CDD6F4"/>
-                          </a:solidFill>
-                          <a:latin typeface="Segoe UI"/>
-                        </a:defRPr>
-                      </a:pPr>
-                      <a:r>
-                        <a:rPr>
-                          <a:solidFill>
-                            <a:schemeClr val="bg1"/>
-                          </a:solidFill>
-                        </a:rPr>
-                        <a:t>$20B (NVIDIA acq.)</a:t>
-                      </a:r>
-                    </a:p>
-                  </a:txBody>
-                  <a:tcPr marL="73152" marR="73152" marT="36576" marB="36576">
-                    <a:solidFill>
-                      <a:srgbClr val="1A1A28"/>
-                    </a:solidFill>
-                  </a:tcPr>
-                </a:tc>
-                <a:tc>
-                  <a:txBody>
-                    <a:bodyPr/>
-                    <a:lstStyle/>
-                    <a:p>
-                      <a:pPr algn="ctr">
-                        <a:defRPr sz="1100" b="0">
-                          <a:solidFill>
-                            <a:srgbClr val="CDD6F4"/>
-                          </a:solidFill>
-                          <a:latin typeface="Segoe UI"/>
-                        </a:defRPr>
-                      </a:pPr>
-                      <a:r>
-                        <a:rPr>
-                          <a:solidFill>
-                            <a:schemeClr val="bg1"/>
-                          </a:solidFill>
-                        </a:rPr>
-                        <a:t>Inference accelerator</a:t>
-                      </a:r>
-                    </a:p>
-                  </a:txBody>
-                  <a:tcPr marL="73152" marR="73152" marT="36576" marB="36576">
-                    <a:solidFill>
-                      <a:srgbClr val="1A1A28"/>
-                    </a:solidFill>
-                  </a:tcPr>
-                </a:tc>
-                <a:tc>
-                  <a:txBody>
-                    <a:bodyPr/>
-                    <a:lstStyle/>
-                    <a:p>
-                      <a:pPr algn="ctr">
-                        <a:defRPr sz="1100" b="0">
-                          <a:solidFill>
-                            <a:srgbClr val="CDD6F4"/>
-                          </a:solidFill>
-                          <a:latin typeface="Segoe UI"/>
-                        </a:defRPr>
-                      </a:pPr>
-                      <a:r>
-                        <a:rPr>
-                          <a:solidFill>
-                            <a:schemeClr val="bg1"/>
-                          </a:solidFill>
-                        </a:rPr>
-                        <a:t>TechCrunch, Dec 2025</a:t>
-                      </a:r>
-                    </a:p>
-                  </a:txBody>
-                  <a:tcPr marL="73152" marR="73152" marT="36576" marB="36576">
-                    <a:solidFill>
-                      <a:srgbClr val="1A1A28"/>
-                    </a:solidFill>
-                  </a:tcPr>
-                </a:tc>
-                <a:extLst>
-                  <a:ext uri="{0D108BD9-81ED-4DB2-BD59-A6C34878D82A}">
-                    <a16:rowId xmlns:a16="http://schemas.microsoft.com/office/drawing/2014/main" val="10004"/>
-                  </a:ext>
-                </a:extLst>
-              </a:tr>
-              <a:tr h="326571">
-                <a:tc>
-                  <a:txBody>
-                    <a:bodyPr/>
-                    <a:lstStyle/>
-                    <a:p>
-                      <a:pPr algn="l">
-                        <a:defRPr sz="1100" b="0">
-                          <a:solidFill>
-                            <a:srgbClr val="CDD6F4"/>
-                          </a:solidFill>
-                          <a:latin typeface="Segoe UI"/>
-                        </a:defRPr>
-                      </a:pPr>
-                      <a:r>
-                        <a:rPr>
-                          <a:solidFill>
-                            <a:schemeClr val="bg1"/>
-                          </a:solidFill>
-                        </a:rPr>
-                        <a:t>Tenstorrent</a:t>
-                      </a:r>
-                    </a:p>
-                  </a:txBody>
-                  <a:tcPr marL="73152" marR="73152" marT="36576" marB="36576">
-                    <a:solidFill>
-                      <a:srgbClr val="1E1E2E"/>
-                    </a:solidFill>
-                  </a:tcPr>
-                </a:tc>
-                <a:tc>
-                  <a:txBody>
-                    <a:bodyPr/>
-                    <a:lstStyle/>
-                    <a:p>
-                      <a:pPr algn="ctr">
-                        <a:defRPr sz="1100" b="0">
-                          <a:solidFill>
-                            <a:srgbClr val="CDD6F4"/>
-                          </a:solidFill>
-                          <a:latin typeface="Segoe UI"/>
-                        </a:defRPr>
-                      </a:pPr>
-                      <a:r>
-                        <a:rPr>
-                          <a:solidFill>
-                            <a:schemeClr val="bg1"/>
-                          </a:solidFill>
-                        </a:rPr>
-                        <a:t>$2.6B valuation</a:t>
-                      </a:r>
-                    </a:p>
-                  </a:txBody>
-                  <a:tcPr marL="73152" marR="73152" marT="36576" marB="36576">
-                    <a:solidFill>
-                      <a:srgbClr val="1E1E2E"/>
-                    </a:solidFill>
-                  </a:tcPr>
-                </a:tc>
-                <a:tc>
-                  <a:txBody>
-                    <a:bodyPr/>
-                    <a:lstStyle/>
-                    <a:p>
-                      <a:pPr algn="ctr">
-                        <a:defRPr sz="1100" b="0">
-                          <a:solidFill>
-                            <a:srgbClr val="CDD6F4"/>
-                          </a:solidFill>
-                          <a:latin typeface="Segoe UI"/>
-                        </a:defRPr>
-                      </a:pPr>
-                      <a:r>
-                        <a:rPr>
-                          <a:solidFill>
-                            <a:schemeClr val="bg1"/>
-                          </a:solidFill>
-                        </a:rPr>
-                        <a:t>RISC-V AI accelerator</a:t>
-                      </a:r>
-                    </a:p>
-                  </a:txBody>
-                  <a:tcPr marL="73152" marR="73152" marT="36576" marB="36576">
-                    <a:solidFill>
-                      <a:srgbClr val="1E1E2E"/>
-                    </a:solidFill>
-                  </a:tcPr>
-                </a:tc>
-                <a:tc>
-                  <a:txBody>
-                    <a:bodyPr/>
-                    <a:lstStyle/>
-                    <a:p>
-                      <a:pPr algn="ctr">
-                        <a:defRPr sz="1100" b="0">
-                          <a:solidFill>
-                            <a:srgbClr val="CDD6F4"/>
-                          </a:solidFill>
-                          <a:latin typeface="Segoe UI"/>
-                        </a:defRPr>
-                      </a:pPr>
-                      <a:r>
-                        <a:rPr>
-                          <a:solidFill>
-                            <a:schemeClr val="bg1"/>
-                          </a:solidFill>
-                        </a:rPr>
-                        <a:t>Fortune, Dec 2024</a:t>
-                      </a:r>
-                    </a:p>
-                  </a:txBody>
-                  <a:tcPr marL="73152" marR="73152" marT="36576" marB="36576">
-                    <a:solidFill>
-                      <a:srgbClr val="1E1E2E"/>
-                    </a:solidFill>
-                  </a:tcPr>
-                </a:tc>
-                <a:extLst>
-                  <a:ext uri="{0D108BD9-81ED-4DB2-BD59-A6C34878D82A}">
-                    <a16:rowId xmlns:a16="http://schemas.microsoft.com/office/drawing/2014/main" val="10005"/>
-                  </a:ext>
-                </a:extLst>
-              </a:tr>
-              <a:tr h="326574">
-                <a:tc>
-                  <a:txBody>
-                    <a:bodyPr/>
-                    <a:lstStyle/>
-                    <a:p>
-                      <a:pPr algn="l">
-                        <a:defRPr sz="1100" b="0">
-                          <a:solidFill>
-                            <a:srgbClr val="CDD6F4"/>
-                          </a:solidFill>
-                          <a:latin typeface="Segoe UI"/>
-                        </a:defRPr>
-                      </a:pPr>
-                      <a:r>
-                        <a:rPr dirty="0">
-                          <a:solidFill>
-                            <a:schemeClr val="bg1"/>
-                          </a:solidFill>
-                        </a:rPr>
-                        <a:t>Positron AI</a:t>
-                      </a:r>
-                    </a:p>
-                  </a:txBody>
-                  <a:tcPr marL="73152" marR="73152" marT="36576" marB="36576">
-                    <a:solidFill>
-                      <a:srgbClr val="1A1A28"/>
-                    </a:solidFill>
-                  </a:tcPr>
-                </a:tc>
-                <a:tc>
-                  <a:txBody>
-                    <a:bodyPr/>
-                    <a:lstStyle/>
-                    <a:p>
-                      <a:pPr algn="ctr">
-                        <a:defRPr sz="1100" b="0">
-                          <a:solidFill>
-                            <a:srgbClr val="CDD6F4"/>
-                          </a:solidFill>
-                          <a:latin typeface="Segoe UI"/>
-                        </a:defRPr>
-                      </a:pPr>
-                      <a:r>
-                        <a:rPr>
-                          <a:solidFill>
-                            <a:schemeClr val="bg1"/>
-                          </a:solidFill>
-                        </a:rPr>
-                        <a:t>$51.6M Series A</a:t>
-                      </a:r>
-                    </a:p>
-                  </a:txBody>
-                  <a:tcPr marL="73152" marR="73152" marT="36576" marB="36576">
-                    <a:solidFill>
-                      <a:srgbClr val="1A1A28"/>
-                    </a:solidFill>
-                  </a:tcPr>
-                </a:tc>
-                <a:tc>
-                  <a:txBody>
-                    <a:bodyPr/>
-                    <a:lstStyle/>
-                    <a:p>
-                      <a:pPr algn="ctr">
-                        <a:defRPr sz="1100" b="0">
-                          <a:solidFill>
-                            <a:srgbClr val="CDD6F4"/>
-                          </a:solidFill>
-                          <a:latin typeface="Segoe UI"/>
-                        </a:defRPr>
-                      </a:pPr>
-                      <a:r>
-                        <a:rPr>
-                          <a:solidFill>
-                            <a:schemeClr val="bg1"/>
-                          </a:solidFill>
-                        </a:rPr>
-                        <a:t>FPGA inference</a:t>
-                      </a:r>
-                    </a:p>
-                  </a:txBody>
-                  <a:tcPr marL="73152" marR="73152" marT="36576" marB="36576">
-                    <a:solidFill>
-                      <a:srgbClr val="1A1A28"/>
-                    </a:solidFill>
-                  </a:tcPr>
-                </a:tc>
-                <a:tc>
-                  <a:txBody>
-                    <a:bodyPr/>
-                    <a:lstStyle/>
-                    <a:p>
-                      <a:pPr algn="ctr">
-                        <a:defRPr sz="1100" b="0">
-                          <a:solidFill>
-                            <a:srgbClr val="CDD6F4"/>
-                          </a:solidFill>
-                          <a:latin typeface="Segoe UI"/>
-                        </a:defRPr>
-                      </a:pPr>
-                      <a:r>
-                        <a:rPr dirty="0">
-                          <a:solidFill>
-                            <a:schemeClr val="bg1"/>
-                          </a:solidFill>
-                        </a:rPr>
-                        <a:t>Crunchbase, 2025</a:t>
-                      </a:r>
-                    </a:p>
-                  </a:txBody>
-                  <a:tcPr marL="73152" marR="73152" marT="36576" marB="36576">
-                    <a:solidFill>
-                      <a:srgbClr val="1A1A28"/>
-                    </a:solidFill>
-                  </a:tcPr>
-                </a:tc>
-                <a:extLst>
-                  <a:ext uri="{0D108BD9-81ED-4DB2-BD59-A6C34878D82A}">
-                    <a16:rowId xmlns:a16="http://schemas.microsoft.com/office/drawing/2014/main" val="10006"/>
                   </a:ext>
                 </a:extLst>
               </a:tr>
@@ -12673,7 +9402,7 @@
                 </a:solidFill>
                 <a:latin typeface="Segoe UI"/>
               </a:rPr>
-              <a:t>Larger FPGA</a:t>
+              <a:t>Zynq Validation</a:t>
             </a:r>
           </a:p>
         </p:txBody>
@@ -12716,8 +9445,29 @@
                 </a:solidFill>
                 <a:latin typeface="Segoe UI"/>
               </a:rPr>
-              <a:t>N=64+ banks
-&gt;4 Gops/s target</a:t>
+              <a:t>Physical Zynq-7020</a:t>
+            </a:r>
+          </a:p>
+          <a:p>
+            <a:pPr algn="ctr">
+              <a:lnSpc>
+                <a:spcPts val="1200"/>
+              </a:lnSpc>
+              <a:spcBef>
+                <a:spcPts val="0"/>
+              </a:spcBef>
+              <a:spcAft>
+                <a:spcPts val="0"/>
+              </a:spcAft>
+            </a:pPr>
+            <a:r>
+              <a:rPr sz="1000" b="0" dirty="0">
+                <a:solidFill>
+                  <a:schemeClr val="bg1"/>
+                </a:solidFill>
+                <a:latin typeface="Segoe UI"/>
+              </a:rPr>
+              <a:t>validation + N=32+</a:t>
             </a:r>
           </a:p>
         </p:txBody>
@@ -12893,8 +9643,29 @@
                 </a:solidFill>
                 <a:latin typeface="Segoe UI"/>
               </a:rPr>
-              <a:t>HFT, sensor,
-streaming packages</a:t>
+              <a:t>Sensor fusion,</a:t>
+            </a:r>
+          </a:p>
+          <a:p>
+            <a:pPr algn="ctr">
+              <a:lnSpc>
+                <a:spcPts val="1200"/>
+              </a:lnSpc>
+              <a:spcBef>
+                <a:spcPts val="0"/>
+              </a:spcBef>
+              <a:spcAft>
+                <a:spcPts val="0"/>
+              </a:spcAft>
+            </a:pPr>
+            <a:r>
+              <a:rPr sz="1000" b="0">
+                <a:solidFill>
+                  <a:schemeClr val="bg1"/>
+                </a:solidFill>
+                <a:latin typeface="Segoe UI"/>
+              </a:rPr>
+              <a:t>industrial packages</a:t>
             </a:r>
           </a:p>
         </p:txBody>
@@ -13069,8 +9840,29 @@
                 </a:solidFill>
                 <a:latin typeface="Segoe UI"/>
               </a:rPr>
-              <a:t>Foundry partner
-28nm estimates</a:t>
+              <a:t>$150K–$300K study</a:t>
+            </a:r>
+          </a:p>
+          <a:p>
+            <a:pPr algn="ctr">
+              <a:lnSpc>
+                <a:spcPts val="1200"/>
+              </a:lnSpc>
+              <a:spcBef>
+                <a:spcPts val="0"/>
+              </a:spcBef>
+              <a:spcAft>
+                <a:spcPts val="0"/>
+              </a:spcAft>
+            </a:pPr>
+            <a:r>
+              <a:rPr sz="1000" b="0">
+                <a:solidFill>
+                  <a:schemeClr val="bg1"/>
+                </a:solidFill>
+                <a:latin typeface="Segoe UI"/>
+              </a:rPr>
+              <a:t>go/no-go gates</a:t>
             </a:r>
           </a:p>
         </p:txBody>
@@ -13202,8 +9994,7 @@
                 </a:solidFill>
                 <a:latin typeface="Segoe UI"/>
               </a:rPr>
-              <a:t>Pilot Design
-Wins</a:t>
+              <a:t>Paid Pilots</a:t>
             </a:r>
           </a:p>
         </p:txBody>
@@ -13246,8 +10037,29 @@
                 </a:solidFill>
                 <a:latin typeface="Segoe UI"/>
               </a:rPr>
-              <a:t>2–3 revenue
-customers</a:t>
+              <a:t>2–3 edge embedded</a:t>
+            </a:r>
+          </a:p>
+          <a:p>
+            <a:pPr algn="ctr">
+              <a:lnSpc>
+                <a:spcPts val="1200"/>
+              </a:lnSpc>
+              <a:spcBef>
+                <a:spcPts val="0"/>
+              </a:spcBef>
+              <a:spcAft>
+                <a:spcPts val="0"/>
+              </a:spcAft>
+            </a:pPr>
+            <a:r>
+              <a:rPr sz="1000" b="0">
+                <a:solidFill>
+                  <a:schemeClr val="bg1"/>
+                </a:solidFill>
+                <a:latin typeface="Segoe UI"/>
+              </a:rPr>
+              <a:t>$50K–$200K NRE</a:t>
             </a:r>
           </a:p>
         </p:txBody>
@@ -13333,7 +10145,7 @@
                 </a:solidFill>
                 <a:latin typeface="Segoe UI"/>
               </a:rPr>
-              <a:t>Larger FPGA = Low</a:t>
+              <a:t>Zynq Validation = Low</a:t>
             </a:r>
           </a:p>
         </p:txBody>
@@ -13845,7 +10657,7 @@
                 </a:solidFill>
                 <a:latin typeface="Segoe UI"/>
               </a:rPr>
-              <a:t>Solo founder + AI-augmented development model.</a:t>
+              <a:t>Solo founder. AI-augmented R&amp;D compressed the timeline.</a:t>
             </a:r>
           </a:p>
         </p:txBody>
@@ -13890,6 +10702,7 @@
           <a:lstStyle/>
           <a:p>
             <a:pPr algn="ctr"/>
+            <a:endParaRPr/>
           </a:p>
         </p:txBody>
       </p:sp>
@@ -13933,6 +10746,7 @@
           <a:lstStyle/>
           <a:p>
             <a:pPr algn="ctr"/>
+            <a:endParaRPr/>
           </a:p>
         </p:txBody>
       </p:sp>
@@ -13979,7 +10793,7 @@
         </p:nvSpPr>
         <p:spPr>
           <a:xfrm>
-            <a:off x="900000" y="1900000"/>
+            <a:off x="900000" y="1948228"/>
             <a:ext cx="4600000" cy="300000"/>
           </a:xfrm>
           <a:prstGeom prst="rect">
@@ -14221,6 +11035,7 @@
           <a:lstStyle/>
           <a:p>
             <a:pPr algn="ctr"/>
+            <a:endParaRPr/>
           </a:p>
         </p:txBody>
       </p:sp>
@@ -14254,7 +11069,7 @@
                 </a:solidFill>
                 <a:latin typeface="Segoe UI"/>
               </a:rPr>
-              <a:t>AI-Augmented Development</a:t>
+              <a:t>Post-Funding Plan</a:t>
             </a:r>
           </a:p>
         </p:txBody>
@@ -14267,7 +11082,7 @@
         </p:nvSpPr>
         <p:spPr>
           <a:xfrm>
-            <a:off x="6300000" y="2050000"/>
+            <a:off x="6319291" y="2271848"/>
             <a:ext cx="1800000" cy="200000"/>
           </a:xfrm>
           <a:prstGeom prst="rect">
@@ -14289,7 +11104,7 @@
                 </a:solidFill>
                 <a:latin typeface="Segoe UI"/>
               </a:rPr>
-              <a:t>Development cost</a:t>
+              <a:t>Founder</a:t>
             </a:r>
           </a:p>
         </p:txBody>
@@ -14302,8 +11117,8 @@
         </p:nvSpPr>
         <p:spPr>
           <a:xfrm>
-            <a:off x="8100000" y="2050000"/>
-            <a:ext cx="1500000" cy="200000"/>
+            <a:off x="8119291" y="2271848"/>
+            <a:ext cx="3200000" cy="200000"/>
           </a:xfrm>
           <a:prstGeom prst="rect">
             <a:avLst/>
@@ -14324,7 +11139,7 @@
                 </a:solidFill>
                 <a:latin typeface="Segoe UI"/>
               </a:rPr>
-              <a:t>$2–5M typical</a:t>
+              <a:t>Formal math + hardware + software stack</a:t>
             </a:r>
           </a:p>
         </p:txBody>
@@ -14337,7 +11152,7 @@
         </p:nvSpPr>
         <p:spPr>
           <a:xfrm>
-            <a:off x="9700000" y="2050000"/>
+            <a:off x="-5000000" y="-5000000"/>
             <a:ext cx="1500000" cy="200000"/>
           </a:xfrm>
           <a:prstGeom prst="rect">
@@ -14359,7 +11174,7 @@
                 </a:solidFill>
                 <a:latin typeface="Segoe UI"/>
               </a:rPr>
-              <a:t>~$225 total</a:t>
+              <a:t/>
             </a:r>
           </a:p>
         </p:txBody>
@@ -14372,7 +11187,7 @@
         </p:nvSpPr>
         <p:spPr>
           <a:xfrm>
-            <a:off x="6300000" y="2550000"/>
+            <a:off x="6319291" y="2771848"/>
             <a:ext cx="1800000" cy="200000"/>
           </a:xfrm>
           <a:prstGeom prst="rect">
@@ -14394,7 +11209,7 @@
                 </a:solidFill>
                 <a:latin typeface="Segoe UI"/>
               </a:rPr>
-              <a:t>Team size</a:t>
+              <a:t>First Hires</a:t>
             </a:r>
           </a:p>
         </p:txBody>
@@ -14407,8 +11222,8 @@
         </p:nvSpPr>
         <p:spPr>
           <a:xfrm>
-            <a:off x="8100000" y="2550000"/>
-            <a:ext cx="1500000" cy="200000"/>
+            <a:off x="8119291" y="2771848"/>
+            <a:ext cx="3200000" cy="200000"/>
           </a:xfrm>
           <a:prstGeom prst="rect">
             <a:avLst/>
@@ -14429,7 +11244,7 @@
                 </a:solidFill>
                 <a:latin typeface="Segoe UI"/>
               </a:rPr>
-              <a:t>5–10 engineers</a:t>
+              <a:t>FPGA/ASIC engineer + application engineer</a:t>
             </a:r>
           </a:p>
         </p:txBody>
@@ -14442,7 +11257,7 @@
         </p:nvSpPr>
         <p:spPr>
           <a:xfrm>
-            <a:off x="9700000" y="2550000"/>
+            <a:off x="-5000000" y="-5000000"/>
             <a:ext cx="1500000" cy="200000"/>
           </a:xfrm>
           <a:prstGeom prst="rect">
@@ -14464,7 +11279,7 @@
                 </a:solidFill>
                 <a:latin typeface="Segoe UI"/>
               </a:rPr>
-              <a:t>1 founder + AI</a:t>
+              <a:t/>
             </a:r>
           </a:p>
         </p:txBody>
@@ -14477,7 +11292,7 @@
         </p:nvSpPr>
         <p:spPr>
           <a:xfrm>
-            <a:off x="6300000" y="3050000"/>
+            <a:off x="6319291" y="3271848"/>
             <a:ext cx="1800000" cy="200000"/>
           </a:xfrm>
           <a:prstGeom prst="rect">
@@ -14499,7 +11314,7 @@
                 </a:solidFill>
                 <a:latin typeface="Segoe UI"/>
               </a:rPr>
-              <a:t>Time to PoC</a:t>
+              <a:t>Advisory Targets</a:t>
             </a:r>
           </a:p>
         </p:txBody>
@@ -14512,8 +11327,8 @@
         </p:nvSpPr>
         <p:spPr>
           <a:xfrm>
-            <a:off x="8100000" y="3050000"/>
-            <a:ext cx="1500000" cy="200000"/>
+            <a:off x="8119291" y="3271848"/>
+            <a:ext cx="3200000" cy="200000"/>
           </a:xfrm>
           <a:prstGeom prst="rect">
             <a:avLst/>
@@ -14534,7 +11349,7 @@
                 </a:solidFill>
                 <a:latin typeface="Segoe UI"/>
               </a:rPr>
-              <a:t>12–18 months</a:t>
+              <a:t>Semiconductor, IP licensing, domain experts</a:t>
             </a:r>
           </a:p>
         </p:txBody>
@@ -14547,7 +11362,7 @@
         </p:nvSpPr>
         <p:spPr>
           <a:xfrm>
-            <a:off x="9700000" y="3050000"/>
+            <a:off x="-5000000" y="-5000000"/>
             <a:ext cx="1500000" cy="200000"/>
           </a:xfrm>
           <a:prstGeom prst="rect">
@@ -14569,7 +11384,7 @@
                 </a:solidFill>
                 <a:latin typeface="Segoe UI"/>
               </a:rPr>
-              <a:t>~7 days</a:t>
+              <a:t/>
             </a:r>
           </a:p>
         </p:txBody>
@@ -14582,7 +11397,7 @@
         </p:nvSpPr>
         <p:spPr>
           <a:xfrm>
-            <a:off x="6300000" y="3550000"/>
+            <a:off x="6319291" y="3771848"/>
             <a:ext cx="1800000" cy="200000"/>
           </a:xfrm>
           <a:prstGeom prst="rect">
@@ -14604,7 +11419,7 @@
                 </a:solidFill>
                 <a:latin typeface="Segoe UI"/>
               </a:rPr>
-              <a:t>Proof engineering</a:t>
+              <a:t>Timeline</a:t>
             </a:r>
           </a:p>
         </p:txBody>
@@ -14617,8 +11432,8 @@
         </p:nvSpPr>
         <p:spPr>
           <a:xfrm>
-            <a:off x="8100000" y="3550000"/>
-            <a:ext cx="1500000" cy="200000"/>
+            <a:off x="8119291" y="3771848"/>
+            <a:ext cx="3200000" cy="200000"/>
           </a:xfrm>
           <a:prstGeom prst="rect">
             <a:avLst/>
@@ -14639,7 +11454,7 @@
                 </a:solidFill>
                 <a:latin typeface="Segoe UI"/>
               </a:rPr>
-              <a:t>Months per proof</a:t>
+              <a:t>Hires month 3–6, advisors within 60 days</a:t>
             </a:r>
           </a:p>
         </p:txBody>
@@ -14652,7 +11467,7 @@
         </p:nvSpPr>
         <p:spPr>
           <a:xfrm>
-            <a:off x="9700000" y="3550000"/>
+            <a:off x="-5000000" y="-5000000"/>
             <a:ext cx="1500000" cy="200000"/>
           </a:xfrm>
           <a:prstGeom prst="rect">
@@ -14674,7 +11489,7 @@
                 </a:solidFill>
                 <a:latin typeface="Segoe UI"/>
               </a:rPr>
-              <a:t>92 in single sprint</a:t>
+              <a:t/>
             </a:r>
           </a:p>
         </p:txBody>
@@ -14687,7 +11502,7 @@
         </p:nvSpPr>
         <p:spPr>
           <a:xfrm>
-            <a:off x="8100000" y="1900000"/>
+            <a:off x="-5000000" y="-5000000"/>
             <a:ext cx="1500000" cy="200000"/>
           </a:xfrm>
           <a:prstGeom prst="rect">
@@ -14709,7 +11524,7 @@
                 </a:solidFill>
                 <a:latin typeface="Segoe UI"/>
               </a:rPr>
-              <a:t>Traditional</a:t>
+              <a:t/>
             </a:r>
           </a:p>
         </p:txBody>
@@ -14722,7 +11537,7 @@
         </p:nvSpPr>
         <p:spPr>
           <a:xfrm>
-            <a:off x="9700000" y="1900000"/>
+            <a:off x="-5000000" y="-5000000"/>
             <a:ext cx="1500000" cy="200000"/>
           </a:xfrm>
           <a:prstGeom prst="rect">
@@ -14744,7 +11559,7 @@
                 </a:solidFill>
                 <a:latin typeface="Segoe UI"/>
               </a:rPr>
-              <a:t>ATOMiK</a:t>
+              <a:t/>
             </a:r>
           </a:p>
         </p:txBody>
@@ -14779,7 +11594,7 @@
                 </a:solidFill>
                 <a:latin typeface="Segoe UI"/>
               </a:rPr>
-              <a:t>Post-Funding Team Expansion</a:t>
+              <a:t>First Two Hires + Advisory Board (60-Day Target)</a:t>
             </a:r>
           </a:p>
         </p:txBody>
@@ -14824,6 +11639,7 @@
           <a:lstStyle/>
           <a:p>
             <a:pPr algn="ctr"/>
+            <a:endParaRPr/>
           </a:p>
         </p:txBody>
       </p:sp>
@@ -14870,7 +11686,7 @@
         </p:nvSpPr>
         <p:spPr>
           <a:xfrm>
-            <a:off x="2831520" y="5100000"/>
+            <a:off x="2725419" y="5100000"/>
             <a:ext cx="600000" cy="250000"/>
           </a:xfrm>
           <a:prstGeom prst="rect">
@@ -14927,7 +11743,7 @@
                 </a:solidFill>
                 <a:latin typeface="Segoe UI"/>
               </a:rPr>
-              <a:t>Larger device ports, synthesis optimization</a:t>
+              <a:t>$150K–$200K + 1–2% equity (Mo 3–4)</a:t>
             </a:r>
           </a:p>
         </p:txBody>
@@ -15032,7 +11848,7 @@
                 </a:solidFill>
                 <a:latin typeface="Segoe UI"/>
               </a:rPr>
-              <a:t>Vertical modules, customer integration</a:t>
+              <a:t>$130K–$170K + 0.5–1.5% equity (Mo 5–6)</a:t>
             </a:r>
           </a:p>
         </p:txBody>
@@ -15067,7 +11883,7 @@
                 </a:solidFill>
                 <a:latin typeface="Segoe UI"/>
               </a:rPr>
-              <a:t>DevRel / Community</a:t>
+              <a:t>Advisory Board</a:t>
             </a:r>
           </a:p>
         </p:txBody>
@@ -15080,8 +11896,8 @@
         </p:nvSpPr>
         <p:spPr>
           <a:xfrm>
-            <a:off x="2831520" y="5650000"/>
-            <a:ext cx="600000" cy="250000"/>
+            <a:off x="2600027" y="5650000"/>
+            <a:ext cx="831493" cy="276999"/>
           </a:xfrm>
           <a:prstGeom prst="rect">
             <a:avLst/>
@@ -15137,7 +11953,7 @@
                 </a:solidFill>
                 <a:latin typeface="Segoe UI"/>
               </a:rPr>
-              <a:t>SDK ecosystem growth</a:t>
+              <a:t>Semiconductor, IP licensing, domain (60-day target)</a:t>
             </a:r>
           </a:p>
         </p:txBody>
@@ -15172,7 +11988,7 @@
                 </a:solidFill>
                 <a:latin typeface="Segoe UI"/>
               </a:rPr>
-              <a:t>Business Development</a:t>
+              <a:t>Advisory Compensation</a:t>
             </a:r>
           </a:p>
         </p:txBody>
@@ -15185,8 +12001,8 @@
         </p:nvSpPr>
         <p:spPr>
           <a:xfrm>
-            <a:off x="8231520" y="5650000"/>
-            <a:ext cx="600000" cy="250000"/>
+            <a:off x="8096483" y="5650000"/>
+            <a:ext cx="821847" cy="276999"/>
           </a:xfrm>
           <a:prstGeom prst="rect">
             <a:avLst/>
@@ -15242,7 +12058,7 @@
                 </a:solidFill>
                 <a:latin typeface="Segoe UI"/>
               </a:rPr>
-              <a:t>Partnership and licensing deals</a:t>
+              <a:t>0.25–0.5% equity each, 2yr quarterly vest</a:t>
             </a:r>
           </a:p>
         </p:txBody>
@@ -15255,7 +12071,7 @@
         </p:nvSpPr>
         <p:spPr>
           <a:xfrm>
-            <a:off x="731520" y="6100000"/>
+            <a:off x="731520" y="6331494"/>
             <a:ext cx="10500000" cy="300000"/>
           </a:xfrm>
           <a:prstGeom prst="rect">
@@ -15277,7 +12093,7 @@
                 </a:solidFill>
                 <a:latin typeface="Segoe UI"/>
               </a:rPr>
-              <a:t>If one person with AI tools can produce 92 proofs, working hardware, and a 5-language SDK, a funded team can move exponentially faster.</a:t>
+              <a:t>AI-augmented workflows compressed the R&amp;D timeline. Post-funding, the first hires and advisory board distribute execution across hardware, software, and commercial.</a:t>
             </a:r>
           </a:p>
         </p:txBody>
@@ -15465,6 +12281,7 @@
           <a:lstStyle/>
           <a:p>
             <a:pPr algn="ctr"/>
+            <a:endParaRPr/>
           </a:p>
         </p:txBody>
       </p:sp>
@@ -15477,7 +12294,7 @@
         <p:spPr>
           <a:xfrm>
             <a:off x="731520" y="1500000"/>
-            <a:ext cx="5200000" cy="1700000"/>
+            <a:ext cx="5200000" cy="1989367"/>
           </a:xfrm>
           <a:prstGeom prst="roundRect">
             <a:avLst/>
@@ -15508,6 +12325,7 @@
           <a:lstStyle/>
           <a:p>
             <a:pPr algn="ctr"/>
+            <a:endParaRPr/>
           </a:p>
         </p:txBody>
       </p:sp>
@@ -15551,6 +12369,7 @@
           <a:lstStyle/>
           <a:p>
             <a:pPr algn="ctr"/>
+            <a:endParaRPr/>
           </a:p>
         </p:txBody>
       </p:sp>
@@ -15562,7 +12381,7 @@
         </p:nvSpPr>
         <p:spPr>
           <a:xfrm>
-            <a:off x="881520" y="1690000"/>
+            <a:off x="881520" y="1651418"/>
             <a:ext cx="350000" cy="300000"/>
           </a:xfrm>
           <a:prstGeom prst="rect">
@@ -15702,7 +12521,7 @@
         </p:nvSpPr>
         <p:spPr>
           <a:xfrm>
-            <a:off x="1331520" y="2730000"/>
+            <a:off x="1331520" y="2884329"/>
             <a:ext cx="4400000" cy="300000"/>
           </a:xfrm>
           <a:prstGeom prst="rect">
@@ -15738,7 +12557,7 @@
         <p:spPr>
           <a:xfrm>
             <a:off x="6231520" y="1500000"/>
-            <a:ext cx="5200000" cy="1700000"/>
+            <a:ext cx="5200000" cy="1989367"/>
           </a:xfrm>
           <a:prstGeom prst="roundRect">
             <a:avLst/>
@@ -15769,6 +12588,7 @@
           <a:lstStyle/>
           <a:p>
             <a:pPr algn="ctr"/>
+            <a:endParaRPr/>
           </a:p>
         </p:txBody>
       </p:sp>
@@ -15812,6 +12632,7 @@
           <a:lstStyle/>
           <a:p>
             <a:pPr algn="ctr"/>
+            <a:endParaRPr/>
           </a:p>
         </p:txBody>
       </p:sp>
@@ -15823,7 +12644,7 @@
         </p:nvSpPr>
         <p:spPr>
           <a:xfrm>
-            <a:off x="6381520" y="1690000"/>
+            <a:off x="6381520" y="1651418"/>
             <a:ext cx="350000" cy="300000"/>
           </a:xfrm>
           <a:prstGeom prst="rect">
@@ -15963,7 +12784,7 @@
         </p:nvSpPr>
         <p:spPr>
           <a:xfrm>
-            <a:off x="6831520" y="2730000"/>
+            <a:off x="6831520" y="2884329"/>
             <a:ext cx="4400000" cy="300000"/>
           </a:xfrm>
           <a:prstGeom prst="rect">
@@ -15998,8 +12819,8 @@
         </p:nvSpPr>
         <p:spPr>
           <a:xfrm>
-            <a:off x="731520" y="3400000"/>
-            <a:ext cx="5200000" cy="1700000"/>
+            <a:off x="712229" y="3882278"/>
+            <a:ext cx="5200000" cy="1989367"/>
           </a:xfrm>
           <a:prstGeom prst="roundRect">
             <a:avLst/>
@@ -16030,6 +12851,7 @@
           <a:lstStyle/>
           <a:p>
             <a:pPr algn="ctr"/>
+            <a:endParaRPr/>
           </a:p>
         </p:txBody>
       </p:sp>
@@ -16041,7 +12863,7 @@
         </p:nvSpPr>
         <p:spPr>
           <a:xfrm>
-            <a:off x="881520" y="3550000"/>
+            <a:off x="862229" y="4032278"/>
             <a:ext cx="350000" cy="350000"/>
           </a:xfrm>
           <a:prstGeom prst="ellipse">
@@ -16073,6 +12895,7 @@
           <a:lstStyle/>
           <a:p>
             <a:pPr algn="ctr"/>
+            <a:endParaRPr/>
           </a:p>
         </p:txBody>
       </p:sp>
@@ -16084,7 +12907,7 @@
         </p:nvSpPr>
         <p:spPr>
           <a:xfrm>
-            <a:off x="881520" y="3590000"/>
+            <a:off x="862229" y="4033696"/>
             <a:ext cx="350000" cy="300000"/>
           </a:xfrm>
           <a:prstGeom prst="rect">
@@ -16119,7 +12942,7 @@
         </p:nvSpPr>
         <p:spPr>
           <a:xfrm>
-            <a:off x="1331520" y="3580000"/>
+            <a:off x="1312229" y="4062279"/>
             <a:ext cx="4400000" cy="300000"/>
           </a:xfrm>
           <a:prstGeom prst="rect">
@@ -16154,7 +12977,59 @@
         </p:nvSpPr>
         <p:spPr>
           <a:xfrm>
-            <a:off x="1331520" y="3930000"/>
+            <a:off x="1312229" y="4412278"/>
+            <a:ext cx="4400000" cy="430887"/>
+          </a:xfrm>
+          <a:prstGeom prst="rect">
+            <a:avLst/>
+          </a:prstGeom>
+          <a:noFill/>
+        </p:spPr>
+        <p:txBody>
+          <a:bodyPr wrap="square" lIns="91440" tIns="45720" rIns="91440" bIns="45720" anchor="t">
+            <a:spAutoFit/>
+          </a:bodyPr>
+          <a:lstStyle/>
+          <a:p>
+            <a:r>
+              <a:rPr sz="1100" b="0" dirty="0">
+                <a:solidFill>
+                  <a:srgbClr val="CDD6F4"/>
+                </a:solidFill>
+                <a:latin typeface="Segoe UI"/>
+              </a:rPr>
+              <a:t>•  Schema-driven </a:t>
+            </a:r>
+            <a:r>
+              <a:rPr lang="en-US" sz="1100" dirty="0">
+                <a:solidFill>
+                  <a:srgbClr val="CDD6F4"/>
+                </a:solidFill>
+                <a:latin typeface="Segoe UI"/>
+              </a:rPr>
+              <a:t>code generation</a:t>
+            </a:r>
+            <a:r>
+              <a:rPr sz="1100" b="0" dirty="0">
+                <a:solidFill>
+                  <a:srgbClr val="CDD6F4"/>
+                </a:solidFill>
+                <a:latin typeface="Segoe UI"/>
+              </a:rPr>
+              <a:t> across 5 languages creates switching costs</a:t>
+            </a:r>
+          </a:p>
+        </p:txBody>
+      </p:sp>
+      <p:sp>
+        <p:nvSpPr>
+          <p:cNvPr id="24" name="TextBox 23"/>
+          <p:cNvSpPr txBox="1"/>
+          <p:nvPr/>
+        </p:nvSpPr>
+        <p:spPr>
+          <a:xfrm>
+            <a:off x="1302583" y="4887670"/>
             <a:ext cx="4400000" cy="300000"/>
           </a:xfrm>
           <a:prstGeom prst="rect">
@@ -16176,20 +13051,20 @@
                 </a:solidFill>
                 <a:latin typeface="Segoe UI"/>
               </a:rPr>
-              <a:t>•  Schema-driven codegen across 5 languages creates switching costs</a:t>
-            </a:r>
-          </a:p>
-        </p:txBody>
-      </p:sp>
-      <p:sp>
-        <p:nvSpPr>
-          <p:cNvPr id="24" name="TextBox 23"/>
-          <p:cNvSpPr txBox="1"/>
-          <p:nvPr/>
-        </p:nvSpPr>
-        <p:spPr>
-          <a:xfrm>
-            <a:off x="1331520" y="4280000"/>
+              <a:t>•  Hardware RTL + software coupled through same schema</a:t>
+            </a:r>
+          </a:p>
+        </p:txBody>
+      </p:sp>
+      <p:sp>
+        <p:nvSpPr>
+          <p:cNvPr id="25" name="TextBox 24"/>
+          <p:cNvSpPr txBox="1"/>
+          <p:nvPr/>
+        </p:nvSpPr>
+        <p:spPr>
+          <a:xfrm>
+            <a:off x="1302583" y="5237670"/>
             <a:ext cx="4400000" cy="300000"/>
           </a:xfrm>
           <a:prstGeom prst="rect">
@@ -16211,41 +13086,6 @@
                 </a:solidFill>
                 <a:latin typeface="Segoe UI"/>
               </a:rPr>
-              <a:t>•  Hardware RTL + software coupled through same schema</a:t>
-            </a:r>
-          </a:p>
-        </p:txBody>
-      </p:sp>
-      <p:sp>
-        <p:nvSpPr>
-          <p:cNvPr id="25" name="TextBox 24"/>
-          <p:cNvSpPr txBox="1"/>
-          <p:nvPr/>
-        </p:nvSpPr>
-        <p:spPr>
-          <a:xfrm>
-            <a:off x="1331520" y="4630000"/>
-            <a:ext cx="4400000" cy="300000"/>
-          </a:xfrm>
-          <a:prstGeom prst="rect">
-            <a:avLst/>
-          </a:prstGeom>
-          <a:noFill/>
-        </p:spPr>
-        <p:txBody>
-          <a:bodyPr wrap="square">
-            <a:spAutoFit/>
-          </a:bodyPr>
-          <a:lstStyle/>
-          <a:p>
-            <a:pPr algn="l"/>
-            <a:r>
-              <a:rPr sz="1100" b="0">
-                <a:solidFill>
-                  <a:srgbClr val="CDD6F4"/>
-                </a:solidFill>
-                <a:latin typeface="Segoe UI"/>
-              </a:rPr>
               <a:t>•  353 tests verify algebraic correctness across all targets</a:t>
             </a:r>
           </a:p>
@@ -16259,8 +13099,8 @@
         </p:nvSpPr>
         <p:spPr>
           <a:xfrm>
-            <a:off x="6231520" y="3400000"/>
-            <a:ext cx="5200000" cy="1700000"/>
+            <a:off x="6212229" y="3882278"/>
+            <a:ext cx="5200000" cy="1989367"/>
           </a:xfrm>
           <a:prstGeom prst="roundRect">
             <a:avLst/>
@@ -16291,6 +13131,7 @@
           <a:lstStyle/>
           <a:p>
             <a:pPr algn="ctr"/>
+            <a:endParaRPr/>
           </a:p>
         </p:txBody>
       </p:sp>
@@ -16302,7 +13143,7 @@
         </p:nvSpPr>
         <p:spPr>
           <a:xfrm>
-            <a:off x="6381520" y="3550000"/>
+            <a:off x="6362229" y="4032278"/>
             <a:ext cx="350000" cy="350000"/>
           </a:xfrm>
           <a:prstGeom prst="ellipse">
@@ -16334,6 +13175,7 @@
           <a:lstStyle/>
           <a:p>
             <a:pPr algn="ctr"/>
+            <a:endParaRPr/>
           </a:p>
         </p:txBody>
       </p:sp>
@@ -16345,7 +13187,7 @@
         </p:nvSpPr>
         <p:spPr>
           <a:xfrm>
-            <a:off x="6381520" y="3590000"/>
+            <a:off x="6362229" y="4033696"/>
             <a:ext cx="350000" cy="300000"/>
           </a:xfrm>
           <a:prstGeom prst="rect">
@@ -16380,7 +13222,7 @@
         </p:nvSpPr>
         <p:spPr>
           <a:xfrm>
-            <a:off x="6831520" y="3580000"/>
+            <a:off x="6812229" y="4062279"/>
             <a:ext cx="4400000" cy="300000"/>
           </a:xfrm>
           <a:prstGeom prst="rect">
@@ -16415,7 +13257,7 @@
         </p:nvSpPr>
         <p:spPr>
           <a:xfrm>
-            <a:off x="6831520" y="3930000"/>
+            <a:off x="6812229" y="4412278"/>
             <a:ext cx="4400000" cy="300000"/>
           </a:xfrm>
           <a:prstGeom prst="rect">
@@ -16450,7 +13292,7 @@
         </p:nvSpPr>
         <p:spPr>
           <a:xfrm>
-            <a:off x="6831520" y="4280000"/>
+            <a:off x="6802583" y="4878025"/>
             <a:ext cx="4400000" cy="300000"/>
           </a:xfrm>
           <a:prstGeom prst="rect">
@@ -16485,7 +13327,7 @@
         </p:nvSpPr>
         <p:spPr>
           <a:xfrm>
-            <a:off x="6831520" y="4630000"/>
+            <a:off x="6812229" y="5382354"/>
             <a:ext cx="4400000" cy="300000"/>
           </a:xfrm>
           <a:prstGeom prst="rect">
@@ -16520,7 +13362,7 @@
         </p:nvSpPr>
         <p:spPr>
           <a:xfrm>
-            <a:off x="731520" y="5700000"/>
+            <a:off x="683292" y="6095468"/>
             <a:ext cx="10500000" cy="400000"/>
           </a:xfrm>
           <a:prstGeom prst="rect">
@@ -18019,28 +14861,22 @@
         </p:nvSpPr>
         <p:spPr>
           <a:xfrm>
-            <a:off x="9052560" y="2971800"/>
-            <a:ext cx="2103120" cy="731520"/>
-          </a:xfrm>
-          <a:prstGeom prst="rect">
-            <a:avLst/>
-          </a:prstGeom>
-          <a:noFill/>
-        </p:spPr>
-        <p:txBody>
-          <a:bodyPr wrap="square"/>
-          <a:lstStyle/>
-          <a:p>
-            <a:pPr algn="l">
+            <a:off x="8994687" y="2952509"/>
+            <a:ext cx="2276739" cy="750811"/>
+          </a:xfrm>
+          <a:prstGeom prst="rect">
+            <a:avLst/>
+          </a:prstGeom>
+          <a:noFill/>
+        </p:spPr>
+        <p:txBody>
+          <a:bodyPr wrap="square" lIns="91440" tIns="45720" rIns="91440" bIns="45720" anchor="t"/>
+          <a:lstStyle/>
+          <a:p>
+            <a:pPr>
               <a:lnSpc>
                 <a:spcPts val="1300"/>
               </a:lnSpc>
-              <a:spcBef>
-                <a:spcPts val="0"/>
-              </a:spcBef>
-              <a:spcAft>
-                <a:spcPts val="0"/>
-              </a:spcAft>
             </a:pPr>
             <a:r>
               <a:rPr sz="1000" b="0" dirty="0">
@@ -18049,8 +14885,7 @@
                 </a:solidFill>
                 <a:latin typeface="Segoe UI"/>
               </a:rPr>
-              <a:t>FPGA engineer,
-application engineer</a:t>
+              <a:t>FPGA/ASIC eng ($150K–$200K),</a:t>
             </a:r>
             <a:endParaRPr lang="en-US" sz="1000" b="0" dirty="0">
               <a:solidFill>
@@ -18060,18 +14895,21 @@
             </a:endParaRPr>
           </a:p>
           <a:p>
-            <a:pPr algn="l">
+            <a:pPr>
               <a:lnSpc>
                 <a:spcPts val="1300"/>
               </a:lnSpc>
-              <a:spcBef>
-                <a:spcPts val="0"/>
-              </a:spcBef>
-              <a:spcAft>
-                <a:spcPts val="0"/>
-              </a:spcAft>
             </a:pPr>
-            <a:endParaRPr lang="en-US" sz="1000" dirty="0">
+            <a:r>
+              <a:rPr sz="1000" b="0" dirty="0">
+                <a:solidFill>
+                  <a:schemeClr val="bg1"/>
+                </a:solidFill>
+                <a:latin typeface="Segoe UI"/>
+              </a:rPr>
+              <a:t>app eng ($130K–$170K), CEO salary</a:t>
+            </a:r>
+            <a:endParaRPr lang="en-US" sz="1000" b="0" dirty="0">
               <a:solidFill>
                 <a:schemeClr val="bg1"/>
               </a:solidFill>
@@ -18079,33 +14917,49 @@
             </a:endParaRPr>
           </a:p>
           <a:p>
-            <a:pPr algn="l">
+            <a:pPr>
               <a:lnSpc>
                 <a:spcPts val="1300"/>
               </a:lnSpc>
-              <a:spcBef>
-                <a:spcPts val="0"/>
-              </a:spcBef>
-              <a:spcAft>
-                <a:spcPts val="0"/>
-              </a:spcAft>
             </a:pPr>
             <a:r>
-              <a:rPr lang="en-US" sz="1000" b="0" dirty="0">
+              <a:rPr sz="1000" b="0" dirty="0">
                 <a:solidFill>
                   <a:schemeClr val="bg1"/>
                 </a:solidFill>
                 <a:latin typeface="Segoe UI"/>
               </a:rPr>
-              <a:t>$400K - $600K</a:t>
-            </a:r>
-            <a:endParaRPr sz="1000" b="0" dirty="0">
+              <a:t/>
+            </a:r>
+            <a:endParaRPr lang="en-US" sz="1000" b="0" dirty="0">
               <a:solidFill>
                 <a:schemeClr val="bg1"/>
               </a:solidFill>
               <a:latin typeface="Segoe UI"/>
             </a:endParaRPr>
           </a:p>
+          <a:p>
+            <a:pPr>
+              <a:lnSpc>
+                <a:spcPts val="1300"/>
+              </a:lnSpc>
+            </a:pPr>
+            <a:r>
+              <a:rPr sz="1000" b="0" dirty="0">
+                <a:solidFill>
+                  <a:schemeClr val="bg1"/>
+                </a:solidFill>
+                <a:latin typeface="Segoe UI"/>
+              </a:rPr>
+              <a:t>$450K–$600K</a:t>
+            </a:r>
+            <a:endParaRPr lang="en-US" sz="1000" b="0" dirty="0">
+              <a:solidFill>
+                <a:schemeClr val="bg1"/>
+              </a:solidFill>
+              <a:latin typeface="Segoe UI"/>
+            </a:endParaRPr>
+          </a:p>
         </p:txBody>
       </p:sp>
       <p:sp>
@@ -18146,7 +15000,7 @@
                 </a:solidFill>
                 <a:latin typeface="Segoe UI"/>
               </a:rPr>
-              <a:t>Key Milestones (Seed Stage)</a:t>
+              <a:t>First 90 Days (Post-Funding)</a:t>
             </a:r>
           </a:p>
         </p:txBody>
@@ -18276,7 +15130,7 @@
                 </a:solidFill>
                 <a:latin typeface="Segoe UI"/>
               </a:rPr>
-              <a:t>Port to mid-range FPGA: N=64+ banks, &gt;4 Gops/s</a:t>
+              <a:t>Validate ATOMiK on physical Xilinx Zynq-7020</a:t>
             </a:r>
           </a:p>
         </p:txBody>
@@ -18406,7 +15260,7 @@
                 </a:solidFill>
                 <a:latin typeface="Segoe UI"/>
               </a:rPr>
-              <a:t>Land 2 pilot design wins (HFT + edge AI)</a:t>
+              <a:t>10–15 exploratory conversations with embedded/edge teams</a:t>
             </a:r>
           </a:p>
         </p:txBody>
@@ -18536,7 +15390,7 @@
                 </a:solidFill>
                 <a:latin typeface="Segoe UI"/>
               </a:rPr>
-              <a:t>Complete ASIC feasibility study with foundry</a:t>
+              <a:t>Identify 2–3 candidates for paid technical evaluation</a:t>
             </a:r>
           </a:p>
         </p:txBody>
@@ -18666,7 +15520,7 @@
                 </a:solidFill>
                 <a:latin typeface="Segoe UI"/>
               </a:rPr>
-              <a:t>Grow SDK community to 500+ developers</a:t>
+              <a:t>Recruit first FPGA/ASIC engineer (month 3–4)</a:t>
             </a:r>
           </a:p>
         </p:txBody>
@@ -18796,7 +15650,7 @@
                 </a:solidFill>
                 <a:latin typeface="Segoe UI"/>
               </a:rPr>
-              <a:t>File 2+ continuation patents</a:t>
+              <a:t>ASIC feasibility study scoped ($150K–$300K, go/no-go gates)</a:t>
             </a:r>
           </a:p>
         </p:txBody>
@@ -19095,7 +15949,7 @@
                 </a:solidFill>
                 <a:latin typeface="Segoe UI"/>
               </a:rPr>
-              <a:t>$300B+ hyperscaler AI capex cycle in progress</a:t>
+              <a:t>Edge embedded growing 25%+ CAGR; memory bandwidth is the binding constraint</a:t>
             </a:r>
           </a:p>
         </p:txBody>
@@ -19138,7 +15992,7 @@
                 </a:solidFill>
                 <a:latin typeface="Segoe UI"/>
               </a:rPr>
-              <a:t>✓  Capital efficiency</a:t>
+              <a:t>✓  Proven efficiency</a:t>
             </a:r>
           </a:p>
         </p:txBody>
@@ -19181,7 +16035,7 @@
                 </a:solidFill>
                 <a:latin typeface="Segoe UI"/>
               </a:rPr>
-              <a:t>~$225 total spend → 1 Gops/s hardware</a:t>
+              <a:t>Full stack built with AI-augmented development — hardware, proofs, SDK, firmware</a:t>
             </a:r>
           </a:p>
         </p:txBody>
@@ -19267,16 +16121,7 @@
                 </a:solidFill>
                 <a:latin typeface="Segoe UI"/>
               </a:rPr>
-              <a:t>Provisional </a:t>
-            </a:r>
-            <a:r>
-              <a:rPr sz="1000" b="0" dirty="0">
-                <a:solidFill>
-                  <a:schemeClr val="bg1"/>
-                </a:solidFill>
-                <a:latin typeface="Segoe UI"/>
-              </a:rPr>
-              <a:t>Patent pending + formal verification barrier</a:t>
+              <a:t>Provisional patent pending + formal verification barrier</a:t>
             </a:r>
           </a:p>
         </p:txBody>
@@ -19362,7 +16207,7 @@
                 </a:solidFill>
                 <a:latin typeface="Segoe UI"/>
               </a:rPr>
-              <a:t>$225 to 1 Gops/s. Imagine what funded execution looks like.</a:t>
+              <a:t>Validated architecture. Defined milestones. Ready for funded execution.</a:t>
             </a:r>
           </a:p>
         </p:txBody>
@@ -19473,7 +16318,7 @@
                 </a:solidFill>
                 <a:latin typeface="Segoe UI"/>
               </a:rPr>
-              <a:t>Why ATOMiK Wins</a:t>
+              <a:t>Why ATOMiK Is Fundable Now</a:t>
             </a:r>
           </a:p>
         </p:txBody>
@@ -19518,6 +16363,7 @@
           <a:lstStyle/>
           <a:p>
             <a:pPr algn="ctr"/>
+            <a:endParaRPr/>
           </a:p>
         </p:txBody>
       </p:sp>
@@ -19530,7 +16376,7 @@
         <p:spPr>
           <a:xfrm>
             <a:off x="900000" y="1400000"/>
-            <a:ext cx="3200000" cy="2400000"/>
+            <a:ext cx="3200000" cy="2612202"/>
           </a:xfrm>
           <a:prstGeom prst="roundRect">
             <a:avLst/>
@@ -19561,6 +16407,7 @@
           <a:lstStyle/>
           <a:p>
             <a:pPr algn="ctr"/>
+            <a:endParaRPr/>
           </a:p>
         </p:txBody>
       </p:sp>
@@ -19594,8 +16441,19 @@
                 </a:solidFill>
                 <a:latin typeface="Segoe UI"/>
               </a:rPr>
-              <a:t>Mathematically
-Inevitable</a:t>
+              <a:t>Formally</a:t>
+            </a:r>
+          </a:p>
+          <a:p>
+            <a:pPr algn="ctr"/>
+            <a:r>
+              <a:rPr sz="2200" b="1">
+                <a:solidFill>
+                  <a:srgbClr val="A6E3A1"/>
+                </a:solidFill>
+                <a:latin typeface="Segoe UI"/>
+              </a:rPr>
+              <a:t>Verified</a:t>
             </a:r>
           </a:p>
         </p:txBody>
@@ -19608,7 +16466,7 @@
         </p:nvSpPr>
         <p:spPr>
           <a:xfrm>
-            <a:off x="1300000" y="2100000"/>
+            <a:off x="1290354" y="2283266"/>
             <a:ext cx="2400000" cy="20000"/>
           </a:xfrm>
           <a:prstGeom prst="rect">
@@ -19640,6 +16498,7 @@
           <a:lstStyle/>
           <a:p>
             <a:pPr algn="ctr"/>
+            <a:endParaRPr/>
           </a:p>
         </p:txBody>
       </p:sp>
@@ -19651,7 +16510,7 @@
         </p:nvSpPr>
         <p:spPr>
           <a:xfrm>
-            <a:off x="1100000" y="2200000"/>
+            <a:off x="1090354" y="2383266"/>
             <a:ext cx="2800000" cy="1000000"/>
           </a:xfrm>
           <a:prstGeom prst="rect">
@@ -19709,7 +16568,7 @@
                 </a:solidFill>
                 <a:latin typeface="Segoe UI"/>
               </a:rPr>
-              <a:t>is the optimal structure for</a:t>
+              <a:t>forms a complete Abelian group</a:t>
             </a:r>
           </a:p>
           <a:p>
@@ -19725,7 +16584,7 @@
                 </a:solidFill>
                 <a:latin typeface="Segoe UI"/>
               </a:rPr>
-              <a:t>parallel state accumulation.</a:t>
+              <a:t>for parallel state accumulation.</a:t>
             </a:r>
           </a:p>
         </p:txBody>
@@ -19738,7 +16597,7 @@
         </p:nvSpPr>
         <p:spPr>
           <a:xfrm>
-            <a:off x="900000" y="3300000"/>
+            <a:off x="890354" y="3483266"/>
             <a:ext cx="3200000" cy="350000"/>
           </a:xfrm>
           <a:prstGeom prst="rect">
@@ -19774,7 +16633,7 @@
         <p:spPr>
           <a:xfrm>
             <a:off x="4500000" y="1400000"/>
-            <a:ext cx="3200000" cy="2400000"/>
+            <a:ext cx="3200000" cy="2612202"/>
           </a:xfrm>
           <a:prstGeom prst="roundRect">
             <a:avLst/>
@@ -19805,6 +16664,7 @@
           <a:lstStyle/>
           <a:p>
             <a:pPr algn="ctr"/>
+            <a:endParaRPr/>
           </a:p>
         </p:txBody>
       </p:sp>
@@ -19852,7 +16712,7 @@
         </p:nvSpPr>
         <p:spPr>
           <a:xfrm>
-            <a:off x="4900000" y="2100000"/>
+            <a:off x="4890354" y="2283266"/>
             <a:ext cx="2400000" cy="20000"/>
           </a:xfrm>
           <a:prstGeom prst="rect">
@@ -19884,6 +16744,7 @@
           <a:lstStyle/>
           <a:p>
             <a:pPr algn="ctr"/>
+            <a:endParaRPr/>
           </a:p>
         </p:txBody>
       </p:sp>
@@ -19895,7 +16756,7 @@
         </p:nvSpPr>
         <p:spPr>
           <a:xfrm>
-            <a:off x="4700000" y="2200000"/>
+            <a:off x="4690354" y="2383266"/>
             <a:ext cx="2800000" cy="1000000"/>
           </a:xfrm>
           <a:prstGeom prst="rect">
@@ -19921,7 +16782,7 @@
                 </a:solidFill>
                 <a:latin typeface="Segoe UI"/>
               </a:rPr>
-              <a:t>1,056 Mops/s on a $13.50 FPGA.</a:t>
+              <a:t>Two production SoCs validated.</a:t>
             </a:r>
           </a:p>
           <a:p>
@@ -19937,7 +16798,7 @@
                 </a:solidFill>
                 <a:latin typeface="Segoe UI"/>
               </a:rPr>
-              <a:t>80/80 tests passing. Real silicon.</a:t>
+              <a:t>80/80 parallel tests passing.</a:t>
             </a:r>
           </a:p>
           <a:p>
@@ -19953,7 +16814,7 @@
                 </a:solidFill>
                 <a:latin typeface="Segoe UI"/>
               </a:rPr>
-              <a:t>95-100% memory traffic</a:t>
+              <a:t>95–100% memory traffic reduction</a:t>
             </a:r>
           </a:p>
           <a:p>
@@ -19969,7 +16830,7 @@
                 </a:solidFill>
                 <a:latin typeface="Segoe UI"/>
               </a:rPr>
-              <a:t>reduction measured.</a:t>
+              <a:t>across benchmarked workloads.</a:t>
             </a:r>
           </a:p>
         </p:txBody>
@@ -19982,7 +16843,7 @@
         </p:nvSpPr>
         <p:spPr>
           <a:xfrm>
-            <a:off x="4500000" y="3300000"/>
+            <a:off x="4490354" y="3483266"/>
             <a:ext cx="3200000" cy="350000"/>
           </a:xfrm>
           <a:prstGeom prst="rect">
@@ -20004,7 +16865,7 @@
                 </a:solidFill>
                 <a:latin typeface="Segoe UI"/>
               </a:rPr>
-              <a:t>1,056 Mops/s</a:t>
+              <a:t>Working silicon</a:t>
             </a:r>
           </a:p>
         </p:txBody>
@@ -20018,7 +16879,7 @@
         <p:spPr>
           <a:xfrm>
             <a:off x="8100000" y="1400000"/>
-            <a:ext cx="3200000" cy="2400000"/>
+            <a:ext cx="3200000" cy="2612202"/>
           </a:xfrm>
           <a:prstGeom prst="roundRect">
             <a:avLst/>
@@ -20049,6 +16910,7 @@
           <a:lstStyle/>
           <a:p>
             <a:pPr algn="ctr"/>
+            <a:endParaRPr/>
           </a:p>
         </p:txBody>
       </p:sp>
@@ -20082,8 +16944,19 @@
                 </a:solidFill>
                 <a:latin typeface="Segoe UI"/>
               </a:rPr>
-              <a:t>Timing
-Is Right</a:t>
+              <a:t>Clear Path to</a:t>
+            </a:r>
+          </a:p>
+          <a:p>
+            <a:pPr algn="ctr"/>
+            <a:r>
+              <a:rPr sz="2200" b="1">
+                <a:solidFill>
+                  <a:srgbClr val="CBA6F7"/>
+                </a:solidFill>
+                <a:latin typeface="Segoe UI"/>
+              </a:rPr>
+              <a:t>First Design Wins</a:t>
             </a:r>
           </a:p>
         </p:txBody>
@@ -20096,7 +16969,7 @@
         </p:nvSpPr>
         <p:spPr>
           <a:xfrm>
-            <a:off x="8500000" y="2100000"/>
+            <a:off x="8490354" y="2283266"/>
             <a:ext cx="2400000" cy="20000"/>
           </a:xfrm>
           <a:prstGeom prst="rect">
@@ -20128,6 +17001,7 @@
           <a:lstStyle/>
           <a:p>
             <a:pPr algn="ctr"/>
+            <a:endParaRPr/>
           </a:p>
         </p:txBody>
       </p:sp>
@@ -20139,7 +17013,7 @@
         </p:nvSpPr>
         <p:spPr>
           <a:xfrm>
-            <a:off x="8300000" y="2200000"/>
+            <a:off x="8290354" y="2383266"/>
             <a:ext cx="2800000" cy="1000000"/>
           </a:xfrm>
           <a:prstGeom prst="rect">
@@ -20165,7 +17039,7 @@
                 </a:solidFill>
                 <a:latin typeface="Segoe UI"/>
               </a:rPr>
-              <a:t>AI inference crisis, memory wall,</a:t>
+              <a:t>Validated architecture.</a:t>
             </a:r>
           </a:p>
           <a:p>
@@ -20181,7 +17055,7 @@
                 </a:solidFill>
                 <a:latin typeface="Segoe UI"/>
               </a:rPr>
-              <a:t>edge constraints, HBM cost spiral.</a:t>
+              <a:t>Defined beachhead.</a:t>
             </a:r>
           </a:p>
           <a:p>
@@ -20197,7 +17071,7 @@
                 </a:solidFill>
                 <a:latin typeface="Segoe UI"/>
               </a:rPr>
-              <a:t>$280B VC + $300B+ hyperscaler</a:t>
+              <a:t>Clear licensing motion.</a:t>
             </a:r>
           </a:p>
           <a:p>
@@ -20213,7 +17087,7 @@
                 </a:solidFill>
                 <a:latin typeface="Segoe UI"/>
               </a:rPr>
-              <a:t>capex seeking solutions.</a:t>
+              <a:t>Seed capital unlocks first customers.</a:t>
             </a:r>
           </a:p>
         </p:txBody>
@@ -20226,7 +17100,7 @@
         </p:nvSpPr>
         <p:spPr>
           <a:xfrm>
-            <a:off x="8100000" y="3300000"/>
+            <a:off x="8090354" y="3483266"/>
             <a:ext cx="3200000" cy="350000"/>
           </a:xfrm>
           <a:prstGeom prst="rect">
@@ -20248,7 +17122,7 @@
                 </a:solidFill>
                 <a:latin typeface="Segoe UI"/>
               </a:rPr>
-              <a:t>$300B+ AI capex</a:t>
+              <a:t>First design wins in sight</a:t>
             </a:r>
           </a:p>
         </p:txBody>
@@ -20261,7 +17135,7 @@
         </p:nvSpPr>
         <p:spPr>
           <a:xfrm>
-            <a:off x="731520" y="4200000"/>
+            <a:off x="750811" y="4441139"/>
             <a:ext cx="10500000" cy="400000"/>
           </a:xfrm>
           <a:prstGeom prst="rect">
@@ -20283,7 +17157,7 @@
                 </a:solidFill>
                 <a:latin typeface="Segoe UI"/>
               </a:rPr>
-              <a:t>Invitation to Investors</a:t>
+              <a:t>The Investment Case</a:t>
             </a:r>
           </a:p>
         </p:txBody>
@@ -20296,7 +17170,7 @@
         </p:nvSpPr>
         <p:spPr>
           <a:xfrm>
-            <a:off x="2000000" y="4600000"/>
+            <a:off x="2019291" y="4841139"/>
             <a:ext cx="8000000" cy="280000"/>
           </a:xfrm>
           <a:prstGeom prst="rect">
@@ -20318,7 +17192,7 @@
                 </a:solidFill>
                 <a:latin typeface="Segoe UI"/>
               </a:rPr>
-              <a:t>✓  Review the proofs — Every theorem is in the repository, machine-verified</a:t>
+              <a:t>✓  Validated architecture — 92 machine-verified proofs, working silicon, 353 tests</a:t>
             </a:r>
           </a:p>
         </p:txBody>
@@ -20331,7 +17205,7 @@
         </p:nvSpPr>
         <p:spPr>
           <a:xfrm>
-            <a:off x="2000000" y="4920000"/>
+            <a:off x="2019291" y="5161139"/>
             <a:ext cx="8000000" cy="280000"/>
           </a:xfrm>
           <a:prstGeom prst="rect">
@@ -20353,7 +17227,7 @@
                 </a:solidFill>
                 <a:latin typeface="Segoe UI"/>
               </a:rPr>
-              <a:t>✓  Run the hardware — The demo runs on $13.50 boards — we’ll ship you one</a:t>
+              <a:t>✓  Defined beachhead — edge embedded, eval → license → royalty motion</a:t>
             </a:r>
           </a:p>
         </p:txBody>
@@ -20366,7 +17240,7 @@
         </p:nvSpPr>
         <p:spPr>
           <a:xfrm>
-            <a:off x="2000000" y="5240000"/>
+            <a:off x="2019291" y="5481139"/>
             <a:ext cx="8000000" cy="280000"/>
           </a:xfrm>
           <a:prstGeom prst="rect">
@@ -20388,7 +17262,7 @@
                 </a:solidFill>
                 <a:latin typeface="Segoe UI"/>
               </a:rPr>
-              <a:t>✓  Examine the data — Every metric traces to a source file with methodology</a:t>
+              <a:t>✓  Clear near-term milestones — Zynq validation, first paid evals, team buildout</a:t>
             </a:r>
           </a:p>
         </p:txBody>
@@ -20401,7 +17275,7 @@
         </p:nvSpPr>
         <p:spPr>
           <a:xfrm>
-            <a:off x="731520" y="5700000"/>
+            <a:off x="750811" y="5941139"/>
             <a:ext cx="10500000" cy="400000"/>
           </a:xfrm>
           <a:prstGeom prst="rect">
@@ -20423,7 +17297,7 @@
                 </a:solidFill>
                 <a:latin typeface="Segoe UI"/>
               </a:rPr>
-              <a:t>ATOMiK — Delta-State Computing in Silicon</a:t>
+              <a:t>ATOMiK — Delta-State Execution for Real-Time Embedded Systems</a:t>
             </a:r>
           </a:p>
         </p:txBody>
@@ -20436,30 +17310,46 @@
         </p:nvSpPr>
         <p:spPr>
           <a:xfrm>
-            <a:off x="731520" y="6050000"/>
-            <a:ext cx="10500000" cy="300000"/>
-          </a:xfrm>
-          <a:prstGeom prst="rect">
-            <a:avLst/>
-          </a:prstGeom>
-          <a:noFill/>
-        </p:spPr>
-        <p:txBody>
-          <a:bodyPr wrap="square">
+            <a:off x="750811" y="6291139"/>
+            <a:ext cx="10500000" cy="307777"/>
+          </a:xfrm>
+          <a:prstGeom prst="rect">
+            <a:avLst/>
+          </a:prstGeom>
+          <a:noFill/>
+        </p:spPr>
+        <p:txBody>
+          <a:bodyPr wrap="square" lIns="91440" tIns="45720" rIns="91440" bIns="45720" anchor="t">
             <a:spAutoFit/>
           </a:bodyPr>
           <a:lstStyle/>
           <a:p>
             <a:pPr algn="ctr"/>
             <a:r>
-              <a:rPr sz="1400" b="0">
+              <a:rPr sz="1400" b="0" dirty="0">
                 <a:solidFill>
                   <a:srgbClr val="7F849C"/>
                 </a:solidFill>
                 <a:latin typeface="Segoe UI"/>
               </a:rPr>
-              <a:t>Patent Pending  •  matt@atomik.dev</a:t>
-            </a:r>
+              <a:t>Patent Pending  •  </a:t>
+            </a:r>
+            <a:r>
+              <a:rPr lang="en-US" sz="1400" dirty="0">
+                <a:solidFill>
+                  <a:srgbClr val="7F849C"/>
+                </a:solidFill>
+                <a:latin typeface="Segoe UI"/>
+              </a:rPr>
+              <a:t>matthew.h.rockwell@gmail.com</a:t>
+            </a:r>
+            <a:endParaRPr lang="en-US" sz="1400" b="0" dirty="0">
+              <a:solidFill>
+                <a:srgbClr val="7F849C"/>
+              </a:solidFill>
+              <a:latin typeface="Segoe UI"/>
+              <a:cs typeface="Segoe UI"/>
+            </a:endParaRPr>
           </a:p>
         </p:txBody>
       </p:sp>
@@ -20574,7 +17464,7 @@
                 </a:solidFill>
                 <a:latin typeface="Segoe UI"/>
               </a:rPr>
-              <a:t>The Memory Wall</a:t>
+              <a:t>The Problem</a:t>
             </a:r>
           </a:p>
         </p:txBody>
@@ -20617,7 +17507,7 @@
                 </a:solidFill>
                 <a:latin typeface="Segoe UI"/>
               </a:rPr>
-              <a:t>60–90% of system energy is spent moving data, not computing on it.</a:t>
+              <a:t>Embedded systems repeatedly copy and reconstruct large state when only small portions change.</a:t>
             </a:r>
           </a:p>
         </p:txBody>
@@ -21196,7 +18086,7 @@
         </p:nvSpPr>
         <p:spPr>
           <a:xfrm>
-            <a:off x="7613725" y="3302449"/>
+            <a:off x="-9000000" y="-9000000"/>
             <a:ext cx="3108960" cy="1280160"/>
           </a:xfrm>
           <a:prstGeom prst="roundRect">
@@ -21244,7 +18134,7 @@
         </p:nvSpPr>
         <p:spPr>
           <a:xfrm>
-            <a:off x="7796605" y="3456404"/>
+            <a:off x="-9000000" y="-9000000"/>
             <a:ext cx="2743200" cy="457200"/>
           </a:xfrm>
           <a:prstGeom prst="rect">
@@ -21274,7 +18164,7 @@
                 </a:solidFill>
                 <a:latin typeface="Segoe UI"/>
               </a:rPr>
-              <a:t>+130%</a:t>
+              <a:t/>
             </a:r>
           </a:p>
         </p:txBody>
@@ -21287,7 +18177,7 @@
         </p:nvSpPr>
         <p:spPr>
           <a:xfrm>
-            <a:off x="7796605" y="3986756"/>
+            <a:off x="-9000000" y="-9000000"/>
             <a:ext cx="2743200" cy="640080"/>
           </a:xfrm>
           <a:prstGeom prst="rect">
@@ -21317,8 +18207,7 @@
                 </a:solidFill>
                 <a:latin typeface="Segoe UI"/>
               </a:rPr>
-              <a:t>HBM demand growth
-YoY in 2025 (TrendForce)</a:t>
+              <a:t/>
             </a:r>
           </a:p>
         </p:txBody>
@@ -21361,7 +18250,7 @@
                 </a:solidFill>
                 <a:latin typeface="Segoe UI"/>
               </a:rPr>
-              <a:t>Root cause: the full-state computation model.</a:t>
+              <a:t>Root cause: full-state memory operations. Every update copies the entire structure.</a:t>
             </a:r>
           </a:p>
         </p:txBody>
@@ -21404,7 +18293,29 @@
                 </a:solidFill>
                 <a:latin typeface="Segoe UI"/>
               </a:rPr>
-              <a:t>Changing 1 bit in a 64-byte cache line moves 512 bits. A 64×64 matrix update moves 32 KB per operation. ATOMiK’s delta approach moves 8 bytes — the delta itself.</a:t>
+              <a:t>A sensor fusion node tracking 50 inputs moves the entire state buffer every cycle.</a:t>
+            </a:r>
+          </a:p>
+          <a:p>
+            <a:pPr algn="l">
+              <a:lnSpc>
+                <a:spcPts val="1600"/>
+              </a:lnSpc>
+              <a:spcBef>
+                <a:spcPts val="0"/>
+              </a:spcBef>
+              <a:spcAft>
+                <a:spcPts val="0"/>
+              </a:spcAft>
+            </a:pPr>
+            <a:r>
+              <a:rPr sz="1400" b="0" dirty="0">
+                <a:solidFill>
+                  <a:schemeClr val="bg1"/>
+                </a:solidFill>
+                <a:latin typeface="Segoe UI"/>
+              </a:rPr>
+              <a:t>A 64×64 matrix update moves 32 KB. The cost scales with state size, not change size.</a:t>
             </a:r>
           </a:p>
         </p:txBody>
@@ -21558,7 +18469,7 @@
                 </a:solidFill>
                 <a:latin typeface="Segoe UI"/>
               </a:rPr>
-              <a:t>Beyond the Memory Wall</a:t>
+              <a:t>The Solution</a:t>
             </a:r>
           </a:p>
         </p:txBody>
@@ -21593,7 +18504,7 @@
                 </a:solidFill>
                 <a:latin typeface="Segoe UI"/>
               </a:rPr>
-              <a:t>Three compounding problems that delta-state algebra solves simultaneously.</a:t>
+              <a:t>Accumulate deltas, not full state. Reconstruct on demand: current_state = initial_state ⊕ deltas.</a:t>
             </a:r>
           </a:p>
         </p:txBody>
@@ -21638,6 +18549,7 @@
           <a:lstStyle/>
           <a:p>
             <a:pPr algn="ctr"/>
+            <a:endParaRPr/>
           </a:p>
         </p:txBody>
       </p:sp>
@@ -21681,6 +18593,7 @@
           <a:lstStyle/>
           <a:p>
             <a:pPr algn="ctr"/>
+            <a:endParaRPr/>
           </a:p>
         </p:txBody>
       </p:sp>
@@ -21846,6 +18759,7 @@
           <a:lstStyle/>
           <a:p>
             <a:pPr algn="ctr"/>
+            <a:endParaRPr/>
           </a:p>
         </p:txBody>
       </p:sp>
@@ -22049,6 +18963,7 @@
           <a:lstStyle/>
           <a:p>
             <a:pPr algn="ctr"/>
+            <a:endParaRPr/>
           </a:p>
         </p:txBody>
       </p:sp>
@@ -22214,6 +19129,7 @@
           <a:lstStyle/>
           <a:p>
             <a:pPr algn="ctr"/>
+            <a:endParaRPr/>
           </a:p>
         </p:txBody>
       </p:sp>
@@ -22417,6 +19333,7 @@
           <a:lstStyle/>
           <a:p>
             <a:pPr algn="ctr"/>
+            <a:endParaRPr/>
           </a:p>
         </p:txBody>
       </p:sp>
@@ -22582,6 +19499,7 @@
           <a:lstStyle/>
           <a:p>
             <a:pPr algn="ctr"/>
+            <a:endParaRPr/>
           </a:p>
         </p:txBody>
       </p:sp>
@@ -22775,7 +19693,7 @@
                 </a:solidFill>
                 <a:latin typeface="Segoe UI"/>
               </a:rPr>
-              <a:t>All three properties proven in Lean4 (92 theorems, 0 sorry statements). Hardware-validated on Tang Nano 9K.</a:t>
+              <a:t>All three properties formally proven (92 Lean4 theorems, 0 unproven axioms) and hardware-validated on two production SoCs.</a:t>
             </a:r>
           </a:p>
         </p:txBody>
@@ -22891,7 +19809,7 @@
                 </a:solidFill>
                 <a:latin typeface="Segoe UI"/>
               </a:rPr>
-              <a:t>Why Now: Four Converging Forces</a:t>
+              <a:t>Why Now: Three Edge Tailwinds</a:t>
             </a:r>
           </a:p>
         </p:txBody>
@@ -23157,8 +20075,29 @@
                 </a:solidFill>
                 <a:latin typeface="Segoe UI"/>
               </a:rPr>
-              <a:t>AI Inference
-Crisis</a:t>
+              <a:t>Bandwidth</a:t>
+            </a:r>
+          </a:p>
+          <a:p>
+            <a:pPr algn="ctr">
+              <a:lnSpc>
+                <a:spcPts val="1700"/>
+              </a:lnSpc>
+              <a:spcBef>
+                <a:spcPts val="0"/>
+              </a:spcBef>
+              <a:spcAft>
+                <a:spcPts val="0"/>
+              </a:spcAft>
+            </a:pPr>
+            <a:r>
+              <a:rPr sz="1600" b="1">
+                <a:solidFill>
+                  <a:srgbClr val="F38BA8"/>
+                </a:solidFill>
+                <a:latin typeface="Segoe UI"/>
+              </a:rPr>
+              <a:t>Constrained</a:t>
             </a:r>
           </a:p>
         </p:txBody>
@@ -23201,10 +20140,73 @@
                 </a:solidFill>
                 <a:latin typeface="Segoe UI"/>
               </a:rPr>
-              <a:t>90% of AI compute is inference
-(McKinsey). Inference is
-memory-bandwidth-bound.
-$300B+ hyperscaler AI capex.</a:t>
+              <a:t>Edge devices move entire state</a:t>
+            </a:r>
+          </a:p>
+          <a:p>
+            <a:pPr algn="ctr">
+              <a:lnSpc>
+                <a:spcPts val="1400"/>
+              </a:lnSpc>
+              <a:spcBef>
+                <a:spcPts val="0"/>
+              </a:spcBef>
+              <a:spcAft>
+                <a:spcPts val="0"/>
+              </a:spcAft>
+            </a:pPr>
+            <a:r>
+              <a:rPr sz="1100" b="0" dirty="0">
+                <a:solidFill>
+                  <a:schemeClr val="bg1"/>
+                </a:solidFill>
+                <a:latin typeface="Segoe UI"/>
+              </a:rPr>
+              <a:t>buffers every cycle. Memory</a:t>
+            </a:r>
+          </a:p>
+          <a:p>
+            <a:pPr algn="ctr">
+              <a:lnSpc>
+                <a:spcPts val="1400"/>
+              </a:lnSpc>
+              <a:spcBef>
+                <a:spcPts val="0"/>
+              </a:spcBef>
+              <a:spcAft>
+                <a:spcPts val="0"/>
+              </a:spcAft>
+            </a:pPr>
+            <a:r>
+              <a:rPr sz="1100" b="0" dirty="0">
+                <a:solidFill>
+                  <a:schemeClr val="bg1"/>
+                </a:solidFill>
+                <a:latin typeface="Segoe UI"/>
+              </a:rPr>
+              <a:t>bandwidth is the bottleneck,</a:t>
+            </a:r>
+          </a:p>
+          <a:p>
+            <a:pPr algn="ctr">
+              <a:lnSpc>
+                <a:spcPts val="1400"/>
+              </a:lnSpc>
+              <a:spcBef>
+                <a:spcPts val="0"/>
+              </a:spcBef>
+              <a:spcAft>
+                <a:spcPts val="0"/>
+              </a:spcAft>
+            </a:pPr>
+            <a:r>
+              <a:rPr sz="1100" b="0" dirty="0">
+                <a:solidFill>
+                  <a:schemeClr val="bg1"/>
+                </a:solidFill>
+                <a:latin typeface="Segoe UI"/>
+              </a:rPr>
+              <a:t>not compute.</a:t>
             </a:r>
           </a:p>
         </p:txBody>
@@ -23426,8 +20428,29 @@
                 </a:solidFill>
                 <a:latin typeface="Segoe UI"/>
               </a:rPr>
-              <a:t>Post-Moore
-Economics</a:t>
+              <a:t>Power Budgets</a:t>
+            </a:r>
+          </a:p>
+          <a:p>
+            <a:pPr algn="ctr">
+              <a:lnSpc>
+                <a:spcPts val="1700"/>
+              </a:lnSpc>
+              <a:spcBef>
+                <a:spcPts val="0"/>
+              </a:spcBef>
+              <a:spcAft>
+                <a:spcPts val="0"/>
+              </a:spcAft>
+            </a:pPr>
+            <a:r>
+              <a:rPr sz="1600" b="1">
+                <a:solidFill>
+                  <a:srgbClr val="CBA6F7"/>
+                </a:solidFill>
+                <a:latin typeface="Segoe UI"/>
+              </a:rPr>
+              <a:t>Tightening</a:t>
             </a:r>
           </a:p>
         </p:txBody>
@@ -23470,10 +20493,73 @@
                 </a:solidFill>
                 <a:latin typeface="Segoe UI"/>
               </a:rPr>
-              <a:t>Below 3nm: diminishing returns.
-Architectural innovation is
-the new scaling vector.
-XOR eliminates carry chains.</a:t>
+              <a:t>Single-watt power envelopes.</a:t>
+            </a:r>
+          </a:p>
+          <a:p>
+            <a:pPr algn="ctr">
+              <a:lnSpc>
+                <a:spcPts val="1400"/>
+              </a:lnSpc>
+              <a:spcBef>
+                <a:spcPts val="0"/>
+              </a:spcBef>
+              <a:spcAft>
+                <a:spcPts val="0"/>
+              </a:spcAft>
+            </a:pPr>
+            <a:r>
+              <a:rPr sz="1100" b="0" dirty="0">
+                <a:solidFill>
+                  <a:schemeClr val="bg1"/>
+                </a:solidFill>
+                <a:latin typeface="Segoe UI"/>
+              </a:rPr>
+              <a:t>Every unnecessary memory op</a:t>
+            </a:r>
+          </a:p>
+          <a:p>
+            <a:pPr algn="ctr">
+              <a:lnSpc>
+                <a:spcPts val="1400"/>
+              </a:lnSpc>
+              <a:spcBef>
+                <a:spcPts val="0"/>
+              </a:spcBef>
+              <a:spcAft>
+                <a:spcPts val="0"/>
+              </a:spcAft>
+            </a:pPr>
+            <a:r>
+              <a:rPr sz="1100" b="0" dirty="0">
+                <a:solidFill>
+                  <a:schemeClr val="bg1"/>
+                </a:solidFill>
+                <a:latin typeface="Segoe UI"/>
+              </a:rPr>
+              <a:t>burns power. 95–100% memory</a:t>
+            </a:r>
+          </a:p>
+          <a:p>
+            <a:pPr algn="ctr">
+              <a:lnSpc>
+                <a:spcPts val="1400"/>
+              </a:lnSpc>
+              <a:spcBef>
+                <a:spcPts val="0"/>
+              </a:spcBef>
+              <a:spcAft>
+                <a:spcPts val="0"/>
+              </a:spcAft>
+            </a:pPr>
+            <a:r>
+              <a:rPr sz="1100" b="0" dirty="0">
+                <a:solidFill>
+                  <a:schemeClr val="bg1"/>
+                </a:solidFill>
+                <a:latin typeface="Segoe UI"/>
+              </a:rPr>
+              <a:t>traffic reduction measured.</a:t>
             </a:r>
           </a:p>
         </p:txBody>
@@ -23695,8 +20781,29 @@
                 </a:solidFill>
                 <a:latin typeface="Segoe UI"/>
               </a:rPr>
-              <a:t>Edge
-Constraints</a:t>
+              <a:t>Deterministic</a:t>
+            </a:r>
+          </a:p>
+          <a:p>
+            <a:pPr algn="ctr">
+              <a:lnSpc>
+                <a:spcPts val="1700"/>
+              </a:lnSpc>
+              <a:spcBef>
+                <a:spcPts val="0"/>
+              </a:spcBef>
+              <a:spcAft>
+                <a:spcPts val="0"/>
+              </a:spcAft>
+            </a:pPr>
+            <a:r>
+              <a:rPr sz="1600" b="1">
+                <a:solidFill>
+                  <a:srgbClr val="94E2D5"/>
+                </a:solidFill>
+                <a:latin typeface="Segoe UI"/>
+              </a:rPr>
+              <a:t>Execution</a:t>
             </a:r>
           </a:p>
         </p:txBody>
@@ -23739,10 +20846,73 @@
                 </a:solidFill>
                 <a:latin typeface="Segoe UI"/>
               </a:rPr>
-              <a:t>Edge market: $61B → $232B
-by 2030 (MarketsandMarkets).
-Devices need single-watt budgets.
-ATOMiK: ~20 mW.</a:t>
+              <a:t>Safety-critical systems need</a:t>
+            </a:r>
+          </a:p>
+          <a:p>
+            <a:pPr algn="ctr">
+              <a:lnSpc>
+                <a:spcPts val="1400"/>
+              </a:lnSpc>
+              <a:spcBef>
+                <a:spcPts val="0"/>
+              </a:spcBef>
+              <a:spcAft>
+                <a:spcPts val="0"/>
+              </a:spcAft>
+            </a:pPr>
+            <a:r>
+              <a:rPr sz="1100" b="0" dirty="0">
+                <a:solidFill>
+                  <a:schemeClr val="bg1"/>
+                </a:solidFill>
+                <a:latin typeface="Segoe UI"/>
+              </a:rPr>
+              <a:t>guaranteed latency. No caches,</a:t>
+            </a:r>
+          </a:p>
+          <a:p>
+            <a:pPr algn="ctr">
+              <a:lnSpc>
+                <a:spcPts val="1400"/>
+              </a:lnSpc>
+              <a:spcBef>
+                <a:spcPts val="0"/>
+              </a:spcBef>
+              <a:spcAft>
+                <a:spcPts val="0"/>
+              </a:spcAft>
+            </a:pPr>
+            <a:r>
+              <a:rPr sz="1100" b="0" dirty="0">
+                <a:solidFill>
+                  <a:schemeClr val="bg1"/>
+                </a:solidFill>
+                <a:latin typeface="Segoe UI"/>
+              </a:rPr>
+              <a:t>no speculation, no jitter.</a:t>
+            </a:r>
+          </a:p>
+          <a:p>
+            <a:pPr algn="ctr">
+              <a:lnSpc>
+                <a:spcPts val="1400"/>
+              </a:lnSpc>
+              <a:spcBef>
+                <a:spcPts val="0"/>
+              </a:spcBef>
+              <a:spcAft>
+                <a:spcPts val="0"/>
+              </a:spcAft>
+            </a:pPr>
+            <a:r>
+              <a:rPr sz="1100" b="0" dirty="0">
+                <a:solidFill>
+                  <a:schemeClr val="bg1"/>
+                </a:solidFill>
+                <a:latin typeface="Segoe UI"/>
+              </a:rPr>
+              <a:t>ATOMiK: ≤2-cycle deterministic.</a:t>
             </a:r>
           </a:p>
         </p:txBody>
@@ -23755,7 +20925,7 @@
         </p:nvSpPr>
         <p:spPr>
           <a:xfrm>
-            <a:off x="8823960" y="1381013"/>
+            <a:off x="-9000000" y="-9000000"/>
             <a:ext cx="2468880" cy="3474720"/>
           </a:xfrm>
           <a:prstGeom prst="roundRect">
@@ -23803,7 +20973,7 @@
         </p:nvSpPr>
         <p:spPr>
           <a:xfrm>
-            <a:off x="8823960" y="1381013"/>
+            <a:off x="-9000000" y="-9000000"/>
             <a:ext cx="2468880" cy="50800"/>
           </a:xfrm>
           <a:prstGeom prst="rect">
@@ -23847,7 +21017,7 @@
         </p:nvSpPr>
         <p:spPr>
           <a:xfrm>
-            <a:off x="9738360" y="1741842"/>
+            <a:off x="-9000000" y="-9000000"/>
             <a:ext cx="640080" cy="640080"/>
           </a:xfrm>
           <a:prstGeom prst="ellipse">
@@ -23891,7 +21061,7 @@
         </p:nvSpPr>
         <p:spPr>
           <a:xfrm>
-            <a:off x="9738360" y="1731682"/>
+            <a:off x="-5000000" y="-5000000"/>
             <a:ext cx="640080" cy="640080"/>
           </a:xfrm>
           <a:prstGeom prst="rect">
@@ -23934,7 +21104,7 @@
         </p:nvSpPr>
         <p:spPr>
           <a:xfrm>
-            <a:off x="8961120" y="2519082"/>
+            <a:off x="-9000000" y="-9000000"/>
             <a:ext cx="2194560" cy="731520"/>
           </a:xfrm>
           <a:prstGeom prst="rect">
@@ -23964,8 +21134,7 @@
                 </a:solidFill>
                 <a:latin typeface="Segoe UI"/>
               </a:rPr>
-              <a:t>HBM Cost
-Spiral</a:t>
+              <a:t/>
             </a:r>
           </a:p>
         </p:txBody>
@@ -23978,7 +21147,7 @@
         </p:nvSpPr>
         <p:spPr>
           <a:xfrm>
-            <a:off x="8961120" y="3164093"/>
+            <a:off x="-9000000" y="-9000000"/>
             <a:ext cx="2194560" cy="1645920"/>
           </a:xfrm>
           <a:prstGeom prst="rect">
@@ -24008,10 +21177,7 @@
                 </a:solidFill>
                 <a:latin typeface="Segoe UI"/>
               </a:rPr>
-              <a:t>Demand +130% YoY (TrendForce).
-Prices +35%.
-95–100% traffic reduction
-cuts HBM requirements.</a:t>
+              <a:t/>
             </a:r>
           </a:p>
         </p:txBody>
@@ -24024,7 +21190,7 @@
         </p:nvSpPr>
         <p:spPr>
           <a:xfrm>
-            <a:off x="731520" y="5130053"/>
+            <a:off x="-9000000" y="-9000000"/>
             <a:ext cx="10515600" cy="1097280"/>
           </a:xfrm>
           <a:prstGeom prst="roundRect">
@@ -24072,7 +21238,7 @@
         </p:nvSpPr>
         <p:spPr>
           <a:xfrm>
-            <a:off x="1005840" y="5311738"/>
+            <a:off x="-9000000" y="-9000000"/>
             <a:ext cx="9966960" cy="365760"/>
           </a:xfrm>
           <a:prstGeom prst="rect">
@@ -24102,7 +21268,7 @@
                 </a:solidFill>
                 <a:latin typeface="Segoe UI"/>
               </a:rPr>
-              <a:t>VC Climate: $280B deployed into US/Canadian startups in 2025 (+46% YoY)</a:t>
+              <a:t/>
             </a:r>
           </a:p>
         </p:txBody>
@@ -24115,7 +21281,7 @@
         </p:nvSpPr>
         <p:spPr>
           <a:xfrm>
-            <a:off x="1005840" y="5723218"/>
+            <a:off x="-9000000" y="-9000000"/>
             <a:ext cx="9966960" cy="365760"/>
           </a:xfrm>
           <a:prstGeom prst="rect">
@@ -24145,7 +21311,7 @@
                 </a:solidFill>
                 <a:latin typeface="Segoe UI"/>
               </a:rPr>
-              <a:t>AI seed median pre-money: $17.9M (42% premium over non-AI)  •  AI Series A median: &gt;$50M  •  Compute-focused seeds regularly &gt;$100M</a:t>
+              <a:t/>
             </a:r>
           </a:p>
         </p:txBody>
@@ -24264,7 +21430,7 @@
                 </a:solidFill>
                 <a:latin typeface="Segoe UI"/>
               </a:rPr>
-              <a:t>Market &amp; Use Cases</a:t>
+              <a:t>Commercial Motion</a:t>
             </a:r>
           </a:p>
         </p:txBody>
@@ -24397,16 +21563,29 @@
                 </a:solidFill>
                 <a:latin typeface="Segoe UI"/>
               </a:rPr>
-              <a:t>TAM </a:t>
-            </a:r>
+              <a:t>Paid Evaluation</a:t>
+            </a:r>
+          </a:p>
+          <a:p>
+            <a:pPr algn="ctr">
+              <a:lnSpc>
+                <a:spcPts val="1600"/>
+              </a:lnSpc>
+              <a:spcBef>
+                <a:spcPts val="0"/>
+              </a:spcBef>
+              <a:spcAft>
+                <a:spcPts val="0"/>
+              </a:spcAft>
+            </a:pPr>
             <a:r>
               <a:rPr sz="1400" b="1" dirty="0">
                 <a:solidFill>
-                  <a:schemeClr val="bg1"/>
-                </a:solidFill>
-                <a:latin typeface="Segoe UI"/>
-              </a:rPr>
-              <a:t>~$85B</a:t>
+                  <a:srgbClr val="89B4FA"/>
+                </a:solidFill>
+                <a:latin typeface="Segoe UI"/>
+              </a:rPr>
+              <a:t>$50K–$200K NRE</a:t>
             </a:r>
           </a:p>
         </p:txBody>
@@ -24495,16 +21674,29 @@
                 </a:solidFill>
                 <a:latin typeface="Segoe UI"/>
               </a:rPr>
-              <a:t>SAM </a:t>
-            </a:r>
+              <a:t>Per-Design License</a:t>
+            </a:r>
+          </a:p>
+          <a:p>
+            <a:pPr algn="ctr">
+              <a:lnSpc>
+                <a:spcPts val="1400"/>
+              </a:lnSpc>
+              <a:spcBef>
+                <a:spcPts val="0"/>
+              </a:spcBef>
+              <a:spcAft>
+                <a:spcPts val="0"/>
+              </a:spcAft>
+            </a:pPr>
             <a:r>
               <a:rPr sz="1300" b="1" dirty="0">
                 <a:solidFill>
-                  <a:schemeClr val="bg1"/>
-                </a:solidFill>
-                <a:latin typeface="Segoe UI"/>
-              </a:rPr>
-              <a:t>~$8B</a:t>
+                  <a:srgbClr val="94E2D5"/>
+                </a:solidFill>
+                <a:latin typeface="Segoe UI"/>
+              </a:rPr>
+              <a:t>$250K–$2M</a:t>
             </a:r>
           </a:p>
         </p:txBody>
@@ -24593,7 +21785,7 @@
                 </a:solidFill>
                 <a:latin typeface="Segoe UI"/>
               </a:rPr>
-              <a:t>SOM</a:t>
+              <a:t>Target Buyer:</a:t>
             </a:r>
           </a:p>
           <a:p>
@@ -24611,11 +21803,11 @@
             <a:r>
               <a:rPr sz="1300" b="1" dirty="0">
                 <a:solidFill>
-                  <a:schemeClr val="bg1"/>
-                </a:solidFill>
-                <a:latin typeface="Segoe UI"/>
-              </a:rPr>
-              <a:t>~$80M (Yr 5)</a:t>
+                  <a:srgbClr val="A6E3A1"/>
+                </a:solidFill>
+                <a:latin typeface="Segoe UI"/>
+              </a:rPr>
+              <a:t>FPGA/SoC Teams</a:t>
             </a:r>
           </a:p>
         </p:txBody>
@@ -24658,29 +21850,7 @@
                 </a:solidFill>
                 <a:latin typeface="Segoe UI"/>
               </a:rPr>
-              <a:t>FPGA: $10–14B  •  Edge: $61B  •  AI HW Accel: $10.2B</a:t>
-            </a:r>
-          </a:p>
-          <a:p>
-            <a:pPr algn="l">
-              <a:lnSpc>
-                <a:spcPts val="1000"/>
-              </a:lnSpc>
-              <a:spcBef>
-                <a:spcPts val="0"/>
-              </a:spcBef>
-              <a:spcAft>
-                <a:spcPts val="200"/>
-              </a:spcAft>
-            </a:pPr>
-            <a:r>
-              <a:rPr sz="900" b="0" dirty="0">
-                <a:solidFill>
-                  <a:srgbClr val="7F849C"/>
-                </a:solidFill>
-                <a:latin typeface="Segoe UI"/>
-              </a:rPr>
-              <a:t>Sources: MarketsandMarkets, Mordor Intelligence, GlobeNewsWire</a:t>
+              <a:t>Motion: Eval → License → Royalty  |  ACV $300K–$3M (ARM/CEVA comparables)</a:t>
             </a:r>
           </a:p>
         </p:txBody>
@@ -24815,25 +21985,29 @@
                 </a:solidFill>
                 <a:latin typeface="Segoe UI"/>
               </a:rPr>
-              <a:t>High-Frequency</a:t>
-            </a:r>
-            <a:r>
-              <a:rPr lang="en-US" sz="1400" b="1" dirty="0">
+              <a:t>Edge Sensor</a:t>
+            </a:r>
+          </a:p>
+          <a:p>
+            <a:pPr algn="l">
+              <a:lnSpc>
+                <a:spcPts val="1500"/>
+              </a:lnSpc>
+              <a:spcBef>
+                <a:spcPts val="0"/>
+              </a:spcBef>
+              <a:spcAft>
+                <a:spcPts val="0"/>
+              </a:spcAft>
+            </a:pPr>
+            <a:r>
+              <a:rPr sz="1400" b="1" dirty="0">
                 <a:solidFill>
                   <a:srgbClr val="F38BA8"/>
                 </a:solidFill>
                 <a:latin typeface="Segoe UI"/>
               </a:rPr>
-              <a:t> </a:t>
-            </a:r>
-            <a:r>
-              <a:rPr sz="1400" b="1" dirty="0">
-                <a:solidFill>
-                  <a:srgbClr val="F38BA8"/>
-                </a:solidFill>
-                <a:latin typeface="Segoe UI"/>
-              </a:rPr>
-              <a:t>Trading</a:t>
+              <a:t>Fusion</a:t>
             </a:r>
           </a:p>
         </p:txBody>
@@ -24878,9 +22052,55 @@
                 </a:solidFill>
                 <a:latin typeface="Segoe UI"/>
               </a:rPr>
-              <a:t>10.6 ns tick processing
-Instant trade reversal
-Lock-free parallel streams</a:t>
+              <a:t>1.8 mW, 287 LUT (0.54%)</a:t>
+            </a:r>
+          </a:p>
+          <a:p>
+            <a:pPr marL="171450" indent="-171450" algn="l">
+              <a:lnSpc>
+                <a:spcPts val="1300"/>
+              </a:lnSpc>
+              <a:spcBef>
+                <a:spcPts val="0"/>
+              </a:spcBef>
+              <a:spcAft>
+                <a:spcPts val="0"/>
+              </a:spcAft>
+              <a:buFont typeface="Arial" panose="020B0604020202020204" pitchFamily="34" charset="0"/>
+              <a:buChar char="•"/>
+            </a:pPr>
+            <a:r>
+              <a:rPr sz="1000" b="0" dirty="0">
+                <a:solidFill>
+                  <a:schemeClr val="bg1"/>
+                </a:solidFill>
+                <a:latin typeface="Segoe UI"/>
+              </a:rPr>
+              <a:t>Lock-free multi-stream merge</a:t>
+            </a:r>
+          </a:p>
+          <a:p>
+            <a:pPr marL="171450" indent="-171450" algn="l">
+              <a:lnSpc>
+                <a:spcPts val="1300"/>
+              </a:lnSpc>
+              <a:spcBef>
+                <a:spcPts val="0"/>
+              </a:spcBef>
+              <a:spcAft>
+                <a:spcPts val="0"/>
+              </a:spcAft>
+              <a:buFont typeface="Arial" panose="020B0604020202020204" pitchFamily="34" charset="0"/>
+              <a:buChar char="•"/>
+            </a:pPr>
+            <a:r>
+              <a:rPr sz="1000" b="0" dirty="0">
+                <a:solidFill>
+                  <a:schemeClr val="bg1"/>
+                </a:solidFill>
+                <a:latin typeface="Segoe UI"/>
+              </a:rPr>
+              <a:t>Linear scaling with sensors</a:t>
             </a:r>
           </a:p>
         </p:txBody>
@@ -24923,7 +22143,7 @@
                 </a:solidFill>
                 <a:latin typeface="Segoe UI"/>
               </a:rPr>
-              <a:t>$12B market</a:t>
+              <a:t>Primary beachhead</a:t>
             </a:r>
           </a:p>
         </p:txBody>
@@ -25058,25 +22278,29 @@
                 </a:solidFill>
                 <a:latin typeface="Segoe UI"/>
               </a:rPr>
-              <a:t>Edge Sensor</a:t>
-            </a:r>
-            <a:r>
-              <a:rPr lang="en-US" sz="1400" b="1" dirty="0">
+              <a:t>Industrial /</a:t>
+            </a:r>
+          </a:p>
+          <a:p>
+            <a:pPr algn="l">
+              <a:lnSpc>
+                <a:spcPts val="1500"/>
+              </a:lnSpc>
+              <a:spcBef>
+                <a:spcPts val="0"/>
+              </a:spcBef>
+              <a:spcAft>
+                <a:spcPts val="0"/>
+              </a:spcAft>
+            </a:pPr>
+            <a:r>
+              <a:rPr sz="1400" b="1" dirty="0">
                 <a:solidFill>
                   <a:srgbClr val="94E2D5"/>
                 </a:solidFill>
                 <a:latin typeface="Segoe UI"/>
               </a:rPr>
-              <a:t> </a:t>
-            </a:r>
-            <a:r>
-              <a:rPr sz="1400" b="1" dirty="0">
-                <a:solidFill>
-                  <a:srgbClr val="94E2D5"/>
-                </a:solidFill>
-                <a:latin typeface="Segoe UI"/>
-              </a:rPr>
-              <a:t>Fusion</a:t>
+              <a:t>Defense RT</a:t>
             </a:r>
           </a:p>
         </p:txBody>
@@ -25121,9 +22345,55 @@
                 </a:solidFill>
                 <a:latin typeface="Segoe UI"/>
               </a:rPr>
-              <a:t>~20 mW power budget
-Lock-free multi-stream merge
-Linear scaling with sensors</a:t>
+              <a:t>≤2-cycle jitter, no side channels</a:t>
+            </a:r>
+          </a:p>
+          <a:p>
+            <a:pPr marL="171450" indent="-171450" algn="l">
+              <a:lnSpc>
+                <a:spcPts val="1300"/>
+              </a:lnSpc>
+              <a:spcBef>
+                <a:spcPts val="0"/>
+              </a:spcBef>
+              <a:spcAft>
+                <a:spcPts val="0"/>
+              </a:spcAft>
+              <a:buFont typeface="Arial" panose="020B0604020202020204" pitchFamily="34" charset="0"/>
+              <a:buChar char="•"/>
+            </a:pPr>
+            <a:r>
+              <a:rPr sz="1000" b="0" dirty="0">
+                <a:solidFill>
+                  <a:schemeClr val="bg1"/>
+                </a:solidFill>
+                <a:latin typeface="Segoe UI"/>
+              </a:rPr>
+              <a:t>Formally verified (92 proofs)</a:t>
+            </a:r>
+          </a:p>
+          <a:p>
+            <a:pPr marL="171450" indent="-171450" algn="l">
+              <a:lnSpc>
+                <a:spcPts val="1300"/>
+              </a:lnSpc>
+              <a:spcBef>
+                <a:spcPts val="0"/>
+              </a:spcBef>
+              <a:spcAft>
+                <a:spcPts val="0"/>
+              </a:spcAft>
+              <a:buFont typeface="Arial" panose="020B0604020202020204" pitchFamily="34" charset="0"/>
+              <a:buChar char="•"/>
+            </a:pPr>
+            <a:r>
+              <a:rPr sz="1000" b="0" dirty="0">
+                <a:solidFill>
+                  <a:schemeClr val="bg1"/>
+                </a:solidFill>
+                <a:latin typeface="Segoe UI"/>
+              </a:rPr>
+              <a:t>Safety-critical viable</a:t>
             </a:r>
           </a:p>
         </p:txBody>
@@ -25166,7 +22436,7 @@
                 </a:solidFill>
                 <a:latin typeface="Segoe UI"/>
               </a:rPr>
-              <a:t>$61B→$232B market</a:t>
+              <a:t>Higher ACV, longer cycles</a:t>
             </a:r>
           </a:p>
         </p:txBody>
@@ -25301,25 +22571,29 @@
                 </a:solidFill>
                 <a:latin typeface="Segoe UI"/>
               </a:rPr>
-              <a:t>Streaming</a:t>
-            </a:r>
-            <a:r>
-              <a:rPr lang="en-US" sz="1400" b="1" dirty="0">
+              <a:t>HFT / Low-</a:t>
+            </a:r>
+          </a:p>
+          <a:p>
+            <a:pPr algn="l">
+              <a:lnSpc>
+                <a:spcPts val="1500"/>
+              </a:lnSpc>
+              <a:spcBef>
+                <a:spcPts val="0"/>
+              </a:spcBef>
+              <a:spcAft>
+                <a:spcPts val="0"/>
+              </a:spcAft>
+            </a:pPr>
+            <a:r>
+              <a:rPr sz="1400" b="1" dirty="0">
                 <a:solidFill>
                   <a:srgbClr val="F9E2AF"/>
                 </a:solidFill>
                 <a:latin typeface="Segoe UI"/>
               </a:rPr>
-              <a:t> </a:t>
-            </a:r>
-            <a:r>
-              <a:rPr sz="1400" b="1" dirty="0">
-                <a:solidFill>
-                  <a:srgbClr val="F9E2AF"/>
-                </a:solidFill>
-                <a:latin typeface="Segoe UI"/>
-              </a:rPr>
-              <a:t>Transforms</a:t>
+              <a:t>Latency Infra</a:t>
             </a:r>
           </a:p>
         </p:txBody>
@@ -25364,9 +22638,55 @@
                 </a:solidFill>
                 <a:latin typeface="Segoe UI"/>
               </a:rPr>
-              <a:t>95–100% memory reduction
-+55% pipeline speedup
-Frame/signal delta native</a:t>
+              <a:t>10.6 ns tick processing</a:t>
+            </a:r>
+          </a:p>
+          <a:p>
+            <a:pPr marL="171450" indent="-171450" algn="l">
+              <a:lnSpc>
+                <a:spcPts val="1300"/>
+              </a:lnSpc>
+              <a:spcBef>
+                <a:spcPts val="0"/>
+              </a:spcBef>
+              <a:spcAft>
+                <a:spcPts val="0"/>
+              </a:spcAft>
+              <a:buFont typeface="Arial" panose="020B0604020202020204" pitchFamily="34" charset="0"/>
+              <a:buChar char="•"/>
+            </a:pPr>
+            <a:r>
+              <a:rPr sz="1000" b="0" dirty="0">
+                <a:solidFill>
+                  <a:schemeClr val="bg1"/>
+                </a:solidFill>
+                <a:latin typeface="Segoe UI"/>
+              </a:rPr>
+              <a:t>Instant trade reversal</a:t>
+            </a:r>
+          </a:p>
+          <a:p>
+            <a:pPr marL="171450" indent="-171450" algn="l">
+              <a:lnSpc>
+                <a:spcPts val="1300"/>
+              </a:lnSpc>
+              <a:spcBef>
+                <a:spcPts val="0"/>
+              </a:spcBef>
+              <a:spcAft>
+                <a:spcPts val="0"/>
+              </a:spcAft>
+              <a:buFont typeface="Arial" panose="020B0604020202020204" pitchFamily="34" charset="0"/>
+              <a:buChar char="•"/>
+            </a:pPr>
+            <a:r>
+              <a:rPr sz="1000" b="0" dirty="0">
+                <a:solidFill>
+                  <a:schemeClr val="bg1"/>
+                </a:solidFill>
+                <a:latin typeface="Segoe UI"/>
+              </a:rPr>
+              <a:t>Lock-free parallel streams</a:t>
             </a:r>
           </a:p>
         </p:txBody>
@@ -25409,7 +22729,7 @@
                 </a:solidFill>
                 <a:latin typeface="Segoe UI"/>
               </a:rPr>
-              <a:t>Write-heavy verticals</a:t>
+              <a:t>Long-term target</a:t>
             </a:r>
           </a:p>
         </p:txBody>
@@ -25422,7 +22742,7 @@
         </p:nvSpPr>
         <p:spPr>
           <a:xfrm>
-            <a:off x="6278880" y="5281601"/>
+            <a:off x="-9000000" y="-9000000"/>
             <a:ext cx="4664186" cy="548640"/>
           </a:xfrm>
           <a:prstGeom prst="rect">
@@ -25452,25 +22772,7 @@
                 </a:solidFill>
                 <a:latin typeface="Segoe UI"/>
               </a:rPr>
-              <a:t>SOM </a:t>
-            </a:r>
-            <a:r>
-              <a:rPr lang="en-US" sz="1000" b="0" dirty="0">
-                <a:solidFill>
-                  <a:schemeClr val="bg1"/>
-                </a:solidFill>
-                <a:latin typeface="Segoe UI"/>
-              </a:rPr>
-              <a:t>M</a:t>
-            </a:r>
-            <a:r>
-              <a:rPr sz="1000" b="0" dirty="0">
-                <a:solidFill>
-                  <a:schemeClr val="bg1"/>
-                </a:solidFill>
-                <a:latin typeface="Segoe UI"/>
-              </a:rPr>
-              <a:t>ath: 15 design wins × $3M + 200 SDK subs × $50K + royalties = ~$80M</a:t>
+              <a:t/>
             </a:r>
           </a:p>
         </p:txBody>
@@ -25632,7 +22934,7 @@
                 </a:solidFill>
                 <a:latin typeface="Segoe UI"/>
               </a:rPr>
-              <a:t>Replace full-state read-modify-write with single-cycle delta accumulation.</a:t>
+              <a:t>Single-cycle delta accumulation replaces full-state read-modify-write.</a:t>
             </a:r>
           </a:p>
         </p:txBody>
@@ -26087,7 +23389,7 @@
           <p:nvPr>
             <p:extLst>
               <p:ext uri="{D42A27DB-BD31-4B8C-83A1-F6EECF244321}">
-                <p14:modId xmlns:p14="http://schemas.microsoft.com/office/powerpoint/2010/main" val="1317095794"/>
+                <p14:modId xmlns:p14="http://schemas.microsoft.com/office/powerpoint/2010/main" val="1862745692"/>
               </p:ext>
             </p:extLst>
           </p:nvPr>
@@ -26140,6 +23442,7 @@
                         </a:defRPr>
                       </a:pPr>
                       <a:r>
+                        <a:rPr dirty="0"/>
                         <a:t>Property</a:t>
                       </a:r>
                     </a:p>
@@ -26164,6 +23467,7 @@
                         </a:defRPr>
                       </a:pPr>
                       <a:r>
+                        <a:rPr dirty="0"/>
                         <a:t>Formula</a:t>
                       </a:r>
                     </a:p>
@@ -26188,6 +23492,7 @@
                         </a:defRPr>
                       </a:pPr>
                       <a:r>
+                        <a:rPr dirty="0"/>
                         <a:t>Hardware Implication</a:t>
                       </a:r>
                     </a:p>
@@ -26219,11 +23524,16 @@
                         </a:defRPr>
                       </a:pPr>
                       <a:r>
+                        <a:rPr dirty="0">
+                          <a:solidFill>
+                            <a:schemeClr val="bg1"/>
+                          </a:solidFill>
+                        </a:rPr>
                         <a:t>Commutativity</a:t>
                       </a:r>
                     </a:p>
                   </a:txBody>
-                  <a:tcPr marL="73152" marR="73152" marT="36576" marB="36576">
+                  <a:tcPr marL="73152" marR="73152" marT="36576" marB="36576" anchor="ctr">
                     <a:solidFill>
                       <a:srgbClr val="1E1E2E"/>
                     </a:solidFill>
@@ -26243,11 +23553,16 @@
                         </a:defRPr>
                       </a:pPr>
                       <a:r>
+                        <a:rPr dirty="0">
+                          <a:solidFill>
+                            <a:schemeClr val="bg1"/>
+                          </a:solidFill>
+                        </a:rPr>
                         <a:t>δ₁ ⊕ δ₂ = δ₂ ⊕ δ₁</a:t>
                       </a:r>
                     </a:p>
                   </a:txBody>
-                  <a:tcPr marL="73152" marR="73152" marT="36576" marB="36576">
+                  <a:tcPr marL="73152" marR="73152" marT="36576" marB="36576" anchor="ctr">
                     <a:solidFill>
                       <a:srgbClr val="1E1E2E"/>
                     </a:solidFill>
@@ -26267,6 +23582,11 @@
                         </a:defRPr>
                       </a:pPr>
                       <a:r>
+                        <a:rPr dirty="0">
+                          <a:solidFill>
+                            <a:schemeClr val="bg1"/>
+                          </a:solidFill>
+                        </a:rPr>
                         <a:t>Lock-free parallel banks</a:t>
                       </a:r>
                     </a:p>
@@ -26298,11 +23618,16 @@
                         </a:defRPr>
                       </a:pPr>
                       <a:r>
+                        <a:rPr dirty="0">
+                          <a:solidFill>
+                            <a:schemeClr val="bg1"/>
+                          </a:solidFill>
+                        </a:rPr>
                         <a:t>Associativity</a:t>
                       </a:r>
                     </a:p>
                   </a:txBody>
-                  <a:tcPr marL="73152" marR="73152" marT="36576" marB="36576">
+                  <a:tcPr marL="73152" marR="73152" marT="36576" marB="36576" anchor="ctr">
                     <a:solidFill>
                       <a:srgbClr val="1A1A28"/>
                     </a:solidFill>
@@ -26322,11 +23647,16 @@
                         </a:defRPr>
                       </a:pPr>
                       <a:r>
+                        <a:rPr dirty="0">
+                          <a:solidFill>
+                            <a:schemeClr val="bg1"/>
+                          </a:solidFill>
+                        </a:rPr>
                         <a:t>(δ₁ ⊕ δ₂) ⊕ δ₃ = δ₁ ⊕ (δ₂ ⊕ δ₃)</a:t>
                       </a:r>
                     </a:p>
                   </a:txBody>
-                  <a:tcPr marL="73152" marR="73152" marT="36576" marB="36576">
+                  <a:tcPr marL="73152" marR="73152" marT="36576" marB="36576" anchor="ctr">
                     <a:solidFill>
                       <a:srgbClr val="1A1A28"/>
                     </a:solidFill>
@@ -26346,7 +23676,12 @@
                         </a:defRPr>
                       </a:pPr>
                       <a:r>
-                        <a:t>Binary merge tree reduction</a:t>
+                        <a:rPr dirty="0">
+                          <a:solidFill>
+                            <a:schemeClr val="bg1"/>
+                          </a:solidFill>
+                        </a:rPr>
+                        <a:t>Pipelined merge reduction</a:t>
                       </a:r>
                     </a:p>
                   </a:txBody>
@@ -26377,11 +23712,16 @@
                         </a:defRPr>
                       </a:pPr>
                       <a:r>
+                        <a:rPr dirty="0">
+                          <a:solidFill>
+                            <a:schemeClr val="bg1"/>
+                          </a:solidFill>
+                        </a:rPr>
                         <a:t>Self-Inverse</a:t>
                       </a:r>
                     </a:p>
                   </a:txBody>
-                  <a:tcPr marL="73152" marR="73152" marT="36576" marB="36576">
+                  <a:tcPr marL="73152" marR="73152" marT="36576" marB="36576" anchor="ctr">
                     <a:solidFill>
                       <a:srgbClr val="1E1E2E"/>
                     </a:solidFill>
@@ -26401,11 +23741,16 @@
                         </a:defRPr>
                       </a:pPr>
                       <a:r>
+                        <a:rPr dirty="0">
+                          <a:solidFill>
+                            <a:schemeClr val="bg1"/>
+                          </a:solidFill>
+                        </a:rPr>
                         <a:t>δ ⊕ δ = 0</a:t>
                       </a:r>
                     </a:p>
                   </a:txBody>
-                  <a:tcPr marL="73152" marR="73152" marT="36576" marB="36576">
+                  <a:tcPr marL="73152" marR="73152" marT="36576" marB="36576" anchor="ctr">
                     <a:solidFill>
                       <a:srgbClr val="1E1E2E"/>
                     </a:solidFill>
@@ -26425,6 +23770,11 @@
                         </a:defRPr>
                       </a:pPr>
                       <a:r>
+                        <a:rPr dirty="0">
+                          <a:solidFill>
+                            <a:schemeClr val="bg1"/>
+                          </a:solidFill>
+                        </a:rPr>
                         <a:t>Every change is its own undo</a:t>
                       </a:r>
                     </a:p>
@@ -26456,11 +23806,16 @@
                         </a:defRPr>
                       </a:pPr>
                       <a:r>
+                        <a:rPr dirty="0">
+                          <a:solidFill>
+                            <a:schemeClr val="bg1"/>
+                          </a:solidFill>
+                        </a:rPr>
                         <a:t>Identity</a:t>
                       </a:r>
                     </a:p>
                   </a:txBody>
-                  <a:tcPr marL="73152" marR="73152" marT="36576" marB="36576">
+                  <a:tcPr marL="73152" marR="73152" marT="36576" marB="36576" anchor="ctr">
                     <a:solidFill>
                       <a:srgbClr val="1A1A28"/>
                     </a:solidFill>
@@ -26480,11 +23835,16 @@
                         </a:defRPr>
                       </a:pPr>
                       <a:r>
+                        <a:rPr dirty="0">
+                          <a:solidFill>
+                            <a:schemeClr val="bg1"/>
+                          </a:solidFill>
+                        </a:rPr>
                         <a:t>δ ⊕ 0 = δ</a:t>
                       </a:r>
                     </a:p>
                   </a:txBody>
-                  <a:tcPr marL="73152" marR="73152" marT="36576" marB="36576">
+                  <a:tcPr marL="73152" marR="73152" marT="36576" marB="36576" anchor="ctr">
                     <a:solidFill>
                       <a:srgbClr val="1A1A28"/>
                     </a:solidFill>
@@ -26504,7 +23864,12 @@
                         </a:defRPr>
                       </a:pPr>
                       <a:r>
-                        <a:t>Zero-cost no-op filtering</a:t>
+                        <a:rPr dirty="0">
+                          <a:solidFill>
+                            <a:schemeClr val="bg1"/>
+                          </a:solidFill>
+                        </a:rPr>
+                        <a:t>Zero-cost filtering</a:t>
                       </a:r>
                     </a:p>
                   </a:txBody>
@@ -26535,12 +23900,16 @@
                         </a:defRPr>
                       </a:pPr>
                       <a:r>
-                        <a:rPr dirty="0"/>
+                        <a:rPr dirty="0">
+                          <a:solidFill>
+                            <a:schemeClr val="bg1"/>
+                          </a:solidFill>
+                        </a:rPr>
                         <a:t>Closure</a:t>
                       </a:r>
                     </a:p>
                   </a:txBody>
-                  <a:tcPr marL="73152" marR="73152" marT="36576" marB="36576">
+                  <a:tcPr marL="73152" marR="73152" marT="36576" marB="36576" anchor="ctr">
                     <a:solidFill>
                       <a:srgbClr val="1E1E2E"/>
                     </a:solidFill>
@@ -26560,11 +23929,16 @@
                         </a:defRPr>
                       </a:pPr>
                       <a:r>
+                        <a:rPr dirty="0">
+                          <a:solidFill>
+                            <a:schemeClr val="bg1"/>
+                          </a:solidFill>
+                        </a:rPr>
                         <a:t>δ₁ ⊕ δ₂ ∈ Δ</a:t>
                       </a:r>
                     </a:p>
                   </a:txBody>
-                  <a:tcPr marL="73152" marR="73152" marT="36576" marB="36576">
+                  <a:tcPr marL="73152" marR="73152" marT="36576" marB="36576" anchor="ctr">
                     <a:solidFill>
                       <a:srgbClr val="1E1E2E"/>
                     </a:solidFill>
@@ -26584,7 +23958,11 @@
                         </a:defRPr>
                       </a:pPr>
                       <a:r>
-                        <a:rPr dirty="0"/>
+                        <a:rPr dirty="0">
+                          <a:solidFill>
+                            <a:schemeClr val="bg1"/>
+                          </a:solidFill>
+                        </a:rPr>
                         <a:t>No overflow, no type conversion</a:t>
                       </a:r>
                     </a:p>
@@ -27510,6 +24888,7 @@
           <a:lstStyle/>
           <a:p>
             <a:pPr algn="ctr"/>
+            <a:endParaRPr/>
           </a:p>
         </p:txBody>
       </p:sp>
@@ -27522,7 +24901,7 @@
         <p:spPr>
           <a:xfrm>
             <a:off x="731520" y="1600000"/>
-            <a:ext cx="1800000" cy="800000"/>
+            <a:ext cx="1800000" cy="1031493"/>
           </a:xfrm>
           <a:prstGeom prst="roundRect">
             <a:avLst/>
@@ -27553,6 +24932,7 @@
           <a:lstStyle/>
           <a:p>
             <a:pPr algn="ctr"/>
+            <a:endParaRPr/>
           </a:p>
         </p:txBody>
       </p:sp>
@@ -27669,8 +25049,8 @@
         </p:nvSpPr>
         <p:spPr>
           <a:xfrm>
-            <a:off x="3100000" y="1400000"/>
-            <a:ext cx="3600000" cy="1400000"/>
+            <a:off x="3128936" y="1419291"/>
+            <a:ext cx="3571064" cy="1689366"/>
           </a:xfrm>
           <a:prstGeom prst="roundRect">
             <a:avLst/>
@@ -27701,6 +25081,7 @@
           <a:lstStyle/>
           <a:p>
             <a:pPr algn="ctr"/>
+            <a:endParaRPr/>
           </a:p>
         </p:txBody>
       </p:sp>
@@ -27747,8 +25128,8 @@
         </p:nvSpPr>
         <p:spPr>
           <a:xfrm>
-            <a:off x="3250000" y="1750000"/>
-            <a:ext cx="580000" cy="400000"/>
+            <a:off x="3259646" y="1913975"/>
+            <a:ext cx="580000" cy="467518"/>
           </a:xfrm>
           <a:prstGeom prst="roundRect">
             <a:avLst/>
@@ -27779,6 +25160,7 @@
           <a:lstStyle/>
           <a:p>
             <a:pPr algn="ctr"/>
+            <a:endParaRPr/>
           </a:p>
         </p:txBody>
       </p:sp>
@@ -27790,7 +25172,7 @@
         </p:nvSpPr>
         <p:spPr>
           <a:xfrm>
-            <a:off x="3250000" y="1800000"/>
+            <a:off x="3259646" y="1963975"/>
             <a:ext cx="580000" cy="300000"/>
           </a:xfrm>
           <a:prstGeom prst="rect">
@@ -27825,7 +25207,7 @@
         </p:nvSpPr>
         <p:spPr>
           <a:xfrm>
-            <a:off x="3250000" y="1950000"/>
+            <a:off x="3250000" y="2355114"/>
             <a:ext cx="580000" cy="200000"/>
           </a:xfrm>
           <a:prstGeom prst="rect">
@@ -27860,8 +25242,8 @@
         </p:nvSpPr>
         <p:spPr>
           <a:xfrm>
-            <a:off x="3910000" y="1750000"/>
-            <a:ext cx="580000" cy="400000"/>
+            <a:off x="3919646" y="1913975"/>
+            <a:ext cx="580000" cy="467518"/>
           </a:xfrm>
           <a:prstGeom prst="roundRect">
             <a:avLst/>
@@ -27892,6 +25274,7 @@
           <a:lstStyle/>
           <a:p>
             <a:pPr algn="ctr"/>
+            <a:endParaRPr/>
           </a:p>
         </p:txBody>
       </p:sp>
@@ -27903,7 +25286,7 @@
         </p:nvSpPr>
         <p:spPr>
           <a:xfrm>
-            <a:off x="3910000" y="1800000"/>
+            <a:off x="3919646" y="1963975"/>
             <a:ext cx="580000" cy="300000"/>
           </a:xfrm>
           <a:prstGeom prst="rect">
@@ -27938,7 +25321,7 @@
         </p:nvSpPr>
         <p:spPr>
           <a:xfrm>
-            <a:off x="3910000" y="1950000"/>
+            <a:off x="3910000" y="2355114"/>
             <a:ext cx="580000" cy="200000"/>
           </a:xfrm>
           <a:prstGeom prst="rect">
@@ -27973,8 +25356,8 @@
         </p:nvSpPr>
         <p:spPr>
           <a:xfrm>
-            <a:off x="4570000" y="1750000"/>
-            <a:ext cx="580000" cy="400000"/>
+            <a:off x="4579646" y="1913975"/>
+            <a:ext cx="580000" cy="467518"/>
           </a:xfrm>
           <a:prstGeom prst="roundRect">
             <a:avLst/>
@@ -28005,6 +25388,7 @@
           <a:lstStyle/>
           <a:p>
             <a:pPr algn="ctr"/>
+            <a:endParaRPr/>
           </a:p>
         </p:txBody>
       </p:sp>
@@ -28016,7 +25400,7 @@
         </p:nvSpPr>
         <p:spPr>
           <a:xfrm>
-            <a:off x="4570000" y="1800000"/>
+            <a:off x="4579646" y="1963975"/>
             <a:ext cx="580000" cy="300000"/>
           </a:xfrm>
           <a:prstGeom prst="rect">
@@ -28051,7 +25435,7 @@
         </p:nvSpPr>
         <p:spPr>
           <a:xfrm>
-            <a:off x="4570000" y="1950000"/>
+            <a:off x="4570000" y="2355114"/>
             <a:ext cx="580000" cy="200000"/>
           </a:xfrm>
           <a:prstGeom prst="rect">
@@ -28086,8 +25470,8 @@
         </p:nvSpPr>
         <p:spPr>
           <a:xfrm>
-            <a:off x="5230000" y="1750000"/>
-            <a:ext cx="580000" cy="400000"/>
+            <a:off x="5239646" y="1913975"/>
+            <a:ext cx="580000" cy="467518"/>
           </a:xfrm>
           <a:prstGeom prst="roundRect">
             <a:avLst/>
@@ -28118,6 +25502,7 @@
           <a:lstStyle/>
           <a:p>
             <a:pPr algn="ctr"/>
+            <a:endParaRPr/>
           </a:p>
         </p:txBody>
       </p:sp>
@@ -28129,7 +25514,7 @@
         </p:nvSpPr>
         <p:spPr>
           <a:xfrm>
-            <a:off x="5230000" y="1800000"/>
+            <a:off x="5239646" y="2002557"/>
             <a:ext cx="580000" cy="300000"/>
           </a:xfrm>
           <a:prstGeom prst="rect">
@@ -28179,15 +25564,7 @@
           <a:lstStyle/>
           <a:p>
             <a:pPr algn="ctr"/>
-            <a:r>
-              <a:rPr sz="900" b="0">
-                <a:solidFill>
-                  <a:srgbClr val="7F849C"/>
-                </a:solidFill>
-                <a:latin typeface="Segoe UI"/>
-              </a:rPr>
-              <a:t/>
-            </a:r>
+            <a:endParaRPr/>
           </a:p>
         </p:txBody>
       </p:sp>
@@ -28199,8 +25576,8 @@
         </p:nvSpPr>
         <p:spPr>
           <a:xfrm>
-            <a:off x="5890000" y="1750000"/>
-            <a:ext cx="580000" cy="400000"/>
+            <a:off x="5899646" y="1913975"/>
+            <a:ext cx="580000" cy="467518"/>
           </a:xfrm>
           <a:prstGeom prst="roundRect">
             <a:avLst/>
@@ -28231,6 +25608,7 @@
           <a:lstStyle/>
           <a:p>
             <a:pPr algn="ctr"/>
+            <a:endParaRPr/>
           </a:p>
         </p:txBody>
       </p:sp>
@@ -28242,7 +25620,7 @@
         </p:nvSpPr>
         <p:spPr>
           <a:xfrm>
-            <a:off x="5890000" y="1800000"/>
+            <a:off x="5899646" y="1963975"/>
             <a:ext cx="580000" cy="300000"/>
           </a:xfrm>
           <a:prstGeom prst="rect">
@@ -28277,7 +25655,7 @@
         </p:nvSpPr>
         <p:spPr>
           <a:xfrm>
-            <a:off x="5890000" y="1950000"/>
+            <a:off x="5890000" y="2355114"/>
             <a:ext cx="580000" cy="200000"/>
           </a:xfrm>
           <a:prstGeom prst="rect">
@@ -28312,7 +25690,7 @@
         </p:nvSpPr>
         <p:spPr>
           <a:xfrm>
-            <a:off x="3100000" y="2200000"/>
+            <a:off x="3100000" y="2691924"/>
             <a:ext cx="3600000" cy="300000"/>
           </a:xfrm>
           <a:prstGeom prst="rect">
@@ -28383,7 +25761,7 @@
         <p:spPr>
           <a:xfrm>
             <a:off x="7300000" y="1600000"/>
-            <a:ext cx="1800000" cy="800000"/>
+            <a:ext cx="1800000" cy="1031493"/>
           </a:xfrm>
           <a:prstGeom prst="roundRect">
             <a:avLst/>
@@ -28414,6 +25792,7 @@
           <a:lstStyle/>
           <a:p>
             <a:pPr algn="ctr"/>
+            <a:endParaRPr/>
           </a:p>
         </p:txBody>
       </p:sp>
@@ -28460,7 +25839,7 @@
         </p:nvSpPr>
         <p:spPr>
           <a:xfrm>
-            <a:off x="7300000" y="1940000"/>
+            <a:off x="7309646" y="2036456"/>
             <a:ext cx="1800000" cy="400000"/>
           </a:xfrm>
           <a:prstGeom prst="rect">
@@ -28532,7 +25911,7 @@
         <p:spPr>
           <a:xfrm>
             <a:off x="9700000" y="1600000"/>
-            <a:ext cx="1800000" cy="800000"/>
+            <a:ext cx="1800000" cy="1031493"/>
           </a:xfrm>
           <a:prstGeom prst="roundRect">
             <a:avLst/>
@@ -28563,6 +25942,7 @@
           <a:lstStyle/>
           <a:p>
             <a:pPr algn="ctr"/>
+            <a:endParaRPr/>
           </a:p>
         </p:txBody>
       </p:sp>
@@ -28609,7 +25989,7 @@
         </p:nvSpPr>
         <p:spPr>
           <a:xfrm>
-            <a:off x="9700000" y="1940000"/>
+            <a:off x="9700000" y="2075038"/>
             <a:ext cx="1800000" cy="400000"/>
           </a:xfrm>
           <a:prstGeom prst="rect">
@@ -28712,6 +26092,7 @@
           <a:lstStyle/>
           <a:p>
             <a:pPr algn="ctr"/>
+            <a:endParaRPr/>
           </a:p>
         </p:txBody>
       </p:sp>
@@ -28724,7 +26105,7 @@
         <p:spPr>
           <a:xfrm>
             <a:off x="731520" y="3600000"/>
-            <a:ext cx="2500000" cy="700000"/>
+            <a:ext cx="2500000" cy="989367"/>
           </a:xfrm>
           <a:prstGeom prst="roundRect">
             <a:avLst/>
@@ -28755,6 +26136,7 @@
           <a:lstStyle/>
           <a:p>
             <a:pPr algn="ctr"/>
+            <a:endParaRPr/>
           </a:p>
         </p:txBody>
       </p:sp>
@@ -28836,7 +26218,7 @@
         </p:nvSpPr>
         <p:spPr>
           <a:xfrm>
-            <a:off x="831520" y="4070000"/>
+            <a:off x="831520" y="4291848"/>
             <a:ext cx="2300000" cy="200000"/>
           </a:xfrm>
           <a:prstGeom prst="rect">
@@ -28872,7 +26254,7 @@
         <p:spPr>
           <a:xfrm>
             <a:off x="3431520" y="3600000"/>
-            <a:ext cx="2500000" cy="700000"/>
+            <a:ext cx="2500000" cy="989367"/>
           </a:xfrm>
           <a:prstGeom prst="roundRect">
             <a:avLst/>
@@ -28903,6 +26285,7 @@
           <a:lstStyle/>
           <a:p>
             <a:pPr algn="ctr"/>
+            <a:endParaRPr/>
           </a:p>
         </p:txBody>
       </p:sp>
@@ -28984,7 +26367,7 @@
         </p:nvSpPr>
         <p:spPr>
           <a:xfrm>
-            <a:off x="3531520" y="4070000"/>
+            <a:off x="3531520" y="4291848"/>
             <a:ext cx="2300000" cy="200000"/>
           </a:xfrm>
           <a:prstGeom prst="rect">
@@ -29020,7 +26403,7 @@
         <p:spPr>
           <a:xfrm>
             <a:off x="6131520" y="3600000"/>
-            <a:ext cx="2500000" cy="700000"/>
+            <a:ext cx="2500000" cy="989367"/>
           </a:xfrm>
           <a:prstGeom prst="roundRect">
             <a:avLst/>
@@ -29051,6 +26434,7 @@
           <a:lstStyle/>
           <a:p>
             <a:pPr algn="ctr"/>
+            <a:endParaRPr/>
           </a:p>
         </p:txBody>
       </p:sp>
@@ -29132,7 +26516,7 @@
         </p:nvSpPr>
         <p:spPr>
           <a:xfrm>
-            <a:off x="6231520" y="4070000"/>
+            <a:off x="6231520" y="4291848"/>
             <a:ext cx="2300000" cy="200000"/>
           </a:xfrm>
           <a:prstGeom prst="rect">
@@ -29168,7 +26552,7 @@
         <p:spPr>
           <a:xfrm>
             <a:off x="8831520" y="3600000"/>
-            <a:ext cx="2500000" cy="700000"/>
+            <a:ext cx="2500000" cy="989367"/>
           </a:xfrm>
           <a:prstGeom prst="roundRect">
             <a:avLst/>
@@ -29199,6 +26583,7 @@
           <a:lstStyle/>
           <a:p>
             <a:pPr algn="ctr"/>
+            <a:endParaRPr/>
           </a:p>
         </p:txBody>
       </p:sp>
@@ -29280,7 +26665,7 @@
         </p:nvSpPr>
         <p:spPr>
           <a:xfrm>
-            <a:off x="8931520" y="4070000"/>
+            <a:off x="8931520" y="4291848"/>
             <a:ext cx="2300000" cy="200000"/>
           </a:xfrm>
           <a:prstGeom prst="rect">
@@ -29382,6 +26767,7 @@
           <a:lstStyle/>
           <a:p>
             <a:pPr algn="ctr"/>
+            <a:endParaRPr/>
           </a:p>
         </p:txBody>
       </p:sp>
@@ -29428,7 +26814,7 @@
         </p:nvSpPr>
         <p:spPr>
           <a:xfrm>
-            <a:off x="3231520" y="5100000"/>
+            <a:off x="1292760" y="5485823"/>
             <a:ext cx="2800000" cy="250000"/>
           </a:xfrm>
           <a:prstGeom prst="rect">
@@ -29463,7 +26849,7 @@
         </p:nvSpPr>
         <p:spPr>
           <a:xfrm>
-            <a:off x="6131520" y="5100000"/>
+            <a:off x="6941748" y="5071063"/>
             <a:ext cx="2400000" cy="250000"/>
           </a:xfrm>
           <a:prstGeom prst="rect">
@@ -29498,7 +26884,7 @@
         </p:nvSpPr>
         <p:spPr>
           <a:xfrm>
-            <a:off x="8631520" y="5100000"/>
+            <a:off x="7715192" y="5456886"/>
             <a:ext cx="2800000" cy="250000"/>
           </a:xfrm>
           <a:prstGeom prst="rect">
@@ -29533,8 +26919,70 @@
         </p:nvSpPr>
         <p:spPr>
           <a:xfrm>
-            <a:off x="731520" y="5650000"/>
-            <a:ext cx="2400000" cy="250000"/>
+            <a:off x="760457" y="6026177"/>
+            <a:ext cx="2400000" cy="292388"/>
+          </a:xfrm>
+          <a:prstGeom prst="rect">
+            <a:avLst/>
+          </a:prstGeom>
+          <a:noFill/>
+        </p:spPr>
+        <p:txBody>
+          <a:bodyPr wrap="square" lIns="91440" tIns="45720" rIns="91440" bIns="45720" anchor="t">
+            <a:spAutoFit/>
+          </a:bodyPr>
+          <a:lstStyle/>
+          <a:p>
+            <a:pPr algn="l"/>
+            <a:r>
+              <a:rPr lang="en-US" sz="1300" b="1" dirty="0">
+                <a:solidFill>
+                  <a:srgbClr val="A6E3A1"/>
+                </a:solidFill>
+                <a:latin typeface="Segoe UI"/>
+              </a:rPr>
+              <a:t>"</a:t>
+            </a:r>
+            <a:r>
+              <a:rPr sz="1300" b="1" dirty="0" err="1">
+                <a:solidFill>
+                  <a:srgbClr val="A6E3A1"/>
+                </a:solidFill>
+                <a:latin typeface="Segoe UI"/>
+              </a:rPr>
+              <a:t>syn_keep</a:t>
+            </a:r>
+            <a:r>
+              <a:rPr lang="en-US" sz="1300" b="1" dirty="0">
+                <a:solidFill>
+                  <a:srgbClr val="A6E3A1"/>
+                </a:solidFill>
+                <a:latin typeface="Segoe UI"/>
+              </a:rPr>
+              <a:t>"</a:t>
+            </a:r>
+            <a:r>
+              <a:rPr sz="1300" b="1" dirty="0">
+                <a:solidFill>
+                  <a:srgbClr val="A6E3A1"/>
+                </a:solidFill>
+                <a:latin typeface="Segoe UI"/>
+              </a:rPr>
+              <a:t> attributes</a:t>
+            </a:r>
+          </a:p>
+        </p:txBody>
+      </p:sp>
+      <p:sp>
+        <p:nvSpPr>
+          <p:cNvPr id="60" name="TextBox 59"/>
+          <p:cNvSpPr txBox="1"/>
+          <p:nvPr/>
+        </p:nvSpPr>
+        <p:spPr>
+          <a:xfrm>
+            <a:off x="1312052" y="6412000"/>
+            <a:ext cx="3417316" cy="276999"/>
           </a:xfrm>
           <a:prstGeom prst="rect">
             <a:avLst/>
@@ -29549,27 +26997,27 @@
           <a:p>
             <a:pPr algn="l"/>
             <a:r>
-              <a:rPr sz="1300" b="1">
-                <a:solidFill>
-                  <a:srgbClr val="A6E3A1"/>
-                </a:solidFill>
-                <a:latin typeface="Segoe UI"/>
-              </a:rPr>
-              <a:t>syn_keep attributes</a:t>
-            </a:r>
-          </a:p>
-        </p:txBody>
-      </p:sp>
-      <p:sp>
-        <p:nvSpPr>
-          <p:cNvPr id="60" name="TextBox 59"/>
-          <p:cNvSpPr txBox="1"/>
-          <p:nvPr/>
-        </p:nvSpPr>
-        <p:spPr>
-          <a:xfrm>
-            <a:off x="3231520" y="5650000"/>
-            <a:ext cx="2800000" cy="250000"/>
+              <a:rPr sz="1200" b="0">
+                <a:solidFill>
+                  <a:srgbClr val="7F849C"/>
+                </a:solidFill>
+                <a:latin typeface="Segoe UI"/>
+              </a:rPr>
+              <a:t>Prevent carry-chain inference (+42% Fmax)</a:t>
+            </a:r>
+          </a:p>
+        </p:txBody>
+      </p:sp>
+      <p:sp>
+        <p:nvSpPr>
+          <p:cNvPr id="61" name="TextBox 60"/>
+          <p:cNvSpPr txBox="1"/>
+          <p:nvPr/>
+        </p:nvSpPr>
+        <p:spPr>
+          <a:xfrm>
+            <a:off x="6970685" y="5997240"/>
+            <a:ext cx="2400000" cy="250000"/>
           </a:xfrm>
           <a:prstGeom prst="rect">
             <a:avLst/>
@@ -29584,41 +27032,6 @@
           <a:p>
             <a:pPr algn="l"/>
             <a:r>
-              <a:rPr sz="1200" b="0">
-                <a:solidFill>
-                  <a:srgbClr val="7F849C"/>
-                </a:solidFill>
-                <a:latin typeface="Segoe UI"/>
-              </a:rPr>
-              <a:t>Prevent carry-chain inference (+42% Fmax)</a:t>
-            </a:r>
-          </a:p>
-        </p:txBody>
-      </p:sp>
-      <p:sp>
-        <p:nvSpPr>
-          <p:cNvPr id="61" name="TextBox 60"/>
-          <p:cNvSpPr txBox="1"/>
-          <p:nvPr/>
-        </p:nvSpPr>
-        <p:spPr>
-          <a:xfrm>
-            <a:off x="6131520" y="5650000"/>
-            <a:ext cx="2400000" cy="250000"/>
-          </a:xfrm>
-          <a:prstGeom prst="rect">
-            <a:avLst/>
-          </a:prstGeom>
-          <a:noFill/>
-        </p:spPr>
-        <p:txBody>
-          <a:bodyPr wrap="square">
-            <a:spAutoFit/>
-          </a:bodyPr>
-          <a:lstStyle/>
-          <a:p>
-            <a:pPr algn="l"/>
-            <a:r>
               <a:rPr sz="1300" b="1">
                 <a:solidFill>
                   <a:srgbClr val="A6E3A1"/>
@@ -29638,7 +27051,7 @@
         </p:nvSpPr>
         <p:spPr>
           <a:xfrm>
-            <a:off x="8631520" y="5650000"/>
+            <a:off x="7734483" y="6383063"/>
             <a:ext cx="2800000" cy="250000"/>
           </a:xfrm>
           <a:prstGeom prst="rect">
@@ -30357,8 +27770,7 @@
                 </a:solidFill>
                 <a:latin typeface="Segoe UI"/>
               </a:rPr>
-              <a:t>Pre-built domain
-modules (HFT, IoT)</a:t>
+              <a:t>modules (sensor, industrial)</a:t>
             </a:r>
           </a:p>
         </p:txBody>
@@ -33223,7 +30635,7 @@
         </p:nvSpPr>
         <p:spPr>
           <a:xfrm>
-            <a:off x="7772400" y="3794760"/>
+            <a:off x="-9000000" y="-9000000"/>
             <a:ext cx="3291840" cy="1051560"/>
           </a:xfrm>
           <a:prstGeom prst="roundRect">
@@ -33271,7 +30683,7 @@
         </p:nvSpPr>
         <p:spPr>
           <a:xfrm>
-            <a:off x="7772400" y="3794760"/>
+            <a:off x="-9000000" y="-9000000"/>
             <a:ext cx="50800" cy="1051560"/>
           </a:xfrm>
           <a:prstGeom prst="rect">
@@ -33315,7 +30727,7 @@
         </p:nvSpPr>
         <p:spPr>
           <a:xfrm>
-            <a:off x="7955280" y="3886200"/>
+            <a:off x="-9000000" y="-9000000"/>
             <a:ext cx="3017520" cy="457200"/>
           </a:xfrm>
           <a:prstGeom prst="rect">
@@ -33345,7 +30757,7 @@
                 </a:solidFill>
                 <a:latin typeface="Segoe UI"/>
               </a:rPr>
-              <a:t>~$225 total</a:t>
+              <a:t/>
             </a:r>
           </a:p>
         </p:txBody>
@@ -33358,7 +30770,7 @@
         </p:nvSpPr>
         <p:spPr>
           <a:xfrm>
-            <a:off x="7955280" y="4389120"/>
+            <a:off x="-9000000" y="-9000000"/>
             <a:ext cx="3017520" cy="365760"/>
           </a:xfrm>
           <a:prstGeom prst="rect">
@@ -33388,7 +30800,7 @@
                 </a:solidFill>
                 <a:latin typeface="Segoe UI"/>
               </a:rPr>
-              <a:t>Development cost (AI tokens)</a:t>
+              <a:t/>
             </a:r>
           </a:p>
         </p:txBody>

--- a/business/pitch_deck/ATOMiK_Investor_Deck.pptx
+++ b/business/pitch_deck/ATOMiK_Investor_Deck.pptx
@@ -3301,7 +3301,7 @@
                 </a:solidFill>
                 <a:latin typeface="Aptos"/>
               </a:rPr>
-              <a:t>PRE-SEED  ·  $2.0M  ·  POST-MONEY SAFE</a:t>
+              <a:t>PRE-SEED  ·  $2.0M TARGET  ·  PLANNED SAFE</a:t>
             </a:r>
           </a:p>
         </p:txBody>
@@ -3353,8 +3353,8 @@
         </p:nvSpPr>
         <p:spPr>
           <a:xfrm>
-            <a:off x="704088" y="1920240"/>
-            <a:ext cx="9326880" cy="502920"/>
+            <a:off x="704088" y="1901952"/>
+            <a:ext cx="5303520" cy="566928"/>
           </a:xfrm>
           <a:prstGeom prst="rect">
             <a:avLst/>
@@ -3373,13 +3373,13 @@
               </a:spcAft>
             </a:pPr>
             <a:r>
-              <a:rPr sz="1500" b="0">
+              <a:rPr sz="1440" b="0">
                 <a:solidFill>
                   <a:srgbClr val="9FB1C7"/>
                 </a:solidFill>
                 <a:latin typeface="Aptos"/>
               </a:rPr>
-              <a:t>State-aware compute architecture that reduces wasted state movement for constrained edge, embedded, and AI workloads.</a:t>
+              <a:t>For edge and embedded teams whose battery, heat, bandwidth, latency, or footprint is constrained by repeated state work.</a:t>
             </a:r>
           </a:p>
         </p:txBody>
@@ -3393,7 +3393,7 @@
         <p:spPr>
           <a:xfrm>
             <a:off x="704088" y="2615184"/>
-            <a:ext cx="2514600" cy="310896"/>
+            <a:ext cx="2331720" cy="310896"/>
           </a:xfrm>
           <a:prstGeom prst="roundRect">
             <a:avLst>
@@ -3440,7 +3440,7 @@
         <p:spPr>
           <a:xfrm>
             <a:off x="813816" y="2688336"/>
-            <a:ext cx="2295144" cy="164592"/>
+            <a:ext cx="2112264" cy="164592"/>
           </a:xfrm>
           <a:prstGeom prst="rect">
             <a:avLst/>
@@ -3465,7 +3465,7 @@
                 </a:solidFill>
                 <a:latin typeface="Aptos"/>
               </a:rPr>
-              <a:t>HARDWARE_VALIDATED on Zynq FPGA</a:t>
+              <a:t>Zynq UI proof</a:t>
             </a:r>
           </a:p>
         </p:txBody>
@@ -3478,8 +3478,8 @@
         </p:nvSpPr>
         <p:spPr>
           <a:xfrm>
-            <a:off x="3383280" y="2615184"/>
-            <a:ext cx="2148840" cy="310896"/>
+            <a:off x="3218688" y="2615184"/>
+            <a:ext cx="2606040" cy="310896"/>
           </a:xfrm>
           <a:prstGeom prst="roundRect">
             <a:avLst>
@@ -3525,8 +3525,8 @@
         </p:nvSpPr>
         <p:spPr>
           <a:xfrm>
-            <a:off x="3493008" y="2688336"/>
-            <a:ext cx="1929384" cy="164592"/>
+            <a:off x="3328416" y="2688336"/>
+            <a:ext cx="2386584" cy="164592"/>
           </a:xfrm>
           <a:prstGeom prst="rect">
             <a:avLst/>
@@ -3551,14 +3551,100 @@
                 </a:solidFill>
                 <a:latin typeface="Aptos"/>
               </a:rPr>
-              <a:t>16/16 algebraic proofs pass</a:t>
-            </a:r>
-          </a:p>
-        </p:txBody>
-      </p:sp>
-      <p:sp>
-        <p:nvSpPr>
-          <p:cNvPr id="13" name="TextBox 12"/>
+              <a:t>Linux-to-FPGA path</a:t>
+            </a:r>
+          </a:p>
+        </p:txBody>
+      </p:sp>
+      <p:sp>
+        <p:nvSpPr>
+          <p:cNvPr id="13" name="Rounded Rectangle 12"/>
+          <p:cNvSpPr/>
+          <p:nvPr/>
+        </p:nvSpPr>
+        <p:spPr>
+          <a:xfrm>
+            <a:off x="6016752" y="2615184"/>
+            <a:ext cx="2697480" cy="310896"/>
+          </a:xfrm>
+          <a:prstGeom prst="roundRect">
+            <a:avLst>
+              <a:gd name="adj" fmla="val 8000"/>
+            </a:avLst>
+          </a:prstGeom>
+          <a:solidFill>
+            <a:srgbClr val="101A29"/>
+          </a:solidFill>
+          <a:ln w="9525">
+            <a:solidFill>
+              <a:srgbClr val="1D324A"/>
+            </a:solidFill>
+          </a:ln>
+        </p:spPr>
+        <p:style>
+          <a:lnRef idx="1">
+            <a:schemeClr val="accent1"/>
+          </a:lnRef>
+          <a:fillRef idx="3">
+            <a:schemeClr val="accent1"/>
+          </a:fillRef>
+          <a:effectRef idx="2">
+            <a:schemeClr val="accent1"/>
+          </a:effectRef>
+          <a:fontRef idx="minor">
+            <a:schemeClr val="lt1"/>
+          </a:fontRef>
+        </p:style>
+        <p:txBody>
+          <a:bodyPr rtlCol="0" anchor="ctr"/>
+          <a:lstStyle/>
+          <a:p>
+            <a:pPr algn="ctr"/>
+          </a:p>
+        </p:txBody>
+      </p:sp>
+      <p:sp>
+        <p:nvSpPr>
+          <p:cNvPr id="14" name="TextBox 13"/>
+          <p:cNvSpPr txBox="1"/>
+          <p:nvPr/>
+        </p:nvSpPr>
+        <p:spPr>
+          <a:xfrm>
+            <a:off x="6126480" y="2688336"/>
+            <a:ext cx="2478024" cy="164592"/>
+          </a:xfrm>
+          <a:prstGeom prst="rect">
+            <a:avLst/>
+          </a:prstGeom>
+          <a:noFill/>
+        </p:spPr>
+        <p:txBody>
+          <a:bodyPr wrap="square" lIns="0" rIns="0" tIns="0" bIns="0" anchor="t">
+            <a:spAutoFit/>
+          </a:bodyPr>
+          <a:lstStyle/>
+          <a:p>
+            <a:pPr algn="ctr">
+              <a:spcAft>
+                <a:spcPts val="0"/>
+              </a:spcAft>
+            </a:pPr>
+            <a:r>
+              <a:rPr sz="850" b="1">
+                <a:solidFill>
+                  <a:srgbClr val="A78BFA"/>
+                </a:solidFill>
+                <a:latin typeface="Aptos"/>
+              </a:rPr>
+              <a:t>16/16 property checks</a:t>
+            </a:r>
+          </a:p>
+        </p:txBody>
+      </p:sp>
+      <p:sp>
+        <p:nvSpPr>
+          <p:cNvPr id="15" name="TextBox 14"/>
           <p:cNvSpPr txBox="1"/>
           <p:nvPr/>
         </p:nvSpPr>
@@ -3590,14 +3676,14 @@
                 </a:solidFill>
                 <a:latin typeface="Aptos"/>
               </a:rPr>
-              <a:t>Every constrained system wastes resources rediscovering what changed. ATOMiK tracks meaningful change instead — reducing bytes moved, operations repeated, and state scanned.</a:t>
+              <a:t>Bring one workload. Measure wasted state movement. Decide fit with evidence.</a:t>
             </a:r>
           </a:p>
         </p:txBody>
       </p:sp>
       <p:pic>
         <p:nvPicPr>
-          <p:cNvPr id="14" name="Picture 13" descr="09-current-live-atomik-desk-v039k.png"/>
+          <p:cNvPr id="16" name="Picture 15" descr="09-current-live-atomik-desk-v039k.png"/>
           <p:cNvPicPr>
             <a:picLocks noChangeAspect="1"/>
           </p:cNvPicPr>
@@ -3611,8 +3697,8 @@
         </p:blipFill>
         <p:spPr>
           <a:xfrm>
-            <a:off x="5623560" y="1104424"/>
-            <a:ext cx="5989320" cy="3368992"/>
+            <a:off x="7784084" y="3035808"/>
+            <a:ext cx="2308352" cy="1298448"/>
           </a:xfrm>
           <a:prstGeom prst="rect">
             <a:avLst/>
@@ -3621,7 +3707,7 @@
       </p:pic>
       <p:sp>
         <p:nvSpPr>
-          <p:cNvPr id="15" name="Rounded Rectangle 14"/>
+          <p:cNvPr id="17" name="Rounded Rectangle 16"/>
           <p:cNvSpPr/>
           <p:nvPr/>
         </p:nvSpPr>
@@ -3668,7 +3754,7 @@
       </p:sp>
       <p:sp>
         <p:nvSpPr>
-          <p:cNvPr id="16" name="Rectangle 15"/>
+          <p:cNvPr id="18" name="Rectangle 17"/>
           <p:cNvSpPr/>
           <p:nvPr/>
         </p:nvSpPr>
@@ -3711,7 +3797,7 @@
       </p:sp>
       <p:sp>
         <p:nvSpPr>
-          <p:cNvPr id="17" name="TextBox 16"/>
+          <p:cNvPr id="19" name="TextBox 18"/>
           <p:cNvSpPr txBox="1"/>
           <p:nvPr/>
         </p:nvSpPr>
@@ -3750,7 +3836,7 @@
       </p:sp>
       <p:sp>
         <p:nvSpPr>
-          <p:cNvPr id="18" name="TextBox 17"/>
+          <p:cNvPr id="20" name="TextBox 19"/>
           <p:cNvSpPr txBox="1"/>
           <p:nvPr/>
         </p:nvSpPr>
@@ -3782,14 +3868,14 @@
                 </a:solidFill>
                 <a:latin typeface="Aptos"/>
               </a:rPr>
-              <a:t>Architecture + implementation + workload evidence → licensing or strategic acquisition</a:t>
-            </a:r>
-          </a:p>
-        </p:txBody>
-      </p:sp>
-      <p:sp>
-        <p:nvSpPr>
-          <p:cNvPr id="19" name="Rounded Rectangle 18"/>
+              <a:t>Architecture + proof + IP packet</a:t>
+            </a:r>
+          </a:p>
+        </p:txBody>
+      </p:sp>
+      <p:sp>
+        <p:nvSpPr>
+          <p:cNvPr id="21" name="Rounded Rectangle 20"/>
           <p:cNvSpPr/>
           <p:nvPr/>
         </p:nvSpPr>
@@ -3836,7 +3922,7 @@
       </p:sp>
       <p:sp>
         <p:nvSpPr>
-          <p:cNvPr id="20" name="Rectangle 19"/>
+          <p:cNvPr id="22" name="Rectangle 21"/>
           <p:cNvSpPr/>
           <p:nvPr/>
         </p:nvSpPr>
@@ -3879,7 +3965,7 @@
       </p:sp>
       <p:sp>
         <p:nvSpPr>
-          <p:cNvPr id="21" name="TextBox 20"/>
+          <p:cNvPr id="23" name="TextBox 22"/>
           <p:cNvSpPr txBox="1"/>
           <p:nvPr/>
         </p:nvSpPr>
@@ -3918,7 +4004,7 @@
       </p:sp>
       <p:sp>
         <p:nvSpPr>
-          <p:cNvPr id="22" name="TextBox 21"/>
+          <p:cNvPr id="24" name="TextBox 23"/>
           <p:cNvSpPr txBox="1"/>
           <p:nvPr/>
         </p:nvSpPr>
@@ -3950,14 +4036,14 @@
                 </a:solidFill>
                 <a:latin typeface="Aptos"/>
               </a:rPr>
-              <a:t>ATOMiK Desk v0.39-K running on Zynq hardware today</a:t>
-            </a:r>
-          </a:p>
-        </p:txBody>
-      </p:sp>
-      <p:sp>
-        <p:nvSpPr>
-          <p:cNvPr id="23" name="Rounded Rectangle 22"/>
+              <a:t>v0.39-K running on Zynq</a:t>
+            </a:r>
+          </a:p>
+        </p:txBody>
+      </p:sp>
+      <p:sp>
+        <p:nvSpPr>
+          <p:cNvPr id="25" name="Rounded Rectangle 24"/>
           <p:cNvSpPr/>
           <p:nvPr/>
         </p:nvSpPr>
@@ -4004,7 +4090,7 @@
       </p:sp>
       <p:sp>
         <p:nvSpPr>
-          <p:cNvPr id="24" name="Rectangle 23"/>
+          <p:cNvPr id="26" name="Rectangle 25"/>
           <p:cNvSpPr/>
           <p:nvPr/>
         </p:nvSpPr>
@@ -4047,7 +4133,7 @@
       </p:sp>
       <p:sp>
         <p:nvSpPr>
-          <p:cNvPr id="25" name="TextBox 24"/>
+          <p:cNvPr id="27" name="TextBox 26"/>
           <p:cNvSpPr txBox="1"/>
           <p:nvPr/>
         </p:nvSpPr>
@@ -4086,7 +4172,7 @@
       </p:sp>
       <p:sp>
         <p:nvSpPr>
-          <p:cNvPr id="26" name="TextBox 25"/>
+          <p:cNvPr id="28" name="TextBox 27"/>
           <p:cNvSpPr txBox="1"/>
           <p:nvPr/>
         </p:nvSpPr>
@@ -4118,7 +4204,7 @@
                 </a:solidFill>
                 <a:latin typeface="Aptos"/>
               </a:rPr>
-              <a:t>$2M funds measured customer proof + IP diligence + ASIC feasibility</a:t>
+              <a:t>measured workload proof + IP diligence</a:t>
             </a:r>
           </a:p>
         </p:txBody>
@@ -4395,8 +4481,8 @@
         </p:nvSpPr>
         <p:spPr>
           <a:xfrm>
-            <a:off x="777240" y="1828800"/>
-            <a:ext cx="3337560" cy="1060704"/>
+            <a:off x="777240" y="2240280"/>
+            <a:ext cx="3337560" cy="932688"/>
           </a:xfrm>
           <a:prstGeom prst="roundRect">
             <a:avLst>
@@ -4442,7 +4528,7 @@
         </p:nvSpPr>
         <p:spPr>
           <a:xfrm>
-            <a:off x="941832" y="1975104"/>
+            <a:off x="941832" y="2386584"/>
             <a:ext cx="566928" cy="38100"/>
           </a:xfrm>
           <a:prstGeom prst="rect">
@@ -4485,7 +4571,7 @@
         </p:nvSpPr>
         <p:spPr>
           <a:xfrm>
-            <a:off x="941832" y="2157984"/>
+            <a:off x="941832" y="2569464"/>
             <a:ext cx="3008376" cy="274320"/>
           </a:xfrm>
           <a:prstGeom prst="rect">
@@ -4524,8 +4610,8 @@
         </p:nvSpPr>
         <p:spPr>
           <a:xfrm>
-            <a:off x="941832" y="2532888"/>
-            <a:ext cx="3008376" cy="237744"/>
+            <a:off x="941832" y="2944368"/>
+            <a:ext cx="3008376" cy="109728"/>
           </a:xfrm>
           <a:prstGeom prst="rect">
             <a:avLst/>
@@ -4544,7 +4630,7 @@
               </a:spcAft>
             </a:pPr>
             <a:r>
-              <a:rPr sz="1019" b="0">
+              <a:rPr sz="940" b="0">
                 <a:solidFill>
                   <a:srgbClr val="9FB1C7"/>
                 </a:solidFill>
@@ -4563,8 +4649,8 @@
         </p:nvSpPr>
         <p:spPr>
           <a:xfrm>
-            <a:off x="4526279" y="1828800"/>
-            <a:ext cx="3337560" cy="1060704"/>
+            <a:off x="4526279" y="2240280"/>
+            <a:ext cx="3337560" cy="932688"/>
           </a:xfrm>
           <a:prstGeom prst="roundRect">
             <a:avLst>
@@ -4610,7 +4696,7 @@
         </p:nvSpPr>
         <p:spPr>
           <a:xfrm>
-            <a:off x="4690871" y="1975104"/>
+            <a:off x="4690871" y="2386584"/>
             <a:ext cx="566928" cy="38100"/>
           </a:xfrm>
           <a:prstGeom prst="rect">
@@ -4653,7 +4739,7 @@
         </p:nvSpPr>
         <p:spPr>
           <a:xfrm>
-            <a:off x="4690871" y="2157984"/>
+            <a:off x="4690871" y="2569464"/>
             <a:ext cx="3008376" cy="274320"/>
           </a:xfrm>
           <a:prstGeom prst="rect">
@@ -4692,8 +4778,8 @@
         </p:nvSpPr>
         <p:spPr>
           <a:xfrm>
-            <a:off x="4690871" y="2532888"/>
-            <a:ext cx="3008376" cy="237744"/>
+            <a:off x="4690871" y="2944368"/>
+            <a:ext cx="3008376" cy="109728"/>
           </a:xfrm>
           <a:prstGeom prst="rect">
             <a:avLst/>
@@ -4712,7 +4798,7 @@
               </a:spcAft>
             </a:pPr>
             <a:r>
-              <a:rPr sz="1019" b="0">
+              <a:rPr sz="940" b="0">
                 <a:solidFill>
                   <a:srgbClr val="9FB1C7"/>
                 </a:solidFill>
@@ -4731,8 +4817,8 @@
         </p:nvSpPr>
         <p:spPr>
           <a:xfrm>
-            <a:off x="8275319" y="1828800"/>
-            <a:ext cx="3337560" cy="1060704"/>
+            <a:off x="8275319" y="2240280"/>
+            <a:ext cx="3337560" cy="932688"/>
           </a:xfrm>
           <a:prstGeom prst="roundRect">
             <a:avLst>
@@ -4778,7 +4864,7 @@
         </p:nvSpPr>
         <p:spPr>
           <a:xfrm>
-            <a:off x="8439911" y="1975104"/>
+            <a:off x="8439911" y="2386584"/>
             <a:ext cx="566928" cy="38100"/>
           </a:xfrm>
           <a:prstGeom prst="rect">
@@ -4821,7 +4907,7 @@
         </p:nvSpPr>
         <p:spPr>
           <a:xfrm>
-            <a:off x="8439911" y="2157984"/>
+            <a:off x="8439911" y="2569464"/>
             <a:ext cx="3008376" cy="274320"/>
           </a:xfrm>
           <a:prstGeom prst="rect">
@@ -4860,8 +4946,8 @@
         </p:nvSpPr>
         <p:spPr>
           <a:xfrm>
-            <a:off x="8439911" y="2532888"/>
-            <a:ext cx="3008376" cy="237744"/>
+            <a:off x="8439911" y="2944368"/>
+            <a:ext cx="3008376" cy="109728"/>
           </a:xfrm>
           <a:prstGeom prst="rect">
             <a:avLst/>
@@ -4880,7 +4966,7 @@
               </a:spcAft>
             </a:pPr>
             <a:r>
-              <a:rPr sz="1019" b="0">
+              <a:rPr sz="940" b="0">
                 <a:solidFill>
                   <a:srgbClr val="9FB1C7"/>
                 </a:solidFill>
@@ -4899,8 +4985,8 @@
         </p:nvSpPr>
         <p:spPr>
           <a:xfrm>
-            <a:off x="777240" y="3246120"/>
-            <a:ext cx="3337560" cy="1060704"/>
+            <a:off x="777240" y="3502152"/>
+            <a:ext cx="3337560" cy="932688"/>
           </a:xfrm>
           <a:prstGeom prst="roundRect">
             <a:avLst>
@@ -4946,7 +5032,7 @@
         </p:nvSpPr>
         <p:spPr>
           <a:xfrm>
-            <a:off x="941832" y="3392424"/>
+            <a:off x="941832" y="3648456"/>
             <a:ext cx="566928" cy="38100"/>
           </a:xfrm>
           <a:prstGeom prst="rect">
@@ -4989,7 +5075,7 @@
         </p:nvSpPr>
         <p:spPr>
           <a:xfrm>
-            <a:off x="941832" y="3575304"/>
+            <a:off x="941832" y="3831336"/>
             <a:ext cx="3008376" cy="274320"/>
           </a:xfrm>
           <a:prstGeom prst="rect">
@@ -5028,8 +5114,8 @@
         </p:nvSpPr>
         <p:spPr>
           <a:xfrm>
-            <a:off x="941832" y="3950208"/>
-            <a:ext cx="3008376" cy="237744"/>
+            <a:off x="941832" y="4206240"/>
+            <a:ext cx="3008376" cy="109728"/>
           </a:xfrm>
           <a:prstGeom prst="rect">
             <a:avLst/>
@@ -5048,7 +5134,7 @@
               </a:spcAft>
             </a:pPr>
             <a:r>
-              <a:rPr sz="1019" b="0">
+              <a:rPr sz="940" b="0">
                 <a:solidFill>
                   <a:srgbClr val="9FB1C7"/>
                 </a:solidFill>
@@ -5067,8 +5153,8 @@
         </p:nvSpPr>
         <p:spPr>
           <a:xfrm>
-            <a:off x="4526279" y="3246120"/>
-            <a:ext cx="3337560" cy="1060704"/>
+            <a:off x="4526279" y="3502152"/>
+            <a:ext cx="3337560" cy="932688"/>
           </a:xfrm>
           <a:prstGeom prst="roundRect">
             <a:avLst>
@@ -5114,7 +5200,7 @@
         </p:nvSpPr>
         <p:spPr>
           <a:xfrm>
-            <a:off x="4690871" y="3392424"/>
+            <a:off x="4690871" y="3648456"/>
             <a:ext cx="566928" cy="38100"/>
           </a:xfrm>
           <a:prstGeom prst="rect">
@@ -5157,7 +5243,7 @@
         </p:nvSpPr>
         <p:spPr>
           <a:xfrm>
-            <a:off x="4690871" y="3575304"/>
+            <a:off x="4690871" y="3831336"/>
             <a:ext cx="3008376" cy="274320"/>
           </a:xfrm>
           <a:prstGeom prst="rect">
@@ -5196,8 +5282,8 @@
         </p:nvSpPr>
         <p:spPr>
           <a:xfrm>
-            <a:off x="4690871" y="3950208"/>
-            <a:ext cx="3008376" cy="237744"/>
+            <a:off x="4690871" y="4206240"/>
+            <a:ext cx="3008376" cy="109728"/>
           </a:xfrm>
           <a:prstGeom prst="rect">
             <a:avLst/>
@@ -5216,7 +5302,7 @@
               </a:spcAft>
             </a:pPr>
             <a:r>
-              <a:rPr sz="1019" b="0">
+              <a:rPr sz="940" b="0">
                 <a:solidFill>
                   <a:srgbClr val="9FB1C7"/>
                 </a:solidFill>
@@ -5235,8 +5321,8 @@
         </p:nvSpPr>
         <p:spPr>
           <a:xfrm>
-            <a:off x="8275319" y="3246120"/>
-            <a:ext cx="3337560" cy="1060704"/>
+            <a:off x="8275319" y="3502152"/>
+            <a:ext cx="3337560" cy="932688"/>
           </a:xfrm>
           <a:prstGeom prst="roundRect">
             <a:avLst>
@@ -5282,7 +5368,7 @@
         </p:nvSpPr>
         <p:spPr>
           <a:xfrm>
-            <a:off x="8439911" y="3392424"/>
+            <a:off x="8439911" y="3648456"/>
             <a:ext cx="566928" cy="38100"/>
           </a:xfrm>
           <a:prstGeom prst="rect">
@@ -5325,7 +5411,7 @@
         </p:nvSpPr>
         <p:spPr>
           <a:xfrm>
-            <a:off x="8439911" y="3575304"/>
+            <a:off x="8439911" y="3831336"/>
             <a:ext cx="3008376" cy="274320"/>
           </a:xfrm>
           <a:prstGeom prst="rect">
@@ -5364,8 +5450,8 @@
         </p:nvSpPr>
         <p:spPr>
           <a:xfrm>
-            <a:off x="8439911" y="3950208"/>
-            <a:ext cx="3008376" cy="237744"/>
+            <a:off x="8439911" y="4206240"/>
+            <a:ext cx="3008376" cy="109728"/>
           </a:xfrm>
           <a:prstGeom prst="rect">
             <a:avLst/>
@@ -5384,7 +5470,7 @@
               </a:spcAft>
             </a:pPr>
             <a:r>
-              <a:rPr sz="1019" b="0">
+              <a:rPr sz="940" b="0">
                 <a:solidFill>
                   <a:srgbClr val="9FB1C7"/>
                 </a:solidFill>
@@ -5423,7 +5509,7 @@
               </a:spcAft>
             </a:pPr>
             <a:r>
-              <a:rPr sz="1420" b="0">
+              <a:rPr sz="1350" b="0">
                 <a:solidFill>
                   <a:srgbClr val="6F8097"/>
                 </a:solidFill>
@@ -5706,8 +5792,8 @@
         </p:nvSpPr>
         <p:spPr>
           <a:xfrm>
-            <a:off x="822960" y="1920240"/>
-            <a:ext cx="4892040" cy="1115568"/>
+            <a:off x="822960" y="2240280"/>
+            <a:ext cx="4892040" cy="987552"/>
           </a:xfrm>
           <a:prstGeom prst="roundRect">
             <a:avLst>
@@ -5753,7 +5839,7 @@
         </p:nvSpPr>
         <p:spPr>
           <a:xfrm>
-            <a:off x="987552" y="2066544"/>
+            <a:off x="987552" y="2386584"/>
             <a:ext cx="566928" cy="38100"/>
           </a:xfrm>
           <a:prstGeom prst="rect">
@@ -5796,7 +5882,7 @@
         </p:nvSpPr>
         <p:spPr>
           <a:xfrm>
-            <a:off x="987552" y="2249424"/>
+            <a:off x="987552" y="2569464"/>
             <a:ext cx="4562856" cy="274320"/>
           </a:xfrm>
           <a:prstGeom prst="rect">
@@ -5835,8 +5921,8 @@
         </p:nvSpPr>
         <p:spPr>
           <a:xfrm>
-            <a:off x="987552" y="2624328"/>
-            <a:ext cx="4562856" cy="292608"/>
+            <a:off x="987552" y="2944368"/>
+            <a:ext cx="4562856" cy="164592"/>
           </a:xfrm>
           <a:prstGeom prst="rect">
             <a:avLst/>
@@ -5855,7 +5941,7 @@
               </a:spcAft>
             </a:pPr>
             <a:r>
-              <a:rPr sz="1100" b="0">
+              <a:rPr sz="1050" b="0">
                 <a:solidFill>
                   <a:srgbClr val="9FB1C7"/>
                 </a:solidFill>
@@ -5874,8 +5960,8 @@
         </p:nvSpPr>
         <p:spPr>
           <a:xfrm>
-            <a:off x="6217920" y="1920240"/>
-            <a:ext cx="4892040" cy="1115568"/>
+            <a:off x="6217920" y="2240280"/>
+            <a:ext cx="4892040" cy="987552"/>
           </a:xfrm>
           <a:prstGeom prst="roundRect">
             <a:avLst>
@@ -5921,7 +6007,7 @@
         </p:nvSpPr>
         <p:spPr>
           <a:xfrm>
-            <a:off x="6382512" y="2066544"/>
+            <a:off x="6382512" y="2386584"/>
             <a:ext cx="566928" cy="38100"/>
           </a:xfrm>
           <a:prstGeom prst="rect">
@@ -5964,7 +6050,7 @@
         </p:nvSpPr>
         <p:spPr>
           <a:xfrm>
-            <a:off x="6382512" y="2249424"/>
+            <a:off x="6382512" y="2569464"/>
             <a:ext cx="4562856" cy="274320"/>
           </a:xfrm>
           <a:prstGeom prst="rect">
@@ -6003,8 +6089,8 @@
         </p:nvSpPr>
         <p:spPr>
           <a:xfrm>
-            <a:off x="6382512" y="2624328"/>
-            <a:ext cx="4562856" cy="292608"/>
+            <a:off x="6382512" y="2944368"/>
+            <a:ext cx="4562856" cy="164592"/>
           </a:xfrm>
           <a:prstGeom prst="rect">
             <a:avLst/>
@@ -6023,7 +6109,7 @@
               </a:spcAft>
             </a:pPr>
             <a:r>
-              <a:rPr sz="1100" b="0">
+              <a:rPr sz="1050" b="0">
                 <a:solidFill>
                   <a:srgbClr val="9FB1C7"/>
                 </a:solidFill>
@@ -6042,8 +6128,8 @@
         </p:nvSpPr>
         <p:spPr>
           <a:xfrm>
-            <a:off x="822960" y="3429000"/>
-            <a:ext cx="4892040" cy="1115568"/>
+            <a:off x="822960" y="3538728"/>
+            <a:ext cx="4892040" cy="987552"/>
           </a:xfrm>
           <a:prstGeom prst="roundRect">
             <a:avLst>
@@ -6089,7 +6175,7 @@
         </p:nvSpPr>
         <p:spPr>
           <a:xfrm>
-            <a:off x="987552" y="3575304"/>
+            <a:off x="987552" y="3685032"/>
             <a:ext cx="566928" cy="38100"/>
           </a:xfrm>
           <a:prstGeom prst="rect">
@@ -6132,7 +6218,7 @@
         </p:nvSpPr>
         <p:spPr>
           <a:xfrm>
-            <a:off x="987552" y="3758184"/>
+            <a:off x="987552" y="3867912"/>
             <a:ext cx="4562856" cy="274320"/>
           </a:xfrm>
           <a:prstGeom prst="rect">
@@ -6171,8 +6257,8 @@
         </p:nvSpPr>
         <p:spPr>
           <a:xfrm>
-            <a:off x="987552" y="4133088"/>
-            <a:ext cx="4562856" cy="292608"/>
+            <a:off x="987552" y="4242816"/>
+            <a:ext cx="4562856" cy="164592"/>
           </a:xfrm>
           <a:prstGeom prst="rect">
             <a:avLst/>
@@ -6191,7 +6277,7 @@
               </a:spcAft>
             </a:pPr>
             <a:r>
-              <a:rPr sz="1100" b="0">
+              <a:rPr sz="1050" b="0">
                 <a:solidFill>
                   <a:srgbClr val="9FB1C7"/>
                 </a:solidFill>
@@ -6210,8 +6296,8 @@
         </p:nvSpPr>
         <p:spPr>
           <a:xfrm>
-            <a:off x="6217920" y="3429000"/>
-            <a:ext cx="4892040" cy="1115568"/>
+            <a:off x="6217920" y="3538728"/>
+            <a:ext cx="4892040" cy="987552"/>
           </a:xfrm>
           <a:prstGeom prst="roundRect">
             <a:avLst>
@@ -6257,7 +6343,7 @@
         </p:nvSpPr>
         <p:spPr>
           <a:xfrm>
-            <a:off x="6382512" y="3575304"/>
+            <a:off x="6382512" y="3685032"/>
             <a:ext cx="566928" cy="38100"/>
           </a:xfrm>
           <a:prstGeom prst="rect">
@@ -6300,7 +6386,7 @@
         </p:nvSpPr>
         <p:spPr>
           <a:xfrm>
-            <a:off x="6382512" y="3758184"/>
+            <a:off x="6382512" y="3867912"/>
             <a:ext cx="4562856" cy="274320"/>
           </a:xfrm>
           <a:prstGeom prst="rect">
@@ -6339,8 +6425,8 @@
         </p:nvSpPr>
         <p:spPr>
           <a:xfrm>
-            <a:off x="6382512" y="4133088"/>
-            <a:ext cx="4562856" cy="292608"/>
+            <a:off x="6382512" y="4242816"/>
+            <a:ext cx="4562856" cy="164592"/>
           </a:xfrm>
           <a:prstGeom prst="rect">
             <a:avLst/>
@@ -6359,7 +6445,7 @@
               </a:spcAft>
             </a:pPr>
             <a:r>
-              <a:rPr sz="1100" b="0">
+              <a:rPr sz="1050" b="0">
                 <a:solidFill>
                   <a:srgbClr val="9FB1C7"/>
                 </a:solidFill>
@@ -6378,7 +6464,7 @@
         </p:nvSpPr>
         <p:spPr>
           <a:xfrm>
-            <a:off x="914400" y="5257800"/>
+            <a:off x="914400" y="5193792"/>
             <a:ext cx="10424160" cy="365760"/>
           </a:xfrm>
           <a:prstGeom prst="rect">
@@ -6398,7 +6484,7 @@
               </a:spcAft>
             </a:pPr>
             <a:r>
-              <a:rPr sz="1800" b="1">
+              <a:rPr sz="1700" b="1">
                 <a:solidFill>
                   <a:srgbClr val="F4F8FF"/>
                 </a:solidFill>
@@ -6668,7 +6754,7 @@
                 </a:solidFill>
                 <a:latin typeface="Aptos"/>
               </a:rPr>
-              <a:t>Raising $2.0M to become a strategic acquisition target</a:t>
+              <a:t>$2.0M target to reach measured workload proof</a:t>
             </a:r>
           </a:p>
         </p:txBody>
@@ -6716,7 +6802,7 @@
                 </a:solidFill>
                 <a:latin typeface="Aptos"/>
               </a:rPr>
-              <a:t>$2.0M target pre-seed  ·  $1.25M minimum close  ·  $2.75M stretch</a:t>
+              <a:t>$2.0M target  ·  $1.25M minimum  ·  $2.75M stretch</a:t>
             </a:r>
           </a:p>
           <a:p>
@@ -6741,7 +6827,7 @@
                 </a:solidFill>
                 <a:latin typeface="Aptos"/>
               </a:rPr>
-              <a:t>Post-money SAFE  ·  final terms require CFO/counsel review</a:t>
+              <a:t>Planned SAFE; final terms counsel/CFO pending</a:t>
             </a:r>
           </a:p>
           <a:p>
@@ -6766,7 +6852,7 @@
                 </a:solidFill>
                 <a:latin typeface="Aptos"/>
               </a:rPr>
-              <a:t>18 months of runway to measured proof, IP diligence, and ASIC feasibility</a:t>
+              <a:t>18 months to workload proof, IP packet, ASIC feasibility</a:t>
             </a:r>
           </a:p>
           <a:p>
@@ -6791,7 +6877,7 @@
                 </a:solidFill>
                 <a:latin typeface="Aptos"/>
               </a:rPr>
-              <a:t>Design-partner introductions and customer workload access</a:t>
+              <a:t>Need: capital, workload access, design-partner intros</a:t>
             </a:r>
           </a:p>
         </p:txBody>
@@ -6916,7 +7002,7 @@
                 </a:solidFill>
                 <a:latin typeface="Aptos"/>
               </a:rPr>
-              <a:t>Proof is achievable at pre-seed scale. The gap between current hardware validation and defensible IP is $2M, not $20M. That gap is the entry point.</a:t>
+              <a:t>Next risk: prove customer workload value before tape-out.</a:t>
             </a:r>
           </a:p>
         </p:txBody>
@@ -7084,7 +7170,7 @@
                 </a:solidFill>
                 <a:latin typeface="Aptos"/>
               </a:rPr>
-              <a:t>$2.0M pre-seed</a:t>
+              <a:t>$2.0M</a:t>
             </a:r>
           </a:p>
         </p:txBody>
@@ -7252,7 +7338,7 @@
                 </a:solidFill>
                 <a:latin typeface="Aptos"/>
               </a:rPr>
-              <a:t>Measured proof + IP packet + ASIC feasibility</a:t>
+              <a:t>proof + IP + ASIC feasibility</a:t>
             </a:r>
           </a:p>
         </p:txBody>
@@ -7420,7 +7506,7 @@
                 </a:solidFill>
                 <a:latin typeface="Aptos"/>
               </a:rPr>
-              <a:t>Acquisition by chip/platform company at IP premium</a:t>
+              <a:t>options if proof holds</a:t>
             </a:r>
           </a:p>
         </p:txBody>
@@ -7723,7 +7809,7 @@
                 </a:solidFill>
                 <a:latin typeface="Aptos"/>
               </a:rPr>
-              <a:t>Constrained systems pay a hidden tax on unchanged state</a:t>
+              <a:t>The hidden tax is repeated state work</a:t>
             </a:r>
           </a:p>
         </p:txBody>
@@ -7771,7 +7857,7 @@
                 </a:solidFill>
                 <a:latin typeface="Aptos"/>
               </a:rPr>
-              <a:t>Data-center energy: 415 TWh in 2024 → projected 945 TWh by 2030. (IEA)</a:t>
+              <a:t>Battery, heat, link budget, latency, and reliability pressure.</a:t>
             </a:r>
           </a:p>
           <a:p>
@@ -7796,7 +7882,7 @@
                 </a:solidFill>
                 <a:latin typeface="Aptos"/>
               </a:rPr>
-              <a:t>U.S. alone: 176 TWh in 2023 → 325–580 TWh projected by 2028. (LBNL)</a:t>
+              <a:t>AI/context and remote systems make state movement expensive.</a:t>
             </a:r>
           </a:p>
           <a:p>
@@ -7821,7 +7907,7 @@
                 </a:solidFill>
                 <a:latin typeface="Aptos"/>
               </a:rPr>
-              <a:t>66 billion liters of direct cooling water consumed in U.S. data centers in 2023.</a:t>
+              <a:t>Market energy and water data explain urgency, not ATOMiK savings.</a:t>
             </a:r>
           </a:p>
           <a:p>
@@ -7846,32 +7932,7 @@
                 </a:solidFill>
                 <a:latin typeface="Aptos"/>
               </a:rPr>
-              <a:t>Edge and embedded teams hit hard limits on battery, heat, and bandwidth — before data center scale.</a:t>
-            </a:r>
-          </a:p>
-          <a:p>
-            <a:pPr>
-              <a:spcAft>
-                <a:spcPts val="700"/>
-              </a:spcAft>
-            </a:pPr>
-            <a:r>
-              <a:rPr sz="1550">
-                <a:solidFill>
-                  <a:srgbClr val="F59E0B"/>
-                </a:solidFill>
-                <a:latin typeface="Aptos"/>
-              </a:rPr>
-              <a:t>- </a:t>
-            </a:r>
-            <a:r>
-              <a:rPr sz="1550">
-                <a:solidFill>
-                  <a:srgbClr val="9FB1C7"/>
-                </a:solidFill>
-                <a:latin typeface="Aptos"/>
-              </a:rPr>
-              <a:t>In every case: the system processes state it already knows. Most of it didn't change.</a:t>
+              <a:t>Common pattern: full-state work when only a compact change matters.</a:t>
             </a:r>
           </a:p>
         </p:txBody>
@@ -8039,7 +8100,7 @@
                 </a:solidFill>
                 <a:latin typeface="Aptos"/>
               </a:rPr>
-              <a:t>Redundant state movement burns power and generates thermal load in sealed devices.</a:t>
+              <a:t>Power and thermal pressure.</a:t>
             </a:r>
           </a:p>
         </p:txBody>
@@ -8207,7 +8268,7 @@
                 </a:solidFill>
                 <a:latin typeface="Aptos"/>
               </a:rPr>
-              <a:t>Full-state sync over constrained links moves more than necessary, every tick.</a:t>
+              <a:t>Link budget pressure.</a:t>
             </a:r>
           </a:p>
         </p:txBody>
@@ -8375,7 +8436,7 @@
                 </a:solidFill>
                 <a:latin typeface="Aptos"/>
               </a:rPr>
-              <a:t>Rebuilding or replaying state instead of tracking delta adds delay where it hurts.</a:t>
+              <a:t>Local-response delay.</a:t>
             </a:r>
           </a:p>
         </p:txBody>
@@ -11452,8 +11513,8 @@
         </p:nvSpPr>
         <p:spPr>
           <a:xfrm>
-            <a:off x="777240" y="1828800"/>
-            <a:ext cx="4983480" cy="1325880"/>
+            <a:off x="777240" y="2240280"/>
+            <a:ext cx="4983480" cy="1170432"/>
           </a:xfrm>
           <a:prstGeom prst="roundRect">
             <a:avLst>
@@ -11499,7 +11560,7 @@
         </p:nvSpPr>
         <p:spPr>
           <a:xfrm>
-            <a:off x="941832" y="1975104"/>
+            <a:off x="941832" y="2386584"/>
             <a:ext cx="658368" cy="38100"/>
           </a:xfrm>
           <a:prstGeom prst="rect">
@@ -11542,7 +11603,7 @@
         </p:nvSpPr>
         <p:spPr>
           <a:xfrm>
-            <a:off x="941832" y="2157984"/>
+            <a:off x="941832" y="2569464"/>
             <a:ext cx="4572000" cy="256032"/>
           </a:xfrm>
           <a:prstGeom prst="rect">
@@ -11581,7 +11642,7 @@
         </p:nvSpPr>
         <p:spPr>
           <a:xfrm>
-            <a:off x="941832" y="2514600"/>
+            <a:off x="941832" y="2926080"/>
             <a:ext cx="4572000" cy="201168"/>
           </a:xfrm>
           <a:prstGeom prst="rect">
@@ -11620,7 +11681,7 @@
         </p:nvSpPr>
         <p:spPr>
           <a:xfrm>
-            <a:off x="941832" y="2788920"/>
+            <a:off x="941832" y="3200400"/>
             <a:ext cx="4572000" cy="201168"/>
           </a:xfrm>
           <a:prstGeom prst="rect">
@@ -11659,8 +11720,8 @@
         </p:nvSpPr>
         <p:spPr>
           <a:xfrm>
-            <a:off x="6309359" y="1828800"/>
-            <a:ext cx="4983480" cy="1325880"/>
+            <a:off x="6309359" y="2240280"/>
+            <a:ext cx="4983480" cy="1170432"/>
           </a:xfrm>
           <a:prstGeom prst="roundRect">
             <a:avLst>
@@ -11706,7 +11767,7 @@
         </p:nvSpPr>
         <p:spPr>
           <a:xfrm>
-            <a:off x="6473951" y="1975104"/>
+            <a:off x="6473951" y="2386584"/>
             <a:ext cx="658368" cy="38100"/>
           </a:xfrm>
           <a:prstGeom prst="rect">
@@ -11749,7 +11810,7 @@
         </p:nvSpPr>
         <p:spPr>
           <a:xfrm>
-            <a:off x="6473951" y="2157984"/>
+            <a:off x="6473951" y="2569464"/>
             <a:ext cx="4572000" cy="256032"/>
           </a:xfrm>
           <a:prstGeom prst="rect">
@@ -11788,7 +11849,7 @@
         </p:nvSpPr>
         <p:spPr>
           <a:xfrm>
-            <a:off x="6473951" y="2514600"/>
+            <a:off x="6473951" y="2926080"/>
             <a:ext cx="4572000" cy="201168"/>
           </a:xfrm>
           <a:prstGeom prst="rect">
@@ -11827,7 +11888,7 @@
         </p:nvSpPr>
         <p:spPr>
           <a:xfrm>
-            <a:off x="6473951" y="2788920"/>
+            <a:off x="6473951" y="3200400"/>
             <a:ext cx="4572000" cy="201168"/>
           </a:xfrm>
           <a:prstGeom prst="rect">
@@ -11866,8 +11927,8 @@
         </p:nvSpPr>
         <p:spPr>
           <a:xfrm>
-            <a:off x="777240" y="3520440"/>
-            <a:ext cx="4983480" cy="1325880"/>
+            <a:off x="777240" y="3749039"/>
+            <a:ext cx="4983480" cy="1170432"/>
           </a:xfrm>
           <a:prstGeom prst="roundRect">
             <a:avLst>
@@ -11913,7 +11974,7 @@
         </p:nvSpPr>
         <p:spPr>
           <a:xfrm>
-            <a:off x="941832" y="3666744"/>
+            <a:off x="941832" y="3895343"/>
             <a:ext cx="658368" cy="38100"/>
           </a:xfrm>
           <a:prstGeom prst="rect">
@@ -11956,7 +12017,7 @@
         </p:nvSpPr>
         <p:spPr>
           <a:xfrm>
-            <a:off x="941832" y="3849624"/>
+            <a:off x="941832" y="4078223"/>
             <a:ext cx="4572000" cy="256032"/>
           </a:xfrm>
           <a:prstGeom prst="rect">
@@ -11995,7 +12056,7 @@
         </p:nvSpPr>
         <p:spPr>
           <a:xfrm>
-            <a:off x="941832" y="4206240"/>
+            <a:off x="941832" y="4434839"/>
             <a:ext cx="4572000" cy="201168"/>
           </a:xfrm>
           <a:prstGeom prst="rect">
@@ -12034,7 +12095,7 @@
         </p:nvSpPr>
         <p:spPr>
           <a:xfrm>
-            <a:off x="941832" y="4480560"/>
+            <a:off x="941832" y="4709159"/>
             <a:ext cx="4572000" cy="201168"/>
           </a:xfrm>
           <a:prstGeom prst="rect">
@@ -12073,8 +12134,8 @@
         </p:nvSpPr>
         <p:spPr>
           <a:xfrm>
-            <a:off x="6309359" y="3520440"/>
-            <a:ext cx="4983480" cy="1325880"/>
+            <a:off x="6309359" y="3749039"/>
+            <a:ext cx="4983480" cy="1170432"/>
           </a:xfrm>
           <a:prstGeom prst="roundRect">
             <a:avLst>
@@ -12120,7 +12181,7 @@
         </p:nvSpPr>
         <p:spPr>
           <a:xfrm>
-            <a:off x="6473951" y="3666744"/>
+            <a:off x="6473951" y="3895343"/>
             <a:ext cx="658368" cy="38100"/>
           </a:xfrm>
           <a:prstGeom prst="rect">
@@ -12163,7 +12224,7 @@
         </p:nvSpPr>
         <p:spPr>
           <a:xfrm>
-            <a:off x="6473951" y="3849624"/>
+            <a:off x="6473951" y="4078223"/>
             <a:ext cx="4572000" cy="256032"/>
           </a:xfrm>
           <a:prstGeom prst="rect">
@@ -12202,7 +12263,7 @@
         </p:nvSpPr>
         <p:spPr>
           <a:xfrm>
-            <a:off x="6473951" y="4206240"/>
+            <a:off x="6473951" y="4434839"/>
             <a:ext cx="4572000" cy="201168"/>
           </a:xfrm>
           <a:prstGeom prst="rect">
@@ -12241,7 +12302,7 @@
         </p:nvSpPr>
         <p:spPr>
           <a:xfrm>
-            <a:off x="6473951" y="4480560"/>
+            <a:off x="6473951" y="4709159"/>
             <a:ext cx="4572000" cy="201168"/>
           </a:xfrm>
           <a:prstGeom prst="rect">
@@ -12544,8 +12605,8 @@
         </p:nvSpPr>
         <p:spPr>
           <a:xfrm>
-            <a:off x="685800" y="1828800"/>
-            <a:ext cx="10835640" cy="3886200"/>
+            <a:off x="685800" y="2148840"/>
+            <a:ext cx="10835640" cy="3566160"/>
           </a:xfrm>
           <a:prstGeom prst="roundRect">
             <a:avLst>
@@ -12599,8 +12660,8 @@
         </p:blipFill>
         <p:spPr>
           <a:xfrm>
-            <a:off x="3132328" y="1993392"/>
-            <a:ext cx="5933440" cy="3337560"/>
+            <a:off x="3416808" y="2304288"/>
+            <a:ext cx="5364480" cy="3017520"/>
           </a:xfrm>
           <a:prstGeom prst="rect">
             <a:avLst/>
@@ -13522,7 +13583,7 @@
                 </a:solidFill>
                 <a:latin typeface="Aptos"/>
               </a:rPr>
-              <a:t>SOFTWARE_VALIDATED</a:t>
+              <a:t>FORMAL_PROOF*</a:t>
             </a:r>
           </a:p>
         </p:txBody>
@@ -13561,7 +13622,7 @@
                 </a:solidFill>
                 <a:latin typeface="Aptos"/>
               </a:rPr>
-              <a:t>proof work in repo</a:t>
+              <a:t>audited properties only; counts withheld</a:t>
             </a:r>
           </a:p>
         </p:txBody>
@@ -13950,7 +14011,7 @@
                 </a:solidFill>
                 <a:latin typeface="Aptos"/>
               </a:rPr>
-              <a:t>RETURN PATH</a:t>
+              <a:t>COMMERCIAL PATH</a:t>
             </a:r>
           </a:p>
         </p:txBody>
@@ -13989,7 +14050,7 @@
                 </a:solidFill>
                 <a:latin typeface="Aptos"/>
               </a:rPr>
-              <a:t>Don't outspend incumbents. Become their strategic acquisition.</a:t>
+              <a:t>Start with paid evaluation, then earn strategic options</a:t>
             </a:r>
           </a:p>
         </p:txBody>
@@ -14002,8 +14063,8 @@
         </p:nvSpPr>
         <p:spPr>
           <a:xfrm>
-            <a:off x="685800" y="1920240"/>
-            <a:ext cx="2468880" cy="2788920"/>
+            <a:off x="685800" y="2240280"/>
+            <a:ext cx="2468880" cy="2331720"/>
           </a:xfrm>
           <a:prstGeom prst="roundRect">
             <a:avLst>
@@ -14049,7 +14110,7 @@
         </p:nvSpPr>
         <p:spPr>
           <a:xfrm>
-            <a:off x="850392" y="2066543"/>
+            <a:off x="850392" y="2386584"/>
             <a:ext cx="1965960" cy="38100"/>
           </a:xfrm>
           <a:prstGeom prst="rect">
@@ -14092,7 +14153,7 @@
         </p:nvSpPr>
         <p:spPr>
           <a:xfrm>
-            <a:off x="850392" y="2286000"/>
+            <a:off x="850392" y="2615184"/>
             <a:ext cx="2103120" cy="438912"/>
           </a:xfrm>
           <a:prstGeom prst="rect">
@@ -14112,14 +14173,14 @@
               </a:spcAft>
             </a:pPr>
             <a:r>
-              <a:rPr sz="1350" b="1">
+              <a:rPr sz="1280" b="1">
                 <a:solidFill>
                   <a:srgbClr val="F4F8FF"/>
                 </a:solidFill>
                 <a:latin typeface="Aptos"/>
               </a:rPr>
-              <a:t>Measured proof
-(0–12 mo)</a:t>
+              <a:t>Proof review
+0-30 days</a:t>
             </a:r>
           </a:p>
         </p:txBody>
@@ -14132,8 +14193,8 @@
         </p:nvSpPr>
         <p:spPr>
           <a:xfrm>
-            <a:off x="850392" y="2834640"/>
-            <a:ext cx="2057400" cy="868680"/>
+            <a:off x="850392" y="3182112"/>
+            <a:ext cx="2057400" cy="640080"/>
           </a:xfrm>
           <a:prstGeom prst="rect">
             <a:avLst/>
@@ -14152,13 +14213,13 @@
               </a:spcAft>
             </a:pPr>
             <a:r>
-              <a:rPr sz="1050" b="0">
+              <a:rPr sz="1000" b="0">
                 <a:solidFill>
                   <a:srgbClr val="9FB1C7"/>
                 </a:solidFill>
                 <a:latin typeface="Aptos"/>
               </a:rPr>
-              <a:t>One workload. One baseline. One metric. Artifact-backed, correctness-verified.</a:t>
+              <a:t>Artifact review + fit question.</a:t>
             </a:r>
           </a:p>
         </p:txBody>
@@ -14171,8 +14232,8 @@
         </p:nvSpPr>
         <p:spPr>
           <a:xfrm>
-            <a:off x="3520440" y="1920240"/>
-            <a:ext cx="2468880" cy="2788920"/>
+            <a:off x="3520440" y="2240280"/>
+            <a:ext cx="2468880" cy="2331720"/>
           </a:xfrm>
           <a:prstGeom prst="roundRect">
             <a:avLst>
@@ -14218,7 +14279,7 @@
         </p:nvSpPr>
         <p:spPr>
           <a:xfrm>
-            <a:off x="3685032" y="2066543"/>
+            <a:off x="3685032" y="2386584"/>
             <a:ext cx="1965960" cy="38100"/>
           </a:xfrm>
           <a:prstGeom prst="rect">
@@ -14261,7 +14322,7 @@
         </p:nvSpPr>
         <p:spPr>
           <a:xfrm>
-            <a:off x="3685032" y="2286000"/>
+            <a:off x="3685032" y="2615184"/>
             <a:ext cx="2103120" cy="438912"/>
           </a:xfrm>
           <a:prstGeom prst="rect">
@@ -14281,14 +14342,14 @@
               </a:spcAft>
             </a:pPr>
             <a:r>
-              <a:rPr sz="1350" b="1">
+              <a:rPr sz="1280" b="1">
                 <a:solidFill>
                   <a:srgbClr val="F4F8FF"/>
                 </a:solidFill>
                 <a:latin typeface="Aptos"/>
               </a:rPr>
-              <a:t>IP &amp; diligence
-(6–18 mo)</a:t>
+              <a:t>Technical eval
+30-90 days</a:t>
             </a:r>
           </a:p>
         </p:txBody>
@@ -14301,8 +14362,8 @@
         </p:nvSpPr>
         <p:spPr>
           <a:xfrm>
-            <a:off x="3685032" y="2834640"/>
-            <a:ext cx="2057400" cy="868680"/>
+            <a:off x="3685032" y="3182112"/>
+            <a:ext cx="2057400" cy="640080"/>
           </a:xfrm>
           <a:prstGeom prst="rect">
             <a:avLst/>
@@ -14321,13 +14382,13 @@
               </a:spcAft>
             </a:pPr>
             <a:r>
-              <a:rPr sz="1050" b="0">
+              <a:rPr sz="1000" b="0">
                 <a:solidFill>
                   <a:srgbClr val="9FB1C7"/>
                 </a:solidFill>
                 <a:latin typeface="Aptos"/>
               </a:rPr>
-              <a:t>Patent conversion, prior-art review, counsel-reviewed packet.</a:t>
+              <a:t>Workload + baseline + metric.</a:t>
             </a:r>
           </a:p>
         </p:txBody>
@@ -14340,8 +14401,8 @@
         </p:nvSpPr>
         <p:spPr>
           <a:xfrm>
-            <a:off x="6355080" y="1920240"/>
-            <a:ext cx="2468880" cy="2788920"/>
+            <a:off x="6355080" y="2240280"/>
+            <a:ext cx="2468880" cy="2331720"/>
           </a:xfrm>
           <a:prstGeom prst="roundRect">
             <a:avLst>
@@ -14387,7 +14448,7 @@
         </p:nvSpPr>
         <p:spPr>
           <a:xfrm>
-            <a:off x="6519672" y="2066543"/>
+            <a:off x="6519672" y="2386584"/>
             <a:ext cx="1965960" cy="38100"/>
           </a:xfrm>
           <a:prstGeom prst="rect">
@@ -14430,7 +14491,7 @@
         </p:nvSpPr>
         <p:spPr>
           <a:xfrm>
-            <a:off x="6519672" y="2286000"/>
+            <a:off x="6519672" y="2615184"/>
             <a:ext cx="2103120" cy="438912"/>
           </a:xfrm>
           <a:prstGeom prst="rect">
@@ -14450,14 +14511,14 @@
               </a:spcAft>
             </a:pPr>
             <a:r>
-              <a:rPr sz="1350" b="1">
+              <a:rPr sz="1280" b="1">
                 <a:solidFill>
                   <a:srgbClr val="F4F8FF"/>
                 </a:solidFill>
                 <a:latin typeface="Aptos"/>
               </a:rPr>
-              <a:t>Design partners
-(12–24 mo)</a:t>
+              <a:t>Design partner
+3-12 mo</a:t>
             </a:r>
           </a:p>
         </p:txBody>
@@ -14470,8 +14531,8 @@
         </p:nvSpPr>
         <p:spPr>
           <a:xfrm>
-            <a:off x="6519672" y="2834640"/>
-            <a:ext cx="2057400" cy="868680"/>
+            <a:off x="6519672" y="3182112"/>
+            <a:ext cx="2057400" cy="640080"/>
           </a:xfrm>
           <a:prstGeom prst="rect">
             <a:avLst/>
@@ -14490,13 +14551,13 @@
               </a:spcAft>
             </a:pPr>
             <a:r>
-              <a:rPr sz="1050" b="0">
+              <a:rPr sz="1000" b="0">
                 <a:solidFill>
                   <a:srgbClr val="9FB1C7"/>
                 </a:solidFill>
                 <a:latin typeface="Aptos"/>
               </a:rPr>
-              <a:t>Paid evaluations → design-partner agreements → IP licensing value.</a:t>
+              <a:t>Measured artifact + integration learning.</a:t>
             </a:r>
           </a:p>
         </p:txBody>
@@ -14509,8 +14570,8 @@
         </p:nvSpPr>
         <p:spPr>
           <a:xfrm>
-            <a:off x="9189720" y="1920240"/>
-            <a:ext cx="2468880" cy="2788920"/>
+            <a:off x="9189720" y="2240280"/>
+            <a:ext cx="2468880" cy="2331720"/>
           </a:xfrm>
           <a:prstGeom prst="roundRect">
             <a:avLst>
@@ -14556,7 +14617,7 @@
         </p:nvSpPr>
         <p:spPr>
           <a:xfrm>
-            <a:off x="9354312" y="2066543"/>
+            <a:off x="9354312" y="2386584"/>
             <a:ext cx="1965960" cy="38100"/>
           </a:xfrm>
           <a:prstGeom prst="rect">
@@ -14599,7 +14660,7 @@
         </p:nvSpPr>
         <p:spPr>
           <a:xfrm>
-            <a:off x="9354312" y="2286000"/>
+            <a:off x="9354312" y="2615184"/>
             <a:ext cx="2103120" cy="438912"/>
           </a:xfrm>
           <a:prstGeom prst="rect">
@@ -14619,14 +14680,14 @@
               </a:spcAft>
             </a:pPr>
             <a:r>
-              <a:rPr sz="1350" b="1">
+              <a:rPr sz="1280" b="1">
                 <a:solidFill>
                   <a:srgbClr val="F4F8FF"/>
                 </a:solidFill>
                 <a:latin typeface="Aptos"/>
               </a:rPr>
-              <a:t>Strategic outcome
-(18–36 mo)</a:t>
+              <a:t>Licensing diligence
+12-24 mo</a:t>
             </a:r>
           </a:p>
         </p:txBody>
@@ -14639,8 +14700,8 @@
         </p:nvSpPr>
         <p:spPr>
           <a:xfrm>
-            <a:off x="9354312" y="2834640"/>
-            <a:ext cx="2057400" cy="868680"/>
+            <a:off x="9354312" y="3182112"/>
+            <a:ext cx="2057400" cy="640080"/>
           </a:xfrm>
           <a:prstGeom prst="rect">
             <a:avLst/>
@@ -14659,13 +14720,13 @@
               </a:spcAft>
             </a:pPr>
             <a:r>
-              <a:rPr sz="1050" b="0">
+              <a:rPr sz="1000" b="0">
                 <a:solidFill>
                   <a:srgbClr val="9FB1C7"/>
                 </a:solidFill>
                 <a:latin typeface="Aptos"/>
               </a:rPr>
-              <a:t>License, partner, or be acquired by a chip/platform company at IP premium.</a:t>
+              <a:t>Partner review only if proof holds.</a:t>
             </a:r>
           </a:p>
         </p:txBody>
@@ -14704,7 +14765,7 @@
                 </a:solidFill>
                 <a:latin typeface="Aptos"/>
               </a:rPr>
-              <a:t>Comparable IP architecture acquisitions in semiconductor history: $50M–$400M+ for validated compute primitives. ATOMiK's path: proof → IP value → strategic partner.</a:t>
+              <a:t>Capital buys the evidence path: proof review, measured workload artifact, IP packet, ASIC feasibility.</a:t>
             </a:r>
           </a:p>
         </p:txBody>
@@ -14743,7 +14804,7 @@
                 </a:solidFill>
                 <a:latin typeface="Aptos"/>
               </a:rPr>
-              <a:t>Strategic outcome framing only. No acquisition is guaranteed or implied. Returns are speculative and subject to risk.</a:t>
+              <a:t>No acquisition, valuation, or return multiple is guaranteed or implied.</a:t>
             </a:r>
           </a:p>
         </p:txBody>

--- a/business/pitch_deck/ATOMiK_Investor_Deck.pptx
+++ b/business/pitch_deck/ATOMiK_Investor_Deck.pptx
@@ -4046,7 +4046,7 @@
       </p:sp>
       <p:pic>
         <p:nvPicPr>
-          <p:cNvPr id="25" name="Picture 24" descr="09-current-live-atomik-desk-v039k.png"/>
+          <p:cNvPr id="25" name="Picture 24" descr="10-current-live-atomik-desk-v040a.png"/>
           <p:cNvPicPr>
             <a:picLocks noChangeAspect="1"/>
           </p:cNvPicPr>
@@ -4459,7 +4459,7 @@
       </p:sp>
       <p:pic>
         <p:nvPicPr>
-          <p:cNvPr id="9" name="Picture 8" descr="09-current-live-atomik-desk-v039k.png"/>
+          <p:cNvPr id="9" name="Picture 8" descr="10-current-live-atomik-desk-v040a.png"/>
           <p:cNvPicPr>
             <a:picLocks noChangeAspect="1"/>
           </p:cNvPicPr>
@@ -4644,7 +4644,7 @@
                 </a:solidFill>
                 <a:latin typeface="Aptos"/>
               </a:rPr>
-              <a:t>current Zynq hardware UI/demo surface</a:t>
+              <a:t>current Zynq UI captured from /dev/fb0, driven by real measured on-board data</a:t>
             </a:r>
           </a:p>
         </p:txBody>
@@ -4980,7 +4980,7 @@
                 </a:solidFill>
                 <a:latin typeface="Aptos"/>
               </a:rPr>
-              <a:t>on-screen telemetry as customer benchmark</a:t>
+              <a:t>on-screen telemetry as customer benchmark; not an interactive demo</a:t>
             </a:r>
           </a:p>
         </p:txBody>
@@ -5296,7 +5296,7 @@
         </p:nvSpPr>
         <p:spPr>
           <a:xfrm>
-            <a:off x="822960" y="1847088"/>
+            <a:off x="822960" y="1755648"/>
             <a:ext cx="10561320" cy="457200"/>
           </a:xfrm>
           <a:prstGeom prst="roundRect">
@@ -5343,7 +5343,7 @@
         </p:nvSpPr>
         <p:spPr>
           <a:xfrm>
-            <a:off x="1024128" y="1956816"/>
+            <a:off x="1024128" y="1865376"/>
             <a:ext cx="2743200" cy="146304"/>
           </a:xfrm>
           <a:prstGeom prst="rect">
@@ -5369,7 +5369,7 @@
                 </a:solidFill>
                 <a:latin typeface="Aptos"/>
               </a:rPr>
-              <a:t>Zynq Desk v0.39-K</a:t>
+              <a:t>Zynq Desk v0.40-A</a:t>
             </a:r>
           </a:p>
         </p:txBody>
@@ -5382,7 +5382,7 @@
         </p:nvSpPr>
         <p:spPr>
           <a:xfrm>
-            <a:off x="3931920" y="1956816"/>
+            <a:off x="3931920" y="1865376"/>
             <a:ext cx="2194560" cy="146304"/>
           </a:xfrm>
           <a:prstGeom prst="rect">
@@ -5421,7 +5421,7 @@
         </p:nvSpPr>
         <p:spPr>
           <a:xfrm>
-            <a:off x="6309360" y="1956816"/>
+            <a:off x="6309360" y="1865376"/>
             <a:ext cx="4709160" cy="146304"/>
           </a:xfrm>
           <a:prstGeom prst="rect">
@@ -5447,7 +5447,7 @@
                 </a:solidFill>
                 <a:latin typeface="Aptos"/>
               </a:rPr>
-              <a:t>current UI proof image</a:t>
+              <a:t>current UI proof image, captured from /dev/fb0</a:t>
             </a:r>
           </a:p>
         </p:txBody>
@@ -5460,7 +5460,7 @@
         </p:nvSpPr>
         <p:spPr>
           <a:xfrm>
-            <a:off x="822960" y="2505456"/>
+            <a:off x="822960" y="2340864"/>
             <a:ext cx="10561320" cy="457200"/>
           </a:xfrm>
           <a:prstGeom prst="roundRect">
@@ -5507,7 +5507,7 @@
         </p:nvSpPr>
         <p:spPr>
           <a:xfrm>
-            <a:off x="1024128" y="2615184"/>
+            <a:off x="1024128" y="2450592"/>
             <a:ext cx="2743200" cy="146304"/>
           </a:xfrm>
           <a:prstGeom prst="rect">
@@ -5533,7 +5533,7 @@
                 </a:solidFill>
                 <a:latin typeface="Aptos"/>
               </a:rPr>
-              <a:t>Linux userspace to FPGA</a:t>
+              <a:t>Parallel-bank throughput</a:t>
             </a:r>
           </a:p>
         </p:txBody>
@@ -5546,7 +5546,7 @@
         </p:nvSpPr>
         <p:spPr>
           <a:xfrm>
-            <a:off x="3931920" y="2615184"/>
+            <a:off x="3931920" y="2450592"/>
             <a:ext cx="2194560" cy="146304"/>
           </a:xfrm>
           <a:prstGeom prst="rect">
@@ -5568,11 +5568,11 @@
             <a:r>
               <a:rPr sz="919" b="1">
                 <a:solidFill>
-                  <a:srgbClr val="22D3EE"/>
-                </a:solidFill>
-                <a:latin typeface="Aptos"/>
-              </a:rPr>
-              <a:t>HARDWARE_VALIDATED</a:t>
+                  <a:srgbClr val="60A5FA"/>
+                </a:solidFill>
+                <a:latin typeface="Aptos"/>
+              </a:rPr>
+              <a:t>LIVE_MEASURED</a:t>
             </a:r>
           </a:p>
         </p:txBody>
@@ -5585,7 +5585,7 @@
         </p:nvSpPr>
         <p:spPr>
           <a:xfrm>
-            <a:off x="6309360" y="2615184"/>
+            <a:off x="6309360" y="2450592"/>
             <a:ext cx="4709160" cy="146304"/>
           </a:xfrm>
           <a:prstGeom prst="rect">
@@ -5611,7 +5611,7 @@
                 </a:solidFill>
                 <a:latin typeface="Aptos"/>
               </a:rPr>
-              <a:t>documented OS-to-bus path</a:t>
+              <a:t>AX7020 8-bank accumulator scales 1/2/4/8x, byte-identical to software</a:t>
             </a:r>
           </a:p>
         </p:txBody>
@@ -5624,7 +5624,7 @@
         </p:nvSpPr>
         <p:spPr>
           <a:xfrm>
-            <a:off x="822960" y="3163824"/>
+            <a:off x="822960" y="2926080"/>
             <a:ext cx="10561320" cy="457200"/>
           </a:xfrm>
           <a:prstGeom prst="roundRect">
@@ -5671,7 +5671,7 @@
         </p:nvSpPr>
         <p:spPr>
           <a:xfrm>
-            <a:off x="1024128" y="3273552"/>
+            <a:off x="1024128" y="3035808"/>
             <a:ext cx="2743200" cy="146304"/>
           </a:xfrm>
           <a:prstGeom prst="rect">
@@ -5697,7 +5697,7 @@
                 </a:solidFill>
                 <a:latin typeface="Aptos"/>
               </a:rPr>
-              <a:t>AX7020 board matrix</a:t>
+              <a:t>Linux userspace to FPGA</a:t>
             </a:r>
           </a:p>
         </p:txBody>
@@ -5710,7 +5710,7 @@
         </p:nvSpPr>
         <p:spPr>
           <a:xfrm>
-            <a:off x="3931920" y="3273552"/>
+            <a:off x="3931920" y="3035808"/>
             <a:ext cx="2194560" cy="146304"/>
           </a:xfrm>
           <a:prstGeom prst="rect">
@@ -5732,11 +5732,11 @@
             <a:r>
               <a:rPr sz="919" b="1">
                 <a:solidFill>
-                  <a:srgbClr val="60A5FA"/>
-                </a:solidFill>
-                <a:latin typeface="Aptos"/>
-              </a:rPr>
-              <a:t>LIVE_MEASURED</a:t>
+                  <a:srgbClr val="22D3EE"/>
+                </a:solidFill>
+                <a:latin typeface="Aptos"/>
+              </a:rPr>
+              <a:t>HARDWARE_VALIDATED</a:t>
             </a:r>
           </a:p>
         </p:txBody>
@@ -5749,7 +5749,7 @@
         </p:nvSpPr>
         <p:spPr>
           <a:xfrm>
-            <a:off x="6309360" y="3273552"/>
+            <a:off x="6309360" y="3035808"/>
             <a:ext cx="4709160" cy="146304"/>
           </a:xfrm>
           <a:prstGeom prst="rect">
@@ -5775,7 +5775,7 @@
                 </a:solidFill>
                 <a:latin typeface="Aptos"/>
               </a:rPr>
-              <a:t>wins and losses with caveats</a:t>
+              <a:t>documented OS-to-bus path</a:t>
             </a:r>
           </a:p>
         </p:txBody>
@@ -5788,7 +5788,7 @@
         </p:nvSpPr>
         <p:spPr>
           <a:xfrm>
-            <a:off x="822960" y="3822191"/>
+            <a:off x="822960" y="3511296"/>
             <a:ext cx="10561320" cy="457200"/>
           </a:xfrm>
           <a:prstGeom prst="roundRect">
@@ -5835,7 +5835,7 @@
         </p:nvSpPr>
         <p:spPr>
           <a:xfrm>
-            <a:off x="1024128" y="3931919"/>
+            <a:off x="1024128" y="3621024"/>
             <a:ext cx="2743200" cy="146304"/>
           </a:xfrm>
           <a:prstGeom prst="rect">
@@ -5861,7 +5861,7 @@
                 </a:solidFill>
                 <a:latin typeface="Aptos"/>
               </a:rPr>
-              <a:t>Formal algebra</a:t>
+              <a:t>AX7020 board matrix</a:t>
             </a:r>
           </a:p>
         </p:txBody>
@@ -5874,7 +5874,7 @@
         </p:nvSpPr>
         <p:spPr>
           <a:xfrm>
-            <a:off x="3931920" y="3931919"/>
+            <a:off x="3931920" y="3621024"/>
             <a:ext cx="2194560" cy="146304"/>
           </a:xfrm>
           <a:prstGeom prst="rect">
@@ -5896,11 +5896,11 @@
             <a:r>
               <a:rPr sz="919" b="1">
                 <a:solidFill>
-                  <a:srgbClr val="A78BFA"/>
-                </a:solidFill>
-                <a:latin typeface="Aptos"/>
-              </a:rPr>
-              <a:t>FORMAL_PROOF*</a:t>
+                  <a:srgbClr val="60A5FA"/>
+                </a:solidFill>
+                <a:latin typeface="Aptos"/>
+              </a:rPr>
+              <a:t>LIVE_MEASURED</a:t>
             </a:r>
           </a:p>
         </p:txBody>
@@ -5913,7 +5913,7 @@
         </p:nvSpPr>
         <p:spPr>
           <a:xfrm>
-            <a:off x="6309360" y="3931919"/>
+            <a:off x="6309360" y="3621024"/>
             <a:ext cx="4709160" cy="146304"/>
           </a:xfrm>
           <a:prstGeom prst="rect">
@@ -5939,7 +5939,7 @@
                 </a:solidFill>
                 <a:latin typeface="Aptos"/>
               </a:rPr>
-              <a:t>Lean4-checked algebra; exact audited properties only</a:t>
+              <a:t>wins and losses with caveats</a:t>
             </a:r>
           </a:p>
         </p:txBody>
@@ -5952,7 +5952,7 @@
         </p:nvSpPr>
         <p:spPr>
           <a:xfrm>
-            <a:off x="822960" y="4480560"/>
+            <a:off x="822960" y="4096512"/>
             <a:ext cx="10561320" cy="457200"/>
           </a:xfrm>
           <a:prstGeom prst="roundRect">
@@ -5999,7 +5999,7 @@
         </p:nvSpPr>
         <p:spPr>
           <a:xfrm>
-            <a:off x="1024128" y="4590288"/>
+            <a:off x="1024128" y="4206240"/>
             <a:ext cx="2743200" cy="146304"/>
           </a:xfrm>
           <a:prstGeom prst="rect">
@@ -6025,6 +6025,170 @@
                 </a:solidFill>
                 <a:latin typeface="Aptos"/>
               </a:rPr>
+              <a:t>Formal algebra</a:t>
+            </a:r>
+          </a:p>
+        </p:txBody>
+      </p:sp>
+      <p:sp>
+        <p:nvSpPr>
+          <p:cNvPr id="26" name="TextBox 25"/>
+          <p:cNvSpPr txBox="1"/>
+          <p:nvPr/>
+        </p:nvSpPr>
+        <p:spPr>
+          <a:xfrm>
+            <a:off x="3931920" y="4206240"/>
+            <a:ext cx="2194560" cy="146304"/>
+          </a:xfrm>
+          <a:prstGeom prst="rect">
+            <a:avLst/>
+          </a:prstGeom>
+          <a:noFill/>
+        </p:spPr>
+        <p:txBody>
+          <a:bodyPr wrap="square" lIns="12700" rIns="12700" tIns="12700" bIns="12700" anchor="t">
+            <a:spAutoFit/>
+          </a:bodyPr>
+          <a:lstStyle/>
+          <a:p>
+            <a:pPr algn="l">
+              <a:spcAft>
+                <a:spcPts val="0"/>
+              </a:spcAft>
+            </a:pPr>
+            <a:r>
+              <a:rPr sz="919" b="1">
+                <a:solidFill>
+                  <a:srgbClr val="A78BFA"/>
+                </a:solidFill>
+                <a:latin typeface="Aptos"/>
+              </a:rPr>
+              <a:t>FORMAL_PROOF*</a:t>
+            </a:r>
+          </a:p>
+        </p:txBody>
+      </p:sp>
+      <p:sp>
+        <p:nvSpPr>
+          <p:cNvPr id="27" name="TextBox 26"/>
+          <p:cNvSpPr txBox="1"/>
+          <p:nvPr/>
+        </p:nvSpPr>
+        <p:spPr>
+          <a:xfrm>
+            <a:off x="6309360" y="4206240"/>
+            <a:ext cx="4709160" cy="146304"/>
+          </a:xfrm>
+          <a:prstGeom prst="rect">
+            <a:avLst/>
+          </a:prstGeom>
+          <a:noFill/>
+        </p:spPr>
+        <p:txBody>
+          <a:bodyPr wrap="square" lIns="12700" rIns="12700" tIns="12700" bIns="12700" anchor="t">
+            <a:spAutoFit/>
+          </a:bodyPr>
+          <a:lstStyle/>
+          <a:p>
+            <a:pPr algn="l">
+              <a:spcAft>
+                <a:spcPts val="0"/>
+              </a:spcAft>
+            </a:pPr>
+            <a:r>
+              <a:rPr sz="1000" b="0">
+                <a:solidFill>
+                  <a:srgbClr val="A5B4C5"/>
+                </a:solidFill>
+                <a:latin typeface="Aptos"/>
+              </a:rPr>
+              <a:t>Lean4-checked algebra; exact audited properties only</a:t>
+            </a:r>
+          </a:p>
+        </p:txBody>
+      </p:sp>
+      <p:sp>
+        <p:nvSpPr>
+          <p:cNvPr id="28" name="Rounded Rectangle 27"/>
+          <p:cNvSpPr/>
+          <p:nvPr/>
+        </p:nvSpPr>
+        <p:spPr>
+          <a:xfrm>
+            <a:off x="822960" y="4681728"/>
+            <a:ext cx="10561320" cy="457200"/>
+          </a:xfrm>
+          <a:prstGeom prst="roundRect">
+            <a:avLst>
+              <a:gd name="adj" fmla="val 8000"/>
+            </a:avLst>
+          </a:prstGeom>
+          <a:solidFill>
+            <a:srgbClr val="0C1420"/>
+          </a:solidFill>
+          <a:ln w="9525">
+            <a:solidFill>
+              <a:srgbClr val="24364D"/>
+            </a:solidFill>
+          </a:ln>
+        </p:spPr>
+        <p:style>
+          <a:lnRef idx="1">
+            <a:schemeClr val="accent1"/>
+          </a:lnRef>
+          <a:fillRef idx="3">
+            <a:schemeClr val="accent1"/>
+          </a:fillRef>
+          <a:effectRef idx="2">
+            <a:schemeClr val="accent1"/>
+          </a:effectRef>
+          <a:fontRef idx="minor">
+            <a:schemeClr val="lt1"/>
+          </a:fontRef>
+        </p:style>
+        <p:txBody>
+          <a:bodyPr rtlCol="0" anchor="ctr"/>
+          <a:lstStyle/>
+          <a:p>
+            <a:pPr algn="ctr"/>
+          </a:p>
+        </p:txBody>
+      </p:sp>
+      <p:sp>
+        <p:nvSpPr>
+          <p:cNvPr id="29" name="TextBox 28"/>
+          <p:cNvSpPr txBox="1"/>
+          <p:nvPr/>
+        </p:nvSpPr>
+        <p:spPr>
+          <a:xfrm>
+            <a:off x="1024128" y="4791456"/>
+            <a:ext cx="2743200" cy="146304"/>
+          </a:xfrm>
+          <a:prstGeom prst="rect">
+            <a:avLst/>
+          </a:prstGeom>
+          <a:noFill/>
+        </p:spPr>
+        <p:txBody>
+          <a:bodyPr wrap="square" lIns="12700" rIns="12700" tIns="12700" bIns="12700" anchor="t">
+            <a:spAutoFit/>
+          </a:bodyPr>
+          <a:lstStyle/>
+          <a:p>
+            <a:pPr algn="l">
+              <a:spcAft>
+                <a:spcPts val="0"/>
+              </a:spcAft>
+            </a:pPr>
+            <a:r>
+              <a:rPr sz="1019" b="1">
+                <a:solidFill>
+                  <a:srgbClr val="F5F8FF"/>
+                </a:solidFill>
+                <a:latin typeface="Aptos"/>
+              </a:rPr>
               <a:t>Standalone boot</a:t>
             </a:r>
           </a:p>
@@ -6032,13 +6196,13 @@
       </p:sp>
       <p:sp>
         <p:nvSpPr>
-          <p:cNvPr id="26" name="TextBox 25"/>
-          <p:cNvSpPr txBox="1"/>
-          <p:nvPr/>
-        </p:nvSpPr>
-        <p:spPr>
-          <a:xfrm>
-            <a:off x="3931920" y="4590288"/>
+          <p:cNvPr id="30" name="TextBox 29"/>
+          <p:cNvSpPr txBox="1"/>
+          <p:nvPr/>
+        </p:nvSpPr>
+        <p:spPr>
+          <a:xfrm>
+            <a:off x="3931920" y="4791456"/>
             <a:ext cx="2194560" cy="146304"/>
           </a:xfrm>
           <a:prstGeom prst="rect">
@@ -6071,13 +6235,13 @@
       </p:sp>
       <p:sp>
         <p:nvSpPr>
-          <p:cNvPr id="27" name="TextBox 26"/>
-          <p:cNvSpPr txBox="1"/>
-          <p:nvPr/>
-        </p:nvSpPr>
-        <p:spPr>
-          <a:xfrm>
-            <a:off x="6309360" y="4590288"/>
+          <p:cNvPr id="31" name="TextBox 30"/>
+          <p:cNvSpPr txBox="1"/>
+          <p:nvPr/>
+        </p:nvSpPr>
+        <p:spPr>
+          <a:xfrm>
+            <a:off x="6309360" y="4791456"/>
             <a:ext cx="4709160" cy="146304"/>
           </a:xfrm>
           <a:prstGeom prst="rect">
@@ -6110,7 +6274,7 @@
       </p:sp>
       <p:sp>
         <p:nvSpPr>
-          <p:cNvPr id="28" name="TextBox 27"/>
+          <p:cNvPr id="32" name="TextBox 31"/>
           <p:cNvSpPr txBox="1"/>
           <p:nvPr/>
         </p:nvSpPr>

--- a/business/pitch_deck/ATOMiK_Investor_Deck.pptx
+++ b/business/pitch_deck/ATOMiK_Investor_Deck.pptx
@@ -5296,7 +5296,7 @@
         </p:nvSpPr>
         <p:spPr>
           <a:xfrm>
-            <a:off x="822960" y="1755648"/>
+            <a:off x="822960" y="1691640"/>
             <a:ext cx="10561320" cy="457200"/>
           </a:xfrm>
           <a:prstGeom prst="roundRect">
@@ -5343,7 +5343,7 @@
         </p:nvSpPr>
         <p:spPr>
           <a:xfrm>
-            <a:off x="1024128" y="1865376"/>
+            <a:off x="1024128" y="1801368"/>
             <a:ext cx="2743200" cy="146304"/>
           </a:xfrm>
           <a:prstGeom prst="rect">
@@ -5382,7 +5382,7 @@
         </p:nvSpPr>
         <p:spPr>
           <a:xfrm>
-            <a:off x="3931920" y="1865376"/>
+            <a:off x="3931920" y="1801368"/>
             <a:ext cx="2194560" cy="146304"/>
           </a:xfrm>
           <a:prstGeom prst="rect">
@@ -5421,7 +5421,7 @@
         </p:nvSpPr>
         <p:spPr>
           <a:xfrm>
-            <a:off x="6309360" y="1865376"/>
+            <a:off x="6309360" y="1801368"/>
             <a:ext cx="4709160" cy="146304"/>
           </a:xfrm>
           <a:prstGeom prst="rect">
@@ -5460,7 +5460,7 @@
         </p:nvSpPr>
         <p:spPr>
           <a:xfrm>
-            <a:off x="822960" y="2340864"/>
+            <a:off x="822960" y="2221992"/>
             <a:ext cx="10561320" cy="457200"/>
           </a:xfrm>
           <a:prstGeom prst="roundRect">
@@ -5507,7 +5507,7 @@
         </p:nvSpPr>
         <p:spPr>
           <a:xfrm>
-            <a:off x="1024128" y="2450592"/>
+            <a:off x="1024128" y="2331720"/>
             <a:ext cx="2743200" cy="146304"/>
           </a:xfrm>
           <a:prstGeom prst="rect">
@@ -5533,7 +5533,7 @@
                 </a:solidFill>
                 <a:latin typeface="Aptos"/>
               </a:rPr>
-              <a:t>Parallel-bank throughput</a:t>
+              <a:t>Live Workloads demo</a:t>
             </a:r>
           </a:p>
         </p:txBody>
@@ -5546,7 +5546,7 @@
         </p:nvSpPr>
         <p:spPr>
           <a:xfrm>
-            <a:off x="3931920" y="2450592"/>
+            <a:off x="3931920" y="2331720"/>
             <a:ext cx="2194560" cy="146304"/>
           </a:xfrm>
           <a:prstGeom prst="rect">
@@ -5585,7 +5585,7 @@
         </p:nvSpPr>
         <p:spPr>
           <a:xfrm>
-            <a:off x="6309360" y="2450592"/>
+            <a:off x="6309360" y="2331720"/>
             <a:ext cx="4709160" cy="146304"/>
           </a:xfrm>
           <a:prstGeom prst="rect">
@@ -5611,7 +5611,7 @@
                 </a:solidFill>
                 <a:latin typeface="Aptos"/>
               </a:rPr>
-              <a:t>AX7020 8-bank accumulator scales 1/2/4/8x, byte-identical to software</a:t>
+              <a:t>first customer-facing workload on AX7020: 800 Mevents/s @ 8 banks, byte-identical</a:t>
             </a:r>
           </a:p>
         </p:txBody>
@@ -5624,7 +5624,7 @@
         </p:nvSpPr>
         <p:spPr>
           <a:xfrm>
-            <a:off x="822960" y="2926080"/>
+            <a:off x="822960" y="2752344"/>
             <a:ext cx="10561320" cy="457200"/>
           </a:xfrm>
           <a:prstGeom prst="roundRect">
@@ -5671,7 +5671,7 @@
         </p:nvSpPr>
         <p:spPr>
           <a:xfrm>
-            <a:off x="1024128" y="3035808"/>
+            <a:off x="1024128" y="2862072"/>
             <a:ext cx="2743200" cy="146304"/>
           </a:xfrm>
           <a:prstGeom prst="rect">
@@ -5697,7 +5697,7 @@
                 </a:solidFill>
                 <a:latin typeface="Aptos"/>
               </a:rPr>
-              <a:t>Linux userspace to FPGA</a:t>
+              <a:t>Parallel-bank throughput</a:t>
             </a:r>
           </a:p>
         </p:txBody>
@@ -5710,7 +5710,7 @@
         </p:nvSpPr>
         <p:spPr>
           <a:xfrm>
-            <a:off x="3931920" y="3035808"/>
+            <a:off x="3931920" y="2862072"/>
             <a:ext cx="2194560" cy="146304"/>
           </a:xfrm>
           <a:prstGeom prst="rect">
@@ -5732,11 +5732,11 @@
             <a:r>
               <a:rPr sz="919" b="1">
                 <a:solidFill>
-                  <a:srgbClr val="22D3EE"/>
-                </a:solidFill>
-                <a:latin typeface="Aptos"/>
-              </a:rPr>
-              <a:t>HARDWARE_VALIDATED</a:t>
+                  <a:srgbClr val="60A5FA"/>
+                </a:solidFill>
+                <a:latin typeface="Aptos"/>
+              </a:rPr>
+              <a:t>LIVE_MEASURED</a:t>
             </a:r>
           </a:p>
         </p:txBody>
@@ -5749,7 +5749,7 @@
         </p:nvSpPr>
         <p:spPr>
           <a:xfrm>
-            <a:off x="6309360" y="3035808"/>
+            <a:off x="6309360" y="2862072"/>
             <a:ext cx="4709160" cy="146304"/>
           </a:xfrm>
           <a:prstGeom prst="rect">
@@ -5775,7 +5775,7 @@
                 </a:solidFill>
                 <a:latin typeface="Aptos"/>
               </a:rPr>
-              <a:t>documented OS-to-bus path</a:t>
+              <a:t>AX7020 8-bank accumulator scales 1/2/4/8x, byte-identical to software</a:t>
             </a:r>
           </a:p>
         </p:txBody>
@@ -5788,7 +5788,7 @@
         </p:nvSpPr>
         <p:spPr>
           <a:xfrm>
-            <a:off x="822960" y="3511296"/>
+            <a:off x="822960" y="3282696"/>
             <a:ext cx="10561320" cy="457200"/>
           </a:xfrm>
           <a:prstGeom prst="roundRect">
@@ -5835,7 +5835,7 @@
         </p:nvSpPr>
         <p:spPr>
           <a:xfrm>
-            <a:off x="1024128" y="3621024"/>
+            <a:off x="1024128" y="3392424"/>
             <a:ext cx="2743200" cy="146304"/>
           </a:xfrm>
           <a:prstGeom prst="rect">
@@ -5861,7 +5861,7 @@
                 </a:solidFill>
                 <a:latin typeface="Aptos"/>
               </a:rPr>
-              <a:t>AX7020 board matrix</a:t>
+              <a:t>Linux userspace to FPGA</a:t>
             </a:r>
           </a:p>
         </p:txBody>
@@ -5874,7 +5874,7 @@
         </p:nvSpPr>
         <p:spPr>
           <a:xfrm>
-            <a:off x="3931920" y="3621024"/>
+            <a:off x="3931920" y="3392424"/>
             <a:ext cx="2194560" cy="146304"/>
           </a:xfrm>
           <a:prstGeom prst="rect">
@@ -5896,11 +5896,11 @@
             <a:r>
               <a:rPr sz="919" b="1">
                 <a:solidFill>
-                  <a:srgbClr val="60A5FA"/>
-                </a:solidFill>
-                <a:latin typeface="Aptos"/>
-              </a:rPr>
-              <a:t>LIVE_MEASURED</a:t>
+                  <a:srgbClr val="22D3EE"/>
+                </a:solidFill>
+                <a:latin typeface="Aptos"/>
+              </a:rPr>
+              <a:t>HARDWARE_VALIDATED</a:t>
             </a:r>
           </a:p>
         </p:txBody>
@@ -5913,7 +5913,7 @@
         </p:nvSpPr>
         <p:spPr>
           <a:xfrm>
-            <a:off x="6309360" y="3621024"/>
+            <a:off x="6309360" y="3392424"/>
             <a:ext cx="4709160" cy="146304"/>
           </a:xfrm>
           <a:prstGeom prst="rect">
@@ -5939,7 +5939,7 @@
                 </a:solidFill>
                 <a:latin typeface="Aptos"/>
               </a:rPr>
-              <a:t>wins and losses with caveats</a:t>
+              <a:t>documented OS-to-bus path</a:t>
             </a:r>
           </a:p>
         </p:txBody>
@@ -5952,7 +5952,7 @@
         </p:nvSpPr>
         <p:spPr>
           <a:xfrm>
-            <a:off x="822960" y="4096512"/>
+            <a:off x="822960" y="3813048"/>
             <a:ext cx="10561320" cy="457200"/>
           </a:xfrm>
           <a:prstGeom prst="roundRect">
@@ -5999,7 +5999,7 @@
         </p:nvSpPr>
         <p:spPr>
           <a:xfrm>
-            <a:off x="1024128" y="4206240"/>
+            <a:off x="1024128" y="3922776"/>
             <a:ext cx="2743200" cy="146304"/>
           </a:xfrm>
           <a:prstGeom prst="rect">
@@ -6025,7 +6025,7 @@
                 </a:solidFill>
                 <a:latin typeface="Aptos"/>
               </a:rPr>
-              <a:t>Formal algebra</a:t>
+              <a:t>AX7020 board matrix</a:t>
             </a:r>
           </a:p>
         </p:txBody>
@@ -6038,7 +6038,7 @@
         </p:nvSpPr>
         <p:spPr>
           <a:xfrm>
-            <a:off x="3931920" y="4206240"/>
+            <a:off x="3931920" y="3922776"/>
             <a:ext cx="2194560" cy="146304"/>
           </a:xfrm>
           <a:prstGeom prst="rect">
@@ -6060,11 +6060,11 @@
             <a:r>
               <a:rPr sz="919" b="1">
                 <a:solidFill>
-                  <a:srgbClr val="A78BFA"/>
-                </a:solidFill>
-                <a:latin typeface="Aptos"/>
-              </a:rPr>
-              <a:t>FORMAL_PROOF*</a:t>
+                  <a:srgbClr val="60A5FA"/>
+                </a:solidFill>
+                <a:latin typeface="Aptos"/>
+              </a:rPr>
+              <a:t>LIVE_MEASURED</a:t>
             </a:r>
           </a:p>
         </p:txBody>
@@ -6077,7 +6077,7 @@
         </p:nvSpPr>
         <p:spPr>
           <a:xfrm>
-            <a:off x="6309360" y="4206240"/>
+            <a:off x="6309360" y="3922776"/>
             <a:ext cx="4709160" cy="146304"/>
           </a:xfrm>
           <a:prstGeom prst="rect">
@@ -6103,7 +6103,7 @@
                 </a:solidFill>
                 <a:latin typeface="Aptos"/>
               </a:rPr>
-              <a:t>Lean4-checked algebra; exact audited properties only</a:t>
+              <a:t>wins and losses with caveats</a:t>
             </a:r>
           </a:p>
         </p:txBody>
@@ -6116,7 +6116,7 @@
         </p:nvSpPr>
         <p:spPr>
           <a:xfrm>
-            <a:off x="822960" y="4681728"/>
+            <a:off x="822960" y="4343400"/>
             <a:ext cx="10561320" cy="457200"/>
           </a:xfrm>
           <a:prstGeom prst="roundRect">
@@ -6163,7 +6163,7 @@
         </p:nvSpPr>
         <p:spPr>
           <a:xfrm>
-            <a:off x="1024128" y="4791456"/>
+            <a:off x="1024128" y="4453128"/>
             <a:ext cx="2743200" cy="146304"/>
           </a:xfrm>
           <a:prstGeom prst="rect">
@@ -6189,6 +6189,170 @@
                 </a:solidFill>
                 <a:latin typeface="Aptos"/>
               </a:rPr>
+              <a:t>Formal algebra</a:t>
+            </a:r>
+          </a:p>
+        </p:txBody>
+      </p:sp>
+      <p:sp>
+        <p:nvSpPr>
+          <p:cNvPr id="30" name="TextBox 29"/>
+          <p:cNvSpPr txBox="1"/>
+          <p:nvPr/>
+        </p:nvSpPr>
+        <p:spPr>
+          <a:xfrm>
+            <a:off x="3931920" y="4453128"/>
+            <a:ext cx="2194560" cy="146304"/>
+          </a:xfrm>
+          <a:prstGeom prst="rect">
+            <a:avLst/>
+          </a:prstGeom>
+          <a:noFill/>
+        </p:spPr>
+        <p:txBody>
+          <a:bodyPr wrap="square" lIns="12700" rIns="12700" tIns="12700" bIns="12700" anchor="t">
+            <a:spAutoFit/>
+          </a:bodyPr>
+          <a:lstStyle/>
+          <a:p>
+            <a:pPr algn="l">
+              <a:spcAft>
+                <a:spcPts val="0"/>
+              </a:spcAft>
+            </a:pPr>
+            <a:r>
+              <a:rPr sz="919" b="1">
+                <a:solidFill>
+                  <a:srgbClr val="A78BFA"/>
+                </a:solidFill>
+                <a:latin typeface="Aptos"/>
+              </a:rPr>
+              <a:t>FORMAL_PROOF*</a:t>
+            </a:r>
+          </a:p>
+        </p:txBody>
+      </p:sp>
+      <p:sp>
+        <p:nvSpPr>
+          <p:cNvPr id="31" name="TextBox 30"/>
+          <p:cNvSpPr txBox="1"/>
+          <p:nvPr/>
+        </p:nvSpPr>
+        <p:spPr>
+          <a:xfrm>
+            <a:off x="6309360" y="4453128"/>
+            <a:ext cx="4709160" cy="146304"/>
+          </a:xfrm>
+          <a:prstGeom prst="rect">
+            <a:avLst/>
+          </a:prstGeom>
+          <a:noFill/>
+        </p:spPr>
+        <p:txBody>
+          <a:bodyPr wrap="square" lIns="12700" rIns="12700" tIns="12700" bIns="12700" anchor="t">
+            <a:spAutoFit/>
+          </a:bodyPr>
+          <a:lstStyle/>
+          <a:p>
+            <a:pPr algn="l">
+              <a:spcAft>
+                <a:spcPts val="0"/>
+              </a:spcAft>
+            </a:pPr>
+            <a:r>
+              <a:rPr sz="1000" b="0">
+                <a:solidFill>
+                  <a:srgbClr val="A5B4C5"/>
+                </a:solidFill>
+                <a:latin typeface="Aptos"/>
+              </a:rPr>
+              <a:t>Lean4-checked algebra; exact audited properties only</a:t>
+            </a:r>
+          </a:p>
+        </p:txBody>
+      </p:sp>
+      <p:sp>
+        <p:nvSpPr>
+          <p:cNvPr id="32" name="Rounded Rectangle 31"/>
+          <p:cNvSpPr/>
+          <p:nvPr/>
+        </p:nvSpPr>
+        <p:spPr>
+          <a:xfrm>
+            <a:off x="822960" y="4873752"/>
+            <a:ext cx="10561320" cy="457200"/>
+          </a:xfrm>
+          <a:prstGeom prst="roundRect">
+            <a:avLst>
+              <a:gd name="adj" fmla="val 8000"/>
+            </a:avLst>
+          </a:prstGeom>
+          <a:solidFill>
+            <a:srgbClr val="0C1420"/>
+          </a:solidFill>
+          <a:ln w="9525">
+            <a:solidFill>
+              <a:srgbClr val="24364D"/>
+            </a:solidFill>
+          </a:ln>
+        </p:spPr>
+        <p:style>
+          <a:lnRef idx="1">
+            <a:schemeClr val="accent1"/>
+          </a:lnRef>
+          <a:fillRef idx="3">
+            <a:schemeClr val="accent1"/>
+          </a:fillRef>
+          <a:effectRef idx="2">
+            <a:schemeClr val="accent1"/>
+          </a:effectRef>
+          <a:fontRef idx="minor">
+            <a:schemeClr val="lt1"/>
+          </a:fontRef>
+        </p:style>
+        <p:txBody>
+          <a:bodyPr rtlCol="0" anchor="ctr"/>
+          <a:lstStyle/>
+          <a:p>
+            <a:pPr algn="ctr"/>
+          </a:p>
+        </p:txBody>
+      </p:sp>
+      <p:sp>
+        <p:nvSpPr>
+          <p:cNvPr id="33" name="TextBox 32"/>
+          <p:cNvSpPr txBox="1"/>
+          <p:nvPr/>
+        </p:nvSpPr>
+        <p:spPr>
+          <a:xfrm>
+            <a:off x="1024128" y="4983480"/>
+            <a:ext cx="2743200" cy="146304"/>
+          </a:xfrm>
+          <a:prstGeom prst="rect">
+            <a:avLst/>
+          </a:prstGeom>
+          <a:noFill/>
+        </p:spPr>
+        <p:txBody>
+          <a:bodyPr wrap="square" lIns="12700" rIns="12700" tIns="12700" bIns="12700" anchor="t">
+            <a:spAutoFit/>
+          </a:bodyPr>
+          <a:lstStyle/>
+          <a:p>
+            <a:pPr algn="l">
+              <a:spcAft>
+                <a:spcPts val="0"/>
+              </a:spcAft>
+            </a:pPr>
+            <a:r>
+              <a:rPr sz="1019" b="1">
+                <a:solidFill>
+                  <a:srgbClr val="F5F8FF"/>
+                </a:solidFill>
+                <a:latin typeface="Aptos"/>
+              </a:rPr>
               <a:t>Standalone boot</a:t>
             </a:r>
           </a:p>
@@ -6196,13 +6360,13 @@
       </p:sp>
       <p:sp>
         <p:nvSpPr>
-          <p:cNvPr id="30" name="TextBox 29"/>
-          <p:cNvSpPr txBox="1"/>
-          <p:nvPr/>
-        </p:nvSpPr>
-        <p:spPr>
-          <a:xfrm>
-            <a:off x="3931920" y="4791456"/>
+          <p:cNvPr id="34" name="TextBox 33"/>
+          <p:cNvSpPr txBox="1"/>
+          <p:nvPr/>
+        </p:nvSpPr>
+        <p:spPr>
+          <a:xfrm>
+            <a:off x="3931920" y="4983480"/>
             <a:ext cx="2194560" cy="146304"/>
           </a:xfrm>
           <a:prstGeom prst="rect">
@@ -6235,13 +6399,13 @@
       </p:sp>
       <p:sp>
         <p:nvSpPr>
-          <p:cNvPr id="31" name="TextBox 30"/>
-          <p:cNvSpPr txBox="1"/>
-          <p:nvPr/>
-        </p:nvSpPr>
-        <p:spPr>
-          <a:xfrm>
-            <a:off x="6309360" y="4791456"/>
+          <p:cNvPr id="35" name="TextBox 34"/>
+          <p:cNvSpPr txBox="1"/>
+          <p:nvPr/>
+        </p:nvSpPr>
+        <p:spPr>
+          <a:xfrm>
+            <a:off x="6309360" y="4983480"/>
             <a:ext cx="4709160" cy="146304"/>
           </a:xfrm>
           <a:prstGeom prst="rect">
@@ -6274,7 +6438,7 @@
       </p:sp>
       <p:sp>
         <p:nvSpPr>
-          <p:cNvPr id="32" name="TextBox 31"/>
+          <p:cNvPr id="36" name="TextBox 35"/>
           <p:cNvSpPr txBox="1"/>
           <p:nvPr/>
         </p:nvSpPr>
